--- a/docs/test/stress/e2e-outputs/income_pro_gradeC_pr07.pptx
+++ b/docs/test/stress/e2e-outputs/income_pro_gradeC_pr07.pptx
@@ -4114,11 +4114,11 @@
         <p:spPr>
           <a:xfrm>
             <a:off x="566928" y="1417320"/>
-            <a:ext cx="5391760" cy="3611880"/>
+            <a:ext cx="5400904" cy="3657600"/>
           </a:xfrm>
           <a:prstGeom prst="roundRect">
             <a:avLst>
-              <a:gd name="adj" fmla="val 1519"/>
+              <a:gd name="adj" fmla="val 1500"/>
             </a:avLst>
           </a:prstGeom>
           <a:solidFill>
@@ -4141,7 +4141,7 @@
         <p:spPr>
           <a:xfrm>
             <a:off x="566928" y="1417320"/>
-            <a:ext cx="5391760" cy="45720"/>
+            <a:ext cx="5400904" cy="45720"/>
           </a:xfrm>
           <a:prstGeom prst="rect">
             <a:avLst/>
@@ -4161,7 +4161,7 @@
         <p:spPr>
           <a:xfrm>
             <a:off x="795528" y="1618488"/>
-            <a:ext cx="4934560" cy="292608"/>
+            <a:ext cx="4943704" cy="292608"/>
           </a:xfrm>
           <a:prstGeom prst="rect">
             <a:avLst/>
@@ -4199,8 +4199,8 @@
         </p:nvSpPr>
         <p:spPr>
           <a:xfrm>
-            <a:off x="795528" y="1911096"/>
-            <a:ext cx="4934560" cy="402336"/>
+            <a:off x="795528" y="1947672"/>
+            <a:ext cx="4943704" cy="365760"/>
           </a:xfrm>
           <a:prstGeom prst="rect">
             <a:avLst/>
@@ -4218,7 +4218,7 @@
               <a:buNone/>
             </a:pPr>
             <a:r>
-              <a:rPr lang="en-US" sz="1350" b="1" dirty="0">
+              <a:rPr lang="en-US" sz="1250" b="1" dirty="0">
                 <a:solidFill>
                   <a:srgbClr val="10161F"/>
                 </a:solidFill>
@@ -4228,7 +4228,7 @@
               </a:rPr>
               <a:t>전층 의료</a:t>
             </a:r>
-            <a:endParaRPr lang="en-US" sz="1350" dirty="0"/>
+            <a:endParaRPr lang="en-US" sz="1250" dirty="0"/>
           </a:p>
         </p:txBody>
       </p:sp>
@@ -4241,7 +4241,7 @@
         <p:spPr>
           <a:xfrm>
             <a:off x="795528" y="2377440"/>
-            <a:ext cx="4934560" cy="2560320"/>
+            <a:ext cx="4943704" cy="2606040"/>
           </a:xfrm>
           <a:prstGeom prst="rect">
             <a:avLst/>
@@ -4263,7 +4263,7 @@
               <a:buChar char="•"/>
             </a:pPr>
             <a:r>
-              <a:rPr lang="en-US" sz="1200" dirty="0">
+              <a:rPr lang="en-US" sz="1100" dirty="0">
                 <a:solidFill>
                   <a:srgbClr val="10161F"/>
                 </a:solidFill>
@@ -4273,7 +4273,7 @@
               </a:rPr>
               <a:t>업종 다각화 검토</a:t>
             </a:r>
-            <a:endParaRPr lang="en-US" sz="1200" dirty="0"/>
+            <a:endParaRPr lang="en-US" sz="1100" dirty="0"/>
           </a:p>
         </p:txBody>
       </p:sp>
@@ -4285,12 +4285,12 @@
         </p:nvSpPr>
         <p:spPr>
           <a:xfrm>
-            <a:off x="6233008" y="1417320"/>
-            <a:ext cx="5391760" cy="3611880"/>
+            <a:off x="6223864" y="1417320"/>
+            <a:ext cx="5400904" cy="3657600"/>
           </a:xfrm>
           <a:prstGeom prst="roundRect">
             <a:avLst>
-              <a:gd name="adj" fmla="val 1519"/>
+              <a:gd name="adj" fmla="val 1500"/>
             </a:avLst>
           </a:prstGeom>
           <a:solidFill>
@@ -4312,8 +4312,8 @@
         </p:nvSpPr>
         <p:spPr>
           <a:xfrm>
-            <a:off x="6233008" y="1417320"/>
-            <a:ext cx="5391760" cy="45720"/>
+            <a:off x="6223864" y="1417320"/>
+            <a:ext cx="5400904" cy="45720"/>
           </a:xfrm>
           <a:prstGeom prst="rect">
             <a:avLst/>
@@ -4332,8 +4332,8 @@
         </p:nvSpPr>
         <p:spPr>
           <a:xfrm>
-            <a:off x="6461608" y="1618488"/>
-            <a:ext cx="4934560" cy="292608"/>
+            <a:off x="6452464" y="1618488"/>
+            <a:ext cx="4943704" cy="292608"/>
           </a:xfrm>
           <a:prstGeom prst="rect">
             <a:avLst/>
@@ -4371,8 +4371,8 @@
         </p:nvSpPr>
         <p:spPr>
           <a:xfrm>
-            <a:off x="6461608" y="1911096"/>
-            <a:ext cx="4934560" cy="402336"/>
+            <a:off x="6452464" y="1947672"/>
+            <a:ext cx="4943704" cy="365760"/>
           </a:xfrm>
           <a:prstGeom prst="rect">
             <a:avLst/>
@@ -4390,7 +4390,7 @@
               <a:buNone/>
             </a:pPr>
             <a:r>
-              <a:rPr lang="en-US" sz="1350" b="1" dirty="0">
+              <a:rPr lang="en-US" sz="1250" b="1" dirty="0">
                 <a:solidFill>
                   <a:srgbClr val="10161F"/>
                 </a:solidFill>
@@ -4400,7 +4400,7 @@
               </a:rPr>
               <a:t>4.1% 고정</a:t>
             </a:r>
-            <a:endParaRPr lang="en-US" sz="1350" dirty="0"/>
+            <a:endParaRPr lang="en-US" sz="1250" dirty="0"/>
           </a:p>
         </p:txBody>
       </p:sp>
@@ -4412,8 +4412,8 @@
         </p:nvSpPr>
         <p:spPr>
           <a:xfrm>
-            <a:off x="6461608" y="2377440"/>
-            <a:ext cx="4934560" cy="2560320"/>
+            <a:off x="6452464" y="2377440"/>
+            <a:ext cx="4943704" cy="2606040"/>
           </a:xfrm>
           <a:prstGeom prst="rect">
             <a:avLst/>
@@ -4435,7 +4435,7 @@
               <a:buChar char="•"/>
             </a:pPr>
             <a:r>
-              <a:rPr lang="en-US" sz="1200" dirty="0">
+              <a:rPr lang="en-US" sz="1100" dirty="0">
                 <a:solidFill>
                   <a:srgbClr val="10161F"/>
                 </a:solidFill>
@@ -4445,20 +4445,47 @@
               </a:rPr>
               <a:t>승계 대출 활용</a:t>
             </a:r>
-            <a:endParaRPr lang="en-US" sz="1200" dirty="0"/>
-          </a:p>
-        </p:txBody>
-      </p:sp>
-      <p:sp>
-        <p:nvSpPr>
-          <p:cNvPr id="16" name="Text 14"/>
-          <p:cNvSpPr/>
-          <p:nvPr/>
-        </p:nvSpPr>
-        <p:spPr>
-          <a:xfrm>
-            <a:off x="566928" y="6382512"/>
-            <a:ext cx="7315200" cy="219456"/>
+            <a:endParaRPr lang="en-US" sz="1100" dirty="0"/>
+          </a:p>
+        </p:txBody>
+      </p:sp>
+      <p:sp>
+        <p:nvSpPr>
+          <p:cNvPr id="16" name="Shape 14"/>
+          <p:cNvSpPr/>
+          <p:nvPr/>
+        </p:nvSpPr>
+        <p:spPr>
+          <a:xfrm>
+            <a:off x="566928" y="5193792"/>
+            <a:ext cx="11057839" cy="621792"/>
+          </a:xfrm>
+          <a:prstGeom prst="roundRect">
+            <a:avLst>
+              <a:gd name="adj" fmla="val 8824"/>
+            </a:avLst>
+          </a:prstGeom>
+          <a:solidFill>
+            <a:srgbClr val="F7FAFC"/>
+          </a:solidFill>
+          <a:ln w="6350">
+            <a:solidFill>
+              <a:srgbClr val="CBD5E0"/>
+            </a:solidFill>
+            <a:prstDash val="solid"/>
+          </a:ln>
+        </p:spPr>
+      </p:sp>
+      <p:sp>
+        <p:nvSpPr>
+          <p:cNvPr id="17" name="Text 15"/>
+          <p:cNvSpPr/>
+          <p:nvPr/>
+        </p:nvSpPr>
+        <p:spPr>
+          <a:xfrm>
+            <a:off x="795528" y="5193792"/>
+            <a:ext cx="10600639" cy="621792"/>
           </a:xfrm>
           <a:prstGeom prst="rect">
             <a:avLst/>
@@ -4474,14 +4501,53 @@
               <a:buNone/>
             </a:pPr>
             <a:r>
-              <a:rPr lang="en-US" sz="800" dirty="0">
-                <a:solidFill>
-                  <a:srgbClr val="718096"/>
+              <a:rPr lang="en-US" sz="1100" dirty="0">
+                <a:solidFill>
+                  <a:srgbClr val="10161F"/>
                 </a:solidFill>
                 <a:latin typeface="Pretendard" pitchFamily="34" charset="0"/>
                 <a:ea typeface="Pretendard" pitchFamily="34" charset="-122"/>
                 <a:cs typeface="Pretendard" pitchFamily="34" charset="-120"/>
               </a:rPr>
+              <a:t>※ 본 리스크 체크는 공부 및 브로커 확인 기반이며, 매수 전 전문 실사팀(변호사/건축사)을 통한 정밀 실사가 필요합니다.</a:t>
+            </a:r>
+            <a:endParaRPr lang="en-US" sz="1100" dirty="0"/>
+          </a:p>
+        </p:txBody>
+      </p:sp>
+      <p:sp>
+        <p:nvSpPr>
+          <p:cNvPr id="18" name="Text 16"/>
+          <p:cNvSpPr/>
+          <p:nvPr/>
+        </p:nvSpPr>
+        <p:spPr>
+          <a:xfrm>
+            <a:off x="566928" y="6382512"/>
+            <a:ext cx="7315200" cy="219456"/>
+          </a:xfrm>
+          <a:prstGeom prst="rect">
+            <a:avLst/>
+          </a:prstGeom>
+          <a:noFill/>
+          <a:ln/>
+        </p:spPr>
+        <p:txBody>
+          <a:bodyPr wrap="square" lIns="0" tIns="0" rIns="0" bIns="0" rtlCol="0" anchor="ctr"/>
+          <a:lstStyle/>
+          <a:p>
+            <a:pPr indent="0" marL="0">
+              <a:buNone/>
+            </a:pPr>
+            <a:r>
+              <a:rPr lang="en-US" sz="800" dirty="0">
+                <a:solidFill>
+                  <a:srgbClr val="718096"/>
+                </a:solidFill>
+                <a:latin typeface="Pretendard" pitchFamily="34" charset="0"/>
+                <a:ea typeface="Pretendard" pitchFamily="34" charset="-122"/>
+                <a:cs typeface="Pretendard" pitchFamily="34" charset="-120"/>
+              </a:rPr>
               <a:t>크리딜   |   </a:t>
             </a:r>
             <a:endParaRPr lang="en-US" sz="800" dirty="0"/>
@@ -4490,7 +4556,7 @@
       </p:sp>
       <p:sp>
         <p:nvSpPr>
-          <p:cNvPr id="17" name="Text 15"/>
+          <p:cNvPr id="19" name="Text 17"/>
           <p:cNvSpPr/>
           <p:nvPr/>
         </p:nvSpPr>
@@ -9755,7 +9821,7 @@
                 <a:gridCol w="3071622"/>
                 <a:gridCol w="3071622"/>
               </a:tblGrid>
-              <a:tr h="457200">
+              <a:tr h="438912">
                 <a:tc>
                   <a:txBody>
                     <a:bodyPr/>
@@ -10029,7 +10095,7 @@
                   </a:tcPr>
                 </a:tc>
               </a:tr>
-              <a:tr h="457200">
+              <a:tr h="438912">
                 <a:tc>
                   <a:txBody>
                     <a:bodyPr/>
@@ -10303,7 +10369,7 @@
                   </a:tcPr>
                 </a:tc>
               </a:tr>
-              <a:tr h="457200">
+              <a:tr h="438912">
                 <a:tc>
                   <a:txBody>
                     <a:bodyPr/>

--- a/docs/test/stress/e2e-outputs/income_pro_gradeC_pr07.pptx
+++ b/docs/test/stress/e2e-outputs/income_pro_gradeC_pr07.pptx
@@ -15,14 +15,9 @@
     <p:sldId id="263" r:id="rId9"/>
     <p:sldId id="264" r:id="rId10"/>
     <p:sldId id="265" r:id="rId11"/>
-    <p:sldId id="266" r:id="rId12"/>
-    <p:sldId id="267" r:id="rId13"/>
-    <p:sldId id="268" r:id="rId14"/>
-    <p:sldId id="269" r:id="rId15"/>
-    <p:sldId id="270" r:id="rId16"/>
   </p:sldIdLst>
   <p:notesMasterIdLst>
-    <p:notesMasterId r:id="rId17"/>
+    <p:notesMasterId r:id="rId12"/>
   </p:notesMasterIdLst>
   <p:sldSz cx="12192000" cy="6858000"/>
   <p:notesSz cx="6858000" cy="12192000"/>
@@ -628,446 +623,6 @@
             <a:fld id="{F7021451-1387-4CA6-816F-3879F97B5CBC}" type="slidenum">
               <a:rPr lang="en-US"/>
               <a:t>10</a:t>
-            </a:fld>
-            <a:endParaRPr lang="en-US"/>
-          </a:p>
-        </p:txBody>
-      </p:sp>
-    </p:spTree>
-    <p:extLst>
-      <p:ext uri="{BB962C8B-B14F-4D97-AF65-F5344CB8AC3E}">
-        <p14:creationId xmlns:p14="http://schemas.microsoft.com/office/powerpoint/2010/main" val="1024086991"/>
-      </p:ext>
-    </p:extLst>
-  </p:cSld>
-  <p:clrMapOvr>
-    <a:masterClrMapping/>
-  </p:clrMapOvr>
-</p:notes>
-</file>
-
-<file path=ppt/notesSlides/notesSlide11.xml><?xml version="1.0" encoding="utf-8"?>
-<p:notes xmlns:a="http://schemas.openxmlformats.org/drawingml/2006/main" xmlns:r="http://schemas.openxmlformats.org/officeDocument/2006/relationships" xmlns:p="http://schemas.openxmlformats.org/presentationml/2006/main">
-  <p:cSld>
-    <p:spTree>
-      <p:nvGrpSpPr>
-        <p:cNvPr id="1" name=""/>
-        <p:cNvGrpSpPr/>
-        <p:nvPr/>
-      </p:nvGrpSpPr>
-      <p:grpSpPr>
-        <a:xfrm>
-          <a:off x="0" y="0"/>
-          <a:ext cx="0" cy="0"/>
-          <a:chOff x="0" y="0"/>
-          <a:chExt cx="0" cy="0"/>
-        </a:xfrm>
-      </p:grpSpPr>
-      <p:sp>
-        <p:nvSpPr>
-          <p:cNvPr id="2" name="Slide Image Placeholder 1"/>
-          <p:cNvSpPr>
-            <a:spLocks noGrp="1" noRot="1" noChangeAspect="1"/>
-          </p:cNvSpPr>
-          <p:nvPr>
-            <p:ph type="sldImg"/>
-          </p:nvPr>
-        </p:nvSpPr>
-        <p:spPr/>
-      </p:sp>
-      <p:sp>
-        <p:nvSpPr>
-          <p:cNvPr id="3" name="Notes Placeholder 2"/>
-          <p:cNvSpPr>
-            <a:spLocks noGrp="1"/>
-          </p:cNvSpPr>
-          <p:nvPr>
-            <p:ph type="body" idx="1"/>
-          </p:nvPr>
-        </p:nvSpPr>
-        <p:spPr/>
-        <p:txBody>
-          <a:bodyPr/>
-          <a:lstStyle/>
-          <a:p>
-            <a:r>
-              <a:rPr lang="en-US" dirty="0"/>
-              <a:t/>
-            </a:r>
-            <a:endParaRPr lang="en-US" dirty="0"/>
-          </a:p>
-        </p:txBody>
-      </p:sp>
-      <p:sp>
-        <p:nvSpPr>
-          <p:cNvPr id="4" name="Slide Number Placeholder 3"/>
-          <p:cNvSpPr>
-            <a:spLocks noGrp="1"/>
-          </p:cNvSpPr>
-          <p:nvPr>
-            <p:ph type="sldNum" sz="quarter" idx="10"/>
-          </p:nvPr>
-        </p:nvSpPr>
-        <p:spPr/>
-        <p:txBody>
-          <a:bodyPr/>
-          <a:lstStyle/>
-          <a:p>
-            <a:fld id="{F7021451-1387-4CA6-816F-3879F97B5CBC}" type="slidenum">
-              <a:rPr lang="en-US"/>
-              <a:t>11</a:t>
-            </a:fld>
-            <a:endParaRPr lang="en-US"/>
-          </a:p>
-        </p:txBody>
-      </p:sp>
-    </p:spTree>
-    <p:extLst>
-      <p:ext uri="{BB962C8B-B14F-4D97-AF65-F5344CB8AC3E}">
-        <p14:creationId xmlns:p14="http://schemas.microsoft.com/office/powerpoint/2010/main" val="1024086991"/>
-      </p:ext>
-    </p:extLst>
-  </p:cSld>
-  <p:clrMapOvr>
-    <a:masterClrMapping/>
-  </p:clrMapOvr>
-</p:notes>
-</file>
-
-<file path=ppt/notesSlides/notesSlide12.xml><?xml version="1.0" encoding="utf-8"?>
-<p:notes xmlns:a="http://schemas.openxmlformats.org/drawingml/2006/main" xmlns:r="http://schemas.openxmlformats.org/officeDocument/2006/relationships" xmlns:p="http://schemas.openxmlformats.org/presentationml/2006/main">
-  <p:cSld>
-    <p:spTree>
-      <p:nvGrpSpPr>
-        <p:cNvPr id="1" name=""/>
-        <p:cNvGrpSpPr/>
-        <p:nvPr/>
-      </p:nvGrpSpPr>
-      <p:grpSpPr>
-        <a:xfrm>
-          <a:off x="0" y="0"/>
-          <a:ext cx="0" cy="0"/>
-          <a:chOff x="0" y="0"/>
-          <a:chExt cx="0" cy="0"/>
-        </a:xfrm>
-      </p:grpSpPr>
-      <p:sp>
-        <p:nvSpPr>
-          <p:cNvPr id="2" name="Slide Image Placeholder 1"/>
-          <p:cNvSpPr>
-            <a:spLocks noGrp="1" noRot="1" noChangeAspect="1"/>
-          </p:cNvSpPr>
-          <p:nvPr>
-            <p:ph type="sldImg"/>
-          </p:nvPr>
-        </p:nvSpPr>
-        <p:spPr/>
-      </p:sp>
-      <p:sp>
-        <p:nvSpPr>
-          <p:cNvPr id="3" name="Notes Placeholder 2"/>
-          <p:cNvSpPr>
-            <a:spLocks noGrp="1"/>
-          </p:cNvSpPr>
-          <p:nvPr>
-            <p:ph type="body" idx="1"/>
-          </p:nvPr>
-        </p:nvSpPr>
-        <p:spPr/>
-        <p:txBody>
-          <a:bodyPr/>
-          <a:lstStyle/>
-          <a:p>
-            <a:r>
-              <a:rPr lang="en-US" dirty="0"/>
-              <a:t/>
-            </a:r>
-            <a:endParaRPr lang="en-US" dirty="0"/>
-          </a:p>
-        </p:txBody>
-      </p:sp>
-      <p:sp>
-        <p:nvSpPr>
-          <p:cNvPr id="4" name="Slide Number Placeholder 3"/>
-          <p:cNvSpPr>
-            <a:spLocks noGrp="1"/>
-          </p:cNvSpPr>
-          <p:nvPr>
-            <p:ph type="sldNum" sz="quarter" idx="10"/>
-          </p:nvPr>
-        </p:nvSpPr>
-        <p:spPr/>
-        <p:txBody>
-          <a:bodyPr/>
-          <a:lstStyle/>
-          <a:p>
-            <a:fld id="{F7021451-1387-4CA6-816F-3879F97B5CBC}" type="slidenum">
-              <a:rPr lang="en-US"/>
-              <a:t>12</a:t>
-            </a:fld>
-            <a:endParaRPr lang="en-US"/>
-          </a:p>
-        </p:txBody>
-      </p:sp>
-    </p:spTree>
-    <p:extLst>
-      <p:ext uri="{BB962C8B-B14F-4D97-AF65-F5344CB8AC3E}">
-        <p14:creationId xmlns:p14="http://schemas.microsoft.com/office/powerpoint/2010/main" val="1024086991"/>
-      </p:ext>
-    </p:extLst>
-  </p:cSld>
-  <p:clrMapOvr>
-    <a:masterClrMapping/>
-  </p:clrMapOvr>
-</p:notes>
-</file>
-
-<file path=ppt/notesSlides/notesSlide13.xml><?xml version="1.0" encoding="utf-8"?>
-<p:notes xmlns:a="http://schemas.openxmlformats.org/drawingml/2006/main" xmlns:r="http://schemas.openxmlformats.org/officeDocument/2006/relationships" xmlns:p="http://schemas.openxmlformats.org/presentationml/2006/main">
-  <p:cSld>
-    <p:spTree>
-      <p:nvGrpSpPr>
-        <p:cNvPr id="1" name=""/>
-        <p:cNvGrpSpPr/>
-        <p:nvPr/>
-      </p:nvGrpSpPr>
-      <p:grpSpPr>
-        <a:xfrm>
-          <a:off x="0" y="0"/>
-          <a:ext cx="0" cy="0"/>
-          <a:chOff x="0" y="0"/>
-          <a:chExt cx="0" cy="0"/>
-        </a:xfrm>
-      </p:grpSpPr>
-      <p:sp>
-        <p:nvSpPr>
-          <p:cNvPr id="2" name="Slide Image Placeholder 1"/>
-          <p:cNvSpPr>
-            <a:spLocks noGrp="1" noRot="1" noChangeAspect="1"/>
-          </p:cNvSpPr>
-          <p:nvPr>
-            <p:ph type="sldImg"/>
-          </p:nvPr>
-        </p:nvSpPr>
-        <p:spPr/>
-      </p:sp>
-      <p:sp>
-        <p:nvSpPr>
-          <p:cNvPr id="3" name="Notes Placeholder 2"/>
-          <p:cNvSpPr>
-            <a:spLocks noGrp="1"/>
-          </p:cNvSpPr>
-          <p:nvPr>
-            <p:ph type="body" idx="1"/>
-          </p:nvPr>
-        </p:nvSpPr>
-        <p:spPr/>
-        <p:txBody>
-          <a:bodyPr/>
-          <a:lstStyle/>
-          <a:p>
-            <a:r>
-              <a:rPr lang="en-US" dirty="0"/>
-              <a:t/>
-            </a:r>
-            <a:endParaRPr lang="en-US" dirty="0"/>
-          </a:p>
-        </p:txBody>
-      </p:sp>
-      <p:sp>
-        <p:nvSpPr>
-          <p:cNvPr id="4" name="Slide Number Placeholder 3"/>
-          <p:cNvSpPr>
-            <a:spLocks noGrp="1"/>
-          </p:cNvSpPr>
-          <p:nvPr>
-            <p:ph type="sldNum" sz="quarter" idx="10"/>
-          </p:nvPr>
-        </p:nvSpPr>
-        <p:spPr/>
-        <p:txBody>
-          <a:bodyPr/>
-          <a:lstStyle/>
-          <a:p>
-            <a:fld id="{F7021451-1387-4CA6-816F-3879F97B5CBC}" type="slidenum">
-              <a:rPr lang="en-US"/>
-              <a:t>13</a:t>
-            </a:fld>
-            <a:endParaRPr lang="en-US"/>
-          </a:p>
-        </p:txBody>
-      </p:sp>
-    </p:spTree>
-    <p:extLst>
-      <p:ext uri="{BB962C8B-B14F-4D97-AF65-F5344CB8AC3E}">
-        <p14:creationId xmlns:p14="http://schemas.microsoft.com/office/powerpoint/2010/main" val="1024086991"/>
-      </p:ext>
-    </p:extLst>
-  </p:cSld>
-  <p:clrMapOvr>
-    <a:masterClrMapping/>
-  </p:clrMapOvr>
-</p:notes>
-</file>
-
-<file path=ppt/notesSlides/notesSlide14.xml><?xml version="1.0" encoding="utf-8"?>
-<p:notes xmlns:a="http://schemas.openxmlformats.org/drawingml/2006/main" xmlns:r="http://schemas.openxmlformats.org/officeDocument/2006/relationships" xmlns:p="http://schemas.openxmlformats.org/presentationml/2006/main">
-  <p:cSld>
-    <p:spTree>
-      <p:nvGrpSpPr>
-        <p:cNvPr id="1" name=""/>
-        <p:cNvGrpSpPr/>
-        <p:nvPr/>
-      </p:nvGrpSpPr>
-      <p:grpSpPr>
-        <a:xfrm>
-          <a:off x="0" y="0"/>
-          <a:ext cx="0" cy="0"/>
-          <a:chOff x="0" y="0"/>
-          <a:chExt cx="0" cy="0"/>
-        </a:xfrm>
-      </p:grpSpPr>
-      <p:sp>
-        <p:nvSpPr>
-          <p:cNvPr id="2" name="Slide Image Placeholder 1"/>
-          <p:cNvSpPr>
-            <a:spLocks noGrp="1" noRot="1" noChangeAspect="1"/>
-          </p:cNvSpPr>
-          <p:nvPr>
-            <p:ph type="sldImg"/>
-          </p:nvPr>
-        </p:nvSpPr>
-        <p:spPr/>
-      </p:sp>
-      <p:sp>
-        <p:nvSpPr>
-          <p:cNvPr id="3" name="Notes Placeholder 2"/>
-          <p:cNvSpPr>
-            <a:spLocks noGrp="1"/>
-          </p:cNvSpPr>
-          <p:nvPr>
-            <p:ph type="body" idx="1"/>
-          </p:nvPr>
-        </p:nvSpPr>
-        <p:spPr/>
-        <p:txBody>
-          <a:bodyPr/>
-          <a:lstStyle/>
-          <a:p>
-            <a:r>
-              <a:rPr lang="en-US" dirty="0"/>
-              <a:t/>
-            </a:r>
-            <a:endParaRPr lang="en-US" dirty="0"/>
-          </a:p>
-        </p:txBody>
-      </p:sp>
-      <p:sp>
-        <p:nvSpPr>
-          <p:cNvPr id="4" name="Slide Number Placeholder 3"/>
-          <p:cNvSpPr>
-            <a:spLocks noGrp="1"/>
-          </p:cNvSpPr>
-          <p:nvPr>
-            <p:ph type="sldNum" sz="quarter" idx="10"/>
-          </p:nvPr>
-        </p:nvSpPr>
-        <p:spPr/>
-        <p:txBody>
-          <a:bodyPr/>
-          <a:lstStyle/>
-          <a:p>
-            <a:fld id="{F7021451-1387-4CA6-816F-3879F97B5CBC}" type="slidenum">
-              <a:rPr lang="en-US"/>
-              <a:t>14</a:t>
-            </a:fld>
-            <a:endParaRPr lang="en-US"/>
-          </a:p>
-        </p:txBody>
-      </p:sp>
-    </p:spTree>
-    <p:extLst>
-      <p:ext uri="{BB962C8B-B14F-4D97-AF65-F5344CB8AC3E}">
-        <p14:creationId xmlns:p14="http://schemas.microsoft.com/office/powerpoint/2010/main" val="1024086991"/>
-      </p:ext>
-    </p:extLst>
-  </p:cSld>
-  <p:clrMapOvr>
-    <a:masterClrMapping/>
-  </p:clrMapOvr>
-</p:notes>
-</file>
-
-<file path=ppt/notesSlides/notesSlide15.xml><?xml version="1.0" encoding="utf-8"?>
-<p:notes xmlns:a="http://schemas.openxmlformats.org/drawingml/2006/main" xmlns:r="http://schemas.openxmlformats.org/officeDocument/2006/relationships" xmlns:p="http://schemas.openxmlformats.org/presentationml/2006/main">
-  <p:cSld>
-    <p:spTree>
-      <p:nvGrpSpPr>
-        <p:cNvPr id="1" name=""/>
-        <p:cNvGrpSpPr/>
-        <p:nvPr/>
-      </p:nvGrpSpPr>
-      <p:grpSpPr>
-        <a:xfrm>
-          <a:off x="0" y="0"/>
-          <a:ext cx="0" cy="0"/>
-          <a:chOff x="0" y="0"/>
-          <a:chExt cx="0" cy="0"/>
-        </a:xfrm>
-      </p:grpSpPr>
-      <p:sp>
-        <p:nvSpPr>
-          <p:cNvPr id="2" name="Slide Image Placeholder 1"/>
-          <p:cNvSpPr>
-            <a:spLocks noGrp="1" noRot="1" noChangeAspect="1"/>
-          </p:cNvSpPr>
-          <p:nvPr>
-            <p:ph type="sldImg"/>
-          </p:nvPr>
-        </p:nvSpPr>
-        <p:spPr/>
-      </p:sp>
-      <p:sp>
-        <p:nvSpPr>
-          <p:cNvPr id="3" name="Notes Placeholder 2"/>
-          <p:cNvSpPr>
-            <a:spLocks noGrp="1"/>
-          </p:cNvSpPr>
-          <p:nvPr>
-            <p:ph type="body" idx="1"/>
-          </p:nvPr>
-        </p:nvSpPr>
-        <p:spPr/>
-        <p:txBody>
-          <a:bodyPr/>
-          <a:lstStyle/>
-          <a:p>
-            <a:r>
-              <a:rPr lang="en-US" dirty="0"/>
-              <a:t/>
-            </a:r>
-            <a:endParaRPr lang="en-US" dirty="0"/>
-          </a:p>
-        </p:txBody>
-      </p:sp>
-      <p:sp>
-        <p:nvSpPr>
-          <p:cNvPr id="4" name="Slide Number Placeholder 3"/>
-          <p:cNvSpPr>
-            <a:spLocks noGrp="1"/>
-          </p:cNvSpPr>
-          <p:nvPr>
-            <p:ph type="sldNum" sz="quarter" idx="10"/>
-          </p:nvPr>
-        </p:nvSpPr>
-        <p:spPr/>
-        <p:txBody>
-          <a:bodyPr/>
-          <a:lstStyle/>
-          <a:p>
-            <a:fld id="{F7021451-1387-4CA6-816F-3879F97B5CBC}" type="slidenum">
-              <a:rPr lang="en-US"/>
-              <a:t>15</a:t>
             </a:fld>
             <a:endParaRPr lang="en-US"/>
           </a:p>
@@ -2742,2282 +2297,6 @@
     <p:bg>
       <p:bgPr>
         <a:solidFill>
-          <a:srgbClr val="FFFFFF"/>
-        </a:solidFill>
-      </p:bgPr>
-    </p:bg>
-    <p:spTree>
-      <p:nvGrpSpPr>
-        <p:cNvPr id="1" name=""/>
-        <p:cNvGrpSpPr/>
-        <p:nvPr/>
-      </p:nvGrpSpPr>
-      <p:grpSpPr>
-        <a:xfrm>
-          <a:off x="0" y="0"/>
-          <a:ext cx="0" cy="0"/>
-          <a:chOff x="0" y="0"/>
-          <a:chExt cx="0" cy="0"/>
-        </a:xfrm>
-      </p:grpSpPr>
-      <p:sp>
-        <p:nvSpPr>
-          <p:cNvPr id="2" name="Shape 0"/>
-          <p:cNvSpPr/>
-          <p:nvPr/>
-        </p:nvSpPr>
-        <p:spPr>
-          <a:xfrm>
-            <a:off x="566928" y="457200"/>
-            <a:ext cx="384048" cy="384048"/>
-          </a:xfrm>
-          <a:prstGeom prst="ellipse">
-            <a:avLst/>
-          </a:prstGeom>
-          <a:solidFill>
-            <a:srgbClr val="B98A2E"/>
-          </a:solidFill>
-          <a:ln/>
-        </p:spPr>
-      </p:sp>
-      <p:sp>
-        <p:nvSpPr>
-          <p:cNvPr id="3" name="Text 1"/>
-          <p:cNvSpPr/>
-          <p:nvPr/>
-        </p:nvSpPr>
-        <p:spPr>
-          <a:xfrm>
-            <a:off x="566928" y="457200"/>
-            <a:ext cx="384048" cy="384048"/>
-          </a:xfrm>
-          <a:prstGeom prst="rect">
-            <a:avLst/>
-          </a:prstGeom>
-          <a:noFill/>
-          <a:ln/>
-        </p:spPr>
-        <p:txBody>
-          <a:bodyPr wrap="square" lIns="0" tIns="0" rIns="0" bIns="0" rtlCol="0" anchor="ctr"/>
-          <a:lstStyle/>
-          <a:p>
-            <a:pPr algn="ctr" indent="0" marL="0">
-              <a:buNone/>
-            </a:pPr>
-            <a:r>
-              <a:rPr lang="en-US" sz="1300" b="1" dirty="0">
-                <a:solidFill>
-                  <a:srgbClr val="FFFFFF"/>
-                </a:solidFill>
-                <a:latin typeface="Arial" pitchFamily="34" charset="0"/>
-                <a:ea typeface="Arial" pitchFamily="34" charset="-122"/>
-                <a:cs typeface="Arial" pitchFamily="34" charset="-120"/>
-              </a:rPr>
-              <a:t>10</a:t>
-            </a:r>
-            <a:endParaRPr lang="en-US" sz="1300" dirty="0"/>
-          </a:p>
-        </p:txBody>
-      </p:sp>
-      <p:sp>
-        <p:nvSpPr>
-          <p:cNvPr id="4" name="Text 2"/>
-          <p:cNvSpPr/>
-          <p:nvPr/>
-        </p:nvSpPr>
-        <p:spPr>
-          <a:xfrm>
-            <a:off x="1133856" y="457200"/>
-            <a:ext cx="10490911" cy="182880"/>
-          </a:xfrm>
-          <a:prstGeom prst="rect">
-            <a:avLst/>
-          </a:prstGeom>
-          <a:noFill/>
-          <a:ln/>
-        </p:spPr>
-        <p:txBody>
-          <a:bodyPr wrap="square" lIns="0" tIns="0" rIns="0" bIns="0" rtlCol="0" anchor="ctr"/>
-          <a:lstStyle/>
-          <a:p>
-            <a:pPr indent="0" marL="0">
-              <a:buNone/>
-            </a:pPr>
-            <a:r>
-              <a:rPr lang="en-US" sz="950" b="1" spc="200" kern="0" dirty="0">
-                <a:solidFill>
-                  <a:srgbClr val="B98A2E"/>
-                </a:solidFill>
-                <a:latin typeface="Arial" pitchFamily="34" charset="0"/>
-                <a:ea typeface="Arial" pitchFamily="34" charset="-122"/>
-                <a:cs typeface="Arial" pitchFamily="34" charset="-120"/>
-              </a:rPr>
-              <a:t>Loan</a:t>
-            </a:r>
-            <a:endParaRPr lang="en-US" sz="950" dirty="0"/>
-          </a:p>
-        </p:txBody>
-      </p:sp>
-      <p:sp>
-        <p:nvSpPr>
-          <p:cNvPr id="5" name="Text 3"/>
-          <p:cNvSpPr/>
-          <p:nvPr/>
-        </p:nvSpPr>
-        <p:spPr>
-          <a:xfrm>
-            <a:off x="1133856" y="640080"/>
-            <a:ext cx="10490911" cy="365760"/>
-          </a:xfrm>
-          <a:prstGeom prst="rect">
-            <a:avLst/>
-          </a:prstGeom>
-          <a:noFill/>
-          <a:ln/>
-        </p:spPr>
-        <p:txBody>
-          <a:bodyPr wrap="square" lIns="0" tIns="0" rIns="0" bIns="0" rtlCol="0" anchor="ctr"/>
-          <a:lstStyle/>
-          <a:p>
-            <a:pPr indent="0" marL="0">
-              <a:buNone/>
-            </a:pPr>
-            <a:r>
-              <a:rPr lang="en-US" sz="2300" b="1" dirty="0">
-                <a:solidFill>
-                  <a:srgbClr val="10161F"/>
-                </a:solidFill>
-                <a:latin typeface="Pretendard" pitchFamily="34" charset="0"/>
-                <a:ea typeface="Pretendard" pitchFamily="34" charset="-122"/>
-                <a:cs typeface="Pretendard" pitchFamily="34" charset="-120"/>
-              </a:rPr>
-              <a:t>대출 구조</a:t>
-            </a:r>
-            <a:endParaRPr lang="en-US" sz="2300" dirty="0"/>
-          </a:p>
-        </p:txBody>
-      </p:sp>
-      <p:sp>
-        <p:nvSpPr>
-          <p:cNvPr id="6" name="Text 4"/>
-          <p:cNvSpPr/>
-          <p:nvPr/>
-        </p:nvSpPr>
-        <p:spPr>
-          <a:xfrm>
-            <a:off x="566928" y="1463040"/>
-            <a:ext cx="6675120" cy="237744"/>
-          </a:xfrm>
-          <a:prstGeom prst="rect">
-            <a:avLst/>
-          </a:prstGeom>
-          <a:noFill/>
-          <a:ln/>
-        </p:spPr>
-        <p:txBody>
-          <a:bodyPr wrap="square" lIns="0" tIns="0" rIns="0" bIns="0" rtlCol="0" anchor="ctr"/>
-          <a:lstStyle/>
-          <a:p>
-            <a:pPr indent="0" marL="0">
-              <a:buNone/>
-            </a:pPr>
-            <a:r>
-              <a:rPr lang="en-US" sz="1100" b="1" dirty="0">
-                <a:solidFill>
-                  <a:srgbClr val="10161F"/>
-                </a:solidFill>
-                <a:latin typeface="Pretendard" pitchFamily="34" charset="0"/>
-                <a:ea typeface="Pretendard" pitchFamily="34" charset="-122"/>
-                <a:cs typeface="Pretendard" pitchFamily="34" charset="-120"/>
-              </a:rPr>
-              <a:t>대출 구조</a:t>
-            </a:r>
-            <a:endParaRPr lang="en-US" sz="1100" dirty="0"/>
-          </a:p>
-        </p:txBody>
-      </p:sp>
-      <p:graphicFrame>
-        <p:nvGraphicFramePr>
-          <p:cNvPr id="11" name="Table 0"/>
-          <p:cNvGraphicFramePr>
-            <a:graphicFrameLocks noGrp="1"/>
-          </p:cNvGraphicFramePr>
-          <p:nvPr>
-            <p:extLst>
-              <p:ext uri="{D42A27DB-BD31-4B8C-83A1-F6EECF244321}">
-                <p14:modId xmlns:p14="http://schemas.microsoft.com/office/powerpoint/2010/main" val="1579011935"/>
-              </p:ext>
-            </p:extLst>
-          </p:nvPr>
-        </p:nvGraphicFramePr>
-        <p:xfrm>
-          <a:off x="566928" y="1737360"/>
-          <a:ext cx="6675120" cy="914400"/>
-        </p:xfrm>
-        <a:graphic>
-          <a:graphicData uri="http://schemas.openxmlformats.org/drawingml/2006/table">
-            <a:tbl>
-              <a:tblPr/>
-              <a:tblGrid>
-                <a:gridCol w="3337560"/>
-                <a:gridCol w="3337560"/>
-              </a:tblGrid>
-              <a:tr h="420624">
-                <a:tc>
-                  <a:txBody>
-                    <a:bodyPr/>
-                    <a:lstStyle/>
-                    <a:p>
-                      <a:pPr indent="0" marL="0">
-                        <a:buNone/>
-                      </a:pPr>
-                      <a:r>
-                        <a:rPr lang="en-US" sz="1300" b="1" dirty="0">
-                          <a:solidFill>
-                            <a:srgbClr val="718096"/>
-                          </a:solidFill>
-                          <a:latin typeface="Pretendard" pitchFamily="34" charset="0"/>
-                          <a:ea typeface="Pretendard" pitchFamily="34" charset="-122"/>
-                          <a:cs typeface="Pretendard" pitchFamily="34" charset="-120"/>
-                        </a:rPr>
-                        <a:t>항목</a:t>
-                      </a:r>
-                      <a:endParaRPr lang="en-US" sz="1300" dirty="0">
-                        <a:latin typeface="Pretendard" charset="0"/>
-                        <a:ea typeface="Pretendard" charset="0"/>
-                        <a:cs typeface="Pretendard" charset="0"/>
-                      </a:endParaRPr>
-                    </a:p>
-                  </a:txBody>
-                  <a:tcPr marL="50800" marR="50800" marT="25400" marB="25400" anchor="ctr">
-                    <a:lnL w="3810" cap="flat" cmpd="sng" algn="ctr">
-                      <a:solidFill>
-                        <a:srgbClr val="CBD5E0"/>
-                      </a:solidFill>
-                      <a:prstDash val="solid"/>
-                      <a:round/>
-                      <a:headEnd type="none" w="med" len="med"/>
-                      <a:tailEnd type="none" w="med" len="med"/>
-                    </a:lnL>
-                    <a:lnR w="3810" cap="flat" cmpd="sng" algn="ctr">
-                      <a:solidFill>
-                        <a:srgbClr val="CBD5E0"/>
-                      </a:solidFill>
-                      <a:prstDash val="solid"/>
-                      <a:round/>
-                      <a:headEnd type="none" w="med" len="med"/>
-                      <a:tailEnd type="none" w="med" len="med"/>
-                    </a:lnR>
-                    <a:lnT w="3810" cap="flat" cmpd="sng" algn="ctr">
-                      <a:solidFill>
-                        <a:srgbClr val="CBD5E0"/>
-                      </a:solidFill>
-                      <a:prstDash val="solid"/>
-                      <a:round/>
-                      <a:headEnd type="none" w="med" len="med"/>
-                      <a:tailEnd type="none" w="med" len="med"/>
-                    </a:lnT>
-                    <a:lnB w="3810" cap="flat" cmpd="sng" algn="ctr">
-                      <a:solidFill>
-                        <a:srgbClr val="CBD5E0"/>
-                      </a:solidFill>
-                      <a:prstDash val="solid"/>
-                      <a:round/>
-                      <a:headEnd type="none" w="med" len="med"/>
-                      <a:tailEnd type="none" w="med" len="med"/>
-                    </a:lnB>
-                    <a:solidFill>
-                      <a:srgbClr val="F7FAFC"/>
-                    </a:solidFill>
-                  </a:tcPr>
-                </a:tc>
-                <a:tc>
-                  <a:txBody>
-                    <a:bodyPr/>
-                    <a:lstStyle/>
-                    <a:p>
-                      <a:pPr indent="0" marL="0">
-                        <a:buNone/>
-                      </a:pPr>
-                      <a:r>
-                        <a:rPr lang="en-US" sz="1300" b="1" dirty="0">
-                          <a:solidFill>
-                            <a:srgbClr val="718096"/>
-                          </a:solidFill>
-                          <a:latin typeface="Pretendard" pitchFamily="34" charset="0"/>
-                          <a:ea typeface="Pretendard" pitchFamily="34" charset="-122"/>
-                          <a:cs typeface="Pretendard" pitchFamily="34" charset="-120"/>
-                        </a:rPr>
-                        <a:t>값</a:t>
-                      </a:r>
-                      <a:endParaRPr lang="en-US" sz="1300" dirty="0">
-                        <a:latin typeface="Pretendard" charset="0"/>
-                        <a:ea typeface="Pretendard" charset="0"/>
-                        <a:cs typeface="Pretendard" charset="0"/>
-                      </a:endParaRPr>
-                    </a:p>
-                  </a:txBody>
-                  <a:tcPr marL="50800" marR="50800" marT="25400" marB="25400" anchor="ctr">
-                    <a:lnL w="3810" cap="flat" cmpd="sng" algn="ctr">
-                      <a:solidFill>
-                        <a:srgbClr val="CBD5E0"/>
-                      </a:solidFill>
-                      <a:prstDash val="solid"/>
-                      <a:round/>
-                      <a:headEnd type="none" w="med" len="med"/>
-                      <a:tailEnd type="none" w="med" len="med"/>
-                    </a:lnL>
-                    <a:lnR w="3810" cap="flat" cmpd="sng" algn="ctr">
-                      <a:solidFill>
-                        <a:srgbClr val="CBD5E0"/>
-                      </a:solidFill>
-                      <a:prstDash val="solid"/>
-                      <a:round/>
-                      <a:headEnd type="none" w="med" len="med"/>
-                      <a:tailEnd type="none" w="med" len="med"/>
-                    </a:lnR>
-                    <a:lnT w="3810" cap="flat" cmpd="sng" algn="ctr">
-                      <a:solidFill>
-                        <a:srgbClr val="CBD5E0"/>
-                      </a:solidFill>
-                      <a:prstDash val="solid"/>
-                      <a:round/>
-                      <a:headEnd type="none" w="med" len="med"/>
-                      <a:tailEnd type="none" w="med" len="med"/>
-                    </a:lnT>
-                    <a:lnB w="3810" cap="flat" cmpd="sng" algn="ctr">
-                      <a:solidFill>
-                        <a:srgbClr val="CBD5E0"/>
-                      </a:solidFill>
-                      <a:prstDash val="solid"/>
-                      <a:round/>
-                      <a:headEnd type="none" w="med" len="med"/>
-                      <a:tailEnd type="none" w="med" len="med"/>
-                    </a:lnB>
-                    <a:solidFill>
-                      <a:srgbClr val="F7FAFC"/>
-                    </a:solidFill>
-                  </a:tcPr>
-                </a:tc>
-              </a:tr>
-              <a:tr h="420624">
-                <a:tc>
-                  <a:txBody>
-                    <a:bodyPr/>
-                    <a:lstStyle/>
-                    <a:p>
-                      <a:pPr indent="0" marL="0">
-                        <a:buNone/>
-                      </a:pPr>
-                      <a:r>
-                        <a:rPr lang="en-US" sz="1300" b="1" dirty="0">
-                          <a:solidFill>
-                            <a:srgbClr val="10161F"/>
-                          </a:solidFill>
-                          <a:latin typeface="Pretendard" pitchFamily="34" charset="0"/>
-                          <a:ea typeface="Pretendard" pitchFamily="34" charset="-122"/>
-                          <a:cs typeface="Pretendard" pitchFamily="34" charset="-120"/>
-                        </a:rPr>
-                        <a:t>데이터 </a:t>
-                      </a:r>
-                      <a:pPr indent="0" marL="0">
-                        <a:buNone/>
-                      </a:pPr>
-                      <a:r>
-                        <a:rPr lang="en-US" sz="1300" b="1" dirty="0">
-                          <a:solidFill>
-                            <a:srgbClr val="10161F"/>
-                          </a:solidFill>
-                          <a:latin typeface="Pretendard" pitchFamily="34" charset="0"/>
-                          <a:ea typeface="Pretendard" pitchFamily="34" charset="-122"/>
-                          <a:cs typeface="Pretendard" pitchFamily="34" charset="-120"/>
-                        </a:rPr>
-                        <a:t>없음</a:t>
-                      </a:r>
-                      <a:endParaRPr lang="en-US" sz="1300" dirty="0">
-                        <a:latin typeface="Pretendard" charset="0"/>
-                        <a:ea typeface="Pretendard" charset="0"/>
-                        <a:cs typeface="Pretendard" charset="0"/>
-                      </a:endParaRPr>
-                    </a:p>
-                  </a:txBody>
-                  <a:tcPr marL="50800" marR="50800" marT="25400" marB="25400" anchor="ctr">
-                    <a:lnL w="3810" cap="flat" cmpd="sng" algn="ctr">
-                      <a:solidFill>
-                        <a:srgbClr val="CBD5E0"/>
-                      </a:solidFill>
-                      <a:prstDash val="solid"/>
-                      <a:round/>
-                      <a:headEnd type="none" w="med" len="med"/>
-                      <a:tailEnd type="none" w="med" len="med"/>
-                    </a:lnL>
-                    <a:lnR w="3810" cap="flat" cmpd="sng" algn="ctr">
-                      <a:solidFill>
-                        <a:srgbClr val="CBD5E0"/>
-                      </a:solidFill>
-                      <a:prstDash val="solid"/>
-                      <a:round/>
-                      <a:headEnd type="none" w="med" len="med"/>
-                      <a:tailEnd type="none" w="med" len="med"/>
-                    </a:lnR>
-                    <a:lnT w="3810" cap="flat" cmpd="sng" algn="ctr">
-                      <a:solidFill>
-                        <a:srgbClr val="CBD5E0"/>
-                      </a:solidFill>
-                      <a:prstDash val="solid"/>
-                      <a:round/>
-                      <a:headEnd type="none" w="med" len="med"/>
-                      <a:tailEnd type="none" w="med" len="med"/>
-                    </a:lnT>
-                    <a:lnB w="3810" cap="flat" cmpd="sng" algn="ctr">
-                      <a:solidFill>
-                        <a:srgbClr val="CBD5E0"/>
-                      </a:solidFill>
-                      <a:prstDash val="solid"/>
-                      <a:round/>
-                      <a:headEnd type="none" w="med" len="med"/>
-                      <a:tailEnd type="none" w="med" len="med"/>
-                    </a:lnB>
-                    <a:solidFill>
-                      <a:srgbClr val="FFFFFF"/>
-                    </a:solidFill>
-                  </a:tcPr>
-                </a:tc>
-                <a:tc>
-                  <a:txBody>
-                    <a:bodyPr/>
-                    <a:lstStyle/>
-                    <a:p>
-                      <a:pPr indent="0" marL="0">
-                        <a:buNone/>
-                      </a:pPr>
-                      <a:r>
-                        <a:rPr lang="en-US" sz="1300" dirty="0">
-                          <a:solidFill>
-                            <a:srgbClr val="10161F"/>
-                          </a:solidFill>
-                          <a:latin typeface="Pretendard" pitchFamily="34" charset="0"/>
-                          <a:ea typeface="Pretendard" pitchFamily="34" charset="-122"/>
-                          <a:cs typeface="Pretendard" pitchFamily="34" charset="-120"/>
-                        </a:rPr>
-                        <a:t>-</a:t>
-                      </a:r>
-                      <a:endParaRPr lang="en-US" sz="1300" dirty="0">
-                        <a:latin typeface="Pretendard" charset="0"/>
-                        <a:ea typeface="Pretendard" charset="0"/>
-                        <a:cs typeface="Pretendard" charset="0"/>
-                      </a:endParaRPr>
-                    </a:p>
-                  </a:txBody>
-                  <a:tcPr marL="50800" marR="50800" marT="25400" marB="25400" anchor="ctr">
-                    <a:lnL w="3810" cap="flat" cmpd="sng" algn="ctr">
-                      <a:solidFill>
-                        <a:srgbClr val="CBD5E0"/>
-                      </a:solidFill>
-                      <a:prstDash val="solid"/>
-                      <a:round/>
-                      <a:headEnd type="none" w="med" len="med"/>
-                      <a:tailEnd type="none" w="med" len="med"/>
-                    </a:lnL>
-                    <a:lnR w="3810" cap="flat" cmpd="sng" algn="ctr">
-                      <a:solidFill>
-                        <a:srgbClr val="CBD5E0"/>
-                      </a:solidFill>
-                      <a:prstDash val="solid"/>
-                      <a:round/>
-                      <a:headEnd type="none" w="med" len="med"/>
-                      <a:tailEnd type="none" w="med" len="med"/>
-                    </a:lnR>
-                    <a:lnT w="3810" cap="flat" cmpd="sng" algn="ctr">
-                      <a:solidFill>
-                        <a:srgbClr val="CBD5E0"/>
-                      </a:solidFill>
-                      <a:prstDash val="solid"/>
-                      <a:round/>
-                      <a:headEnd type="none" w="med" len="med"/>
-                      <a:tailEnd type="none" w="med" len="med"/>
-                    </a:lnT>
-                    <a:lnB w="3810" cap="flat" cmpd="sng" algn="ctr">
-                      <a:solidFill>
-                        <a:srgbClr val="CBD5E0"/>
-                      </a:solidFill>
-                      <a:prstDash val="solid"/>
-                      <a:round/>
-                      <a:headEnd type="none" w="med" len="med"/>
-                      <a:tailEnd type="none" w="med" len="med"/>
-                    </a:lnB>
-                    <a:solidFill>
-                      <a:srgbClr val="FFFFFF"/>
-                    </a:solidFill>
-                  </a:tcPr>
-                </a:tc>
-              </a:tr>
-            </a:tbl>
-          </a:graphicData>
-        </a:graphic>
-      </p:graphicFrame>
-      <p:sp>
-        <p:nvSpPr>
-          <p:cNvPr id="8" name="Text 5"/>
-          <p:cNvSpPr/>
-          <p:nvPr/>
-        </p:nvSpPr>
-        <p:spPr>
-          <a:xfrm>
-            <a:off x="566928" y="6382512"/>
-            <a:ext cx="7315200" cy="219456"/>
-          </a:xfrm>
-          <a:prstGeom prst="rect">
-            <a:avLst/>
-          </a:prstGeom>
-          <a:noFill/>
-          <a:ln/>
-        </p:spPr>
-        <p:txBody>
-          <a:bodyPr wrap="square" lIns="0" tIns="0" rIns="0" bIns="0" rtlCol="0" anchor="ctr"/>
-          <a:lstStyle/>
-          <a:p>
-            <a:pPr indent="0" marL="0">
-              <a:buNone/>
-            </a:pPr>
-            <a:r>
-              <a:rPr lang="en-US" sz="800" dirty="0">
-                <a:solidFill>
-                  <a:srgbClr val="718096"/>
-                </a:solidFill>
-                <a:latin typeface="Pretendard" pitchFamily="34" charset="0"/>
-                <a:ea typeface="Pretendard" pitchFamily="34" charset="-122"/>
-                <a:cs typeface="Pretendard" pitchFamily="34" charset="-120"/>
-              </a:rPr>
-              <a:t>크리딜   |   </a:t>
-            </a:r>
-            <a:endParaRPr lang="en-US" sz="800" dirty="0"/>
-          </a:p>
-        </p:txBody>
-      </p:sp>
-      <p:sp>
-        <p:nvSpPr>
-          <p:cNvPr id="9" name="Text 6"/>
-          <p:cNvSpPr/>
-          <p:nvPr/>
-        </p:nvSpPr>
-        <p:spPr>
-          <a:xfrm>
-            <a:off x="10710367" y="6382512"/>
-            <a:ext cx="914400" cy="219456"/>
-          </a:xfrm>
-          <a:prstGeom prst="rect">
-            <a:avLst/>
-          </a:prstGeom>
-          <a:noFill/>
-          <a:ln/>
-        </p:spPr>
-        <p:txBody>
-          <a:bodyPr wrap="square" lIns="0" tIns="0" rIns="0" bIns="0" rtlCol="0" anchor="ctr"/>
-          <a:lstStyle/>
-          <a:p>
-            <a:pPr algn="r" indent="0" marL="0">
-              <a:buNone/>
-            </a:pPr>
-            <a:r>
-              <a:rPr lang="en-US" sz="900" b="1" dirty="0">
-                <a:solidFill>
-                  <a:srgbClr val="B98A2E"/>
-                </a:solidFill>
-                <a:latin typeface="Arial" pitchFamily="34" charset="0"/>
-                <a:ea typeface="Arial" pitchFamily="34" charset="-122"/>
-                <a:cs typeface="Arial" pitchFamily="34" charset="-120"/>
-              </a:rPr>
-              <a:t>10</a:t>
-            </a:r>
-            <a:endParaRPr lang="en-US" sz="900" dirty="0"/>
-          </a:p>
-        </p:txBody>
-      </p:sp>
-    </p:spTree>
-  </p:cSld>
-  <p:clrMapOvr>
-    <a:masterClrMapping/>
-  </p:clrMapOvr>
-</p:sld>
-</file>
-
-<file path=ppt/slides/slide11.xml><?xml version="1.0" encoding="utf-8"?>
-<p:sld xmlns:a="http://schemas.openxmlformats.org/drawingml/2006/main" xmlns:r="http://schemas.openxmlformats.org/officeDocument/2006/relationships" xmlns:p="http://schemas.openxmlformats.org/presentationml/2006/main">
-  <p:cSld name="Slide 11">
-    <p:bg>
-      <p:bgPr>
-        <a:solidFill>
-          <a:srgbClr val="FFFFFF"/>
-        </a:solidFill>
-      </p:bgPr>
-    </p:bg>
-    <p:spTree>
-      <p:nvGrpSpPr>
-        <p:cNvPr id="1" name=""/>
-        <p:cNvGrpSpPr/>
-        <p:nvPr/>
-      </p:nvGrpSpPr>
-      <p:grpSpPr>
-        <a:xfrm>
-          <a:off x="0" y="0"/>
-          <a:ext cx="0" cy="0"/>
-          <a:chOff x="0" y="0"/>
-          <a:chExt cx="0" cy="0"/>
-        </a:xfrm>
-      </p:grpSpPr>
-      <p:sp>
-        <p:nvSpPr>
-          <p:cNvPr id="2" name="Shape 0"/>
-          <p:cNvSpPr/>
-          <p:nvPr/>
-        </p:nvSpPr>
-        <p:spPr>
-          <a:xfrm>
-            <a:off x="566928" y="457200"/>
-            <a:ext cx="384048" cy="384048"/>
-          </a:xfrm>
-          <a:prstGeom prst="ellipse">
-            <a:avLst/>
-          </a:prstGeom>
-          <a:solidFill>
-            <a:srgbClr val="B98A2E"/>
-          </a:solidFill>
-          <a:ln/>
-        </p:spPr>
-      </p:sp>
-      <p:sp>
-        <p:nvSpPr>
-          <p:cNvPr id="3" name="Text 1"/>
-          <p:cNvSpPr/>
-          <p:nvPr/>
-        </p:nvSpPr>
-        <p:spPr>
-          <a:xfrm>
-            <a:off x="566928" y="457200"/>
-            <a:ext cx="384048" cy="384048"/>
-          </a:xfrm>
-          <a:prstGeom prst="rect">
-            <a:avLst/>
-          </a:prstGeom>
-          <a:noFill/>
-          <a:ln/>
-        </p:spPr>
-        <p:txBody>
-          <a:bodyPr wrap="square" lIns="0" tIns="0" rIns="0" bIns="0" rtlCol="0" anchor="ctr"/>
-          <a:lstStyle/>
-          <a:p>
-            <a:pPr algn="ctr" indent="0" marL="0">
-              <a:buNone/>
-            </a:pPr>
-            <a:r>
-              <a:rPr lang="en-US" sz="1300" b="1" dirty="0">
-                <a:solidFill>
-                  <a:srgbClr val="FFFFFF"/>
-                </a:solidFill>
-                <a:latin typeface="Arial" pitchFamily="34" charset="0"/>
-                <a:ea typeface="Arial" pitchFamily="34" charset="-122"/>
-                <a:cs typeface="Arial" pitchFamily="34" charset="-120"/>
-              </a:rPr>
-              <a:t>11</a:t>
-            </a:r>
-            <a:endParaRPr lang="en-US" sz="1300" dirty="0"/>
-          </a:p>
-        </p:txBody>
-      </p:sp>
-      <p:sp>
-        <p:nvSpPr>
-          <p:cNvPr id="4" name="Text 2"/>
-          <p:cNvSpPr/>
-          <p:nvPr/>
-        </p:nvSpPr>
-        <p:spPr>
-          <a:xfrm>
-            <a:off x="1133856" y="457200"/>
-            <a:ext cx="10490911" cy="182880"/>
-          </a:xfrm>
-          <a:prstGeom prst="rect">
-            <a:avLst/>
-          </a:prstGeom>
-          <a:noFill/>
-          <a:ln/>
-        </p:spPr>
-        <p:txBody>
-          <a:bodyPr wrap="square" lIns="0" tIns="0" rIns="0" bIns="0" rtlCol="0" anchor="ctr"/>
-          <a:lstStyle/>
-          <a:p>
-            <a:pPr indent="0" marL="0">
-              <a:buNone/>
-            </a:pPr>
-            <a:r>
-              <a:rPr lang="en-US" sz="950" b="1" spc="200" kern="0" dirty="0">
-                <a:solidFill>
-                  <a:srgbClr val="B98A2E"/>
-                </a:solidFill>
-                <a:latin typeface="Arial" pitchFamily="34" charset="0"/>
-                <a:ea typeface="Arial" pitchFamily="34" charset="-122"/>
-                <a:cs typeface="Arial" pitchFamily="34" charset="-120"/>
-              </a:rPr>
-              <a:t>Tax</a:t>
-            </a:r>
-            <a:endParaRPr lang="en-US" sz="950" dirty="0"/>
-          </a:p>
-        </p:txBody>
-      </p:sp>
-      <p:sp>
-        <p:nvSpPr>
-          <p:cNvPr id="5" name="Text 3"/>
-          <p:cNvSpPr/>
-          <p:nvPr/>
-        </p:nvSpPr>
-        <p:spPr>
-          <a:xfrm>
-            <a:off x="1133856" y="640080"/>
-            <a:ext cx="10490911" cy="365760"/>
-          </a:xfrm>
-          <a:prstGeom prst="rect">
-            <a:avLst/>
-          </a:prstGeom>
-          <a:noFill/>
-          <a:ln/>
-        </p:spPr>
-        <p:txBody>
-          <a:bodyPr wrap="square" lIns="0" tIns="0" rIns="0" bIns="0" rtlCol="0" anchor="ctr"/>
-          <a:lstStyle/>
-          <a:p>
-            <a:pPr indent="0" marL="0">
-              <a:buNone/>
-            </a:pPr>
-            <a:r>
-              <a:rPr lang="en-US" sz="2300" b="1" dirty="0">
-                <a:solidFill>
-                  <a:srgbClr val="10161F"/>
-                </a:solidFill>
-                <a:latin typeface="Pretendard" pitchFamily="34" charset="0"/>
-                <a:ea typeface="Pretendard" pitchFamily="34" charset="-122"/>
-                <a:cs typeface="Pretendard" pitchFamily="34" charset="-120"/>
-              </a:rPr>
-              <a:t>세금 추정</a:t>
-            </a:r>
-            <a:endParaRPr lang="en-US" sz="2300" dirty="0"/>
-          </a:p>
-        </p:txBody>
-      </p:sp>
-      <p:sp>
-        <p:nvSpPr>
-          <p:cNvPr id="6" name="Text 4"/>
-          <p:cNvSpPr/>
-          <p:nvPr/>
-        </p:nvSpPr>
-        <p:spPr>
-          <a:xfrm>
-            <a:off x="566928" y="6382512"/>
-            <a:ext cx="7315200" cy="219456"/>
-          </a:xfrm>
-          <a:prstGeom prst="rect">
-            <a:avLst/>
-          </a:prstGeom>
-          <a:noFill/>
-          <a:ln/>
-        </p:spPr>
-        <p:txBody>
-          <a:bodyPr wrap="square" lIns="0" tIns="0" rIns="0" bIns="0" rtlCol="0" anchor="ctr"/>
-          <a:lstStyle/>
-          <a:p>
-            <a:pPr indent="0" marL="0">
-              <a:buNone/>
-            </a:pPr>
-            <a:r>
-              <a:rPr lang="en-US" sz="800" dirty="0">
-                <a:solidFill>
-                  <a:srgbClr val="718096"/>
-                </a:solidFill>
-                <a:latin typeface="Pretendard" pitchFamily="34" charset="0"/>
-                <a:ea typeface="Pretendard" pitchFamily="34" charset="-122"/>
-                <a:cs typeface="Pretendard" pitchFamily="34" charset="-120"/>
-              </a:rPr>
-              <a:t>크리딜   |   </a:t>
-            </a:r>
-            <a:endParaRPr lang="en-US" sz="800" dirty="0"/>
-          </a:p>
-        </p:txBody>
-      </p:sp>
-      <p:sp>
-        <p:nvSpPr>
-          <p:cNvPr id="7" name="Text 5"/>
-          <p:cNvSpPr/>
-          <p:nvPr/>
-        </p:nvSpPr>
-        <p:spPr>
-          <a:xfrm>
-            <a:off x="10710367" y="6382512"/>
-            <a:ext cx="914400" cy="219456"/>
-          </a:xfrm>
-          <a:prstGeom prst="rect">
-            <a:avLst/>
-          </a:prstGeom>
-          <a:noFill/>
-          <a:ln/>
-        </p:spPr>
-        <p:txBody>
-          <a:bodyPr wrap="square" lIns="0" tIns="0" rIns="0" bIns="0" rtlCol="0" anchor="ctr"/>
-          <a:lstStyle/>
-          <a:p>
-            <a:pPr algn="r" indent="0" marL="0">
-              <a:buNone/>
-            </a:pPr>
-            <a:r>
-              <a:rPr lang="en-US" sz="900" b="1" dirty="0">
-                <a:solidFill>
-                  <a:srgbClr val="B98A2E"/>
-                </a:solidFill>
-                <a:latin typeface="Arial" pitchFamily="34" charset="0"/>
-                <a:ea typeface="Arial" pitchFamily="34" charset="-122"/>
-                <a:cs typeface="Arial" pitchFamily="34" charset="-120"/>
-              </a:rPr>
-              <a:t>11</a:t>
-            </a:r>
-            <a:endParaRPr lang="en-US" sz="900" dirty="0"/>
-          </a:p>
-        </p:txBody>
-      </p:sp>
-    </p:spTree>
-  </p:cSld>
-  <p:clrMapOvr>
-    <a:masterClrMapping/>
-  </p:clrMapOvr>
-</p:sld>
-</file>
-
-<file path=ppt/slides/slide12.xml><?xml version="1.0" encoding="utf-8"?>
-<p:sld xmlns:a="http://schemas.openxmlformats.org/drawingml/2006/main" xmlns:r="http://schemas.openxmlformats.org/officeDocument/2006/relationships" xmlns:p="http://schemas.openxmlformats.org/presentationml/2006/main">
-  <p:cSld name="Slide 12">
-    <p:bg>
-      <p:bgPr>
-        <a:solidFill>
-          <a:srgbClr val="FFFFFF"/>
-        </a:solidFill>
-      </p:bgPr>
-    </p:bg>
-    <p:spTree>
-      <p:nvGrpSpPr>
-        <p:cNvPr id="1" name=""/>
-        <p:cNvGrpSpPr/>
-        <p:nvPr/>
-      </p:nvGrpSpPr>
-      <p:grpSpPr>
-        <a:xfrm>
-          <a:off x="0" y="0"/>
-          <a:ext cx="0" cy="0"/>
-          <a:chOff x="0" y="0"/>
-          <a:chExt cx="0" cy="0"/>
-        </a:xfrm>
-      </p:grpSpPr>
-      <p:sp>
-        <p:nvSpPr>
-          <p:cNvPr id="2" name="Shape 0"/>
-          <p:cNvSpPr/>
-          <p:nvPr/>
-        </p:nvSpPr>
-        <p:spPr>
-          <a:xfrm>
-            <a:off x="566928" y="457200"/>
-            <a:ext cx="384048" cy="384048"/>
-          </a:xfrm>
-          <a:prstGeom prst="ellipse">
-            <a:avLst/>
-          </a:prstGeom>
-          <a:solidFill>
-            <a:srgbClr val="B98A2E"/>
-          </a:solidFill>
-          <a:ln/>
-        </p:spPr>
-      </p:sp>
-      <p:sp>
-        <p:nvSpPr>
-          <p:cNvPr id="3" name="Text 1"/>
-          <p:cNvSpPr/>
-          <p:nvPr/>
-        </p:nvSpPr>
-        <p:spPr>
-          <a:xfrm>
-            <a:off x="566928" y="457200"/>
-            <a:ext cx="384048" cy="384048"/>
-          </a:xfrm>
-          <a:prstGeom prst="rect">
-            <a:avLst/>
-          </a:prstGeom>
-          <a:noFill/>
-          <a:ln/>
-        </p:spPr>
-        <p:txBody>
-          <a:bodyPr wrap="square" lIns="0" tIns="0" rIns="0" bIns="0" rtlCol="0" anchor="ctr"/>
-          <a:lstStyle/>
-          <a:p>
-            <a:pPr algn="ctr" indent="0" marL="0">
-              <a:buNone/>
-            </a:pPr>
-            <a:r>
-              <a:rPr lang="en-US" sz="1300" b="1" dirty="0">
-                <a:solidFill>
-                  <a:srgbClr val="FFFFFF"/>
-                </a:solidFill>
-                <a:latin typeface="Arial" pitchFamily="34" charset="0"/>
-                <a:ea typeface="Arial" pitchFamily="34" charset="-122"/>
-                <a:cs typeface="Arial" pitchFamily="34" charset="-120"/>
-              </a:rPr>
-              <a:t>12</a:t>
-            </a:r>
-            <a:endParaRPr lang="en-US" sz="1300" dirty="0"/>
-          </a:p>
-        </p:txBody>
-      </p:sp>
-      <p:sp>
-        <p:nvSpPr>
-          <p:cNvPr id="4" name="Text 2"/>
-          <p:cNvSpPr/>
-          <p:nvPr/>
-        </p:nvSpPr>
-        <p:spPr>
-          <a:xfrm>
-            <a:off x="1133856" y="457200"/>
-            <a:ext cx="10490911" cy="182880"/>
-          </a:xfrm>
-          <a:prstGeom prst="rect">
-            <a:avLst/>
-          </a:prstGeom>
-          <a:noFill/>
-          <a:ln/>
-        </p:spPr>
-        <p:txBody>
-          <a:bodyPr wrap="square" lIns="0" tIns="0" rIns="0" bIns="0" rtlCol="0" anchor="ctr"/>
-          <a:lstStyle/>
-          <a:p>
-            <a:pPr indent="0" marL="0">
-              <a:buNone/>
-            </a:pPr>
-            <a:r>
-              <a:rPr lang="en-US" sz="950" b="1" spc="200" kern="0" dirty="0">
-                <a:solidFill>
-                  <a:srgbClr val="B98A2E"/>
-                </a:solidFill>
-                <a:latin typeface="Arial" pitchFamily="34" charset="0"/>
-                <a:ea typeface="Arial" pitchFamily="34" charset="-122"/>
-                <a:cs typeface="Arial" pitchFamily="34" charset="-120"/>
-              </a:rPr>
-              <a:t>Thesis</a:t>
-            </a:r>
-            <a:endParaRPr lang="en-US" sz="950" dirty="0"/>
-          </a:p>
-        </p:txBody>
-      </p:sp>
-      <p:sp>
-        <p:nvSpPr>
-          <p:cNvPr id="5" name="Text 3"/>
-          <p:cNvSpPr/>
-          <p:nvPr/>
-        </p:nvSpPr>
-        <p:spPr>
-          <a:xfrm>
-            <a:off x="1133856" y="640080"/>
-            <a:ext cx="10490911" cy="365760"/>
-          </a:xfrm>
-          <a:prstGeom prst="rect">
-            <a:avLst/>
-          </a:prstGeom>
-          <a:noFill/>
-          <a:ln/>
-        </p:spPr>
-        <p:txBody>
-          <a:bodyPr wrap="square" lIns="0" tIns="0" rIns="0" bIns="0" rtlCol="0" anchor="ctr"/>
-          <a:lstStyle/>
-          <a:p>
-            <a:pPr indent="0" marL="0">
-              <a:buNone/>
-            </a:pPr>
-            <a:r>
-              <a:rPr lang="en-US" sz="2300" b="1" dirty="0">
-                <a:solidFill>
-                  <a:srgbClr val="10161F"/>
-                </a:solidFill>
-                <a:latin typeface="Pretendard" pitchFamily="34" charset="0"/>
-                <a:ea typeface="Pretendard" pitchFamily="34" charset="-122"/>
-                <a:cs typeface="Pretendard" pitchFamily="34" charset="-120"/>
-              </a:rPr>
-              <a:t>투자 포인트</a:t>
-            </a:r>
-            <a:endParaRPr lang="en-US" sz="2300" dirty="0"/>
-          </a:p>
-        </p:txBody>
-      </p:sp>
-      <p:sp>
-        <p:nvSpPr>
-          <p:cNvPr id="6" name="Shape 4"/>
-          <p:cNvSpPr/>
-          <p:nvPr/>
-        </p:nvSpPr>
-        <p:spPr>
-          <a:xfrm>
-            <a:off x="566928" y="4983480"/>
-            <a:ext cx="11057839" cy="804672"/>
-          </a:xfrm>
-          <a:prstGeom prst="roundRect">
-            <a:avLst>
-              <a:gd name="adj" fmla="val 6818"/>
-            </a:avLst>
-          </a:prstGeom>
-          <a:solidFill>
-            <a:srgbClr val="F3EBDA"/>
-          </a:solidFill>
-          <a:ln w="10160">
-            <a:solidFill>
-              <a:srgbClr val="D9B668"/>
-            </a:solidFill>
-            <a:prstDash val="solid"/>
-          </a:ln>
-        </p:spPr>
-      </p:sp>
-      <p:sp>
-        <p:nvSpPr>
-          <p:cNvPr id="7" name="Text 5"/>
-          <p:cNvSpPr/>
-          <p:nvPr/>
-        </p:nvSpPr>
-        <p:spPr>
-          <a:xfrm>
-            <a:off x="749808" y="5093208"/>
-            <a:ext cx="1691640" cy="256032"/>
-          </a:xfrm>
-          <a:prstGeom prst="rect">
-            <a:avLst/>
-          </a:prstGeom>
-          <a:noFill/>
-          <a:ln/>
-        </p:spPr>
-        <p:txBody>
-          <a:bodyPr wrap="square" lIns="0" tIns="0" rIns="0" bIns="0" rtlCol="0" anchor="ctr"/>
-          <a:lstStyle/>
-          <a:p>
-            <a:pPr indent="0" marL="0">
-              <a:buNone/>
-            </a:pPr>
-            <a:r>
-              <a:rPr lang="en-US" sz="1050" b="1" dirty="0">
-                <a:solidFill>
-                  <a:srgbClr val="977024"/>
-                </a:solidFill>
-                <a:latin typeface="Pretendard" pitchFamily="34" charset="0"/>
-                <a:ea typeface="Pretendard" pitchFamily="34" charset="-122"/>
-                <a:cs typeface="Pretendard" pitchFamily="34" charset="-120"/>
-              </a:rPr>
-              <a:t>종합 가치 제안</a:t>
-            </a:r>
-            <a:endParaRPr lang="en-US" sz="1050" dirty="0"/>
-          </a:p>
-        </p:txBody>
-      </p:sp>
-      <p:sp>
-        <p:nvSpPr>
-          <p:cNvPr id="8" name="Text 6"/>
-          <p:cNvSpPr/>
-          <p:nvPr/>
-        </p:nvSpPr>
-        <p:spPr>
-          <a:xfrm>
-            <a:off x="2487168" y="5056632"/>
-            <a:ext cx="8954719" cy="658368"/>
-          </a:xfrm>
-          <a:prstGeom prst="rect">
-            <a:avLst/>
-          </a:prstGeom>
-          <a:noFill/>
-          <a:ln/>
-        </p:spPr>
-        <p:txBody>
-          <a:bodyPr wrap="square" lIns="0" tIns="0" rIns="0" bIns="0" rtlCol="0" anchor="ctr"/>
-          <a:lstStyle/>
-          <a:p>
-            <a:pPr indent="0" marL="0">
-              <a:lnSpc>
-                <a:spcPct val="125000"/>
-              </a:lnSpc>
-              <a:buNone/>
-            </a:pPr>
-            <a:r>
-              <a:rPr lang="en-US" sz="1100" dirty="0">
-                <a:solidFill>
-                  <a:srgbClr val="10161F"/>
-                </a:solidFill>
-                <a:latin typeface="Pretendard" pitchFamily="34" charset="0"/>
-                <a:ea typeface="Pretendard" pitchFamily="34" charset="-122"/>
-                <a:cs typeface="Pretendard" pitchFamily="34" charset="-120"/>
-              </a:rPr>
-              <a:t>관점에서 안정적 월 임대수익과 우량 메디컬 테넌트를 보유한 핵심 투자 자산입니다.</a:t>
-            </a:r>
-            <a:endParaRPr lang="en-US" sz="1100" dirty="0"/>
-          </a:p>
-        </p:txBody>
-      </p:sp>
-      <p:sp>
-        <p:nvSpPr>
-          <p:cNvPr id="9" name="Text 7"/>
-          <p:cNvSpPr/>
-          <p:nvPr/>
-        </p:nvSpPr>
-        <p:spPr>
-          <a:xfrm>
-            <a:off x="566928" y="6382512"/>
-            <a:ext cx="7315200" cy="219456"/>
-          </a:xfrm>
-          <a:prstGeom prst="rect">
-            <a:avLst/>
-          </a:prstGeom>
-          <a:noFill/>
-          <a:ln/>
-        </p:spPr>
-        <p:txBody>
-          <a:bodyPr wrap="square" lIns="0" tIns="0" rIns="0" bIns="0" rtlCol="0" anchor="ctr"/>
-          <a:lstStyle/>
-          <a:p>
-            <a:pPr indent="0" marL="0">
-              <a:buNone/>
-            </a:pPr>
-            <a:r>
-              <a:rPr lang="en-US" sz="800" dirty="0">
-                <a:solidFill>
-                  <a:srgbClr val="718096"/>
-                </a:solidFill>
-                <a:latin typeface="Pretendard" pitchFamily="34" charset="0"/>
-                <a:ea typeface="Pretendard" pitchFamily="34" charset="-122"/>
-                <a:cs typeface="Pretendard" pitchFamily="34" charset="-120"/>
-              </a:rPr>
-              <a:t>크리딜   |   </a:t>
-            </a:r>
-            <a:endParaRPr lang="en-US" sz="800" dirty="0"/>
-          </a:p>
-        </p:txBody>
-      </p:sp>
-      <p:sp>
-        <p:nvSpPr>
-          <p:cNvPr id="10" name="Text 8"/>
-          <p:cNvSpPr/>
-          <p:nvPr/>
-        </p:nvSpPr>
-        <p:spPr>
-          <a:xfrm>
-            <a:off x="10710367" y="6382512"/>
-            <a:ext cx="914400" cy="219456"/>
-          </a:xfrm>
-          <a:prstGeom prst="rect">
-            <a:avLst/>
-          </a:prstGeom>
-          <a:noFill/>
-          <a:ln/>
-        </p:spPr>
-        <p:txBody>
-          <a:bodyPr wrap="square" lIns="0" tIns="0" rIns="0" bIns="0" rtlCol="0" anchor="ctr"/>
-          <a:lstStyle/>
-          <a:p>
-            <a:pPr algn="r" indent="0" marL="0">
-              <a:buNone/>
-            </a:pPr>
-            <a:r>
-              <a:rPr lang="en-US" sz="900" b="1" dirty="0">
-                <a:solidFill>
-                  <a:srgbClr val="B98A2E"/>
-                </a:solidFill>
-                <a:latin typeface="Arial" pitchFamily="34" charset="0"/>
-                <a:ea typeface="Arial" pitchFamily="34" charset="-122"/>
-                <a:cs typeface="Arial" pitchFamily="34" charset="-120"/>
-              </a:rPr>
-              <a:t>12</a:t>
-            </a:r>
-            <a:endParaRPr lang="en-US" sz="900" dirty="0"/>
-          </a:p>
-        </p:txBody>
-      </p:sp>
-    </p:spTree>
-  </p:cSld>
-  <p:clrMapOvr>
-    <a:masterClrMapping/>
-  </p:clrMapOvr>
-</p:sld>
-</file>
-
-<file path=ppt/slides/slide13.xml><?xml version="1.0" encoding="utf-8"?>
-<p:sld xmlns:a="http://schemas.openxmlformats.org/drawingml/2006/main" xmlns:r="http://schemas.openxmlformats.org/officeDocument/2006/relationships" xmlns:p="http://schemas.openxmlformats.org/presentationml/2006/main">
-  <p:cSld name="Slide 13">
-    <p:bg>
-      <p:bgPr>
-        <a:solidFill>
-          <a:srgbClr val="FFFFFF"/>
-        </a:solidFill>
-      </p:bgPr>
-    </p:bg>
-    <p:spTree>
-      <p:nvGrpSpPr>
-        <p:cNvPr id="1" name=""/>
-        <p:cNvGrpSpPr/>
-        <p:nvPr/>
-      </p:nvGrpSpPr>
-      <p:grpSpPr>
-        <a:xfrm>
-          <a:off x="0" y="0"/>
-          <a:ext cx="0" cy="0"/>
-          <a:chOff x="0" y="0"/>
-          <a:chExt cx="0" cy="0"/>
-        </a:xfrm>
-      </p:grpSpPr>
-      <p:sp>
-        <p:nvSpPr>
-          <p:cNvPr id="2" name="Shape 0"/>
-          <p:cNvSpPr/>
-          <p:nvPr/>
-        </p:nvSpPr>
-        <p:spPr>
-          <a:xfrm>
-            <a:off x="566928" y="457200"/>
-            <a:ext cx="384048" cy="384048"/>
-          </a:xfrm>
-          <a:prstGeom prst="ellipse">
-            <a:avLst/>
-          </a:prstGeom>
-          <a:solidFill>
-            <a:srgbClr val="B98A2E"/>
-          </a:solidFill>
-          <a:ln/>
-        </p:spPr>
-      </p:sp>
-      <p:sp>
-        <p:nvSpPr>
-          <p:cNvPr id="3" name="Text 1"/>
-          <p:cNvSpPr/>
-          <p:nvPr/>
-        </p:nvSpPr>
-        <p:spPr>
-          <a:xfrm>
-            <a:off x="566928" y="457200"/>
-            <a:ext cx="384048" cy="384048"/>
-          </a:xfrm>
-          <a:prstGeom prst="rect">
-            <a:avLst/>
-          </a:prstGeom>
-          <a:noFill/>
-          <a:ln/>
-        </p:spPr>
-        <p:txBody>
-          <a:bodyPr wrap="square" lIns="0" tIns="0" rIns="0" bIns="0" rtlCol="0" anchor="ctr"/>
-          <a:lstStyle/>
-          <a:p>
-            <a:pPr algn="ctr" indent="0" marL="0">
-              <a:buNone/>
-            </a:pPr>
-            <a:r>
-              <a:rPr lang="en-US" sz="1300" b="1" dirty="0">
-                <a:solidFill>
-                  <a:srgbClr val="FFFFFF"/>
-                </a:solidFill>
-                <a:latin typeface="Arial" pitchFamily="34" charset="0"/>
-                <a:ea typeface="Arial" pitchFamily="34" charset="-122"/>
-                <a:cs typeface="Arial" pitchFamily="34" charset="-120"/>
-              </a:rPr>
-              <a:t>13</a:t>
-            </a:r>
-            <a:endParaRPr lang="en-US" sz="1300" dirty="0"/>
-          </a:p>
-        </p:txBody>
-      </p:sp>
-      <p:sp>
-        <p:nvSpPr>
-          <p:cNvPr id="4" name="Text 2"/>
-          <p:cNvSpPr/>
-          <p:nvPr/>
-        </p:nvSpPr>
-        <p:spPr>
-          <a:xfrm>
-            <a:off x="1133856" y="457200"/>
-            <a:ext cx="10490911" cy="182880"/>
-          </a:xfrm>
-          <a:prstGeom prst="rect">
-            <a:avLst/>
-          </a:prstGeom>
-          <a:noFill/>
-          <a:ln/>
-        </p:spPr>
-        <p:txBody>
-          <a:bodyPr wrap="square" lIns="0" tIns="0" rIns="0" bIns="0" rtlCol="0" anchor="ctr"/>
-          <a:lstStyle/>
-          <a:p>
-            <a:pPr indent="0" marL="0">
-              <a:buNone/>
-            </a:pPr>
-            <a:r>
-              <a:rPr lang="en-US" sz="950" b="1" spc="200" kern="0" dirty="0">
-                <a:solidFill>
-                  <a:srgbClr val="B98A2E"/>
-                </a:solidFill>
-                <a:latin typeface="Arial" pitchFamily="34" charset="0"/>
-                <a:ea typeface="Arial" pitchFamily="34" charset="-122"/>
-                <a:cs typeface="Arial" pitchFamily="34" charset="-120"/>
-              </a:rPr>
-              <a:t>Risk</a:t>
-            </a:r>
-            <a:endParaRPr lang="en-US" sz="950" dirty="0"/>
-          </a:p>
-        </p:txBody>
-      </p:sp>
-      <p:sp>
-        <p:nvSpPr>
-          <p:cNvPr id="5" name="Text 3"/>
-          <p:cNvSpPr/>
-          <p:nvPr/>
-        </p:nvSpPr>
-        <p:spPr>
-          <a:xfrm>
-            <a:off x="1133856" y="640080"/>
-            <a:ext cx="10490911" cy="365760"/>
-          </a:xfrm>
-          <a:prstGeom prst="rect">
-            <a:avLst/>
-          </a:prstGeom>
-          <a:noFill/>
-          <a:ln/>
-        </p:spPr>
-        <p:txBody>
-          <a:bodyPr wrap="square" lIns="0" tIns="0" rIns="0" bIns="0" rtlCol="0" anchor="ctr"/>
-          <a:lstStyle/>
-          <a:p>
-            <a:pPr indent="0" marL="0">
-              <a:buNone/>
-            </a:pPr>
-            <a:r>
-              <a:rPr lang="en-US" sz="2300" b="1" dirty="0">
-                <a:solidFill>
-                  <a:srgbClr val="10161F"/>
-                </a:solidFill>
-                <a:latin typeface="Pretendard" pitchFamily="34" charset="0"/>
-                <a:ea typeface="Pretendard" pitchFamily="34" charset="-122"/>
-                <a:cs typeface="Pretendard" pitchFamily="34" charset="-120"/>
-              </a:rPr>
-              <a:t>리스크 점검</a:t>
-            </a:r>
-            <a:endParaRPr lang="en-US" sz="2300" dirty="0"/>
-          </a:p>
-        </p:txBody>
-      </p:sp>
-      <p:sp>
-        <p:nvSpPr>
-          <p:cNvPr id="6" name="Shape 4"/>
-          <p:cNvSpPr/>
-          <p:nvPr/>
-        </p:nvSpPr>
-        <p:spPr>
-          <a:xfrm>
-            <a:off x="566928" y="1417320"/>
-            <a:ext cx="5400904" cy="3657600"/>
-          </a:xfrm>
-          <a:prstGeom prst="roundRect">
-            <a:avLst>
-              <a:gd name="adj" fmla="val 1500"/>
-            </a:avLst>
-          </a:prstGeom>
-          <a:solidFill>
-            <a:srgbClr val="F7FAFC"/>
-          </a:solidFill>
-          <a:ln w="6350">
-            <a:solidFill>
-              <a:srgbClr val="CBD5E0"/>
-            </a:solidFill>
-            <a:prstDash val="solid"/>
-          </a:ln>
-        </p:spPr>
-      </p:sp>
-      <p:sp>
-        <p:nvSpPr>
-          <p:cNvPr id="7" name="Shape 5"/>
-          <p:cNvSpPr/>
-          <p:nvPr/>
-        </p:nvSpPr>
-        <p:spPr>
-          <a:xfrm>
-            <a:off x="566928" y="1417320"/>
-            <a:ext cx="5400904" cy="45720"/>
-          </a:xfrm>
-          <a:prstGeom prst="rect">
-            <a:avLst/>
-          </a:prstGeom>
-          <a:solidFill>
-            <a:srgbClr val="B98A2E"/>
-          </a:solidFill>
-          <a:ln/>
-        </p:spPr>
-      </p:sp>
-      <p:sp>
-        <p:nvSpPr>
-          <p:cNvPr id="8" name="Text 6"/>
-          <p:cNvSpPr/>
-          <p:nvPr/>
-        </p:nvSpPr>
-        <p:spPr>
-          <a:xfrm>
-            <a:off x="795528" y="1618488"/>
-            <a:ext cx="4943704" cy="292608"/>
-          </a:xfrm>
-          <a:prstGeom prst="rect">
-            <a:avLst/>
-          </a:prstGeom>
-          <a:noFill/>
-          <a:ln/>
-        </p:spPr>
-        <p:txBody>
-          <a:bodyPr wrap="square" lIns="0" tIns="0" rIns="0" bIns="0" rtlCol="0" anchor="ctr"/>
-          <a:lstStyle/>
-          <a:p>
-            <a:pPr indent="0" marL="0">
-              <a:buNone/>
-            </a:pPr>
-            <a:r>
-              <a:rPr lang="en-US" sz="1350" b="1" dirty="0">
-                <a:solidFill>
-                  <a:srgbClr val="977024"/>
-                </a:solidFill>
-                <a:latin typeface="Pretendard" pitchFamily="34" charset="0"/>
-                <a:ea typeface="Pretendard" pitchFamily="34" charset="-122"/>
-                <a:cs typeface="Pretendard" pitchFamily="34" charset="-120"/>
-              </a:rPr>
-              <a:t>메디컬 단일업종 집중</a:t>
-            </a:r>
-            <a:endParaRPr lang="en-US" sz="1350" dirty="0"/>
-          </a:p>
-        </p:txBody>
-      </p:sp>
-      <p:sp>
-        <p:nvSpPr>
-          <p:cNvPr id="9" name="Text 7"/>
-          <p:cNvSpPr/>
-          <p:nvPr/>
-        </p:nvSpPr>
-        <p:spPr>
-          <a:xfrm>
-            <a:off x="795528" y="1947672"/>
-            <a:ext cx="4943704" cy="365760"/>
-          </a:xfrm>
-          <a:prstGeom prst="rect">
-            <a:avLst/>
-          </a:prstGeom>
-          <a:noFill/>
-          <a:ln/>
-        </p:spPr>
-        <p:txBody>
-          <a:bodyPr wrap="square" lIns="0" tIns="0" rIns="0" bIns="0" rtlCol="0" anchor="ctr">
-            <a:normAutofit/>
-          </a:bodyPr>
-          <a:lstStyle/>
-          <a:p>
-            <a:pPr indent="0" marL="0">
-              <a:buNone/>
-            </a:pPr>
-            <a:r>
-              <a:rPr lang="en-US" sz="1250" b="1" dirty="0">
-                <a:solidFill>
-                  <a:srgbClr val="10161F"/>
-                </a:solidFill>
-                <a:latin typeface="Pretendard" pitchFamily="34" charset="0"/>
-                <a:ea typeface="Pretendard" pitchFamily="34" charset="-122"/>
-                <a:cs typeface="Pretendard" pitchFamily="34" charset="-120"/>
-              </a:rPr>
-              <a:t>전층 의료</a:t>
-            </a:r>
-            <a:endParaRPr lang="en-US" sz="1250" dirty="0"/>
-          </a:p>
-        </p:txBody>
-      </p:sp>
-      <p:sp>
-        <p:nvSpPr>
-          <p:cNvPr id="10" name="Text 8"/>
-          <p:cNvSpPr/>
-          <p:nvPr/>
-        </p:nvSpPr>
-        <p:spPr>
-          <a:xfrm>
-            <a:off x="795528" y="2377440"/>
-            <a:ext cx="4943704" cy="2606040"/>
-          </a:xfrm>
-          <a:prstGeom prst="rect">
-            <a:avLst/>
-          </a:prstGeom>
-          <a:noFill/>
-          <a:ln/>
-        </p:spPr>
-        <p:txBody>
-          <a:bodyPr wrap="square" lIns="0" tIns="0" rIns="0" bIns="0" rtlCol="0" anchor="t">
-            <a:normAutofit/>
-          </a:bodyPr>
-          <a:lstStyle/>
-          <a:p>
-            <a:pPr marL="342900" indent="-342900">
-              <a:lnSpc>
-                <a:spcPct val="125000"/>
-              </a:lnSpc>
-              <a:buSzPct val="100000"/>
-              <a:buChar char="•"/>
-            </a:pPr>
-            <a:r>
-              <a:rPr lang="en-US" sz="1100" dirty="0">
-                <a:solidFill>
-                  <a:srgbClr val="10161F"/>
-                </a:solidFill>
-                <a:latin typeface="Pretendard" pitchFamily="34" charset="0"/>
-                <a:ea typeface="Pretendard" pitchFamily="34" charset="-122"/>
-                <a:cs typeface="Pretendard" pitchFamily="34" charset="-120"/>
-              </a:rPr>
-              <a:t>업종 다각화 검토</a:t>
-            </a:r>
-            <a:endParaRPr lang="en-US" sz="1100" dirty="0"/>
-          </a:p>
-        </p:txBody>
-      </p:sp>
-      <p:sp>
-        <p:nvSpPr>
-          <p:cNvPr id="11" name="Shape 9"/>
-          <p:cNvSpPr/>
-          <p:nvPr/>
-        </p:nvSpPr>
-        <p:spPr>
-          <a:xfrm>
-            <a:off x="6223864" y="1417320"/>
-            <a:ext cx="5400904" cy="3657600"/>
-          </a:xfrm>
-          <a:prstGeom prst="roundRect">
-            <a:avLst>
-              <a:gd name="adj" fmla="val 1500"/>
-            </a:avLst>
-          </a:prstGeom>
-          <a:solidFill>
-            <a:srgbClr val="F7FAFC"/>
-          </a:solidFill>
-          <a:ln w="6350">
-            <a:solidFill>
-              <a:srgbClr val="CBD5E0"/>
-            </a:solidFill>
-            <a:prstDash val="solid"/>
-          </a:ln>
-        </p:spPr>
-      </p:sp>
-      <p:sp>
-        <p:nvSpPr>
-          <p:cNvPr id="12" name="Shape 10"/>
-          <p:cNvSpPr/>
-          <p:nvPr/>
-        </p:nvSpPr>
-        <p:spPr>
-          <a:xfrm>
-            <a:off x="6223864" y="1417320"/>
-            <a:ext cx="5400904" cy="45720"/>
-          </a:xfrm>
-          <a:prstGeom prst="rect">
-            <a:avLst/>
-          </a:prstGeom>
-          <a:solidFill>
-            <a:srgbClr val="B98A2E"/>
-          </a:solidFill>
-          <a:ln/>
-        </p:spPr>
-      </p:sp>
-      <p:sp>
-        <p:nvSpPr>
-          <p:cNvPr id="13" name="Text 11"/>
-          <p:cNvSpPr/>
-          <p:nvPr/>
-        </p:nvSpPr>
-        <p:spPr>
-          <a:xfrm>
-            <a:off x="6452464" y="1618488"/>
-            <a:ext cx="4943704" cy="292608"/>
-          </a:xfrm>
-          <a:prstGeom prst="rect">
-            <a:avLst/>
-          </a:prstGeom>
-          <a:noFill/>
-          <a:ln/>
-        </p:spPr>
-        <p:txBody>
-          <a:bodyPr wrap="square" lIns="0" tIns="0" rIns="0" bIns="0" rtlCol="0" anchor="ctr"/>
-          <a:lstStyle/>
-          <a:p>
-            <a:pPr indent="0" marL="0">
-              <a:buNone/>
-            </a:pPr>
-            <a:r>
-              <a:rPr lang="en-US" sz="1350" b="1" dirty="0">
-                <a:solidFill>
-                  <a:srgbClr val="977024"/>
-                </a:solidFill>
-                <a:latin typeface="Pretendard" pitchFamily="34" charset="0"/>
-                <a:ea typeface="Pretendard" pitchFamily="34" charset="-122"/>
-                <a:cs typeface="Pretendard" pitchFamily="34" charset="-120"/>
-              </a:rPr>
-              <a:t>금리 변동</a:t>
-            </a:r>
-            <a:endParaRPr lang="en-US" sz="1350" dirty="0"/>
-          </a:p>
-        </p:txBody>
-      </p:sp>
-      <p:sp>
-        <p:nvSpPr>
-          <p:cNvPr id="14" name="Text 12"/>
-          <p:cNvSpPr/>
-          <p:nvPr/>
-        </p:nvSpPr>
-        <p:spPr>
-          <a:xfrm>
-            <a:off x="6452464" y="1947672"/>
-            <a:ext cx="4943704" cy="365760"/>
-          </a:xfrm>
-          <a:prstGeom prst="rect">
-            <a:avLst/>
-          </a:prstGeom>
-          <a:noFill/>
-          <a:ln/>
-        </p:spPr>
-        <p:txBody>
-          <a:bodyPr wrap="square" lIns="0" tIns="0" rIns="0" bIns="0" rtlCol="0" anchor="ctr">
-            <a:normAutofit/>
-          </a:bodyPr>
-          <a:lstStyle/>
-          <a:p>
-            <a:pPr indent="0" marL="0">
-              <a:buNone/>
-            </a:pPr>
-            <a:r>
-              <a:rPr lang="en-US" sz="1250" b="1" dirty="0">
-                <a:solidFill>
-                  <a:srgbClr val="10161F"/>
-                </a:solidFill>
-                <a:latin typeface="Pretendard" pitchFamily="34" charset="0"/>
-                <a:ea typeface="Pretendard" pitchFamily="34" charset="-122"/>
-                <a:cs typeface="Pretendard" pitchFamily="34" charset="-120"/>
-              </a:rPr>
-              <a:t>4.1% 고정</a:t>
-            </a:r>
-            <a:endParaRPr lang="en-US" sz="1250" dirty="0"/>
-          </a:p>
-        </p:txBody>
-      </p:sp>
-      <p:sp>
-        <p:nvSpPr>
-          <p:cNvPr id="15" name="Text 13"/>
-          <p:cNvSpPr/>
-          <p:nvPr/>
-        </p:nvSpPr>
-        <p:spPr>
-          <a:xfrm>
-            <a:off x="6452464" y="2377440"/>
-            <a:ext cx="4943704" cy="2606040"/>
-          </a:xfrm>
-          <a:prstGeom prst="rect">
-            <a:avLst/>
-          </a:prstGeom>
-          <a:noFill/>
-          <a:ln/>
-        </p:spPr>
-        <p:txBody>
-          <a:bodyPr wrap="square" lIns="0" tIns="0" rIns="0" bIns="0" rtlCol="0" anchor="t">
-            <a:normAutofit/>
-          </a:bodyPr>
-          <a:lstStyle/>
-          <a:p>
-            <a:pPr marL="342900" indent="-342900">
-              <a:lnSpc>
-                <a:spcPct val="125000"/>
-              </a:lnSpc>
-              <a:buSzPct val="100000"/>
-              <a:buChar char="•"/>
-            </a:pPr>
-            <a:r>
-              <a:rPr lang="en-US" sz="1100" dirty="0">
-                <a:solidFill>
-                  <a:srgbClr val="10161F"/>
-                </a:solidFill>
-                <a:latin typeface="Pretendard" pitchFamily="34" charset="0"/>
-                <a:ea typeface="Pretendard" pitchFamily="34" charset="-122"/>
-                <a:cs typeface="Pretendard" pitchFamily="34" charset="-120"/>
-              </a:rPr>
-              <a:t>승계 대출 활용</a:t>
-            </a:r>
-            <a:endParaRPr lang="en-US" sz="1100" dirty="0"/>
-          </a:p>
-        </p:txBody>
-      </p:sp>
-      <p:sp>
-        <p:nvSpPr>
-          <p:cNvPr id="16" name="Shape 14"/>
-          <p:cNvSpPr/>
-          <p:nvPr/>
-        </p:nvSpPr>
-        <p:spPr>
-          <a:xfrm>
-            <a:off x="566928" y="5193792"/>
-            <a:ext cx="11057839" cy="621792"/>
-          </a:xfrm>
-          <a:prstGeom prst="roundRect">
-            <a:avLst>
-              <a:gd name="adj" fmla="val 8824"/>
-            </a:avLst>
-          </a:prstGeom>
-          <a:solidFill>
-            <a:srgbClr val="F7FAFC"/>
-          </a:solidFill>
-          <a:ln w="6350">
-            <a:solidFill>
-              <a:srgbClr val="CBD5E0"/>
-            </a:solidFill>
-            <a:prstDash val="solid"/>
-          </a:ln>
-        </p:spPr>
-      </p:sp>
-      <p:sp>
-        <p:nvSpPr>
-          <p:cNvPr id="17" name="Text 15"/>
-          <p:cNvSpPr/>
-          <p:nvPr/>
-        </p:nvSpPr>
-        <p:spPr>
-          <a:xfrm>
-            <a:off x="795528" y="5193792"/>
-            <a:ext cx="10600639" cy="621792"/>
-          </a:xfrm>
-          <a:prstGeom prst="rect">
-            <a:avLst/>
-          </a:prstGeom>
-          <a:noFill/>
-          <a:ln/>
-        </p:spPr>
-        <p:txBody>
-          <a:bodyPr wrap="square" lIns="0" tIns="0" rIns="0" bIns="0" rtlCol="0" anchor="ctr"/>
-          <a:lstStyle/>
-          <a:p>
-            <a:pPr indent="0" marL="0">
-              <a:buNone/>
-            </a:pPr>
-            <a:r>
-              <a:rPr lang="en-US" sz="1100" dirty="0">
-                <a:solidFill>
-                  <a:srgbClr val="10161F"/>
-                </a:solidFill>
-                <a:latin typeface="Pretendard" pitchFamily="34" charset="0"/>
-                <a:ea typeface="Pretendard" pitchFamily="34" charset="-122"/>
-                <a:cs typeface="Pretendard" pitchFamily="34" charset="-120"/>
-              </a:rPr>
-              <a:t>※ 본 리스크 체크는 공부 및 브로커 확인 기반이며, 매수 전 전문 실사팀(변호사/건축사)을 통한 정밀 실사가 필요합니다.</a:t>
-            </a:r>
-            <a:endParaRPr lang="en-US" sz="1100" dirty="0"/>
-          </a:p>
-        </p:txBody>
-      </p:sp>
-      <p:sp>
-        <p:nvSpPr>
-          <p:cNvPr id="18" name="Text 16"/>
-          <p:cNvSpPr/>
-          <p:nvPr/>
-        </p:nvSpPr>
-        <p:spPr>
-          <a:xfrm>
-            <a:off x="566928" y="6382512"/>
-            <a:ext cx="7315200" cy="219456"/>
-          </a:xfrm>
-          <a:prstGeom prst="rect">
-            <a:avLst/>
-          </a:prstGeom>
-          <a:noFill/>
-          <a:ln/>
-        </p:spPr>
-        <p:txBody>
-          <a:bodyPr wrap="square" lIns="0" tIns="0" rIns="0" bIns="0" rtlCol="0" anchor="ctr"/>
-          <a:lstStyle/>
-          <a:p>
-            <a:pPr indent="0" marL="0">
-              <a:buNone/>
-            </a:pPr>
-            <a:r>
-              <a:rPr lang="en-US" sz="800" dirty="0">
-                <a:solidFill>
-                  <a:srgbClr val="718096"/>
-                </a:solidFill>
-                <a:latin typeface="Pretendard" pitchFamily="34" charset="0"/>
-                <a:ea typeface="Pretendard" pitchFamily="34" charset="-122"/>
-                <a:cs typeface="Pretendard" pitchFamily="34" charset="-120"/>
-              </a:rPr>
-              <a:t>크리딜   |   </a:t>
-            </a:r>
-            <a:endParaRPr lang="en-US" sz="800" dirty="0"/>
-          </a:p>
-        </p:txBody>
-      </p:sp>
-      <p:sp>
-        <p:nvSpPr>
-          <p:cNvPr id="19" name="Text 17"/>
-          <p:cNvSpPr/>
-          <p:nvPr/>
-        </p:nvSpPr>
-        <p:spPr>
-          <a:xfrm>
-            <a:off x="10710367" y="6382512"/>
-            <a:ext cx="914400" cy="219456"/>
-          </a:xfrm>
-          <a:prstGeom prst="rect">
-            <a:avLst/>
-          </a:prstGeom>
-          <a:noFill/>
-          <a:ln/>
-        </p:spPr>
-        <p:txBody>
-          <a:bodyPr wrap="square" lIns="0" tIns="0" rIns="0" bIns="0" rtlCol="0" anchor="ctr"/>
-          <a:lstStyle/>
-          <a:p>
-            <a:pPr algn="r" indent="0" marL="0">
-              <a:buNone/>
-            </a:pPr>
-            <a:r>
-              <a:rPr lang="en-US" sz="900" b="1" dirty="0">
-                <a:solidFill>
-                  <a:srgbClr val="B98A2E"/>
-                </a:solidFill>
-                <a:latin typeface="Arial" pitchFamily="34" charset="0"/>
-                <a:ea typeface="Arial" pitchFamily="34" charset="-122"/>
-                <a:cs typeface="Arial" pitchFamily="34" charset="-120"/>
-              </a:rPr>
-              <a:t>13</a:t>
-            </a:r>
-            <a:endParaRPr lang="en-US" sz="900" dirty="0"/>
-          </a:p>
-        </p:txBody>
-      </p:sp>
-    </p:spTree>
-  </p:cSld>
-  <p:clrMapOvr>
-    <a:masterClrMapping/>
-  </p:clrMapOvr>
-</p:sld>
-</file>
-
-<file path=ppt/slides/slide14.xml><?xml version="1.0" encoding="utf-8"?>
-<p:sld xmlns:a="http://schemas.openxmlformats.org/drawingml/2006/main" xmlns:r="http://schemas.openxmlformats.org/officeDocument/2006/relationships" xmlns:p="http://schemas.openxmlformats.org/presentationml/2006/main">
-  <p:cSld name="Slide 14">
-    <p:bg>
-      <p:bgPr>
-        <a:solidFill>
-          <a:srgbClr val="FFFFFF"/>
-        </a:solidFill>
-      </p:bgPr>
-    </p:bg>
-    <p:spTree>
-      <p:nvGrpSpPr>
-        <p:cNvPr id="1" name=""/>
-        <p:cNvGrpSpPr/>
-        <p:nvPr/>
-      </p:nvGrpSpPr>
-      <p:grpSpPr>
-        <a:xfrm>
-          <a:off x="0" y="0"/>
-          <a:ext cx="0" cy="0"/>
-          <a:chOff x="0" y="0"/>
-          <a:chExt cx="0" cy="0"/>
-        </a:xfrm>
-      </p:grpSpPr>
-      <p:sp>
-        <p:nvSpPr>
-          <p:cNvPr id="2" name="Shape 0"/>
-          <p:cNvSpPr/>
-          <p:nvPr/>
-        </p:nvSpPr>
-        <p:spPr>
-          <a:xfrm>
-            <a:off x="566928" y="457200"/>
-            <a:ext cx="384048" cy="384048"/>
-          </a:xfrm>
-          <a:prstGeom prst="ellipse">
-            <a:avLst/>
-          </a:prstGeom>
-          <a:solidFill>
-            <a:srgbClr val="B98A2E"/>
-          </a:solidFill>
-          <a:ln/>
-        </p:spPr>
-      </p:sp>
-      <p:sp>
-        <p:nvSpPr>
-          <p:cNvPr id="3" name="Text 1"/>
-          <p:cNvSpPr/>
-          <p:nvPr/>
-        </p:nvSpPr>
-        <p:spPr>
-          <a:xfrm>
-            <a:off x="566928" y="457200"/>
-            <a:ext cx="384048" cy="384048"/>
-          </a:xfrm>
-          <a:prstGeom prst="rect">
-            <a:avLst/>
-          </a:prstGeom>
-          <a:noFill/>
-          <a:ln/>
-        </p:spPr>
-        <p:txBody>
-          <a:bodyPr wrap="square" lIns="0" tIns="0" rIns="0" bIns="0" rtlCol="0" anchor="ctr"/>
-          <a:lstStyle/>
-          <a:p>
-            <a:pPr algn="ctr" indent="0" marL="0">
-              <a:buNone/>
-            </a:pPr>
-            <a:r>
-              <a:rPr lang="en-US" sz="1300" b="1" dirty="0">
-                <a:solidFill>
-                  <a:srgbClr val="FFFFFF"/>
-                </a:solidFill>
-                <a:latin typeface="Arial" pitchFamily="34" charset="0"/>
-                <a:ea typeface="Arial" pitchFamily="34" charset="-122"/>
-                <a:cs typeface="Arial" pitchFamily="34" charset="-120"/>
-              </a:rPr>
-              <a:t>14</a:t>
-            </a:r>
-            <a:endParaRPr lang="en-US" sz="1300" dirty="0"/>
-          </a:p>
-        </p:txBody>
-      </p:sp>
-      <p:sp>
-        <p:nvSpPr>
-          <p:cNvPr id="4" name="Text 2"/>
-          <p:cNvSpPr/>
-          <p:nvPr/>
-        </p:nvSpPr>
-        <p:spPr>
-          <a:xfrm>
-            <a:off x="1133856" y="457200"/>
-            <a:ext cx="10490911" cy="182880"/>
-          </a:xfrm>
-          <a:prstGeom prst="rect">
-            <a:avLst/>
-          </a:prstGeom>
-          <a:noFill/>
-          <a:ln/>
-        </p:spPr>
-        <p:txBody>
-          <a:bodyPr wrap="square" lIns="0" tIns="0" rIns="0" bIns="0" rtlCol="0" anchor="ctr"/>
-          <a:lstStyle/>
-          <a:p>
-            <a:pPr indent="0" marL="0">
-              <a:buNone/>
-            </a:pPr>
-            <a:r>
-              <a:rPr lang="en-US" sz="950" b="1" spc="200" kern="0" dirty="0">
-                <a:solidFill>
-                  <a:srgbClr val="B98A2E"/>
-                </a:solidFill>
-                <a:latin typeface="Arial" pitchFamily="34" charset="0"/>
-                <a:ea typeface="Arial" pitchFamily="34" charset="-122"/>
-                <a:cs typeface="Arial" pitchFamily="34" charset="-120"/>
-              </a:rPr>
-              <a:t>Process</a:t>
-            </a:r>
-            <a:endParaRPr lang="en-US" sz="950" dirty="0"/>
-          </a:p>
-        </p:txBody>
-      </p:sp>
-      <p:sp>
-        <p:nvSpPr>
-          <p:cNvPr id="5" name="Text 3"/>
-          <p:cNvSpPr/>
-          <p:nvPr/>
-        </p:nvSpPr>
-        <p:spPr>
-          <a:xfrm>
-            <a:off x="1133856" y="640080"/>
-            <a:ext cx="10490911" cy="365760"/>
-          </a:xfrm>
-          <a:prstGeom prst="rect">
-            <a:avLst/>
-          </a:prstGeom>
-          <a:noFill/>
-          <a:ln/>
-        </p:spPr>
-        <p:txBody>
-          <a:bodyPr wrap="square" lIns="0" tIns="0" rIns="0" bIns="0" rtlCol="0" anchor="ctr"/>
-          <a:lstStyle/>
-          <a:p>
-            <a:pPr indent="0" marL="0">
-              <a:buNone/>
-            </a:pPr>
-            <a:r>
-              <a:rPr lang="en-US" sz="2300" b="1" dirty="0">
-                <a:solidFill>
-                  <a:srgbClr val="10161F"/>
-                </a:solidFill>
-                <a:latin typeface="Pretendard" pitchFamily="34" charset="0"/>
-                <a:ea typeface="Pretendard" pitchFamily="34" charset="-122"/>
-                <a:cs typeface="Pretendard" pitchFamily="34" charset="-120"/>
-              </a:rPr>
-              <a:t>다음 단계</a:t>
-            </a:r>
-            <a:endParaRPr lang="en-US" sz="2300" dirty="0"/>
-          </a:p>
-        </p:txBody>
-      </p:sp>
-      <p:sp>
-        <p:nvSpPr>
-          <p:cNvPr id="6" name="Shape 4"/>
-          <p:cNvSpPr/>
-          <p:nvPr/>
-        </p:nvSpPr>
-        <p:spPr>
-          <a:xfrm>
-            <a:off x="566928" y="1572768"/>
-            <a:ext cx="11057839" cy="3200400"/>
-          </a:xfrm>
-          <a:prstGeom prst="roundRect">
-            <a:avLst>
-              <a:gd name="adj" fmla="val 1714"/>
-            </a:avLst>
-          </a:prstGeom>
-          <a:solidFill>
-            <a:srgbClr val="F7FAFC"/>
-          </a:solidFill>
-          <a:ln w="6350">
-            <a:solidFill>
-              <a:srgbClr val="CBD5E0"/>
-            </a:solidFill>
-            <a:prstDash val="solid"/>
-          </a:ln>
-        </p:spPr>
-      </p:sp>
-      <p:sp>
-        <p:nvSpPr>
-          <p:cNvPr id="7" name="Shape 5"/>
-          <p:cNvSpPr/>
-          <p:nvPr/>
-        </p:nvSpPr>
-        <p:spPr>
-          <a:xfrm>
-            <a:off x="786384" y="1792224"/>
-            <a:ext cx="384048" cy="384048"/>
-          </a:xfrm>
-          <a:prstGeom prst="ellipse">
-            <a:avLst/>
-          </a:prstGeom>
-          <a:solidFill>
-            <a:srgbClr val="B98A2E"/>
-          </a:solidFill>
-          <a:ln/>
-        </p:spPr>
-      </p:sp>
-      <p:sp>
-        <p:nvSpPr>
-          <p:cNvPr id="8" name="Text 6"/>
-          <p:cNvSpPr/>
-          <p:nvPr/>
-        </p:nvSpPr>
-        <p:spPr>
-          <a:xfrm>
-            <a:off x="786384" y="1792224"/>
-            <a:ext cx="384048" cy="384048"/>
-          </a:xfrm>
-          <a:prstGeom prst="rect">
-            <a:avLst/>
-          </a:prstGeom>
-          <a:noFill/>
-          <a:ln/>
-        </p:spPr>
-        <p:txBody>
-          <a:bodyPr wrap="square" lIns="0" tIns="0" rIns="0" bIns="0" rtlCol="0" anchor="ctr"/>
-          <a:lstStyle/>
-          <a:p>
-            <a:pPr algn="ctr" indent="0" marL="0">
-              <a:buNone/>
-            </a:pPr>
-            <a:r>
-              <a:rPr lang="en-US" sz="1300" b="1" dirty="0">
-                <a:solidFill>
-                  <a:srgbClr val="FFFFFF"/>
-                </a:solidFill>
-                <a:latin typeface="Arial" pitchFamily="34" charset="0"/>
-                <a:ea typeface="Arial" pitchFamily="34" charset="-122"/>
-                <a:cs typeface="Arial" pitchFamily="34" charset="-120"/>
-              </a:rPr>
-              <a:t>STEP 1</a:t>
-            </a:r>
-            <a:endParaRPr lang="en-US" sz="1300" dirty="0"/>
-          </a:p>
-        </p:txBody>
-      </p:sp>
-      <p:sp>
-        <p:nvSpPr>
-          <p:cNvPr id="9" name="Text 7"/>
-          <p:cNvSpPr/>
-          <p:nvPr/>
-        </p:nvSpPr>
-        <p:spPr>
-          <a:xfrm>
-            <a:off x="786384" y="2304288"/>
-            <a:ext cx="10618927" cy="365760"/>
-          </a:xfrm>
-          <a:prstGeom prst="rect">
-            <a:avLst/>
-          </a:prstGeom>
-          <a:noFill/>
-          <a:ln/>
-        </p:spPr>
-        <p:txBody>
-          <a:bodyPr wrap="square" rtlCol="0" anchor="ctr"/>
-          <a:lstStyle/>
-          <a:p>
-            <a:pPr indent="0" marL="0">
-              <a:buNone/>
-            </a:pPr>
-            <a:r>
-              <a:rPr lang="en-US" sz="1600" b="1" dirty="0">
-                <a:solidFill>
-                  <a:srgbClr val="10161F"/>
-                </a:solidFill>
-                <a:latin typeface="Pretendard" pitchFamily="34" charset="0"/>
-                <a:ea typeface="Pretendard" pitchFamily="34" charset="-122"/>
-                <a:cs typeface="Pretendard" pitchFamily="34" charset="-120"/>
-              </a:rPr>
-              <a:t>현장 실사 및 임대차계약서 원본 확인을 권장합니다.</a:t>
-            </a:r>
-            <a:endParaRPr lang="en-US" sz="1600" dirty="0"/>
-          </a:p>
-        </p:txBody>
-      </p:sp>
-      <p:sp>
-        <p:nvSpPr>
-          <p:cNvPr id="10" name="Text 8"/>
-          <p:cNvSpPr/>
-          <p:nvPr/>
-        </p:nvSpPr>
-        <p:spPr>
-          <a:xfrm>
-            <a:off x="786384" y="2761488"/>
-            <a:ext cx="10618927" cy="1828800"/>
-          </a:xfrm>
-          <a:prstGeom prst="rect">
-            <a:avLst/>
-          </a:prstGeom>
-          <a:noFill/>
-          <a:ln/>
-        </p:spPr>
-        <p:txBody>
-          <a:bodyPr wrap="square" rtlCol="0" anchor="t"/>
-          <a:lstStyle/>
-          <a:p>
-            <a:pPr indent="0" marL="0">
-              <a:buNone/>
-            </a:pPr>
-            <a:r>
-              <a:rPr lang="en-US" sz="1100" dirty="0">
-                <a:solidFill>
-                  <a:srgbClr val="10161F"/>
-                </a:solidFill>
-                <a:latin typeface="Pretendard" pitchFamily="34" charset="0"/>
-                <a:ea typeface="Pretendard" pitchFamily="34" charset="-122"/>
-                <a:cs typeface="Pretendard" pitchFamily="34" charset="-120"/>
-              </a:rPr>
-              <a:t>현장 실사 및 임대차계약서 원본 확인을 권장합니다.</a:t>
-            </a:r>
-            <a:endParaRPr lang="en-US" sz="1100" dirty="0"/>
-          </a:p>
-        </p:txBody>
-      </p:sp>
-      <p:sp>
-        <p:nvSpPr>
-          <p:cNvPr id="11" name="Text 9"/>
-          <p:cNvSpPr/>
-          <p:nvPr/>
-        </p:nvSpPr>
-        <p:spPr>
-          <a:xfrm>
-            <a:off x="566928" y="6382512"/>
-            <a:ext cx="7315200" cy="219456"/>
-          </a:xfrm>
-          <a:prstGeom prst="rect">
-            <a:avLst/>
-          </a:prstGeom>
-          <a:noFill/>
-          <a:ln/>
-        </p:spPr>
-        <p:txBody>
-          <a:bodyPr wrap="square" lIns="0" tIns="0" rIns="0" bIns="0" rtlCol="0" anchor="ctr"/>
-          <a:lstStyle/>
-          <a:p>
-            <a:pPr indent="0" marL="0">
-              <a:buNone/>
-            </a:pPr>
-            <a:r>
-              <a:rPr lang="en-US" sz="800" dirty="0">
-                <a:solidFill>
-                  <a:srgbClr val="718096"/>
-                </a:solidFill>
-                <a:latin typeface="Pretendard" pitchFamily="34" charset="0"/>
-                <a:ea typeface="Pretendard" pitchFamily="34" charset="-122"/>
-                <a:cs typeface="Pretendard" pitchFamily="34" charset="-120"/>
-              </a:rPr>
-              <a:t>크리딜   |   </a:t>
-            </a:r>
-            <a:endParaRPr lang="en-US" sz="800" dirty="0"/>
-          </a:p>
-        </p:txBody>
-      </p:sp>
-      <p:sp>
-        <p:nvSpPr>
-          <p:cNvPr id="12" name="Text 10"/>
-          <p:cNvSpPr/>
-          <p:nvPr/>
-        </p:nvSpPr>
-        <p:spPr>
-          <a:xfrm>
-            <a:off x="10710367" y="6382512"/>
-            <a:ext cx="914400" cy="219456"/>
-          </a:xfrm>
-          <a:prstGeom prst="rect">
-            <a:avLst/>
-          </a:prstGeom>
-          <a:noFill/>
-          <a:ln/>
-        </p:spPr>
-        <p:txBody>
-          <a:bodyPr wrap="square" lIns="0" tIns="0" rIns="0" bIns="0" rtlCol="0" anchor="ctr"/>
-          <a:lstStyle/>
-          <a:p>
-            <a:pPr algn="r" indent="0" marL="0">
-              <a:buNone/>
-            </a:pPr>
-            <a:r>
-              <a:rPr lang="en-US" sz="900" b="1" dirty="0">
-                <a:solidFill>
-                  <a:srgbClr val="B98A2E"/>
-                </a:solidFill>
-                <a:latin typeface="Arial" pitchFamily="34" charset="0"/>
-                <a:ea typeface="Arial" pitchFamily="34" charset="-122"/>
-                <a:cs typeface="Arial" pitchFamily="34" charset="-120"/>
-              </a:rPr>
-              <a:t>14</a:t>
-            </a:r>
-            <a:endParaRPr lang="en-US" sz="900" dirty="0"/>
-          </a:p>
-        </p:txBody>
-      </p:sp>
-    </p:spTree>
-  </p:cSld>
-  <p:clrMapOvr>
-    <a:masterClrMapping/>
-  </p:clrMapOvr>
-</p:sld>
-</file>
-
-<file path=ppt/slides/slide15.xml><?xml version="1.0" encoding="utf-8"?>
-<p:sld xmlns:a="http://schemas.openxmlformats.org/drawingml/2006/main" xmlns:r="http://schemas.openxmlformats.org/officeDocument/2006/relationships" xmlns:p="http://schemas.openxmlformats.org/presentationml/2006/main">
-  <p:cSld name="Slide 15">
-    <p:bg>
-      <p:bgPr>
-        <a:solidFill>
           <a:srgbClr val="10161F"/>
         </a:solidFill>
       </p:bgPr>
@@ -5089,7 +2368,7 @@
                 <a:ea typeface="Arial" pitchFamily="34" charset="-122"/>
                 <a:cs typeface="Arial" pitchFamily="34" charset="-120"/>
               </a:rPr>
-              <a:t>15</a:t>
+              <a:t>10</a:t>
             </a:r>
             <a:endParaRPr lang="en-US" sz="1300" dirty="0"/>
           </a:p>
@@ -5128,7 +2407,7 @@
                 <a:ea typeface="Arial" pitchFamily="34" charset="-122"/>
                 <a:cs typeface="Arial" pitchFamily="34" charset="-120"/>
               </a:rPr>
-              <a:t>Closing</a:t>
+              <a:t>Disclaimer</a:t>
             </a:r>
             <a:endParaRPr lang="en-US" sz="950" dirty="0"/>
           </a:p>
@@ -6501,7 +3780,7 @@
                 <a:ea typeface="Arial" pitchFamily="34" charset="-122"/>
                 <a:cs typeface="Arial" pitchFamily="34" charset="-120"/>
               </a:rPr>
-              <a:t>15</a:t>
+              <a:t>10</a:t>
             </a:r>
             <a:endParaRPr lang="en-US" sz="900" dirty="0"/>
           </a:p>
@@ -7331,7 +4610,7 @@
                 <a:ea typeface="Pretendard" pitchFamily="34" charset="-122"/>
                 <a:cs typeface="Pretendard" pitchFamily="34" charset="-120"/>
               </a:rPr>
-              <a:t>원금 안전판: 핵심권역 핵심 입지 및 우량 대지 지분 가치로 하방 경직성 확보</a:t>
+              <a:t>입지 분석: 핵심권역 소재 자산의 입지 특성 및 대지 지분 가치 확인 필요</a:t>
             </a:r>
             <a:endParaRPr lang="en-US" sz="1150" dirty="0"/>
           </a:p>
@@ -7463,7 +4742,7 @@
                 <a:ea typeface="Pretendard" pitchFamily="34" charset="-122"/>
                 <a:cs typeface="Pretendard" pitchFamily="34" charset="-120"/>
               </a:rPr>
-              <a:t>수익 안정성: 매매 시장 적정가 수준 대비 안정적 월 임대수익 창출 기반</a:t>
+              <a:t>수익 구조: 매매 시장 적정가 수준 대비 임대수익 현황 분석 필요</a:t>
             </a:r>
             <a:endParaRPr lang="en-US" sz="1150" dirty="0"/>
           </a:p>
@@ -7595,7 +4874,7 @@
                 <a:ea typeface="Pretendard" pitchFamily="34" charset="-122"/>
                 <a:cs typeface="Pretendard" pitchFamily="34" charset="-120"/>
               </a:rPr>
-              <a:t>미래 가치: 향후 권역 지가 상승 및 공법상 밸류업을 통한 자본이득 실현 가능</a:t>
+              <a:t>향후 검토: 권역 개발 동향 및 공법상 변경 가능성 확인 필요</a:t>
             </a:r>
             <a:endParaRPr lang="en-US" sz="1150" dirty="0"/>
           </a:p>
@@ -8197,7 +5476,7 @@
                 <a:ea typeface="Arial" pitchFamily="34" charset="-122"/>
                 <a:cs typeface="Arial" pitchFamily="34" charset="-120"/>
               </a:rPr>
-              <a:t>Land</a:t>
+              <a:t>Building</a:t>
             </a:r>
             <a:endParaRPr lang="en-US" sz="950" dirty="0"/>
           </a:p>
@@ -8236,7 +5515,7 @@
                 <a:ea typeface="Pretendard" pitchFamily="34" charset="-122"/>
                 <a:cs typeface="Pretendard" pitchFamily="34" charset="-120"/>
               </a:rPr>
-              <a:t>토지</a:t>
+              <a:t>물건 개요</a:t>
             </a:r>
             <a:endParaRPr lang="en-US" sz="2300" dirty="0"/>
           </a:p>
@@ -8275,7 +5554,7 @@
                 <a:ea typeface="Pretendard" pitchFamily="34" charset="-122"/>
                 <a:cs typeface="Pretendard" pitchFamily="34" charset="-120"/>
               </a:rPr>
-              <a:t>토지 현황</a:t>
+              <a:t>건축물 개요 및 물리 스펙</a:t>
             </a:r>
             <a:endParaRPr lang="en-US" sz="1100" dirty="0"/>
           </a:p>
@@ -8480,6 +5759,113 @@
         </p:nvSpPr>
         <p:spPr>
           <a:xfrm>
+            <a:off x="566928" y="2450592"/>
+            <a:ext cx="6858000" cy="0"/>
+          </a:xfrm>
+          <a:prstGeom prst="line">
+            <a:avLst/>
+          </a:prstGeom>
+          <a:noFill/>
+          <a:ln w="3810">
+            <a:solidFill>
+              <a:srgbClr val="CBD5E0"/>
+            </a:solidFill>
+            <a:prstDash val="solid"/>
+          </a:ln>
+        </p:spPr>
+      </p:sp>
+      <p:sp>
+        <p:nvSpPr>
+          <p:cNvPr id="13" name="Text 11"/>
+          <p:cNvSpPr/>
+          <p:nvPr/>
+        </p:nvSpPr>
+        <p:spPr>
+          <a:xfrm>
+            <a:off x="566928" y="2450592"/>
+            <a:ext cx="2606040" cy="402336"/>
+          </a:xfrm>
+          <a:prstGeom prst="rect">
+            <a:avLst/>
+          </a:prstGeom>
+          <a:noFill/>
+          <a:ln/>
+        </p:spPr>
+        <p:txBody>
+          <a:bodyPr wrap="square" lIns="0" tIns="0" rIns="0" bIns="0" rtlCol="0" anchor="ctr"/>
+          <a:lstStyle/>
+          <a:p>
+            <a:pPr indent="0" marL="0">
+              <a:lnSpc>
+                <a:spcPct val="120000"/>
+              </a:lnSpc>
+              <a:buNone/>
+            </a:pPr>
+            <a:r>
+              <a:rPr lang="en-US" sz="1400" dirty="0">
+                <a:solidFill>
+                  <a:srgbClr val="718096"/>
+                </a:solidFill>
+                <a:latin typeface="Pretendard" pitchFamily="34" charset="0"/>
+                <a:ea typeface="Pretendard" pitchFamily="34" charset="-122"/>
+                <a:cs typeface="Pretendard" pitchFamily="34" charset="-120"/>
+              </a:rPr>
+              <a:t>준공</a:t>
+            </a:r>
+            <a:endParaRPr lang="en-US" sz="1400" dirty="0"/>
+          </a:p>
+        </p:txBody>
+      </p:sp>
+      <p:sp>
+        <p:nvSpPr>
+          <p:cNvPr id="14" name="Text 12"/>
+          <p:cNvSpPr/>
+          <p:nvPr/>
+        </p:nvSpPr>
+        <p:spPr>
+          <a:xfrm>
+            <a:off x="3172968" y="2450592"/>
+            <a:ext cx="4251960" cy="402336"/>
+          </a:xfrm>
+          <a:prstGeom prst="rect">
+            <a:avLst/>
+          </a:prstGeom>
+          <a:noFill/>
+          <a:ln/>
+        </p:spPr>
+        <p:txBody>
+          <a:bodyPr wrap="square" lIns="0" tIns="0" rIns="0" bIns="0" rtlCol="0" anchor="ctr"/>
+          <a:lstStyle/>
+          <a:p>
+            <a:pPr indent="0" marL="0">
+              <a:lnSpc>
+                <a:spcPct val="120000"/>
+              </a:lnSpc>
+              <a:buNone/>
+            </a:pPr>
+            <a:r>
+              <a:rPr lang="en-US" sz="1400" b="1" dirty="0">
+                <a:solidFill>
+                  <a:srgbClr val="10161F"/>
+                </a:solidFill>
+                <a:latin typeface="Pretendard" pitchFamily="34" charset="0"/>
+                <a:ea typeface="Pretendard" pitchFamily="34" charset="-122"/>
+                <a:cs typeface="Pretendard" pitchFamily="34" charset="-120"/>
+              </a:rPr>
+              <a:t>2017년</a:t>
+            </a:r>
+            <a:endParaRPr lang="en-US" sz="1400" dirty="0"/>
+          </a:p>
+        </p:txBody>
+      </p:sp>
+      <p:sp>
+        <p:nvSpPr>
+          <p:cNvPr id="15" name="Shape 13"/>
+          <p:cNvSpPr/>
+          <p:nvPr/>
+        </p:nvSpPr>
+        <p:spPr>
+          <a:xfrm>
             <a:off x="7604608" y="1371600"/>
             <a:ext cx="0" cy="4754880"/>
           </a:xfrm>
@@ -8497,49 +5883,49 @@
       </p:sp>
       <p:sp>
         <p:nvSpPr>
-          <p:cNvPr id="13" name="Shape 11"/>
+          <p:cNvPr id="16" name="Shape 14"/>
           <p:cNvSpPr/>
           <p:nvPr/>
         </p:nvSpPr>
         <p:spPr>
           <a:xfrm>
             <a:off x="7784287" y="1645920"/>
-            <a:ext cx="3840480" cy="2103120"/>
+            <a:ext cx="3840480" cy="1645920"/>
           </a:xfrm>
           <a:prstGeom prst="roundRect">
             <a:avLst>
-              <a:gd name="adj" fmla="val 2609"/>
+              <a:gd name="adj" fmla="val 3333"/>
             </a:avLst>
           </a:prstGeom>
           <a:solidFill>
-            <a:srgbClr val="BEE3F8"/>
+            <a:srgbClr val="F3EBDA"/>
           </a:solidFill>
           <a:ln/>
         </p:spPr>
       </p:sp>
       <p:sp>
         <p:nvSpPr>
-          <p:cNvPr id="14" name="Shape 12"/>
+          <p:cNvPr id="17" name="Shape 15"/>
           <p:cNvSpPr/>
           <p:nvPr/>
         </p:nvSpPr>
         <p:spPr>
           <a:xfrm>
             <a:off x="7784287" y="1700784"/>
-            <a:ext cx="36576" cy="1993392"/>
+            <a:ext cx="36576" cy="1536192"/>
           </a:xfrm>
           <a:prstGeom prst="rect">
             <a:avLst/>
           </a:prstGeom>
           <a:solidFill>
-            <a:srgbClr val="2B6CB0"/>
+            <a:srgbClr val="977024"/>
           </a:solidFill>
           <a:ln/>
         </p:spPr>
       </p:sp>
       <p:sp>
         <p:nvSpPr>
-          <p:cNvPr id="15" name="Text 13"/>
+          <p:cNvPr id="18" name="Text 16"/>
           <p:cNvSpPr/>
           <p:nvPr/>
         </p:nvSpPr>
@@ -8561,314 +5947,94 @@
             <a:pPr indent="0" marL="0">
               <a:buNone/>
             </a:pPr>
-            <a:r>
-              <a:rPr lang="en-US" sz="1050" b="1" dirty="0">
-                <a:solidFill>
-                  <a:srgbClr val="2B6CB0"/>
+            <a:endParaRPr lang="en-US" sz="1050" dirty="0"/>
+          </a:p>
+        </p:txBody>
+      </p:sp>
+      <p:sp>
+        <p:nvSpPr>
+          <p:cNvPr id="19" name="Text 17"/>
+          <p:cNvSpPr/>
+          <p:nvPr/>
+        </p:nvSpPr>
+        <p:spPr>
+          <a:xfrm>
+            <a:off x="7967167" y="1975104"/>
+            <a:ext cx="3511296" cy="1243584"/>
+          </a:xfrm>
+          <a:prstGeom prst="rect">
+            <a:avLst/>
+          </a:prstGeom>
+          <a:noFill/>
+          <a:ln/>
+        </p:spPr>
+        <p:txBody>
+          <a:bodyPr wrap="square" lIns="0" tIns="0" rIns="0" bIns="0" rtlCol="0" anchor="t"/>
+          <a:lstStyle/>
+          <a:p>
+            <a:pPr indent="0" marL="0">
+              <a:lnSpc>
+                <a:spcPct val="120000"/>
+              </a:lnSpc>
+              <a:buNone/>
+            </a:pPr>
+            <a:r>
+              <a:rPr lang="en-US" sz="930" dirty="0">
+                <a:solidFill>
+                  <a:srgbClr val="10161F"/>
                 </a:solidFill>
                 <a:latin typeface="Pretendard" pitchFamily="34" charset="0"/>
                 <a:ea typeface="Pretendard" pitchFamily="34" charset="-122"/>
                 <a:cs typeface="Pretendard" pitchFamily="34" charset="-120"/>
               </a:rPr>
-              <a:t>토지 및 건물 분석 포인트</a:t>
-            </a:r>
-            <a:endParaRPr lang="en-US" sz="1050" dirty="0"/>
-          </a:p>
-        </p:txBody>
-      </p:sp>
-      <p:sp>
-        <p:nvSpPr>
-          <p:cNvPr id="16" name="Text 14"/>
-          <p:cNvSpPr/>
-          <p:nvPr/>
-        </p:nvSpPr>
-        <p:spPr>
-          <a:xfrm>
-            <a:off x="7967167" y="1975104"/>
-            <a:ext cx="3511296" cy="1700784"/>
-          </a:xfrm>
-          <a:prstGeom prst="rect">
-            <a:avLst/>
-          </a:prstGeom>
-          <a:noFill/>
-          <a:ln/>
-        </p:spPr>
-        <p:txBody>
-          <a:bodyPr wrap="square" lIns="0" tIns="0" rIns="0" bIns="0" rtlCol="0" anchor="t"/>
-          <a:lstStyle/>
-          <a:p>
-            <a:pPr marL="342900" indent="-342900">
-              <a:lnSpc>
-                <a:spcPct val="120000"/>
-              </a:lnSpc>
-              <a:buSzPct val="100000"/>
-              <a:buChar char="•"/>
-            </a:pPr>
-            <a:r>
-              <a:rPr lang="en-US" sz="930" dirty="0">
-                <a:solidFill>
-                  <a:srgbClr val="10161F"/>
+              <a:t>서초 메디컬 빌딩은 지하2층~지상7층 규모의 올근생 빌딩입니다.</a:t>
+            </a:r>
+            <a:endParaRPr lang="en-US" sz="930" dirty="0"/>
+          </a:p>
+        </p:txBody>
+      </p:sp>
+      <p:sp>
+        <p:nvSpPr>
+          <p:cNvPr id="20" name="Text 18"/>
+          <p:cNvSpPr/>
+          <p:nvPr/>
+        </p:nvSpPr>
+        <p:spPr>
+          <a:xfrm>
+            <a:off x="566928" y="6382512"/>
+            <a:ext cx="7315200" cy="219456"/>
+          </a:xfrm>
+          <a:prstGeom prst="rect">
+            <a:avLst/>
+          </a:prstGeom>
+          <a:noFill/>
+          <a:ln/>
+        </p:spPr>
+        <p:txBody>
+          <a:bodyPr wrap="square" lIns="0" tIns="0" rIns="0" bIns="0" rtlCol="0" anchor="ctr"/>
+          <a:lstStyle/>
+          <a:p>
+            <a:pPr indent="0" marL="0">
+              <a:buNone/>
+            </a:pPr>
+            <a:r>
+              <a:rPr lang="en-US" sz="800" dirty="0">
+                <a:solidFill>
+                  <a:srgbClr val="718096"/>
                 </a:solidFill>
                 <a:latin typeface="Pretendard" pitchFamily="34" charset="0"/>
                 <a:ea typeface="Pretendard" pitchFamily="34" charset="-122"/>
                 <a:cs typeface="Pretendard" pitchFamily="34" charset="-120"/>
               </a:rPr>
-              <a:t>물건 접면 도로 및 교통 여건은 현장 확인 사항입니다</a:t>
-            </a:r>
-            <a:endParaRPr lang="en-US" sz="930" dirty="0"/>
-          </a:p>
-          <a:p>
-            <a:pPr marL="342900" indent="-342900">
-              <a:lnSpc>
-                <a:spcPct val="120000"/>
-              </a:lnSpc>
-              <a:buSzPct val="100000"/>
-              <a:buChar char="•"/>
-            </a:pPr>
-            <a:r>
-              <a:rPr lang="en-US" sz="930" dirty="0">
-                <a:solidFill>
-                  <a:srgbClr val="10161F"/>
-                </a:solidFill>
-                <a:latin typeface="Pretendard" pitchFamily="34" charset="0"/>
-                <a:ea typeface="Pretendard" pitchFamily="34" charset="-122"/>
-                <a:cs typeface="Pretendard" pitchFamily="34" charset="-120"/>
-              </a:rPr>
-              <a:t>상세 건물 제원은 실사 자료를 참조하시기 바랍니다</a:t>
-            </a:r>
-            <a:endParaRPr lang="en-US" sz="930" dirty="0"/>
-          </a:p>
-          <a:p>
-            <a:pPr marL="342900" indent="-342900">
-              <a:lnSpc>
-                <a:spcPct val="120000"/>
-              </a:lnSpc>
-              <a:buSzPct val="100000"/>
-              <a:buChar char="•"/>
-            </a:pPr>
-            <a:r>
-              <a:rPr lang="en-US" sz="930" dirty="0">
-                <a:solidFill>
-                  <a:srgbClr val="10161F"/>
-                </a:solidFill>
-                <a:latin typeface="Pretendard" pitchFamily="34" charset="0"/>
-                <a:ea typeface="Pretendard" pitchFamily="34" charset="-122"/>
-                <a:cs typeface="Pretendard" pitchFamily="34" charset="-120"/>
-              </a:rPr>
-              <a:t>건물 현황 및 규모는 첨부 대장을 기준으로 합니다</a:t>
-            </a:r>
-            <a:endParaRPr lang="en-US" sz="930" dirty="0"/>
-          </a:p>
-        </p:txBody>
-      </p:sp>
-      <p:sp>
-        <p:nvSpPr>
-          <p:cNvPr id="17" name="Shape 15"/>
-          <p:cNvSpPr/>
-          <p:nvPr/>
-        </p:nvSpPr>
-        <p:spPr>
-          <a:xfrm>
-            <a:off x="7784287" y="3977640"/>
-            <a:ext cx="3840480" cy="2148840"/>
-          </a:xfrm>
-          <a:prstGeom prst="roundRect">
-            <a:avLst>
-              <a:gd name="adj" fmla="val 2553"/>
-            </a:avLst>
-          </a:prstGeom>
-          <a:solidFill>
-            <a:srgbClr val="BEE3F8"/>
-          </a:solidFill>
-          <a:ln/>
-        </p:spPr>
-      </p:sp>
-      <p:sp>
-        <p:nvSpPr>
-          <p:cNvPr id="18" name="Shape 16"/>
-          <p:cNvSpPr/>
-          <p:nvPr/>
-        </p:nvSpPr>
-        <p:spPr>
-          <a:xfrm>
-            <a:off x="7784287" y="4032504"/>
-            <a:ext cx="36576" cy="2039112"/>
-          </a:xfrm>
-          <a:prstGeom prst="rect">
-            <a:avLst/>
-          </a:prstGeom>
-          <a:solidFill>
-            <a:srgbClr val="2B6CB0"/>
-          </a:solidFill>
-          <a:ln/>
-        </p:spPr>
-      </p:sp>
-      <p:sp>
-        <p:nvSpPr>
-          <p:cNvPr id="19" name="Text 17"/>
-          <p:cNvSpPr/>
-          <p:nvPr/>
-        </p:nvSpPr>
-        <p:spPr>
-          <a:xfrm>
-            <a:off x="7967167" y="4087368"/>
-            <a:ext cx="3511296" cy="201168"/>
-          </a:xfrm>
-          <a:prstGeom prst="rect">
-            <a:avLst/>
-          </a:prstGeom>
-          <a:noFill/>
-          <a:ln/>
-        </p:spPr>
-        <p:txBody>
-          <a:bodyPr wrap="square" lIns="0" tIns="0" rIns="0" bIns="0" rtlCol="0" anchor="ctr"/>
-          <a:lstStyle/>
-          <a:p>
-            <a:pPr indent="0" marL="0">
-              <a:buNone/>
-            </a:pPr>
-            <a:r>
-              <a:rPr lang="en-US" sz="1050" b="1" dirty="0">
-                <a:solidFill>
-                  <a:srgbClr val="2B6CB0"/>
-                </a:solidFill>
-                <a:latin typeface="Pretendard" pitchFamily="34" charset="0"/>
-                <a:ea typeface="Pretendard" pitchFamily="34" charset="-122"/>
-                <a:cs typeface="Pretendard" pitchFamily="34" charset="-120"/>
-              </a:rPr>
-              <a:t>물건 실사 및 관리 상태</a:t>
-            </a:r>
-            <a:endParaRPr lang="en-US" sz="1050" dirty="0"/>
-          </a:p>
-        </p:txBody>
-      </p:sp>
-      <p:sp>
-        <p:nvSpPr>
-          <p:cNvPr id="20" name="Text 18"/>
-          <p:cNvSpPr/>
-          <p:nvPr/>
-        </p:nvSpPr>
-        <p:spPr>
-          <a:xfrm>
-            <a:off x="7967167" y="4306824"/>
-            <a:ext cx="3511296" cy="1746504"/>
-          </a:xfrm>
-          <a:prstGeom prst="rect">
-            <a:avLst/>
-          </a:prstGeom>
-          <a:noFill/>
-          <a:ln/>
-        </p:spPr>
-        <p:txBody>
-          <a:bodyPr wrap="square" lIns="0" tIns="0" rIns="0" bIns="0" rtlCol="0" anchor="t"/>
-          <a:lstStyle/>
-          <a:p>
-            <a:pPr marL="342900" indent="-342900">
-              <a:lnSpc>
-                <a:spcPct val="120000"/>
-              </a:lnSpc>
-              <a:buSzPct val="100000"/>
-              <a:buChar char="•"/>
-            </a:pPr>
-            <a:r>
-              <a:rPr lang="en-US" sz="930" dirty="0">
-                <a:solidFill>
-                  <a:srgbClr val="10161F"/>
-                </a:solidFill>
-                <a:latin typeface="Pretendard" pitchFamily="34" charset="0"/>
-                <a:ea typeface="Pretendard" pitchFamily="34" charset="-122"/>
-                <a:cs typeface="Pretendard" pitchFamily="34" charset="-120"/>
-              </a:rPr>
-              <a:t>건물 상태 및 설비 현황은 실사 보고서를 참조하십시오</a:t>
-            </a:r>
-            <a:endParaRPr lang="en-US" sz="930" dirty="0"/>
-          </a:p>
-          <a:p>
-            <a:pPr marL="342900" indent="-342900">
-              <a:lnSpc>
-                <a:spcPct val="120000"/>
-              </a:lnSpc>
-              <a:buSzPct val="100000"/>
-              <a:buChar char="•"/>
-            </a:pPr>
-            <a:r>
-              <a:rPr lang="en-US" sz="930" dirty="0">
-                <a:solidFill>
-                  <a:srgbClr val="10161F"/>
-                </a:solidFill>
-                <a:latin typeface="Pretendard" pitchFamily="34" charset="0"/>
-                <a:ea typeface="Pretendard" pitchFamily="34" charset="-122"/>
-                <a:cs typeface="Pretendard" pitchFamily="34" charset="-120"/>
-              </a:rPr>
-              <a:t>자금 조달 및 대출 조건은 금융 자문 후 확정됩니다</a:t>
-            </a:r>
-            <a:endParaRPr lang="en-US" sz="930" dirty="0"/>
-          </a:p>
-          <a:p>
-            <a:pPr marL="342900" indent="-342900">
-              <a:lnSpc>
-                <a:spcPct val="120000"/>
-              </a:lnSpc>
-              <a:buSzPct val="100000"/>
-              <a:buChar char="•"/>
-            </a:pPr>
-            <a:r>
-              <a:rPr lang="en-US" sz="930" dirty="0">
-                <a:solidFill>
-                  <a:srgbClr val="10161F"/>
-                </a:solidFill>
-                <a:latin typeface="Pretendard" pitchFamily="34" charset="0"/>
-                <a:ea typeface="Pretendard" pitchFamily="34" charset="-122"/>
-                <a:cs typeface="Pretendard" pitchFamily="34" charset="-120"/>
-              </a:rPr>
-              <a:t>상세 실사 단계에서 구체적인 계약 조건 및 세무 검토가 진행됩니다</a:t>
-            </a:r>
-            <a:endParaRPr lang="en-US" sz="930" dirty="0"/>
+              <a:t>크리딜   |   </a:t>
+            </a:r>
+            <a:endParaRPr lang="en-US" sz="800" dirty="0"/>
           </a:p>
         </p:txBody>
       </p:sp>
       <p:sp>
         <p:nvSpPr>
           <p:cNvPr id="21" name="Text 19"/>
-          <p:cNvSpPr/>
-          <p:nvPr/>
-        </p:nvSpPr>
-        <p:spPr>
-          <a:xfrm>
-            <a:off x="566928" y="6382512"/>
-            <a:ext cx="7315200" cy="219456"/>
-          </a:xfrm>
-          <a:prstGeom prst="rect">
-            <a:avLst/>
-          </a:prstGeom>
-          <a:noFill/>
-          <a:ln/>
-        </p:spPr>
-        <p:txBody>
-          <a:bodyPr wrap="square" lIns="0" tIns="0" rIns="0" bIns="0" rtlCol="0" anchor="ctr"/>
-          <a:lstStyle/>
-          <a:p>
-            <a:pPr indent="0" marL="0">
-              <a:buNone/>
-            </a:pPr>
-            <a:r>
-              <a:rPr lang="en-US" sz="800" dirty="0">
-                <a:solidFill>
-                  <a:srgbClr val="718096"/>
-                </a:solidFill>
-                <a:latin typeface="Pretendard" pitchFamily="34" charset="0"/>
-                <a:ea typeface="Pretendard" pitchFamily="34" charset="-122"/>
-                <a:cs typeface="Pretendard" pitchFamily="34" charset="-120"/>
-              </a:rPr>
-              <a:t>크리딜   |   </a:t>
-            </a:r>
-            <a:endParaRPr lang="en-US" sz="800" dirty="0"/>
-          </a:p>
-        </p:txBody>
-      </p:sp>
-      <p:sp>
-        <p:nvSpPr>
-          <p:cNvPr id="22" name="Text 20"/>
           <p:cNvSpPr/>
           <p:nvPr/>
         </p:nvSpPr>
@@ -9029,7 +6195,7 @@
                 <a:ea typeface="Arial" pitchFamily="34" charset="-122"/>
                 <a:cs typeface="Arial" pitchFamily="34" charset="-120"/>
               </a:rPr>
-              <a:t>Building</a:t>
+              <a:t>Rent Roll</a:t>
             </a:r>
             <a:endParaRPr lang="en-US" sz="950" dirty="0"/>
           </a:p>
@@ -9068,725 +6234,6 @@
                 <a:ea typeface="Pretendard" pitchFamily="34" charset="-122"/>
                 <a:cs typeface="Pretendard" pitchFamily="34" charset="-120"/>
               </a:rPr>
-              <a:t>물건 개요</a:t>
-            </a:r>
-            <a:endParaRPr lang="en-US" sz="2300" dirty="0"/>
-          </a:p>
-        </p:txBody>
-      </p:sp>
-      <p:sp>
-        <p:nvSpPr>
-          <p:cNvPr id="6" name="Text 4"/>
-          <p:cNvSpPr/>
-          <p:nvPr/>
-        </p:nvSpPr>
-        <p:spPr>
-          <a:xfrm>
-            <a:off x="566928" y="1371600"/>
-            <a:ext cx="6858000" cy="237744"/>
-          </a:xfrm>
-          <a:prstGeom prst="rect">
-            <a:avLst/>
-          </a:prstGeom>
-          <a:noFill/>
-          <a:ln/>
-        </p:spPr>
-        <p:txBody>
-          <a:bodyPr wrap="square" lIns="0" tIns="0" rIns="0" bIns="0" rtlCol="0" anchor="ctr"/>
-          <a:lstStyle/>
-          <a:p>
-            <a:pPr indent="0" marL="0">
-              <a:buNone/>
-            </a:pPr>
-            <a:r>
-              <a:rPr lang="en-US" sz="1100" b="1" dirty="0">
-                <a:solidFill>
-                  <a:srgbClr val="10161F"/>
-                </a:solidFill>
-                <a:latin typeface="Pretendard" pitchFamily="34" charset="0"/>
-                <a:ea typeface="Pretendard" pitchFamily="34" charset="-122"/>
-                <a:cs typeface="Pretendard" pitchFamily="34" charset="-120"/>
-              </a:rPr>
-              <a:t>건축물 개요 및 물리 스펙</a:t>
-            </a:r>
-            <a:endParaRPr lang="en-US" sz="1100" dirty="0"/>
-          </a:p>
-        </p:txBody>
-      </p:sp>
-      <p:sp>
-        <p:nvSpPr>
-          <p:cNvPr id="7" name="Text 5"/>
-          <p:cNvSpPr/>
-          <p:nvPr/>
-        </p:nvSpPr>
-        <p:spPr>
-          <a:xfrm>
-            <a:off x="566928" y="1645920"/>
-            <a:ext cx="2606040" cy="402336"/>
-          </a:xfrm>
-          <a:prstGeom prst="rect">
-            <a:avLst/>
-          </a:prstGeom>
-          <a:noFill/>
-          <a:ln/>
-        </p:spPr>
-        <p:txBody>
-          <a:bodyPr wrap="square" lIns="0" tIns="0" rIns="0" bIns="0" rtlCol="0" anchor="ctr"/>
-          <a:lstStyle/>
-          <a:p>
-            <a:pPr indent="0" marL="0">
-              <a:lnSpc>
-                <a:spcPct val="120000"/>
-              </a:lnSpc>
-              <a:buNone/>
-            </a:pPr>
-            <a:r>
-              <a:rPr lang="en-US" sz="1400" dirty="0">
-                <a:solidFill>
-                  <a:srgbClr val="718096"/>
-                </a:solidFill>
-                <a:latin typeface="Pretendard" pitchFamily="34" charset="0"/>
-                <a:ea typeface="Pretendard" pitchFamily="34" charset="-122"/>
-                <a:cs typeface="Pretendard" pitchFamily="34" charset="-120"/>
-              </a:rPr>
-              <a:t>대지면적</a:t>
-            </a:r>
-            <a:endParaRPr lang="en-US" sz="1400" dirty="0"/>
-          </a:p>
-        </p:txBody>
-      </p:sp>
-      <p:sp>
-        <p:nvSpPr>
-          <p:cNvPr id="8" name="Text 6"/>
-          <p:cNvSpPr/>
-          <p:nvPr/>
-        </p:nvSpPr>
-        <p:spPr>
-          <a:xfrm>
-            <a:off x="3172968" y="1645920"/>
-            <a:ext cx="4251960" cy="402336"/>
-          </a:xfrm>
-          <a:prstGeom prst="rect">
-            <a:avLst/>
-          </a:prstGeom>
-          <a:noFill/>
-          <a:ln/>
-        </p:spPr>
-        <p:txBody>
-          <a:bodyPr wrap="square" lIns="0" tIns="0" rIns="0" bIns="0" rtlCol="0" anchor="ctr"/>
-          <a:lstStyle/>
-          <a:p>
-            <a:pPr indent="0" marL="0">
-              <a:lnSpc>
-                <a:spcPct val="120000"/>
-              </a:lnSpc>
-              <a:buNone/>
-            </a:pPr>
-            <a:r>
-              <a:rPr lang="en-US" sz="1400" b="1" dirty="0">
-                <a:solidFill>
-                  <a:srgbClr val="10161F"/>
-                </a:solidFill>
-                <a:latin typeface="Pretendard" pitchFamily="34" charset="0"/>
-                <a:ea typeface="Pretendard" pitchFamily="34" charset="-122"/>
-                <a:cs typeface="Pretendard" pitchFamily="34" charset="-120"/>
-              </a:rPr>
-              <a:t>142.5평</a:t>
-            </a:r>
-            <a:endParaRPr lang="en-US" sz="1400" dirty="0"/>
-          </a:p>
-        </p:txBody>
-      </p:sp>
-      <p:sp>
-        <p:nvSpPr>
-          <p:cNvPr id="9" name="Shape 7"/>
-          <p:cNvSpPr/>
-          <p:nvPr/>
-        </p:nvSpPr>
-        <p:spPr>
-          <a:xfrm>
-            <a:off x="566928" y="2048256"/>
-            <a:ext cx="6858000" cy="0"/>
-          </a:xfrm>
-          <a:prstGeom prst="line">
-            <a:avLst/>
-          </a:prstGeom>
-          <a:noFill/>
-          <a:ln w="3810">
-            <a:solidFill>
-              <a:srgbClr val="CBD5E0"/>
-            </a:solidFill>
-            <a:prstDash val="solid"/>
-          </a:ln>
-        </p:spPr>
-      </p:sp>
-      <p:sp>
-        <p:nvSpPr>
-          <p:cNvPr id="10" name="Text 8"/>
-          <p:cNvSpPr/>
-          <p:nvPr/>
-        </p:nvSpPr>
-        <p:spPr>
-          <a:xfrm>
-            <a:off x="566928" y="2048256"/>
-            <a:ext cx="2606040" cy="402336"/>
-          </a:xfrm>
-          <a:prstGeom prst="rect">
-            <a:avLst/>
-          </a:prstGeom>
-          <a:noFill/>
-          <a:ln/>
-        </p:spPr>
-        <p:txBody>
-          <a:bodyPr wrap="square" lIns="0" tIns="0" rIns="0" bIns="0" rtlCol="0" anchor="ctr"/>
-          <a:lstStyle/>
-          <a:p>
-            <a:pPr indent="0" marL="0">
-              <a:lnSpc>
-                <a:spcPct val="120000"/>
-              </a:lnSpc>
-              <a:buNone/>
-            </a:pPr>
-            <a:r>
-              <a:rPr lang="en-US" sz="1400" dirty="0">
-                <a:solidFill>
-                  <a:srgbClr val="718096"/>
-                </a:solidFill>
-                <a:latin typeface="Pretendard" pitchFamily="34" charset="0"/>
-                <a:ea typeface="Pretendard" pitchFamily="34" charset="-122"/>
-                <a:cs typeface="Pretendard" pitchFamily="34" charset="-120"/>
-              </a:rPr>
-              <a:t>연면적</a:t>
-            </a:r>
-            <a:endParaRPr lang="en-US" sz="1400" dirty="0"/>
-          </a:p>
-        </p:txBody>
-      </p:sp>
-      <p:sp>
-        <p:nvSpPr>
-          <p:cNvPr id="11" name="Text 9"/>
-          <p:cNvSpPr/>
-          <p:nvPr/>
-        </p:nvSpPr>
-        <p:spPr>
-          <a:xfrm>
-            <a:off x="3172968" y="2048256"/>
-            <a:ext cx="4251960" cy="402336"/>
-          </a:xfrm>
-          <a:prstGeom prst="rect">
-            <a:avLst/>
-          </a:prstGeom>
-          <a:noFill/>
-          <a:ln/>
-        </p:spPr>
-        <p:txBody>
-          <a:bodyPr wrap="square" lIns="0" tIns="0" rIns="0" bIns="0" rtlCol="0" anchor="ctr"/>
-          <a:lstStyle/>
-          <a:p>
-            <a:pPr indent="0" marL="0">
-              <a:lnSpc>
-                <a:spcPct val="120000"/>
-              </a:lnSpc>
-              <a:buNone/>
-            </a:pPr>
-            <a:r>
-              <a:rPr lang="en-US" sz="1400" b="1" dirty="0">
-                <a:solidFill>
-                  <a:srgbClr val="10161F"/>
-                </a:solidFill>
-                <a:latin typeface="Pretendard" pitchFamily="34" charset="0"/>
-                <a:ea typeface="Pretendard" pitchFamily="34" charset="-122"/>
-                <a:cs typeface="Pretendard" pitchFamily="34" charset="-120"/>
-              </a:rPr>
-              <a:t>620.8평</a:t>
-            </a:r>
-            <a:endParaRPr lang="en-US" sz="1400" dirty="0"/>
-          </a:p>
-        </p:txBody>
-      </p:sp>
-      <p:sp>
-        <p:nvSpPr>
-          <p:cNvPr id="12" name="Shape 10"/>
-          <p:cNvSpPr/>
-          <p:nvPr/>
-        </p:nvSpPr>
-        <p:spPr>
-          <a:xfrm>
-            <a:off x="566928" y="2450592"/>
-            <a:ext cx="6858000" cy="0"/>
-          </a:xfrm>
-          <a:prstGeom prst="line">
-            <a:avLst/>
-          </a:prstGeom>
-          <a:noFill/>
-          <a:ln w="3810">
-            <a:solidFill>
-              <a:srgbClr val="CBD5E0"/>
-            </a:solidFill>
-            <a:prstDash val="solid"/>
-          </a:ln>
-        </p:spPr>
-      </p:sp>
-      <p:sp>
-        <p:nvSpPr>
-          <p:cNvPr id="13" name="Text 11"/>
-          <p:cNvSpPr/>
-          <p:nvPr/>
-        </p:nvSpPr>
-        <p:spPr>
-          <a:xfrm>
-            <a:off x="566928" y="2450592"/>
-            <a:ext cx="2606040" cy="402336"/>
-          </a:xfrm>
-          <a:prstGeom prst="rect">
-            <a:avLst/>
-          </a:prstGeom>
-          <a:noFill/>
-          <a:ln/>
-        </p:spPr>
-        <p:txBody>
-          <a:bodyPr wrap="square" lIns="0" tIns="0" rIns="0" bIns="0" rtlCol="0" anchor="ctr"/>
-          <a:lstStyle/>
-          <a:p>
-            <a:pPr indent="0" marL="0">
-              <a:lnSpc>
-                <a:spcPct val="120000"/>
-              </a:lnSpc>
-              <a:buNone/>
-            </a:pPr>
-            <a:r>
-              <a:rPr lang="en-US" sz="1400" dirty="0">
-                <a:solidFill>
-                  <a:srgbClr val="718096"/>
-                </a:solidFill>
-                <a:latin typeface="Pretendard" pitchFamily="34" charset="0"/>
-                <a:ea typeface="Pretendard" pitchFamily="34" charset="-122"/>
-                <a:cs typeface="Pretendard" pitchFamily="34" charset="-120"/>
-              </a:rPr>
-              <a:t>준공</a:t>
-            </a:r>
-            <a:endParaRPr lang="en-US" sz="1400" dirty="0"/>
-          </a:p>
-        </p:txBody>
-      </p:sp>
-      <p:sp>
-        <p:nvSpPr>
-          <p:cNvPr id="14" name="Text 12"/>
-          <p:cNvSpPr/>
-          <p:nvPr/>
-        </p:nvSpPr>
-        <p:spPr>
-          <a:xfrm>
-            <a:off x="3172968" y="2450592"/>
-            <a:ext cx="4251960" cy="402336"/>
-          </a:xfrm>
-          <a:prstGeom prst="rect">
-            <a:avLst/>
-          </a:prstGeom>
-          <a:noFill/>
-          <a:ln/>
-        </p:spPr>
-        <p:txBody>
-          <a:bodyPr wrap="square" lIns="0" tIns="0" rIns="0" bIns="0" rtlCol="0" anchor="ctr"/>
-          <a:lstStyle/>
-          <a:p>
-            <a:pPr indent="0" marL="0">
-              <a:lnSpc>
-                <a:spcPct val="120000"/>
-              </a:lnSpc>
-              <a:buNone/>
-            </a:pPr>
-            <a:r>
-              <a:rPr lang="en-US" sz="1400" b="1" dirty="0">
-                <a:solidFill>
-                  <a:srgbClr val="10161F"/>
-                </a:solidFill>
-                <a:latin typeface="Pretendard" pitchFamily="34" charset="0"/>
-                <a:ea typeface="Pretendard" pitchFamily="34" charset="-122"/>
-                <a:cs typeface="Pretendard" pitchFamily="34" charset="-120"/>
-              </a:rPr>
-              <a:t>2017년</a:t>
-            </a:r>
-            <a:endParaRPr lang="en-US" sz="1400" dirty="0"/>
-          </a:p>
-        </p:txBody>
-      </p:sp>
-      <p:sp>
-        <p:nvSpPr>
-          <p:cNvPr id="15" name="Shape 13"/>
-          <p:cNvSpPr/>
-          <p:nvPr/>
-        </p:nvSpPr>
-        <p:spPr>
-          <a:xfrm>
-            <a:off x="7604608" y="1371600"/>
-            <a:ext cx="0" cy="4754880"/>
-          </a:xfrm>
-          <a:prstGeom prst="line">
-            <a:avLst/>
-          </a:prstGeom>
-          <a:noFill/>
-          <a:ln w="8890">
-            <a:solidFill>
-              <a:srgbClr val="B98A2E"/>
-            </a:solidFill>
-            <a:prstDash val="solid"/>
-          </a:ln>
-        </p:spPr>
-      </p:sp>
-      <p:sp>
-        <p:nvSpPr>
-          <p:cNvPr id="16" name="Shape 14"/>
-          <p:cNvSpPr/>
-          <p:nvPr/>
-        </p:nvSpPr>
-        <p:spPr>
-          <a:xfrm>
-            <a:off x="7784287" y="1645920"/>
-            <a:ext cx="3840480" cy="1645920"/>
-          </a:xfrm>
-          <a:prstGeom prst="roundRect">
-            <a:avLst>
-              <a:gd name="adj" fmla="val 3333"/>
-            </a:avLst>
-          </a:prstGeom>
-          <a:solidFill>
-            <a:srgbClr val="F3EBDA"/>
-          </a:solidFill>
-          <a:ln/>
-        </p:spPr>
-      </p:sp>
-      <p:sp>
-        <p:nvSpPr>
-          <p:cNvPr id="17" name="Shape 15"/>
-          <p:cNvSpPr/>
-          <p:nvPr/>
-        </p:nvSpPr>
-        <p:spPr>
-          <a:xfrm>
-            <a:off x="7784287" y="1700784"/>
-            <a:ext cx="36576" cy="1536192"/>
-          </a:xfrm>
-          <a:prstGeom prst="rect">
-            <a:avLst/>
-          </a:prstGeom>
-          <a:solidFill>
-            <a:srgbClr val="977024"/>
-          </a:solidFill>
-          <a:ln/>
-        </p:spPr>
-      </p:sp>
-      <p:sp>
-        <p:nvSpPr>
-          <p:cNvPr id="18" name="Text 16"/>
-          <p:cNvSpPr/>
-          <p:nvPr/>
-        </p:nvSpPr>
-        <p:spPr>
-          <a:xfrm>
-            <a:off x="7967167" y="1755648"/>
-            <a:ext cx="3511296" cy="201168"/>
-          </a:xfrm>
-          <a:prstGeom prst="rect">
-            <a:avLst/>
-          </a:prstGeom>
-          <a:noFill/>
-          <a:ln/>
-        </p:spPr>
-        <p:txBody>
-          <a:bodyPr wrap="square" lIns="0" tIns="0" rIns="0" bIns="0" rtlCol="0" anchor="ctr"/>
-          <a:lstStyle/>
-          <a:p>
-            <a:pPr indent="0" marL="0">
-              <a:buNone/>
-            </a:pPr>
-            <a:endParaRPr lang="en-US" sz="1050" dirty="0"/>
-          </a:p>
-        </p:txBody>
-      </p:sp>
-      <p:sp>
-        <p:nvSpPr>
-          <p:cNvPr id="19" name="Text 17"/>
-          <p:cNvSpPr/>
-          <p:nvPr/>
-        </p:nvSpPr>
-        <p:spPr>
-          <a:xfrm>
-            <a:off x="7967167" y="1975104"/>
-            <a:ext cx="3511296" cy="1243584"/>
-          </a:xfrm>
-          <a:prstGeom prst="rect">
-            <a:avLst/>
-          </a:prstGeom>
-          <a:noFill/>
-          <a:ln/>
-        </p:spPr>
-        <p:txBody>
-          <a:bodyPr wrap="square" lIns="0" tIns="0" rIns="0" bIns="0" rtlCol="0" anchor="t"/>
-          <a:lstStyle/>
-          <a:p>
-            <a:pPr indent="0" marL="0">
-              <a:lnSpc>
-                <a:spcPct val="120000"/>
-              </a:lnSpc>
-              <a:buNone/>
-            </a:pPr>
-            <a:r>
-              <a:rPr lang="en-US" sz="930" dirty="0">
-                <a:solidFill>
-                  <a:srgbClr val="10161F"/>
-                </a:solidFill>
-                <a:latin typeface="Pretendard" pitchFamily="34" charset="0"/>
-                <a:ea typeface="Pretendard" pitchFamily="34" charset="-122"/>
-                <a:cs typeface="Pretendard" pitchFamily="34" charset="-120"/>
-              </a:rPr>
-              <a:t>서초 메디컬 빌딩은 지하2층~지상7층 규모의 올근생 빌딩입니다.</a:t>
-            </a:r>
-            <a:endParaRPr lang="en-US" sz="930" dirty="0"/>
-          </a:p>
-        </p:txBody>
-      </p:sp>
-      <p:sp>
-        <p:nvSpPr>
-          <p:cNvPr id="20" name="Text 18"/>
-          <p:cNvSpPr/>
-          <p:nvPr/>
-        </p:nvSpPr>
-        <p:spPr>
-          <a:xfrm>
-            <a:off x="566928" y="6382512"/>
-            <a:ext cx="7315200" cy="219456"/>
-          </a:xfrm>
-          <a:prstGeom prst="rect">
-            <a:avLst/>
-          </a:prstGeom>
-          <a:noFill/>
-          <a:ln/>
-        </p:spPr>
-        <p:txBody>
-          <a:bodyPr wrap="square" lIns="0" tIns="0" rIns="0" bIns="0" rtlCol="0" anchor="ctr"/>
-          <a:lstStyle/>
-          <a:p>
-            <a:pPr indent="0" marL="0">
-              <a:buNone/>
-            </a:pPr>
-            <a:r>
-              <a:rPr lang="en-US" sz="800" dirty="0">
-                <a:solidFill>
-                  <a:srgbClr val="718096"/>
-                </a:solidFill>
-                <a:latin typeface="Pretendard" pitchFamily="34" charset="0"/>
-                <a:ea typeface="Pretendard" pitchFamily="34" charset="-122"/>
-                <a:cs typeface="Pretendard" pitchFamily="34" charset="-120"/>
-              </a:rPr>
-              <a:t>크리딜   |   </a:t>
-            </a:r>
-            <a:endParaRPr lang="en-US" sz="800" dirty="0"/>
-          </a:p>
-        </p:txBody>
-      </p:sp>
-      <p:sp>
-        <p:nvSpPr>
-          <p:cNvPr id="21" name="Text 19"/>
-          <p:cNvSpPr/>
-          <p:nvPr/>
-        </p:nvSpPr>
-        <p:spPr>
-          <a:xfrm>
-            <a:off x="10710367" y="6382512"/>
-            <a:ext cx="914400" cy="219456"/>
-          </a:xfrm>
-          <a:prstGeom prst="rect">
-            <a:avLst/>
-          </a:prstGeom>
-          <a:noFill/>
-          <a:ln/>
-        </p:spPr>
-        <p:txBody>
-          <a:bodyPr wrap="square" lIns="0" tIns="0" rIns="0" bIns="0" rtlCol="0" anchor="ctr"/>
-          <a:lstStyle/>
-          <a:p>
-            <a:pPr algn="r" indent="0" marL="0">
-              <a:buNone/>
-            </a:pPr>
-            <a:r>
-              <a:rPr lang="en-US" sz="900" b="1" dirty="0">
-                <a:solidFill>
-                  <a:srgbClr val="B98A2E"/>
-                </a:solidFill>
-                <a:latin typeface="Arial" pitchFamily="34" charset="0"/>
-                <a:ea typeface="Arial" pitchFamily="34" charset="-122"/>
-                <a:cs typeface="Arial" pitchFamily="34" charset="-120"/>
-              </a:rPr>
-              <a:t>5</a:t>
-            </a:r>
-            <a:endParaRPr lang="en-US" sz="900" dirty="0"/>
-          </a:p>
-        </p:txBody>
-      </p:sp>
-    </p:spTree>
-  </p:cSld>
-  <p:clrMapOvr>
-    <a:masterClrMapping/>
-  </p:clrMapOvr>
-</p:sld>
-</file>
-
-<file path=ppt/slides/slide6.xml><?xml version="1.0" encoding="utf-8"?>
-<p:sld xmlns:a="http://schemas.openxmlformats.org/drawingml/2006/main" xmlns:r="http://schemas.openxmlformats.org/officeDocument/2006/relationships" xmlns:p="http://schemas.openxmlformats.org/presentationml/2006/main">
-  <p:cSld name="Slide 6">
-    <p:bg>
-      <p:bgPr>
-        <a:solidFill>
-          <a:srgbClr val="FFFFFF"/>
-        </a:solidFill>
-      </p:bgPr>
-    </p:bg>
-    <p:spTree>
-      <p:nvGrpSpPr>
-        <p:cNvPr id="1" name=""/>
-        <p:cNvGrpSpPr/>
-        <p:nvPr/>
-      </p:nvGrpSpPr>
-      <p:grpSpPr>
-        <a:xfrm>
-          <a:off x="0" y="0"/>
-          <a:ext cx="0" cy="0"/>
-          <a:chOff x="0" y="0"/>
-          <a:chExt cx="0" cy="0"/>
-        </a:xfrm>
-      </p:grpSpPr>
-      <p:sp>
-        <p:nvSpPr>
-          <p:cNvPr id="2" name="Shape 0"/>
-          <p:cNvSpPr/>
-          <p:nvPr/>
-        </p:nvSpPr>
-        <p:spPr>
-          <a:xfrm>
-            <a:off x="566928" y="457200"/>
-            <a:ext cx="384048" cy="384048"/>
-          </a:xfrm>
-          <a:prstGeom prst="ellipse">
-            <a:avLst/>
-          </a:prstGeom>
-          <a:solidFill>
-            <a:srgbClr val="B98A2E"/>
-          </a:solidFill>
-          <a:ln/>
-        </p:spPr>
-      </p:sp>
-      <p:sp>
-        <p:nvSpPr>
-          <p:cNvPr id="3" name="Text 1"/>
-          <p:cNvSpPr/>
-          <p:nvPr/>
-        </p:nvSpPr>
-        <p:spPr>
-          <a:xfrm>
-            <a:off x="566928" y="457200"/>
-            <a:ext cx="384048" cy="384048"/>
-          </a:xfrm>
-          <a:prstGeom prst="rect">
-            <a:avLst/>
-          </a:prstGeom>
-          <a:noFill/>
-          <a:ln/>
-        </p:spPr>
-        <p:txBody>
-          <a:bodyPr wrap="square" lIns="0" tIns="0" rIns="0" bIns="0" rtlCol="0" anchor="ctr"/>
-          <a:lstStyle/>
-          <a:p>
-            <a:pPr algn="ctr" indent="0" marL="0">
-              <a:buNone/>
-            </a:pPr>
-            <a:r>
-              <a:rPr lang="en-US" sz="1300" b="1" dirty="0">
-                <a:solidFill>
-                  <a:srgbClr val="FFFFFF"/>
-                </a:solidFill>
-                <a:latin typeface="Arial" pitchFamily="34" charset="0"/>
-                <a:ea typeface="Arial" pitchFamily="34" charset="-122"/>
-                <a:cs typeface="Arial" pitchFamily="34" charset="-120"/>
-              </a:rPr>
-              <a:t>06</a:t>
-            </a:r>
-            <a:endParaRPr lang="en-US" sz="1300" dirty="0"/>
-          </a:p>
-        </p:txBody>
-      </p:sp>
-      <p:sp>
-        <p:nvSpPr>
-          <p:cNvPr id="4" name="Text 2"/>
-          <p:cNvSpPr/>
-          <p:nvPr/>
-        </p:nvSpPr>
-        <p:spPr>
-          <a:xfrm>
-            <a:off x="1133856" y="457200"/>
-            <a:ext cx="10490911" cy="182880"/>
-          </a:xfrm>
-          <a:prstGeom prst="rect">
-            <a:avLst/>
-          </a:prstGeom>
-          <a:noFill/>
-          <a:ln/>
-        </p:spPr>
-        <p:txBody>
-          <a:bodyPr wrap="square" lIns="0" tIns="0" rIns="0" bIns="0" rtlCol="0" anchor="ctr"/>
-          <a:lstStyle/>
-          <a:p>
-            <a:pPr indent="0" marL="0">
-              <a:buNone/>
-            </a:pPr>
-            <a:r>
-              <a:rPr lang="en-US" sz="950" b="1" spc="200" kern="0" dirty="0">
-                <a:solidFill>
-                  <a:srgbClr val="B98A2E"/>
-                </a:solidFill>
-                <a:latin typeface="Arial" pitchFamily="34" charset="0"/>
-                <a:ea typeface="Arial" pitchFamily="34" charset="-122"/>
-                <a:cs typeface="Arial" pitchFamily="34" charset="-120"/>
-              </a:rPr>
-              <a:t>Rent Roll</a:t>
-            </a:r>
-            <a:endParaRPr lang="en-US" sz="950" dirty="0"/>
-          </a:p>
-        </p:txBody>
-      </p:sp>
-      <p:sp>
-        <p:nvSpPr>
-          <p:cNvPr id="5" name="Text 3"/>
-          <p:cNvSpPr/>
-          <p:nvPr/>
-        </p:nvSpPr>
-        <p:spPr>
-          <a:xfrm>
-            <a:off x="1133856" y="640080"/>
-            <a:ext cx="10490911" cy="365760"/>
-          </a:xfrm>
-          <a:prstGeom prst="rect">
-            <a:avLst/>
-          </a:prstGeom>
-          <a:noFill/>
-          <a:ln/>
-        </p:spPr>
-        <p:txBody>
-          <a:bodyPr wrap="square" lIns="0" tIns="0" rIns="0" bIns="0" rtlCol="0" anchor="ctr"/>
-          <a:lstStyle/>
-          <a:p>
-            <a:pPr indent="0" marL="0">
-              <a:buNone/>
-            </a:pPr>
-            <a:r>
-              <a:rPr lang="en-US" sz="2300" b="1" dirty="0">
-                <a:solidFill>
-                  <a:srgbClr val="10161F"/>
-                </a:solidFill>
-                <a:latin typeface="Pretendard" pitchFamily="34" charset="0"/>
-                <a:ea typeface="Pretendard" pitchFamily="34" charset="-122"/>
-                <a:cs typeface="Pretendard" pitchFamily="34" charset="-120"/>
-              </a:rPr>
               <a:t>임대차 현황</a:t>
             </a:r>
             <a:endParaRPr lang="en-US" sz="2300" dirty="0"/>
@@ -9795,7 +6242,7 @@
       </p:sp>
       <p:graphicFrame>
         <p:nvGraphicFramePr>
-          <p:cNvPr id="7" name="Table 0"/>
+          <p:cNvPr id="6" name="Table 0"/>
           <p:cNvGraphicFramePr>
             <a:graphicFrameLocks noGrp="1"/>
           </p:cNvGraphicFramePr>
@@ -10719,6 +7166,399 @@
                 <a:ea typeface="Arial" pitchFamily="34" charset="-122"/>
                 <a:cs typeface="Arial" pitchFamily="34" charset="-120"/>
               </a:rPr>
+              <a:t>5</a:t>
+            </a:r>
+            <a:endParaRPr lang="en-US" sz="900" dirty="0"/>
+          </a:p>
+        </p:txBody>
+      </p:sp>
+    </p:spTree>
+  </p:cSld>
+  <p:clrMapOvr>
+    <a:masterClrMapping/>
+  </p:clrMapOvr>
+</p:sld>
+</file>
+
+<file path=ppt/slides/slide6.xml><?xml version="1.0" encoding="utf-8"?>
+<p:sld xmlns:a="http://schemas.openxmlformats.org/drawingml/2006/main" xmlns:r="http://schemas.openxmlformats.org/officeDocument/2006/relationships" xmlns:p="http://schemas.openxmlformats.org/presentationml/2006/main">
+  <p:cSld name="Slide 6">
+    <p:bg>
+      <p:bgPr>
+        <a:solidFill>
+          <a:srgbClr val="FFFFFF"/>
+        </a:solidFill>
+      </p:bgPr>
+    </p:bg>
+    <p:spTree>
+      <p:nvGrpSpPr>
+        <p:cNvPr id="1" name=""/>
+        <p:cNvGrpSpPr/>
+        <p:nvPr/>
+      </p:nvGrpSpPr>
+      <p:grpSpPr>
+        <a:xfrm>
+          <a:off x="0" y="0"/>
+          <a:ext cx="0" cy="0"/>
+          <a:chOff x="0" y="0"/>
+          <a:chExt cx="0" cy="0"/>
+        </a:xfrm>
+      </p:grpSpPr>
+      <p:sp>
+        <p:nvSpPr>
+          <p:cNvPr id="2" name="Shape 0"/>
+          <p:cNvSpPr/>
+          <p:nvPr/>
+        </p:nvSpPr>
+        <p:spPr>
+          <a:xfrm>
+            <a:off x="566928" y="457200"/>
+            <a:ext cx="384048" cy="384048"/>
+          </a:xfrm>
+          <a:prstGeom prst="ellipse">
+            <a:avLst/>
+          </a:prstGeom>
+          <a:solidFill>
+            <a:srgbClr val="B98A2E"/>
+          </a:solidFill>
+          <a:ln/>
+        </p:spPr>
+      </p:sp>
+      <p:sp>
+        <p:nvSpPr>
+          <p:cNvPr id="3" name="Text 1"/>
+          <p:cNvSpPr/>
+          <p:nvPr/>
+        </p:nvSpPr>
+        <p:spPr>
+          <a:xfrm>
+            <a:off x="566928" y="457200"/>
+            <a:ext cx="384048" cy="384048"/>
+          </a:xfrm>
+          <a:prstGeom prst="rect">
+            <a:avLst/>
+          </a:prstGeom>
+          <a:noFill/>
+          <a:ln/>
+        </p:spPr>
+        <p:txBody>
+          <a:bodyPr wrap="square" lIns="0" tIns="0" rIns="0" bIns="0" rtlCol="0" anchor="ctr"/>
+          <a:lstStyle/>
+          <a:p>
+            <a:pPr algn="ctr" indent="0" marL="0">
+              <a:buNone/>
+            </a:pPr>
+            <a:r>
+              <a:rPr lang="en-US" sz="1300" b="1" dirty="0">
+                <a:solidFill>
+                  <a:srgbClr val="FFFFFF"/>
+                </a:solidFill>
+                <a:latin typeface="Arial" pitchFamily="34" charset="0"/>
+                <a:ea typeface="Arial" pitchFamily="34" charset="-122"/>
+                <a:cs typeface="Arial" pitchFamily="34" charset="-120"/>
+              </a:rPr>
+              <a:t>06</a:t>
+            </a:r>
+            <a:endParaRPr lang="en-US" sz="1300" dirty="0"/>
+          </a:p>
+        </p:txBody>
+      </p:sp>
+      <p:sp>
+        <p:nvSpPr>
+          <p:cNvPr id="4" name="Text 2"/>
+          <p:cNvSpPr/>
+          <p:nvPr/>
+        </p:nvSpPr>
+        <p:spPr>
+          <a:xfrm>
+            <a:off x="1133856" y="457200"/>
+            <a:ext cx="10490911" cy="182880"/>
+          </a:xfrm>
+          <a:prstGeom prst="rect">
+            <a:avLst/>
+          </a:prstGeom>
+          <a:noFill/>
+          <a:ln/>
+        </p:spPr>
+        <p:txBody>
+          <a:bodyPr wrap="square" lIns="0" tIns="0" rIns="0" bIns="0" rtlCol="0" anchor="ctr"/>
+          <a:lstStyle/>
+          <a:p>
+            <a:pPr indent="0" marL="0">
+              <a:buNone/>
+            </a:pPr>
+            <a:r>
+              <a:rPr lang="en-US" sz="950" b="1" spc="200" kern="0" dirty="0">
+                <a:solidFill>
+                  <a:srgbClr val="B98A2E"/>
+                </a:solidFill>
+                <a:latin typeface="Arial" pitchFamily="34" charset="0"/>
+                <a:ea typeface="Arial" pitchFamily="34" charset="-122"/>
+                <a:cs typeface="Arial" pitchFamily="34" charset="-120"/>
+              </a:rPr>
+              <a:t>Profit</a:t>
+            </a:r>
+            <a:endParaRPr lang="en-US" sz="950" dirty="0"/>
+          </a:p>
+        </p:txBody>
+      </p:sp>
+      <p:sp>
+        <p:nvSpPr>
+          <p:cNvPr id="5" name="Text 3"/>
+          <p:cNvSpPr/>
+          <p:nvPr/>
+        </p:nvSpPr>
+        <p:spPr>
+          <a:xfrm>
+            <a:off x="1133856" y="640080"/>
+            <a:ext cx="10490911" cy="365760"/>
+          </a:xfrm>
+          <a:prstGeom prst="rect">
+            <a:avLst/>
+          </a:prstGeom>
+          <a:noFill/>
+          <a:ln/>
+        </p:spPr>
+        <p:txBody>
+          <a:bodyPr wrap="square" lIns="0" tIns="0" rIns="0" bIns="0" rtlCol="0" anchor="ctr"/>
+          <a:lstStyle/>
+          <a:p>
+            <a:pPr indent="0" marL="0">
+              <a:buNone/>
+            </a:pPr>
+            <a:r>
+              <a:rPr lang="en-US" sz="2300" b="1" dirty="0">
+                <a:solidFill>
+                  <a:srgbClr val="10161F"/>
+                </a:solidFill>
+                <a:latin typeface="Pretendard" pitchFamily="34" charset="0"/>
+                <a:ea typeface="Pretendard" pitchFamily="34" charset="-122"/>
+                <a:cs typeface="Pretendard" pitchFamily="34" charset="-120"/>
+              </a:rPr>
+              <a:t>수익성 분석</a:t>
+            </a:r>
+            <a:endParaRPr lang="en-US" sz="2300" dirty="0"/>
+          </a:p>
+        </p:txBody>
+      </p:sp>
+      <p:sp>
+        <p:nvSpPr>
+          <p:cNvPr id="6" name="Shape 4"/>
+          <p:cNvSpPr/>
+          <p:nvPr/>
+        </p:nvSpPr>
+        <p:spPr>
+          <a:xfrm>
+            <a:off x="566928" y="1325880"/>
+            <a:ext cx="11057839" cy="0"/>
+          </a:xfrm>
+          <a:prstGeom prst="line">
+            <a:avLst/>
+          </a:prstGeom>
+          <a:noFill/>
+          <a:ln w="19050">
+            <a:solidFill>
+              <a:srgbClr val="B98A2E"/>
+            </a:solidFill>
+            <a:prstDash val="solid"/>
+          </a:ln>
+        </p:spPr>
+      </p:sp>
+      <p:sp>
+        <p:nvSpPr>
+          <p:cNvPr id="7" name="Shape 5"/>
+          <p:cNvSpPr/>
+          <p:nvPr/>
+        </p:nvSpPr>
+        <p:spPr>
+          <a:xfrm>
+            <a:off x="566928" y="1645920"/>
+            <a:ext cx="11057839" cy="1280160"/>
+          </a:xfrm>
+          <a:prstGeom prst="roundRect">
+            <a:avLst>
+              <a:gd name="adj" fmla="val 4286"/>
+            </a:avLst>
+          </a:prstGeom>
+          <a:solidFill>
+            <a:srgbClr val="BEE3F8"/>
+          </a:solidFill>
+          <a:ln/>
+        </p:spPr>
+      </p:sp>
+      <p:sp>
+        <p:nvSpPr>
+          <p:cNvPr id="8" name="Shape 6"/>
+          <p:cNvSpPr/>
+          <p:nvPr/>
+        </p:nvSpPr>
+        <p:spPr>
+          <a:xfrm>
+            <a:off x="566928" y="1700784"/>
+            <a:ext cx="36576" cy="1170432"/>
+          </a:xfrm>
+          <a:prstGeom prst="rect">
+            <a:avLst/>
+          </a:prstGeom>
+          <a:solidFill>
+            <a:srgbClr val="2B6CB0"/>
+          </a:solidFill>
+          <a:ln/>
+        </p:spPr>
+      </p:sp>
+      <p:sp>
+        <p:nvSpPr>
+          <p:cNvPr id="9" name="Text 7"/>
+          <p:cNvSpPr/>
+          <p:nvPr/>
+        </p:nvSpPr>
+        <p:spPr>
+          <a:xfrm>
+            <a:off x="749808" y="1755648"/>
+            <a:ext cx="10728655" cy="201168"/>
+          </a:xfrm>
+          <a:prstGeom prst="rect">
+            <a:avLst/>
+          </a:prstGeom>
+          <a:noFill/>
+          <a:ln/>
+        </p:spPr>
+        <p:txBody>
+          <a:bodyPr wrap="square" lIns="0" tIns="0" rIns="0" bIns="0" rtlCol="0" anchor="ctr"/>
+          <a:lstStyle/>
+          <a:p>
+            <a:pPr indent="0" marL="0">
+              <a:buNone/>
+            </a:pPr>
+            <a:r>
+              <a:rPr lang="en-US" sz="1050" b="1" dirty="0">
+                <a:solidFill>
+                  <a:srgbClr val="2B6CB0"/>
+                </a:solidFill>
+                <a:latin typeface="Pretendard" pitchFamily="34" charset="0"/>
+                <a:ea typeface="Pretendard" pitchFamily="34" charset="-122"/>
+                <a:cs typeface="Pretendard" pitchFamily="34" charset="-120"/>
+              </a:rPr>
+              <a:t>투자 가치 제안</a:t>
+            </a:r>
+            <a:endParaRPr lang="en-US" sz="1050" dirty="0"/>
+          </a:p>
+        </p:txBody>
+      </p:sp>
+      <p:sp>
+        <p:nvSpPr>
+          <p:cNvPr id="10" name="Text 8"/>
+          <p:cNvSpPr/>
+          <p:nvPr/>
+        </p:nvSpPr>
+        <p:spPr>
+          <a:xfrm>
+            <a:off x="749808" y="1975104"/>
+            <a:ext cx="10728655" cy="877824"/>
+          </a:xfrm>
+          <a:prstGeom prst="rect">
+            <a:avLst/>
+          </a:prstGeom>
+          <a:noFill/>
+          <a:ln/>
+        </p:spPr>
+        <p:txBody>
+          <a:bodyPr wrap="square" lIns="0" tIns="0" rIns="0" bIns="0" rtlCol="0" anchor="t"/>
+          <a:lstStyle/>
+          <a:p>
+            <a:pPr indent="0" marL="0">
+              <a:lnSpc>
+                <a:spcPct val="120000"/>
+              </a:lnSpc>
+              <a:buNone/>
+            </a:pPr>
+            <a:r>
+              <a:rPr lang="en-US" sz="930" dirty="0">
+                <a:solidFill>
+                  <a:srgbClr val="10161F"/>
+                </a:solidFill>
+                <a:latin typeface="Pretendard" pitchFamily="34" charset="0"/>
+                <a:ea typeface="Pretendard" pitchFamily="34" charset="-122"/>
+                <a:cs typeface="Pretendard" pitchFamily="34" charset="-120"/>
+              </a:rPr>
+              <a:t>연 순영업소득(NOI) 약 7.14억 원, 매입 Cap Rate 4.62%입니다.</a:t>
+            </a:r>
+            <a:endParaRPr lang="en-US" sz="930" dirty="0"/>
+          </a:p>
+        </p:txBody>
+      </p:sp>
+      <p:sp>
+        <p:nvSpPr>
+          <p:cNvPr id="11" name="Text 9"/>
+          <p:cNvSpPr/>
+          <p:nvPr/>
+        </p:nvSpPr>
+        <p:spPr>
+          <a:xfrm>
+            <a:off x="566928" y="6382512"/>
+            <a:ext cx="7315200" cy="219456"/>
+          </a:xfrm>
+          <a:prstGeom prst="rect">
+            <a:avLst/>
+          </a:prstGeom>
+          <a:noFill/>
+          <a:ln/>
+        </p:spPr>
+        <p:txBody>
+          <a:bodyPr wrap="square" lIns="0" tIns="0" rIns="0" bIns="0" rtlCol="0" anchor="ctr"/>
+          <a:lstStyle/>
+          <a:p>
+            <a:pPr indent="0" marL="0">
+              <a:buNone/>
+            </a:pPr>
+            <a:r>
+              <a:rPr lang="en-US" sz="800" dirty="0">
+                <a:solidFill>
+                  <a:srgbClr val="718096"/>
+                </a:solidFill>
+                <a:latin typeface="Pretendard" pitchFamily="34" charset="0"/>
+                <a:ea typeface="Pretendard" pitchFamily="34" charset="-122"/>
+                <a:cs typeface="Pretendard" pitchFamily="34" charset="-120"/>
+              </a:rPr>
+              <a:t>크리딜   |   </a:t>
+            </a:r>
+            <a:endParaRPr lang="en-US" sz="800" dirty="0"/>
+          </a:p>
+        </p:txBody>
+      </p:sp>
+      <p:sp>
+        <p:nvSpPr>
+          <p:cNvPr id="12" name="Text 10"/>
+          <p:cNvSpPr/>
+          <p:nvPr/>
+        </p:nvSpPr>
+        <p:spPr>
+          <a:xfrm>
+            <a:off x="10710367" y="6382512"/>
+            <a:ext cx="914400" cy="219456"/>
+          </a:xfrm>
+          <a:prstGeom prst="rect">
+            <a:avLst/>
+          </a:prstGeom>
+          <a:noFill/>
+          <a:ln/>
+        </p:spPr>
+        <p:txBody>
+          <a:bodyPr wrap="square" lIns="0" tIns="0" rIns="0" bIns="0" rtlCol="0" anchor="ctr"/>
+          <a:lstStyle/>
+          <a:p>
+            <a:pPr algn="r" indent="0" marL="0">
+              <a:buNone/>
+            </a:pPr>
+            <a:r>
+              <a:rPr lang="en-US" sz="900" b="1" dirty="0">
+                <a:solidFill>
+                  <a:srgbClr val="B98A2E"/>
+                </a:solidFill>
+                <a:latin typeface="Arial" pitchFamily="34" charset="0"/>
+                <a:ea typeface="Arial" pitchFamily="34" charset="-122"/>
+                <a:cs typeface="Arial" pitchFamily="34" charset="-120"/>
+              </a:rPr>
               <a:t>6</a:t>
             </a:r>
             <a:endParaRPr lang="en-US" sz="900" dirty="0"/>
@@ -10849,7 +7689,7 @@
                 <a:ea typeface="Arial" pitchFamily="34" charset="-122"/>
                 <a:cs typeface="Arial" pitchFamily="34" charset="-120"/>
               </a:rPr>
-              <a:t>Stability</a:t>
+              <a:t>Risk</a:t>
             </a:r>
             <a:endParaRPr lang="en-US" sz="950" dirty="0"/>
           </a:p>
@@ -10888,7 +7728,7 @@
                 <a:ea typeface="Pretendard" pitchFamily="34" charset="-122"/>
                 <a:cs typeface="Pretendard" pitchFamily="34" charset="-120"/>
               </a:rPr>
-              <a:t>임대안정성</a:t>
+              <a:t>리스크 점검</a:t>
             </a:r>
             <a:endParaRPr lang="en-US" sz="2300" dirty="0"/>
           </a:p>
@@ -10896,143 +7736,24 @@
       </p:sp>
       <p:sp>
         <p:nvSpPr>
-          <p:cNvPr id="6" name="Text 4"/>
-          <p:cNvSpPr/>
-          <p:nvPr/>
-        </p:nvSpPr>
-        <p:spPr>
-          <a:xfrm>
-            <a:off x="566928" y="1371600"/>
-            <a:ext cx="6858000" cy="237744"/>
-          </a:xfrm>
-          <a:prstGeom prst="rect">
-            <a:avLst/>
-          </a:prstGeom>
-          <a:noFill/>
-          <a:ln/>
-        </p:spPr>
-        <p:txBody>
-          <a:bodyPr wrap="square" lIns="0" tIns="0" rIns="0" bIns="0" rtlCol="0" anchor="ctr"/>
-          <a:lstStyle/>
-          <a:p>
-            <a:pPr indent="0" marL="0">
-              <a:buNone/>
-            </a:pPr>
-            <a:r>
-              <a:rPr lang="en-US" sz="1100" b="1" dirty="0">
-                <a:solidFill>
-                  <a:srgbClr val="10161F"/>
-                </a:solidFill>
-                <a:latin typeface="Pretendard" pitchFamily="34" charset="0"/>
-                <a:ea typeface="Pretendard" pitchFamily="34" charset="-122"/>
-                <a:cs typeface="Pretendard" pitchFamily="34" charset="-120"/>
-              </a:rPr>
-              <a:t>건축물 개요 및 물리 스펙</a:t>
-            </a:r>
-            <a:endParaRPr lang="en-US" sz="1100" dirty="0"/>
-          </a:p>
-        </p:txBody>
-      </p:sp>
-      <p:sp>
-        <p:nvSpPr>
-          <p:cNvPr id="7" name="Text 5"/>
-          <p:cNvSpPr/>
-          <p:nvPr/>
-        </p:nvSpPr>
-        <p:spPr>
-          <a:xfrm>
-            <a:off x="566928" y="1645920"/>
-            <a:ext cx="2606040" cy="402336"/>
-          </a:xfrm>
-          <a:prstGeom prst="rect">
-            <a:avLst/>
-          </a:prstGeom>
-          <a:noFill/>
-          <a:ln/>
-        </p:spPr>
-        <p:txBody>
-          <a:bodyPr wrap="square" lIns="0" tIns="0" rIns="0" bIns="0" rtlCol="0" anchor="ctr"/>
-          <a:lstStyle/>
-          <a:p>
-            <a:pPr indent="0" marL="0">
-              <a:lnSpc>
-                <a:spcPct val="120000"/>
-              </a:lnSpc>
-              <a:buNone/>
-            </a:pPr>
-            <a:r>
-              <a:rPr lang="en-US" sz="1400" dirty="0">
-                <a:solidFill>
-                  <a:srgbClr val="718096"/>
-                </a:solidFill>
-                <a:latin typeface="Pretendard" pitchFamily="34" charset="0"/>
-                <a:ea typeface="Pretendard" pitchFamily="34" charset="-122"/>
-                <a:cs typeface="Pretendard" pitchFamily="34" charset="-120"/>
-              </a:rPr>
-              <a:t>1F</a:t>
-            </a:r>
-            <a:endParaRPr lang="en-US" sz="1400" dirty="0"/>
-          </a:p>
-        </p:txBody>
-      </p:sp>
-      <p:sp>
-        <p:nvSpPr>
-          <p:cNvPr id="8" name="Text 6"/>
-          <p:cNvSpPr/>
-          <p:nvPr/>
-        </p:nvSpPr>
-        <p:spPr>
-          <a:xfrm>
-            <a:off x="3172968" y="1645920"/>
-            <a:ext cx="4251960" cy="402336"/>
-          </a:xfrm>
-          <a:prstGeom prst="rect">
-            <a:avLst/>
-          </a:prstGeom>
-          <a:noFill/>
-          <a:ln/>
-        </p:spPr>
-        <p:txBody>
-          <a:bodyPr wrap="square" lIns="0" tIns="0" rIns="0" bIns="0" rtlCol="0" anchor="ctr"/>
-          <a:lstStyle/>
-          <a:p>
-            <a:pPr indent="0" marL="0">
-              <a:lnSpc>
-                <a:spcPct val="120000"/>
-              </a:lnSpc>
-              <a:buNone/>
-            </a:pPr>
-            <a:r>
-              <a:rPr lang="en-US" sz="1400" b="1" dirty="0">
-                <a:solidFill>
-                  <a:srgbClr val="10161F"/>
-                </a:solidFill>
-                <a:latin typeface="Pretendard" pitchFamily="34" charset="0"/>
-                <a:ea typeface="Pretendard" pitchFamily="34" charset="-122"/>
-                <a:cs typeface="Pretendard" pitchFamily="34" charset="-120"/>
-              </a:rPr>
-              <a:t>약국</a:t>
-            </a:r>
-            <a:endParaRPr lang="en-US" sz="1400" dirty="0"/>
-          </a:p>
-        </p:txBody>
-      </p:sp>
-      <p:sp>
-        <p:nvSpPr>
-          <p:cNvPr id="9" name="Shape 7"/>
-          <p:cNvSpPr/>
-          <p:nvPr/>
-        </p:nvSpPr>
-        <p:spPr>
-          <a:xfrm>
-            <a:off x="566928" y="2048256"/>
-            <a:ext cx="6858000" cy="0"/>
-          </a:xfrm>
-          <a:prstGeom prst="line">
-            <a:avLst/>
-          </a:prstGeom>
-          <a:noFill/>
-          <a:ln w="3810">
+          <p:cNvPr id="6" name="Shape 4"/>
+          <p:cNvSpPr/>
+          <p:nvPr/>
+        </p:nvSpPr>
+        <p:spPr>
+          <a:xfrm>
+            <a:off x="566928" y="1417320"/>
+            <a:ext cx="5400904" cy="3657600"/>
+          </a:xfrm>
+          <a:prstGeom prst="roundRect">
+            <a:avLst>
+              <a:gd name="adj" fmla="val 1500"/>
+            </a:avLst>
+          </a:prstGeom>
+          <a:solidFill>
+            <a:srgbClr val="F7FAFC"/>
+          </a:solidFill>
+          <a:ln w="6350">
             <a:solidFill>
               <a:srgbClr val="CBD5E0"/>
             </a:solidFill>
@@ -11042,14 +7763,34 @@
       </p:sp>
       <p:sp>
         <p:nvSpPr>
-          <p:cNvPr id="10" name="Text 8"/>
-          <p:cNvSpPr/>
-          <p:nvPr/>
-        </p:nvSpPr>
-        <p:spPr>
-          <a:xfrm>
-            <a:off x="566928" y="2048256"/>
-            <a:ext cx="2606040" cy="402336"/>
+          <p:cNvPr id="7" name="Shape 5"/>
+          <p:cNvSpPr/>
+          <p:nvPr/>
+        </p:nvSpPr>
+        <p:spPr>
+          <a:xfrm>
+            <a:off x="566928" y="1417320"/>
+            <a:ext cx="5400904" cy="45720"/>
+          </a:xfrm>
+          <a:prstGeom prst="rect">
+            <a:avLst/>
+          </a:prstGeom>
+          <a:solidFill>
+            <a:srgbClr val="B98A2E"/>
+          </a:solidFill>
+          <a:ln/>
+        </p:spPr>
+      </p:sp>
+      <p:sp>
+        <p:nvSpPr>
+          <p:cNvPr id="8" name="Text 6"/>
+          <p:cNvSpPr/>
+          <p:nvPr/>
+        </p:nvSpPr>
+        <p:spPr>
+          <a:xfrm>
+            <a:off x="795528" y="1618488"/>
+            <a:ext cx="4943704" cy="292608"/>
           </a:xfrm>
           <a:prstGeom prst="rect">
             <a:avLst/>
@@ -11062,55 +7803,51 @@
           <a:lstStyle/>
           <a:p>
             <a:pPr indent="0" marL="0">
-              <a:lnSpc>
-                <a:spcPct val="120000"/>
-              </a:lnSpc>
-              <a:buNone/>
-            </a:pPr>
-            <a:r>
-              <a:rPr lang="en-US" sz="1400" dirty="0">
-                <a:solidFill>
-                  <a:srgbClr val="718096"/>
+              <a:buNone/>
+            </a:pPr>
+            <a:r>
+              <a:rPr lang="en-US" sz="1350" b="1" dirty="0">
+                <a:solidFill>
+                  <a:srgbClr val="977024"/>
                 </a:solidFill>
                 <a:latin typeface="Pretendard" pitchFamily="34" charset="0"/>
                 <a:ea typeface="Pretendard" pitchFamily="34" charset="-122"/>
                 <a:cs typeface="Pretendard" pitchFamily="34" charset="-120"/>
               </a:rPr>
-              <a:t>2F</a:t>
-            </a:r>
-            <a:endParaRPr lang="en-US" sz="1400" dirty="0"/>
-          </a:p>
-        </p:txBody>
-      </p:sp>
-      <p:sp>
-        <p:nvSpPr>
-          <p:cNvPr id="11" name="Text 9"/>
-          <p:cNvSpPr/>
-          <p:nvPr/>
-        </p:nvSpPr>
-        <p:spPr>
-          <a:xfrm>
-            <a:off x="3172968" y="2048256"/>
-            <a:ext cx="4251960" cy="402336"/>
-          </a:xfrm>
-          <a:prstGeom prst="rect">
-            <a:avLst/>
-          </a:prstGeom>
-          <a:noFill/>
-          <a:ln/>
-        </p:spPr>
-        <p:txBody>
-          <a:bodyPr wrap="square" lIns="0" tIns="0" rIns="0" bIns="0" rtlCol="0" anchor="ctr"/>
+              <a:t>메디컬 단일업종 집중</a:t>
+            </a:r>
+            <a:endParaRPr lang="en-US" sz="1350" dirty="0"/>
+          </a:p>
+        </p:txBody>
+      </p:sp>
+      <p:sp>
+        <p:nvSpPr>
+          <p:cNvPr id="9" name="Text 7"/>
+          <p:cNvSpPr/>
+          <p:nvPr/>
+        </p:nvSpPr>
+        <p:spPr>
+          <a:xfrm>
+            <a:off x="795528" y="1947672"/>
+            <a:ext cx="4943704" cy="365760"/>
+          </a:xfrm>
+          <a:prstGeom prst="rect">
+            <a:avLst/>
+          </a:prstGeom>
+          <a:noFill/>
+          <a:ln/>
+        </p:spPr>
+        <p:txBody>
+          <a:bodyPr wrap="square" lIns="0" tIns="0" rIns="0" bIns="0" rtlCol="0" anchor="ctr">
+            <a:normAutofit/>
+          </a:bodyPr>
           <a:lstStyle/>
           <a:p>
             <a:pPr indent="0" marL="0">
-              <a:lnSpc>
-                <a:spcPct val="120000"/>
-              </a:lnSpc>
-              <a:buNone/>
-            </a:pPr>
-            <a:r>
-              <a:rPr lang="en-US" sz="1400" b="1" dirty="0">
+              <a:buNone/>
+            </a:pPr>
+            <a:r>
+              <a:rPr lang="en-US" sz="1250" b="1" dirty="0">
                 <a:solidFill>
                   <a:srgbClr val="10161F"/>
                 </a:solidFill>
@@ -11118,30 +7855,79 @@
                 <a:ea typeface="Pretendard" pitchFamily="34" charset="-122"/>
                 <a:cs typeface="Pretendard" pitchFamily="34" charset="-120"/>
               </a:rPr>
-              <a:t>안과</a:t>
-            </a:r>
-            <a:endParaRPr lang="en-US" sz="1400" dirty="0"/>
-          </a:p>
-        </p:txBody>
-      </p:sp>
-      <p:sp>
-        <p:nvSpPr>
-          <p:cNvPr id="12" name="Shape 10"/>
-          <p:cNvSpPr/>
-          <p:nvPr/>
-        </p:nvSpPr>
-        <p:spPr>
-          <a:xfrm>
-            <a:off x="7604608" y="1371600"/>
-            <a:ext cx="0" cy="4754880"/>
-          </a:xfrm>
-          <a:prstGeom prst="line">
-            <a:avLst/>
-          </a:prstGeom>
-          <a:noFill/>
-          <a:ln w="8890">
+              <a:t>전층 의료</a:t>
+            </a:r>
+            <a:endParaRPr lang="en-US" sz="1250" dirty="0"/>
+          </a:p>
+        </p:txBody>
+      </p:sp>
+      <p:sp>
+        <p:nvSpPr>
+          <p:cNvPr id="10" name="Text 8"/>
+          <p:cNvSpPr/>
+          <p:nvPr/>
+        </p:nvSpPr>
+        <p:spPr>
+          <a:xfrm>
+            <a:off x="795528" y="2377440"/>
+            <a:ext cx="4943704" cy="2606040"/>
+          </a:xfrm>
+          <a:prstGeom prst="rect">
+            <a:avLst/>
+          </a:prstGeom>
+          <a:noFill/>
+          <a:ln/>
+        </p:spPr>
+        <p:txBody>
+          <a:bodyPr wrap="square" lIns="0" tIns="0" rIns="0" bIns="0" rtlCol="0" anchor="t">
+            <a:normAutofit/>
+          </a:bodyPr>
+          <a:lstStyle/>
+          <a:p>
+            <a:pPr marL="342900" indent="-342900">
+              <a:lnSpc>
+                <a:spcPct val="125000"/>
+              </a:lnSpc>
+              <a:buSzPct val="100000"/>
+              <a:buChar char="•"/>
+            </a:pPr>
+            <a:r>
+              <a:rPr lang="en-US" sz="1100" dirty="0">
+                <a:solidFill>
+                  <a:srgbClr val="10161F"/>
+                </a:solidFill>
+                <a:latin typeface="Pretendard" pitchFamily="34" charset="0"/>
+                <a:ea typeface="Pretendard" pitchFamily="34" charset="-122"/>
+                <a:cs typeface="Pretendard" pitchFamily="34" charset="-120"/>
+              </a:rPr>
+              <a:t>업종 다각화 검토</a:t>
+            </a:r>
+            <a:endParaRPr lang="en-US" sz="1100" dirty="0"/>
+          </a:p>
+        </p:txBody>
+      </p:sp>
+      <p:sp>
+        <p:nvSpPr>
+          <p:cNvPr id="11" name="Shape 9"/>
+          <p:cNvSpPr/>
+          <p:nvPr/>
+        </p:nvSpPr>
+        <p:spPr>
+          <a:xfrm>
+            <a:off x="6223864" y="1417320"/>
+            <a:ext cx="5400904" cy="3657600"/>
+          </a:xfrm>
+          <a:prstGeom prst="roundRect">
+            <a:avLst>
+              <a:gd name="adj" fmla="val 1500"/>
+            </a:avLst>
+          </a:prstGeom>
+          <a:solidFill>
+            <a:srgbClr val="F7FAFC"/>
+          </a:solidFill>
+          <a:ln w="6350">
             <a:solidFill>
-              <a:srgbClr val="B98A2E"/>
+              <a:srgbClr val="CBD5E0"/>
             </a:solidFill>
             <a:prstDash val="solid"/>
           </a:ln>
@@ -11149,56 +7935,34 @@
       </p:sp>
       <p:sp>
         <p:nvSpPr>
-          <p:cNvPr id="13" name="Shape 11"/>
-          <p:cNvSpPr/>
-          <p:nvPr/>
-        </p:nvSpPr>
-        <p:spPr>
-          <a:xfrm>
-            <a:off x="7784287" y="1645920"/>
-            <a:ext cx="3840480" cy="1645920"/>
-          </a:xfrm>
-          <a:prstGeom prst="roundRect">
-            <a:avLst>
-              <a:gd name="adj" fmla="val 3333"/>
-            </a:avLst>
+          <p:cNvPr id="12" name="Shape 10"/>
+          <p:cNvSpPr/>
+          <p:nvPr/>
+        </p:nvSpPr>
+        <p:spPr>
+          <a:xfrm>
+            <a:off x="6223864" y="1417320"/>
+            <a:ext cx="5400904" cy="45720"/>
+          </a:xfrm>
+          <a:prstGeom prst="rect">
+            <a:avLst/>
           </a:prstGeom>
           <a:solidFill>
-            <a:srgbClr val="F3EBDA"/>
+            <a:srgbClr val="B98A2E"/>
           </a:solidFill>
           <a:ln/>
         </p:spPr>
       </p:sp>
       <p:sp>
         <p:nvSpPr>
-          <p:cNvPr id="14" name="Shape 12"/>
-          <p:cNvSpPr/>
-          <p:nvPr/>
-        </p:nvSpPr>
-        <p:spPr>
-          <a:xfrm>
-            <a:off x="7784287" y="1700784"/>
-            <a:ext cx="36576" cy="1536192"/>
-          </a:xfrm>
-          <a:prstGeom prst="rect">
-            <a:avLst/>
-          </a:prstGeom>
-          <a:solidFill>
-            <a:srgbClr val="977024"/>
-          </a:solidFill>
-          <a:ln/>
-        </p:spPr>
-      </p:sp>
-      <p:sp>
-        <p:nvSpPr>
-          <p:cNvPr id="15" name="Text 13"/>
-          <p:cNvSpPr/>
-          <p:nvPr/>
-        </p:nvSpPr>
-        <p:spPr>
-          <a:xfrm>
-            <a:off x="7967167" y="1755648"/>
-            <a:ext cx="3511296" cy="201168"/>
+          <p:cNvPr id="13" name="Text 11"/>
+          <p:cNvSpPr/>
+          <p:nvPr/>
+        </p:nvSpPr>
+        <p:spPr>
+          <a:xfrm>
+            <a:off x="6452464" y="1618488"/>
+            <a:ext cx="4943704" cy="292608"/>
           </a:xfrm>
           <a:prstGeom prst="rect">
             <a:avLst/>
@@ -11213,85 +7977,206 @@
             <a:pPr indent="0" marL="0">
               <a:buNone/>
             </a:pPr>
-            <a:endParaRPr lang="en-US" sz="1050" dirty="0"/>
-          </a:p>
-        </p:txBody>
-      </p:sp>
-      <p:sp>
-        <p:nvSpPr>
-          <p:cNvPr id="16" name="Text 14"/>
-          <p:cNvSpPr/>
-          <p:nvPr/>
-        </p:nvSpPr>
-        <p:spPr>
-          <a:xfrm>
-            <a:off x="7967167" y="1975104"/>
-            <a:ext cx="3511296" cy="1243584"/>
-          </a:xfrm>
-          <a:prstGeom prst="rect">
-            <a:avLst/>
-          </a:prstGeom>
-          <a:noFill/>
-          <a:ln/>
-        </p:spPr>
-        <p:txBody>
-          <a:bodyPr wrap="square" lIns="0" tIns="0" rIns="0" bIns="0" rtlCol="0" anchor="t"/>
-          <a:lstStyle/>
-          <a:p>
-            <a:pPr indent="0" marL="0">
-              <a:lnSpc>
-                <a:spcPct val="120000"/>
-              </a:lnSpc>
-              <a:buNone/>
-            </a:pPr>
-            <a:r>
-              <a:rPr lang="en-US" sz="930" dirty="0">
-                <a:solidFill>
-                  <a:srgbClr val="10161F"/>
+            <a:r>
+              <a:rPr lang="en-US" sz="1350" b="1" dirty="0">
+                <a:solidFill>
+                  <a:srgbClr val="977024"/>
                 </a:solidFill>
                 <a:latin typeface="Pretendard" pitchFamily="34" charset="0"/>
                 <a:ea typeface="Pretendard" pitchFamily="34" charset="-122"/>
                 <a:cs typeface="Pretendard" pitchFamily="34" charset="-120"/>
               </a:rPr>
-              <a:t>전층 메디컬 만실 운영 중이며 WALE 평균 3.5년입니다.</a:t>
-            </a:r>
-            <a:endParaRPr lang="en-US" sz="930" dirty="0"/>
-          </a:p>
-        </p:txBody>
-      </p:sp>
-      <p:sp>
-        <p:nvSpPr>
-          <p:cNvPr id="17" name="Text 15"/>
-          <p:cNvSpPr/>
-          <p:nvPr/>
-        </p:nvSpPr>
-        <p:spPr>
-          <a:xfrm>
-            <a:off x="566928" y="6382512"/>
-            <a:ext cx="7315200" cy="219456"/>
-          </a:xfrm>
-          <a:prstGeom prst="rect">
-            <a:avLst/>
-          </a:prstGeom>
-          <a:noFill/>
-          <a:ln/>
-        </p:spPr>
-        <p:txBody>
-          <a:bodyPr wrap="square" lIns="0" tIns="0" rIns="0" bIns="0" rtlCol="0" anchor="ctr"/>
+              <a:t>금리 변동</a:t>
+            </a:r>
+            <a:endParaRPr lang="en-US" sz="1350" dirty="0"/>
+          </a:p>
+        </p:txBody>
+      </p:sp>
+      <p:sp>
+        <p:nvSpPr>
+          <p:cNvPr id="14" name="Text 12"/>
+          <p:cNvSpPr/>
+          <p:nvPr/>
+        </p:nvSpPr>
+        <p:spPr>
+          <a:xfrm>
+            <a:off x="6452464" y="1947672"/>
+            <a:ext cx="4943704" cy="365760"/>
+          </a:xfrm>
+          <a:prstGeom prst="rect">
+            <a:avLst/>
+          </a:prstGeom>
+          <a:noFill/>
+          <a:ln/>
+        </p:spPr>
+        <p:txBody>
+          <a:bodyPr wrap="square" lIns="0" tIns="0" rIns="0" bIns="0" rtlCol="0" anchor="ctr">
+            <a:normAutofit/>
+          </a:bodyPr>
           <a:lstStyle/>
           <a:p>
             <a:pPr indent="0" marL="0">
               <a:buNone/>
             </a:pPr>
             <a:r>
-              <a:rPr lang="en-US" sz="800" dirty="0">
-                <a:solidFill>
-                  <a:srgbClr val="718096"/>
+              <a:rPr lang="en-US" sz="1250" b="1" dirty="0">
+                <a:solidFill>
+                  <a:srgbClr val="10161F"/>
                 </a:solidFill>
                 <a:latin typeface="Pretendard" pitchFamily="34" charset="0"/>
                 <a:ea typeface="Pretendard" pitchFamily="34" charset="-122"/>
                 <a:cs typeface="Pretendard" pitchFamily="34" charset="-120"/>
               </a:rPr>
+              <a:t>4.1% 고정</a:t>
+            </a:r>
+            <a:endParaRPr lang="en-US" sz="1250" dirty="0"/>
+          </a:p>
+        </p:txBody>
+      </p:sp>
+      <p:sp>
+        <p:nvSpPr>
+          <p:cNvPr id="15" name="Text 13"/>
+          <p:cNvSpPr/>
+          <p:nvPr/>
+        </p:nvSpPr>
+        <p:spPr>
+          <a:xfrm>
+            <a:off x="6452464" y="2377440"/>
+            <a:ext cx="4943704" cy="2606040"/>
+          </a:xfrm>
+          <a:prstGeom prst="rect">
+            <a:avLst/>
+          </a:prstGeom>
+          <a:noFill/>
+          <a:ln/>
+        </p:spPr>
+        <p:txBody>
+          <a:bodyPr wrap="square" lIns="0" tIns="0" rIns="0" bIns="0" rtlCol="0" anchor="t">
+            <a:normAutofit/>
+          </a:bodyPr>
+          <a:lstStyle/>
+          <a:p>
+            <a:pPr marL="342900" indent="-342900">
+              <a:lnSpc>
+                <a:spcPct val="125000"/>
+              </a:lnSpc>
+              <a:buSzPct val="100000"/>
+              <a:buChar char="•"/>
+            </a:pPr>
+            <a:r>
+              <a:rPr lang="en-US" sz="1100" dirty="0">
+                <a:solidFill>
+                  <a:srgbClr val="10161F"/>
+                </a:solidFill>
+                <a:latin typeface="Pretendard" pitchFamily="34" charset="0"/>
+                <a:ea typeface="Pretendard" pitchFamily="34" charset="-122"/>
+                <a:cs typeface="Pretendard" pitchFamily="34" charset="-120"/>
+              </a:rPr>
+              <a:t>승계 대출 활용</a:t>
+            </a:r>
+            <a:endParaRPr lang="en-US" sz="1100" dirty="0"/>
+          </a:p>
+        </p:txBody>
+      </p:sp>
+      <p:sp>
+        <p:nvSpPr>
+          <p:cNvPr id="16" name="Shape 14"/>
+          <p:cNvSpPr/>
+          <p:nvPr/>
+        </p:nvSpPr>
+        <p:spPr>
+          <a:xfrm>
+            <a:off x="566928" y="5193792"/>
+            <a:ext cx="11057839" cy="621792"/>
+          </a:xfrm>
+          <a:prstGeom prst="roundRect">
+            <a:avLst>
+              <a:gd name="adj" fmla="val 8824"/>
+            </a:avLst>
+          </a:prstGeom>
+          <a:solidFill>
+            <a:srgbClr val="F7FAFC"/>
+          </a:solidFill>
+          <a:ln w="6350">
+            <a:solidFill>
+              <a:srgbClr val="CBD5E0"/>
+            </a:solidFill>
+            <a:prstDash val="solid"/>
+          </a:ln>
+        </p:spPr>
+      </p:sp>
+      <p:sp>
+        <p:nvSpPr>
+          <p:cNvPr id="17" name="Text 15"/>
+          <p:cNvSpPr/>
+          <p:nvPr/>
+        </p:nvSpPr>
+        <p:spPr>
+          <a:xfrm>
+            <a:off x="795528" y="5193792"/>
+            <a:ext cx="10600639" cy="621792"/>
+          </a:xfrm>
+          <a:prstGeom prst="rect">
+            <a:avLst/>
+          </a:prstGeom>
+          <a:noFill/>
+          <a:ln/>
+        </p:spPr>
+        <p:txBody>
+          <a:bodyPr wrap="square" lIns="0" tIns="0" rIns="0" bIns="0" rtlCol="0" anchor="ctr"/>
+          <a:lstStyle/>
+          <a:p>
+            <a:pPr indent="0" marL="0">
+              <a:buNone/>
+            </a:pPr>
+            <a:r>
+              <a:rPr lang="en-US" sz="1100" dirty="0">
+                <a:solidFill>
+                  <a:srgbClr val="10161F"/>
+                </a:solidFill>
+                <a:latin typeface="Pretendard" pitchFamily="34" charset="0"/>
+                <a:ea typeface="Pretendard" pitchFamily="34" charset="-122"/>
+                <a:cs typeface="Pretendard" pitchFamily="34" charset="-120"/>
+              </a:rPr>
+              <a:t>※ 본 리스크 체크는 공부 및 브로커 확인 기반이며, 매수 전 전문 실사팀(변호사/건축사)을 통한 정밀 실사가 필요합니다.</a:t>
+            </a:r>
+            <a:endParaRPr lang="en-US" sz="1100" dirty="0"/>
+          </a:p>
+        </p:txBody>
+      </p:sp>
+      <p:sp>
+        <p:nvSpPr>
+          <p:cNvPr id="18" name="Text 16"/>
+          <p:cNvSpPr/>
+          <p:nvPr/>
+        </p:nvSpPr>
+        <p:spPr>
+          <a:xfrm>
+            <a:off x="566928" y="6382512"/>
+            <a:ext cx="7315200" cy="219456"/>
+          </a:xfrm>
+          <a:prstGeom prst="rect">
+            <a:avLst/>
+          </a:prstGeom>
+          <a:noFill/>
+          <a:ln/>
+        </p:spPr>
+        <p:txBody>
+          <a:bodyPr wrap="square" lIns="0" tIns="0" rIns="0" bIns="0" rtlCol="0" anchor="ctr"/>
+          <a:lstStyle/>
+          <a:p>
+            <a:pPr indent="0" marL="0">
+              <a:buNone/>
+            </a:pPr>
+            <a:r>
+              <a:rPr lang="en-US" sz="800" dirty="0">
+                <a:solidFill>
+                  <a:srgbClr val="718096"/>
+                </a:solidFill>
+                <a:latin typeface="Pretendard" pitchFamily="34" charset="0"/>
+                <a:ea typeface="Pretendard" pitchFamily="34" charset="-122"/>
+                <a:cs typeface="Pretendard" pitchFamily="34" charset="-120"/>
+              </a:rPr>
               <a:t>크리딜   |   </a:t>
             </a:r>
             <a:endParaRPr lang="en-US" sz="800" dirty="0"/>
@@ -11300,7 +8185,7 @@
       </p:sp>
       <p:sp>
         <p:nvSpPr>
-          <p:cNvPr id="18" name="Text 16"/>
+          <p:cNvPr id="19" name="Text 17"/>
           <p:cNvSpPr/>
           <p:nvPr/>
         </p:nvSpPr>
@@ -11461,7 +8346,7 @@
                 <a:ea typeface="Arial" pitchFamily="34" charset="-122"/>
                 <a:cs typeface="Arial" pitchFamily="34" charset="-120"/>
               </a:rPr>
-              <a:t>Profit</a:t>
+              <a:t>Thesis</a:t>
             </a:r>
             <a:endParaRPr lang="en-US" sz="950" dirty="0"/>
           </a:p>
@@ -11500,7 +8385,7 @@
                 <a:ea typeface="Pretendard" pitchFamily="34" charset="-122"/>
                 <a:cs typeface="Pretendard" pitchFamily="34" charset="-120"/>
               </a:rPr>
-              <a:t>수익성 분석</a:t>
+              <a:t>투자 포인트</a:t>
             </a:r>
             <a:endParaRPr lang="en-US" sz="2300" dirty="0"/>
           </a:p>
@@ -11514,16 +8399,20 @@
         </p:nvSpPr>
         <p:spPr>
           <a:xfrm>
-            <a:off x="566928" y="1325880"/>
-            <a:ext cx="11057839" cy="0"/>
-          </a:xfrm>
-          <a:prstGeom prst="line">
-            <a:avLst/>
-          </a:prstGeom>
-          <a:noFill/>
-          <a:ln w="19050">
+            <a:off x="566928" y="4983480"/>
+            <a:ext cx="11057839" cy="804672"/>
+          </a:xfrm>
+          <a:prstGeom prst="roundRect">
+            <a:avLst>
+              <a:gd name="adj" fmla="val 6818"/>
+            </a:avLst>
+          </a:prstGeom>
+          <a:solidFill>
+            <a:srgbClr val="F3EBDA"/>
+          </a:solidFill>
+          <a:ln w="10160">
             <a:solidFill>
-              <a:srgbClr val="B98A2E"/>
+              <a:srgbClr val="D9B668"/>
             </a:solidFill>
             <a:prstDash val="solid"/>
           </a:ln>
@@ -11531,56 +8420,14 @@
       </p:sp>
       <p:sp>
         <p:nvSpPr>
-          <p:cNvPr id="7" name="Shape 5"/>
-          <p:cNvSpPr/>
-          <p:nvPr/>
-        </p:nvSpPr>
-        <p:spPr>
-          <a:xfrm>
-            <a:off x="566928" y="1645920"/>
-            <a:ext cx="11057839" cy="1280160"/>
-          </a:xfrm>
-          <a:prstGeom prst="roundRect">
-            <a:avLst>
-              <a:gd name="adj" fmla="val 4286"/>
-            </a:avLst>
-          </a:prstGeom>
-          <a:solidFill>
-            <a:srgbClr val="BEE3F8"/>
-          </a:solidFill>
-          <a:ln/>
-        </p:spPr>
-      </p:sp>
-      <p:sp>
-        <p:nvSpPr>
-          <p:cNvPr id="8" name="Shape 6"/>
-          <p:cNvSpPr/>
-          <p:nvPr/>
-        </p:nvSpPr>
-        <p:spPr>
-          <a:xfrm>
-            <a:off x="566928" y="1700784"/>
-            <a:ext cx="36576" cy="1170432"/>
-          </a:xfrm>
-          <a:prstGeom prst="rect">
-            <a:avLst/>
-          </a:prstGeom>
-          <a:solidFill>
-            <a:srgbClr val="2B6CB0"/>
-          </a:solidFill>
-          <a:ln/>
-        </p:spPr>
-      </p:sp>
-      <p:sp>
-        <p:nvSpPr>
-          <p:cNvPr id="9" name="Text 7"/>
-          <p:cNvSpPr/>
-          <p:nvPr/>
-        </p:nvSpPr>
-        <p:spPr>
-          <a:xfrm>
-            <a:off x="749808" y="1755648"/>
-            <a:ext cx="10728655" cy="201168"/>
+          <p:cNvPr id="7" name="Text 5"/>
+          <p:cNvSpPr/>
+          <p:nvPr/>
+        </p:nvSpPr>
+        <p:spPr>
+          <a:xfrm>
+            <a:off x="749808" y="5093208"/>
+            <a:ext cx="1691640" cy="256032"/>
           </a:xfrm>
           <a:prstGeom prst="rect">
             <a:avLst/>
@@ -11598,13 +8445,13 @@
             <a:r>
               <a:rPr lang="en-US" sz="1050" b="1" dirty="0">
                 <a:solidFill>
-                  <a:srgbClr val="2B6CB0"/>
+                  <a:srgbClr val="977024"/>
                 </a:solidFill>
                 <a:latin typeface="Pretendard" pitchFamily="34" charset="0"/>
                 <a:ea typeface="Pretendard" pitchFamily="34" charset="-122"/>
                 <a:cs typeface="Pretendard" pitchFamily="34" charset="-120"/>
               </a:rPr>
-              <a:t>투자 가치 제안</a:t>
+              <a:t>종합 가치 제안</a:t>
             </a:r>
             <a:endParaRPr lang="en-US" sz="1050" dirty="0"/>
           </a:p>
@@ -11612,33 +8459,33 @@
       </p:sp>
       <p:sp>
         <p:nvSpPr>
-          <p:cNvPr id="10" name="Text 8"/>
-          <p:cNvSpPr/>
-          <p:nvPr/>
-        </p:nvSpPr>
-        <p:spPr>
-          <a:xfrm>
-            <a:off x="749808" y="1975104"/>
-            <a:ext cx="10728655" cy="877824"/>
-          </a:xfrm>
-          <a:prstGeom prst="rect">
-            <a:avLst/>
-          </a:prstGeom>
-          <a:noFill/>
-          <a:ln/>
-        </p:spPr>
-        <p:txBody>
-          <a:bodyPr wrap="square" lIns="0" tIns="0" rIns="0" bIns="0" rtlCol="0" anchor="t"/>
+          <p:cNvPr id="8" name="Text 6"/>
+          <p:cNvSpPr/>
+          <p:nvPr/>
+        </p:nvSpPr>
+        <p:spPr>
+          <a:xfrm>
+            <a:off x="2487168" y="5056632"/>
+            <a:ext cx="8954719" cy="658368"/>
+          </a:xfrm>
+          <a:prstGeom prst="rect">
+            <a:avLst/>
+          </a:prstGeom>
+          <a:noFill/>
+          <a:ln/>
+        </p:spPr>
+        <p:txBody>
+          <a:bodyPr wrap="square" lIns="0" tIns="0" rIns="0" bIns="0" rtlCol="0" anchor="ctr"/>
           <a:lstStyle/>
           <a:p>
             <a:pPr indent="0" marL="0">
               <a:lnSpc>
-                <a:spcPct val="120000"/>
+                <a:spcPct val="125000"/>
               </a:lnSpc>
               <a:buNone/>
             </a:pPr>
             <a:r>
-              <a:rPr lang="en-US" sz="930" dirty="0">
+              <a:rPr lang="en-US" sz="1100" dirty="0">
                 <a:solidFill>
                   <a:srgbClr val="10161F"/>
                 </a:solidFill>
@@ -11646,15 +8493,15 @@
                 <a:ea typeface="Pretendard" pitchFamily="34" charset="-122"/>
                 <a:cs typeface="Pretendard" pitchFamily="34" charset="-120"/>
               </a:rPr>
-              <a:t>연 순영업소득(NOI) 약 7.14억 원, 매입 Cap Rate 4.62%입니다.</a:t>
-            </a:r>
-            <a:endParaRPr lang="en-US" sz="930" dirty="0"/>
-          </a:p>
-        </p:txBody>
-      </p:sp>
-      <p:sp>
-        <p:nvSpPr>
-          <p:cNvPr id="11" name="Text 9"/>
+              <a:t>관점에서 안정적 월 임대수익과 우량 메디컬 테넌트를 보유한 핵심 투자 자산입니다.</a:t>
+            </a:r>
+            <a:endParaRPr lang="en-US" sz="1100" dirty="0"/>
+          </a:p>
+        </p:txBody>
+      </p:sp>
+      <p:sp>
+        <p:nvSpPr>
+          <p:cNvPr id="9" name="Text 7"/>
           <p:cNvSpPr/>
           <p:nvPr/>
         </p:nvSpPr>
@@ -11693,7 +8540,7 @@
       </p:sp>
       <p:sp>
         <p:nvSpPr>
-          <p:cNvPr id="12" name="Text 10"/>
+          <p:cNvPr id="10" name="Text 8"/>
           <p:cNvSpPr/>
           <p:nvPr/>
         </p:nvSpPr>
@@ -11854,7 +8701,7 @@
                 <a:ea typeface="Arial" pitchFamily="34" charset="-122"/>
                 <a:cs typeface="Arial" pitchFamily="34" charset="-120"/>
               </a:rPr>
-              <a:t>Comps</a:t>
+              <a:t>Process</a:t>
             </a:r>
             <a:endParaRPr lang="en-US" sz="950" dirty="0"/>
           </a:p>
@@ -11893,7 +8740,7 @@
                 <a:ea typeface="Pretendard" pitchFamily="34" charset="-122"/>
                 <a:cs typeface="Pretendard" pitchFamily="34" charset="-120"/>
               </a:rPr>
-              <a:t>비교사례</a:t>
+              <a:t>다음 단계</a:t>
             </a:r>
             <a:endParaRPr lang="en-US" sz="2300" dirty="0"/>
           </a:p>
@@ -11901,104 +8748,24 @@
       </p:sp>
       <p:sp>
         <p:nvSpPr>
-          <p:cNvPr id="6" name="Text 4"/>
-          <p:cNvSpPr/>
-          <p:nvPr/>
-        </p:nvSpPr>
-        <p:spPr>
-          <a:xfrm>
-            <a:off x="566928" y="1645920"/>
-            <a:ext cx="4201979" cy="402336"/>
-          </a:xfrm>
-          <a:prstGeom prst="rect">
-            <a:avLst/>
-          </a:prstGeom>
-          <a:noFill/>
-          <a:ln/>
-        </p:spPr>
-        <p:txBody>
-          <a:bodyPr wrap="square" lIns="0" tIns="0" rIns="0" bIns="0" rtlCol="0" anchor="ctr"/>
-          <a:lstStyle/>
-          <a:p>
-            <a:pPr indent="0" marL="0">
-              <a:lnSpc>
-                <a:spcPct val="120000"/>
-              </a:lnSpc>
-              <a:buNone/>
-            </a:pPr>
-            <a:r>
-              <a:rPr lang="en-US" sz="1400" dirty="0">
-                <a:solidFill>
-                  <a:srgbClr val="718096"/>
-                </a:solidFill>
-                <a:latin typeface="Pretendard" pitchFamily="34" charset="0"/>
-                <a:ea typeface="Pretendard" pitchFamily="34" charset="-122"/>
-                <a:cs typeface="Pretendard" pitchFamily="34" charset="-120"/>
-              </a:rPr>
-              <a:t>- 실투자금</a:t>
-            </a:r>
-            <a:endParaRPr lang="en-US" sz="1400" dirty="0"/>
-          </a:p>
-        </p:txBody>
-      </p:sp>
-      <p:sp>
-        <p:nvSpPr>
-          <p:cNvPr id="7" name="Text 5"/>
-          <p:cNvSpPr/>
-          <p:nvPr/>
-        </p:nvSpPr>
-        <p:spPr>
-          <a:xfrm>
-            <a:off x="4768907" y="1645920"/>
-            <a:ext cx="6855860" cy="402336"/>
-          </a:xfrm>
-          <a:prstGeom prst="rect">
-            <a:avLst/>
-          </a:prstGeom>
-          <a:noFill/>
-          <a:ln/>
-        </p:spPr>
-        <p:txBody>
-          <a:bodyPr wrap="square" lIns="0" tIns="0" rIns="0" bIns="0" rtlCol="0" anchor="ctr"/>
-          <a:lstStyle/>
-          <a:p>
-            <a:pPr indent="0" marL="0">
-              <a:lnSpc>
-                <a:spcPct val="120000"/>
-              </a:lnSpc>
-              <a:buNone/>
-            </a:pPr>
-            <a:r>
-              <a:rPr lang="en-US" sz="1400" b="1" dirty="0">
-                <a:solidFill>
-                  <a:srgbClr val="10161F"/>
-                </a:solidFill>
-                <a:latin typeface="Pretendard" pitchFamily="34" charset="0"/>
-                <a:ea typeface="Pretendard" pitchFamily="34" charset="-122"/>
-                <a:cs typeface="Pretendard" pitchFamily="34" charset="-120"/>
-              </a:rPr>
-              <a:t>약 69억 원</a:t>
-            </a:r>
-            <a:endParaRPr lang="en-US" sz="1400" dirty="0"/>
-          </a:p>
-        </p:txBody>
-      </p:sp>
-      <p:sp>
-        <p:nvSpPr>
-          <p:cNvPr id="8" name="Shape 6"/>
-          <p:cNvSpPr/>
-          <p:nvPr/>
-        </p:nvSpPr>
-        <p:spPr>
-          <a:xfrm>
-            <a:off x="566928" y="2048256"/>
-            <a:ext cx="11057839" cy="0"/>
-          </a:xfrm>
-          <a:prstGeom prst="line">
-            <a:avLst/>
-          </a:prstGeom>
-          <a:noFill/>
-          <a:ln w="3810">
+          <p:cNvPr id="6" name="Shape 4"/>
+          <p:cNvSpPr/>
+          <p:nvPr/>
+        </p:nvSpPr>
+        <p:spPr>
+          <a:xfrm>
+            <a:off x="566928" y="1572768"/>
+            <a:ext cx="11057839" cy="3200400"/>
+          </a:xfrm>
+          <a:prstGeom prst="roundRect">
+            <a:avLst>
+              <a:gd name="adj" fmla="val 1714"/>
+            </a:avLst>
+          </a:prstGeom>
+          <a:solidFill>
+            <a:srgbClr val="F7FAFC"/>
+          </a:solidFill>
+          <a:ln w="6350">
             <a:solidFill>
               <a:srgbClr val="CBD5E0"/>
             </a:solidFill>
@@ -12008,43 +8775,99 @@
       </p:sp>
       <p:sp>
         <p:nvSpPr>
+          <p:cNvPr id="7" name="Shape 5"/>
+          <p:cNvSpPr/>
+          <p:nvPr/>
+        </p:nvSpPr>
+        <p:spPr>
+          <a:xfrm>
+            <a:off x="786384" y="1792224"/>
+            <a:ext cx="438912" cy="438912"/>
+          </a:xfrm>
+          <a:prstGeom prst="ellipse">
+            <a:avLst/>
+          </a:prstGeom>
+          <a:solidFill>
+            <a:srgbClr val="B98A2E"/>
+          </a:solidFill>
+          <a:ln/>
+        </p:spPr>
+      </p:sp>
+      <p:sp>
+        <p:nvSpPr>
+          <p:cNvPr id="8" name="Text 6"/>
+          <p:cNvSpPr/>
+          <p:nvPr/>
+        </p:nvSpPr>
+        <p:spPr>
+          <a:xfrm>
+            <a:off x="786384" y="1792224"/>
+            <a:ext cx="438912" cy="438912"/>
+          </a:xfrm>
+          <a:prstGeom prst="rect">
+            <a:avLst/>
+          </a:prstGeom>
+          <a:noFill/>
+          <a:ln/>
+        </p:spPr>
+        <p:txBody>
+          <a:bodyPr wrap="square" lIns="0" tIns="0" rIns="0" bIns="0" rtlCol="0" anchor="ctr"/>
+          <a:lstStyle/>
+          <a:p>
+            <a:pPr algn="ctr" indent="0" marL="0">
+              <a:buNone/>
+            </a:pPr>
+            <a:r>
+              <a:rPr lang="en-US" sz="1400" b="1" dirty="0">
+                <a:solidFill>
+                  <a:srgbClr val="FFFFFF"/>
+                </a:solidFill>
+                <a:latin typeface="Arial" pitchFamily="34" charset="0"/>
+                <a:ea typeface="Arial" pitchFamily="34" charset="-122"/>
+                <a:cs typeface="Arial" pitchFamily="34" charset="-120"/>
+              </a:rPr>
+              <a:t>01</a:t>
+            </a:r>
+            <a:endParaRPr lang="en-US" sz="1400" dirty="0"/>
+          </a:p>
+        </p:txBody>
+      </p:sp>
+      <p:sp>
+        <p:nvSpPr>
           <p:cNvPr id="9" name="Text 7"/>
           <p:cNvSpPr/>
           <p:nvPr/>
         </p:nvSpPr>
         <p:spPr>
           <a:xfrm>
-            <a:off x="566928" y="2048256"/>
-            <a:ext cx="4201979" cy="402336"/>
-          </a:xfrm>
-          <a:prstGeom prst="rect">
-            <a:avLst/>
-          </a:prstGeom>
-          <a:noFill/>
-          <a:ln/>
-        </p:spPr>
-        <p:txBody>
-          <a:bodyPr wrap="square" lIns="0" tIns="0" rIns="0" bIns="0" rtlCol="0" anchor="ctr"/>
+            <a:off x="786384" y="2304288"/>
+            <a:ext cx="10618927" cy="365760"/>
+          </a:xfrm>
+          <a:prstGeom prst="rect">
+            <a:avLst/>
+          </a:prstGeom>
+          <a:noFill/>
+          <a:ln/>
+        </p:spPr>
+        <p:txBody>
+          <a:bodyPr wrap="square" rtlCol="0" anchor="ctr"/>
           <a:lstStyle/>
           <a:p>
             <a:pPr indent="0" marL="0">
-              <a:lnSpc>
-                <a:spcPct val="120000"/>
-              </a:lnSpc>
-              <a:buNone/>
-            </a:pPr>
-            <a:r>
-              <a:rPr lang="en-US" sz="1400" dirty="0">
-                <a:solidFill>
-                  <a:srgbClr val="718096"/>
+              <a:buNone/>
+            </a:pPr>
+            <a:r>
+              <a:rPr lang="en-US" sz="1600" b="1" dirty="0">
+                <a:solidFill>
+                  <a:srgbClr val="10161F"/>
                 </a:solidFill>
                 <a:latin typeface="Pretendard" pitchFamily="34" charset="0"/>
                 <a:ea typeface="Pretendard" pitchFamily="34" charset="-122"/>
                 <a:cs typeface="Pretendard" pitchFamily="34" charset="-120"/>
               </a:rPr>
-              <a:t>- 순수익(매월)</a:t>
-            </a:r>
-            <a:endParaRPr lang="en-US" sz="1400" dirty="0"/>
+              <a:t>1단계</a:t>
+            </a:r>
+            <a:endParaRPr lang="en-US" sz="1600" dirty="0"/>
           </a:p>
         </p:txBody>
       </p:sp>
@@ -12056,27 +8879,24 @@
         </p:nvSpPr>
         <p:spPr>
           <a:xfrm>
-            <a:off x="4768907" y="2048256"/>
-            <a:ext cx="6855860" cy="402336"/>
-          </a:xfrm>
-          <a:prstGeom prst="rect">
-            <a:avLst/>
-          </a:prstGeom>
-          <a:noFill/>
-          <a:ln/>
-        </p:spPr>
-        <p:txBody>
-          <a:bodyPr wrap="square" lIns="0" tIns="0" rIns="0" bIns="0" rtlCol="0" anchor="ctr"/>
+            <a:off x="786384" y="2761488"/>
+            <a:ext cx="10618927" cy="1828800"/>
+          </a:xfrm>
+          <a:prstGeom prst="rect">
+            <a:avLst/>
+          </a:prstGeom>
+          <a:noFill/>
+          <a:ln/>
+        </p:spPr>
+        <p:txBody>
+          <a:bodyPr wrap="square" rtlCol="0" anchor="t"/>
           <a:lstStyle/>
           <a:p>
             <a:pPr indent="0" marL="0">
-              <a:lnSpc>
-                <a:spcPct val="120000"/>
-              </a:lnSpc>
-              <a:buNone/>
-            </a:pPr>
-            <a:r>
-              <a:rPr lang="en-US" sz="1400" b="1" dirty="0">
+              <a:buNone/>
+            </a:pPr>
+            <a:r>
+              <a:rPr lang="en-US" sz="1100" dirty="0">
                 <a:solidFill>
                   <a:srgbClr val="10161F"/>
                 </a:solidFill>
@@ -12084,87 +8904,39 @@
                 <a:ea typeface="Pretendard" pitchFamily="34" charset="-122"/>
                 <a:cs typeface="Pretendard" pitchFamily="34" charset="-120"/>
               </a:rPr>
-              <a:t>약 3,650만 원</a:t>
-            </a:r>
-            <a:endParaRPr lang="en-US" sz="1400" dirty="0"/>
-          </a:p>
-        </p:txBody>
-      </p:sp>
-      <p:sp>
-        <p:nvSpPr>
-          <p:cNvPr id="11" name="Shape 9"/>
-          <p:cNvSpPr/>
-          <p:nvPr/>
-        </p:nvSpPr>
-        <p:spPr>
-          <a:xfrm>
-            <a:off x="566928" y="2450592"/>
-            <a:ext cx="11057839" cy="0"/>
-          </a:xfrm>
-          <a:prstGeom prst="line">
-            <a:avLst/>
-          </a:prstGeom>
-          <a:noFill/>
-          <a:ln w="3810">
-            <a:solidFill>
-              <a:srgbClr val="CBD5E0"/>
-            </a:solidFill>
-            <a:prstDash val="solid"/>
-          </a:ln>
-        </p:spPr>
-      </p:sp>
-      <p:sp>
-        <p:nvSpPr>
-          <p:cNvPr id="12" name="Text 10"/>
-          <p:cNvSpPr/>
-          <p:nvPr/>
-        </p:nvSpPr>
-        <p:spPr>
-          <a:xfrm>
-            <a:off x="566928" y="2450592"/>
-            <a:ext cx="4201979" cy="402336"/>
-          </a:xfrm>
-          <a:prstGeom prst="rect">
-            <a:avLst/>
-          </a:prstGeom>
-          <a:noFill/>
-          <a:ln/>
-        </p:spPr>
-        <p:txBody>
-          <a:bodyPr wrap="square" lIns="0" tIns="0" rIns="0" bIns="0" rtlCol="0" anchor="ctr"/>
-          <a:lstStyle/>
+              <a:t>현장 실사 및 임대차계약서 원본 확인을 권장합니다.</a:t>
+            </a:r>
+            <a:endParaRPr lang="en-US" sz="1100" dirty="0"/>
+          </a:p>
           <a:p>
             <a:pPr indent="0" marL="0">
-              <a:lnSpc>
-                <a:spcPct val="120000"/>
-              </a:lnSpc>
-              <a:buNone/>
-            </a:pPr>
-            <a:r>
-              <a:rPr lang="en-US" sz="1400" dirty="0">
-                <a:solidFill>
-                  <a:srgbClr val="718096"/>
+              <a:buNone/>
+            </a:pPr>
+            <a:r>
+              <a:rPr lang="en-US" sz="1100" dirty="0">
+                <a:solidFill>
+                  <a:srgbClr val="10161F"/>
                 </a:solidFill>
                 <a:latin typeface="Pretendard" pitchFamily="34" charset="0"/>
                 <a:ea typeface="Pretendard" pitchFamily="34" charset="-122"/>
                 <a:cs typeface="Pretendard" pitchFamily="34" charset="-120"/>
               </a:rPr>
-              <a:t>- 레버리지 수익률</a:t>
-            </a:r>
-            <a:endParaRPr lang="en-US" sz="1400" dirty="0"/>
-          </a:p>
-        </p:txBody>
-      </p:sp>
-      <p:sp>
-        <p:nvSpPr>
-          <p:cNvPr id="13" name="Text 11"/>
-          <p:cNvSpPr/>
-          <p:nvPr/>
-        </p:nvSpPr>
-        <p:spPr>
-          <a:xfrm>
-            <a:off x="4768907" y="2450592"/>
-            <a:ext cx="6855860" cy="402336"/>
+              <a:t>현장 실사 및 임대차계약서 원본 확인을 권장합니다.</a:t>
+            </a:r>
+            <a:endParaRPr lang="en-US" sz="1100" dirty="0"/>
+          </a:p>
+        </p:txBody>
+      </p:sp>
+      <p:sp>
+        <p:nvSpPr>
+          <p:cNvPr id="11" name="Text 9"/>
+          <p:cNvSpPr/>
+          <p:nvPr/>
+        </p:nvSpPr>
+        <p:spPr>
+          <a:xfrm>
+            <a:off x="566928" y="6382512"/>
+            <a:ext cx="7315200" cy="219456"/>
           </a:xfrm>
           <a:prstGeom prst="rect">
             <a:avLst/>
@@ -12177,59 +8949,17 @@
           <a:lstStyle/>
           <a:p>
             <a:pPr indent="0" marL="0">
-              <a:lnSpc>
-                <a:spcPct val="120000"/>
-              </a:lnSpc>
-              <a:buNone/>
-            </a:pPr>
-            <a:r>
-              <a:rPr lang="en-US" sz="1400" b="1" dirty="0">
-                <a:solidFill>
-                  <a:srgbClr val="10161F"/>
+              <a:buNone/>
+            </a:pPr>
+            <a:r>
+              <a:rPr lang="en-US" sz="800" dirty="0">
+                <a:solidFill>
+                  <a:srgbClr val="718096"/>
                 </a:solidFill>
                 <a:latin typeface="Pretendard" pitchFamily="34" charset="0"/>
                 <a:ea typeface="Pretendard" pitchFamily="34" charset="-122"/>
                 <a:cs typeface="Pretendard" pitchFamily="34" charset="-120"/>
               </a:rPr>
-              <a:t>약 5.8%</a:t>
-            </a:r>
-            <a:endParaRPr lang="en-US" sz="1400" dirty="0"/>
-          </a:p>
-        </p:txBody>
-      </p:sp>
-      <p:sp>
-        <p:nvSpPr>
-          <p:cNvPr id="14" name="Text 12"/>
-          <p:cNvSpPr/>
-          <p:nvPr/>
-        </p:nvSpPr>
-        <p:spPr>
-          <a:xfrm>
-            <a:off x="566928" y="6382512"/>
-            <a:ext cx="7315200" cy="219456"/>
-          </a:xfrm>
-          <a:prstGeom prst="rect">
-            <a:avLst/>
-          </a:prstGeom>
-          <a:noFill/>
-          <a:ln/>
-        </p:spPr>
-        <p:txBody>
-          <a:bodyPr wrap="square" lIns="0" tIns="0" rIns="0" bIns="0" rtlCol="0" anchor="ctr"/>
-          <a:lstStyle/>
-          <a:p>
-            <a:pPr indent="0" marL="0">
-              <a:buNone/>
-            </a:pPr>
-            <a:r>
-              <a:rPr lang="en-US" sz="800" dirty="0">
-                <a:solidFill>
-                  <a:srgbClr val="718096"/>
-                </a:solidFill>
-                <a:latin typeface="Pretendard" pitchFamily="34" charset="0"/>
-                <a:ea typeface="Pretendard" pitchFamily="34" charset="-122"/>
-                <a:cs typeface="Pretendard" pitchFamily="34" charset="-120"/>
-              </a:rPr>
               <a:t>크리딜   |   </a:t>
             </a:r>
             <a:endParaRPr lang="en-US" sz="800" dirty="0"/>
@@ -12238,7 +8968,7 @@
       </p:sp>
       <p:sp>
         <p:nvSpPr>
-          <p:cNvPr id="15" name="Text 13"/>
+          <p:cNvPr id="12" name="Text 10"/>
           <p:cNvSpPr/>
           <p:nvPr/>
         </p:nvSpPr>

--- a/docs/test/stress/e2e-outputs/income_pro_gradeC_pr07.pptx
+++ b/docs/test/stress/e2e-outputs/income_pro_gradeC_pr07.pptx
@@ -15,9 +15,13 @@
     <p:sldId id="263" r:id="rId9"/>
     <p:sldId id="264" r:id="rId10"/>
     <p:sldId id="265" r:id="rId11"/>
+    <p:sldId id="266" r:id="rId12"/>
+    <p:sldId id="267" r:id="rId13"/>
+    <p:sldId id="268" r:id="rId14"/>
+    <p:sldId id="269" r:id="rId15"/>
   </p:sldIdLst>
   <p:notesMasterIdLst>
-    <p:notesMasterId r:id="rId12"/>
+    <p:notesMasterId r:id="rId16"/>
   </p:notesMasterIdLst>
   <p:sldSz cx="12192000" cy="6858000"/>
   <p:notesSz cx="6858000" cy="12192000"/>
@@ -623,6 +627,358 @@
             <a:fld id="{F7021451-1387-4CA6-816F-3879F97B5CBC}" type="slidenum">
               <a:rPr lang="en-US"/>
               <a:t>10</a:t>
+            </a:fld>
+            <a:endParaRPr lang="en-US"/>
+          </a:p>
+        </p:txBody>
+      </p:sp>
+    </p:spTree>
+    <p:extLst>
+      <p:ext uri="{BB962C8B-B14F-4D97-AF65-F5344CB8AC3E}">
+        <p14:creationId xmlns:p14="http://schemas.microsoft.com/office/powerpoint/2010/main" val="1024086991"/>
+      </p:ext>
+    </p:extLst>
+  </p:cSld>
+  <p:clrMapOvr>
+    <a:masterClrMapping/>
+  </p:clrMapOvr>
+</p:notes>
+</file>
+
+<file path=ppt/notesSlides/notesSlide11.xml><?xml version="1.0" encoding="utf-8"?>
+<p:notes xmlns:a="http://schemas.openxmlformats.org/drawingml/2006/main" xmlns:r="http://schemas.openxmlformats.org/officeDocument/2006/relationships" xmlns:p="http://schemas.openxmlformats.org/presentationml/2006/main">
+  <p:cSld>
+    <p:spTree>
+      <p:nvGrpSpPr>
+        <p:cNvPr id="1" name=""/>
+        <p:cNvGrpSpPr/>
+        <p:nvPr/>
+      </p:nvGrpSpPr>
+      <p:grpSpPr>
+        <a:xfrm>
+          <a:off x="0" y="0"/>
+          <a:ext cx="0" cy="0"/>
+          <a:chOff x="0" y="0"/>
+          <a:chExt cx="0" cy="0"/>
+        </a:xfrm>
+      </p:grpSpPr>
+      <p:sp>
+        <p:nvSpPr>
+          <p:cNvPr id="2" name="Slide Image Placeholder 1"/>
+          <p:cNvSpPr>
+            <a:spLocks noGrp="1" noRot="1" noChangeAspect="1"/>
+          </p:cNvSpPr>
+          <p:nvPr>
+            <p:ph type="sldImg"/>
+          </p:nvPr>
+        </p:nvSpPr>
+        <p:spPr/>
+      </p:sp>
+      <p:sp>
+        <p:nvSpPr>
+          <p:cNvPr id="3" name="Notes Placeholder 2"/>
+          <p:cNvSpPr>
+            <a:spLocks noGrp="1"/>
+          </p:cNvSpPr>
+          <p:nvPr>
+            <p:ph type="body" idx="1"/>
+          </p:nvPr>
+        </p:nvSpPr>
+        <p:spPr/>
+        <p:txBody>
+          <a:bodyPr/>
+          <a:lstStyle/>
+          <a:p>
+            <a:r>
+              <a:rPr lang="en-US" dirty="0"/>
+              <a:t/>
+            </a:r>
+            <a:endParaRPr lang="en-US" dirty="0"/>
+          </a:p>
+        </p:txBody>
+      </p:sp>
+      <p:sp>
+        <p:nvSpPr>
+          <p:cNvPr id="4" name="Slide Number Placeholder 3"/>
+          <p:cNvSpPr>
+            <a:spLocks noGrp="1"/>
+          </p:cNvSpPr>
+          <p:nvPr>
+            <p:ph type="sldNum" sz="quarter" idx="10"/>
+          </p:nvPr>
+        </p:nvSpPr>
+        <p:spPr/>
+        <p:txBody>
+          <a:bodyPr/>
+          <a:lstStyle/>
+          <a:p>
+            <a:fld id="{F7021451-1387-4CA6-816F-3879F97B5CBC}" type="slidenum">
+              <a:rPr lang="en-US"/>
+              <a:t>11</a:t>
+            </a:fld>
+            <a:endParaRPr lang="en-US"/>
+          </a:p>
+        </p:txBody>
+      </p:sp>
+    </p:spTree>
+    <p:extLst>
+      <p:ext uri="{BB962C8B-B14F-4D97-AF65-F5344CB8AC3E}">
+        <p14:creationId xmlns:p14="http://schemas.microsoft.com/office/powerpoint/2010/main" val="1024086991"/>
+      </p:ext>
+    </p:extLst>
+  </p:cSld>
+  <p:clrMapOvr>
+    <a:masterClrMapping/>
+  </p:clrMapOvr>
+</p:notes>
+</file>
+
+<file path=ppt/notesSlides/notesSlide12.xml><?xml version="1.0" encoding="utf-8"?>
+<p:notes xmlns:a="http://schemas.openxmlformats.org/drawingml/2006/main" xmlns:r="http://schemas.openxmlformats.org/officeDocument/2006/relationships" xmlns:p="http://schemas.openxmlformats.org/presentationml/2006/main">
+  <p:cSld>
+    <p:spTree>
+      <p:nvGrpSpPr>
+        <p:cNvPr id="1" name=""/>
+        <p:cNvGrpSpPr/>
+        <p:nvPr/>
+      </p:nvGrpSpPr>
+      <p:grpSpPr>
+        <a:xfrm>
+          <a:off x="0" y="0"/>
+          <a:ext cx="0" cy="0"/>
+          <a:chOff x="0" y="0"/>
+          <a:chExt cx="0" cy="0"/>
+        </a:xfrm>
+      </p:grpSpPr>
+      <p:sp>
+        <p:nvSpPr>
+          <p:cNvPr id="2" name="Slide Image Placeholder 1"/>
+          <p:cNvSpPr>
+            <a:spLocks noGrp="1" noRot="1" noChangeAspect="1"/>
+          </p:cNvSpPr>
+          <p:nvPr>
+            <p:ph type="sldImg"/>
+          </p:nvPr>
+        </p:nvSpPr>
+        <p:spPr/>
+      </p:sp>
+      <p:sp>
+        <p:nvSpPr>
+          <p:cNvPr id="3" name="Notes Placeholder 2"/>
+          <p:cNvSpPr>
+            <a:spLocks noGrp="1"/>
+          </p:cNvSpPr>
+          <p:nvPr>
+            <p:ph type="body" idx="1"/>
+          </p:nvPr>
+        </p:nvSpPr>
+        <p:spPr/>
+        <p:txBody>
+          <a:bodyPr/>
+          <a:lstStyle/>
+          <a:p>
+            <a:r>
+              <a:rPr lang="en-US" dirty="0"/>
+              <a:t/>
+            </a:r>
+            <a:endParaRPr lang="en-US" dirty="0"/>
+          </a:p>
+        </p:txBody>
+      </p:sp>
+      <p:sp>
+        <p:nvSpPr>
+          <p:cNvPr id="4" name="Slide Number Placeholder 3"/>
+          <p:cNvSpPr>
+            <a:spLocks noGrp="1"/>
+          </p:cNvSpPr>
+          <p:nvPr>
+            <p:ph type="sldNum" sz="quarter" idx="10"/>
+          </p:nvPr>
+        </p:nvSpPr>
+        <p:spPr/>
+        <p:txBody>
+          <a:bodyPr/>
+          <a:lstStyle/>
+          <a:p>
+            <a:fld id="{F7021451-1387-4CA6-816F-3879F97B5CBC}" type="slidenum">
+              <a:rPr lang="en-US"/>
+              <a:t>12</a:t>
+            </a:fld>
+            <a:endParaRPr lang="en-US"/>
+          </a:p>
+        </p:txBody>
+      </p:sp>
+    </p:spTree>
+    <p:extLst>
+      <p:ext uri="{BB962C8B-B14F-4D97-AF65-F5344CB8AC3E}">
+        <p14:creationId xmlns:p14="http://schemas.microsoft.com/office/powerpoint/2010/main" val="1024086991"/>
+      </p:ext>
+    </p:extLst>
+  </p:cSld>
+  <p:clrMapOvr>
+    <a:masterClrMapping/>
+  </p:clrMapOvr>
+</p:notes>
+</file>
+
+<file path=ppt/notesSlides/notesSlide13.xml><?xml version="1.0" encoding="utf-8"?>
+<p:notes xmlns:a="http://schemas.openxmlformats.org/drawingml/2006/main" xmlns:r="http://schemas.openxmlformats.org/officeDocument/2006/relationships" xmlns:p="http://schemas.openxmlformats.org/presentationml/2006/main">
+  <p:cSld>
+    <p:spTree>
+      <p:nvGrpSpPr>
+        <p:cNvPr id="1" name=""/>
+        <p:cNvGrpSpPr/>
+        <p:nvPr/>
+      </p:nvGrpSpPr>
+      <p:grpSpPr>
+        <a:xfrm>
+          <a:off x="0" y="0"/>
+          <a:ext cx="0" cy="0"/>
+          <a:chOff x="0" y="0"/>
+          <a:chExt cx="0" cy="0"/>
+        </a:xfrm>
+      </p:grpSpPr>
+      <p:sp>
+        <p:nvSpPr>
+          <p:cNvPr id="2" name="Slide Image Placeholder 1"/>
+          <p:cNvSpPr>
+            <a:spLocks noGrp="1" noRot="1" noChangeAspect="1"/>
+          </p:cNvSpPr>
+          <p:nvPr>
+            <p:ph type="sldImg"/>
+          </p:nvPr>
+        </p:nvSpPr>
+        <p:spPr/>
+      </p:sp>
+      <p:sp>
+        <p:nvSpPr>
+          <p:cNvPr id="3" name="Notes Placeholder 2"/>
+          <p:cNvSpPr>
+            <a:spLocks noGrp="1"/>
+          </p:cNvSpPr>
+          <p:nvPr>
+            <p:ph type="body" idx="1"/>
+          </p:nvPr>
+        </p:nvSpPr>
+        <p:spPr/>
+        <p:txBody>
+          <a:bodyPr/>
+          <a:lstStyle/>
+          <a:p>
+            <a:r>
+              <a:rPr lang="en-US" dirty="0"/>
+              <a:t/>
+            </a:r>
+            <a:endParaRPr lang="en-US" dirty="0"/>
+          </a:p>
+        </p:txBody>
+      </p:sp>
+      <p:sp>
+        <p:nvSpPr>
+          <p:cNvPr id="4" name="Slide Number Placeholder 3"/>
+          <p:cNvSpPr>
+            <a:spLocks noGrp="1"/>
+          </p:cNvSpPr>
+          <p:nvPr>
+            <p:ph type="sldNum" sz="quarter" idx="10"/>
+          </p:nvPr>
+        </p:nvSpPr>
+        <p:spPr/>
+        <p:txBody>
+          <a:bodyPr/>
+          <a:lstStyle/>
+          <a:p>
+            <a:fld id="{F7021451-1387-4CA6-816F-3879F97B5CBC}" type="slidenum">
+              <a:rPr lang="en-US"/>
+              <a:t>13</a:t>
+            </a:fld>
+            <a:endParaRPr lang="en-US"/>
+          </a:p>
+        </p:txBody>
+      </p:sp>
+    </p:spTree>
+    <p:extLst>
+      <p:ext uri="{BB962C8B-B14F-4D97-AF65-F5344CB8AC3E}">
+        <p14:creationId xmlns:p14="http://schemas.microsoft.com/office/powerpoint/2010/main" val="1024086991"/>
+      </p:ext>
+    </p:extLst>
+  </p:cSld>
+  <p:clrMapOvr>
+    <a:masterClrMapping/>
+  </p:clrMapOvr>
+</p:notes>
+</file>
+
+<file path=ppt/notesSlides/notesSlide14.xml><?xml version="1.0" encoding="utf-8"?>
+<p:notes xmlns:a="http://schemas.openxmlformats.org/drawingml/2006/main" xmlns:r="http://schemas.openxmlformats.org/officeDocument/2006/relationships" xmlns:p="http://schemas.openxmlformats.org/presentationml/2006/main">
+  <p:cSld>
+    <p:spTree>
+      <p:nvGrpSpPr>
+        <p:cNvPr id="1" name=""/>
+        <p:cNvGrpSpPr/>
+        <p:nvPr/>
+      </p:nvGrpSpPr>
+      <p:grpSpPr>
+        <a:xfrm>
+          <a:off x="0" y="0"/>
+          <a:ext cx="0" cy="0"/>
+          <a:chOff x="0" y="0"/>
+          <a:chExt cx="0" cy="0"/>
+        </a:xfrm>
+      </p:grpSpPr>
+      <p:sp>
+        <p:nvSpPr>
+          <p:cNvPr id="2" name="Slide Image Placeholder 1"/>
+          <p:cNvSpPr>
+            <a:spLocks noGrp="1" noRot="1" noChangeAspect="1"/>
+          </p:cNvSpPr>
+          <p:nvPr>
+            <p:ph type="sldImg"/>
+          </p:nvPr>
+        </p:nvSpPr>
+        <p:spPr/>
+      </p:sp>
+      <p:sp>
+        <p:nvSpPr>
+          <p:cNvPr id="3" name="Notes Placeholder 2"/>
+          <p:cNvSpPr>
+            <a:spLocks noGrp="1"/>
+          </p:cNvSpPr>
+          <p:nvPr>
+            <p:ph type="body" idx="1"/>
+          </p:nvPr>
+        </p:nvSpPr>
+        <p:spPr/>
+        <p:txBody>
+          <a:bodyPr/>
+          <a:lstStyle/>
+          <a:p>
+            <a:r>
+              <a:rPr lang="en-US" dirty="0"/>
+              <a:t/>
+            </a:r>
+            <a:endParaRPr lang="en-US" dirty="0"/>
+          </a:p>
+        </p:txBody>
+      </p:sp>
+      <p:sp>
+        <p:nvSpPr>
+          <p:cNvPr id="4" name="Slide Number Placeholder 3"/>
+          <p:cNvSpPr>
+            <a:spLocks noGrp="1"/>
+          </p:cNvSpPr>
+          <p:nvPr>
+            <p:ph type="sldNum" sz="quarter" idx="10"/>
+          </p:nvPr>
+        </p:nvSpPr>
+        <p:spPr/>
+        <p:txBody>
+          <a:bodyPr/>
+          <a:lstStyle/>
+          <a:p>
+            <a:fld id="{F7021451-1387-4CA6-816F-3879F97B5CBC}" type="slidenum">
+              <a:rPr lang="en-US"/>
+              <a:t>14</a:t>
             </a:fld>
             <a:endParaRPr lang="en-US"/>
           </a:p>
@@ -2201,7 +2557,7 @@
             <a:pPr indent="0" marL="0">
               <a:buNone/>
             </a:pPr>
-            <a:endParaRPr lang="en-US" sz="850" dirty="0"/>
+            <a:endParaRPr lang="en-US" sz="900" dirty="0"/>
           </a:p>
         </p:txBody>
       </p:sp>
@@ -2294,6 +2650,2547 @@
 <file path=ppt/slides/slide10.xml><?xml version="1.0" encoding="utf-8"?>
 <p:sld xmlns:a="http://schemas.openxmlformats.org/drawingml/2006/main" xmlns:r="http://schemas.openxmlformats.org/officeDocument/2006/relationships" xmlns:p="http://schemas.openxmlformats.org/presentationml/2006/main">
   <p:cSld name="Slide 10">
+    <p:bg>
+      <p:bgPr>
+        <a:solidFill>
+          <a:srgbClr val="FFFFFF"/>
+        </a:solidFill>
+      </p:bgPr>
+    </p:bg>
+    <p:spTree>
+      <p:nvGrpSpPr>
+        <p:cNvPr id="1" name=""/>
+        <p:cNvGrpSpPr/>
+        <p:nvPr/>
+      </p:nvGrpSpPr>
+      <p:grpSpPr>
+        <a:xfrm>
+          <a:off x="0" y="0"/>
+          <a:ext cx="0" cy="0"/>
+          <a:chOff x="0" y="0"/>
+          <a:chExt cx="0" cy="0"/>
+        </a:xfrm>
+      </p:grpSpPr>
+      <p:sp>
+        <p:nvSpPr>
+          <p:cNvPr id="2" name="Shape 0"/>
+          <p:cNvSpPr/>
+          <p:nvPr/>
+        </p:nvSpPr>
+        <p:spPr>
+          <a:xfrm>
+            <a:off x="566928" y="457200"/>
+            <a:ext cx="384048" cy="384048"/>
+          </a:xfrm>
+          <a:prstGeom prst="ellipse">
+            <a:avLst/>
+          </a:prstGeom>
+          <a:solidFill>
+            <a:srgbClr val="B98A2E"/>
+          </a:solidFill>
+          <a:ln/>
+        </p:spPr>
+      </p:sp>
+      <p:sp>
+        <p:nvSpPr>
+          <p:cNvPr id="3" name="Text 1"/>
+          <p:cNvSpPr/>
+          <p:nvPr/>
+        </p:nvSpPr>
+        <p:spPr>
+          <a:xfrm>
+            <a:off x="566928" y="457200"/>
+            <a:ext cx="384048" cy="384048"/>
+          </a:xfrm>
+          <a:prstGeom prst="rect">
+            <a:avLst/>
+          </a:prstGeom>
+          <a:noFill/>
+          <a:ln/>
+        </p:spPr>
+        <p:txBody>
+          <a:bodyPr wrap="square" lIns="0" tIns="0" rIns="0" bIns="0" rtlCol="0" anchor="ctr"/>
+          <a:lstStyle/>
+          <a:p>
+            <a:pPr algn="ctr" indent="0" marL="0">
+              <a:buNone/>
+            </a:pPr>
+            <a:r>
+              <a:rPr lang="en-US" sz="1300" b="1" dirty="0">
+                <a:solidFill>
+                  <a:srgbClr val="FFFFFF"/>
+                </a:solidFill>
+                <a:latin typeface="Arial" pitchFamily="34" charset="0"/>
+                <a:ea typeface="Arial" pitchFamily="34" charset="-122"/>
+                <a:cs typeface="Arial" pitchFamily="34" charset="-120"/>
+              </a:rPr>
+              <a:t>09</a:t>
+            </a:r>
+            <a:endParaRPr lang="en-US" sz="1300" dirty="0"/>
+          </a:p>
+        </p:txBody>
+      </p:sp>
+      <p:sp>
+        <p:nvSpPr>
+          <p:cNvPr id="4" name="Text 2"/>
+          <p:cNvSpPr/>
+          <p:nvPr/>
+        </p:nvSpPr>
+        <p:spPr>
+          <a:xfrm>
+            <a:off x="1133856" y="457200"/>
+            <a:ext cx="10490911" cy="182880"/>
+          </a:xfrm>
+          <a:prstGeom prst="rect">
+            <a:avLst/>
+          </a:prstGeom>
+          <a:noFill/>
+          <a:ln/>
+        </p:spPr>
+        <p:txBody>
+          <a:bodyPr wrap="square" lIns="0" tIns="0" rIns="0" bIns="0" rtlCol="0" anchor="ctr"/>
+          <a:lstStyle/>
+          <a:p>
+            <a:pPr indent="0" marL="0">
+              <a:buNone/>
+            </a:pPr>
+            <a:r>
+              <a:rPr lang="en-US" sz="950" b="1" spc="200" kern="0" dirty="0">
+                <a:solidFill>
+                  <a:srgbClr val="B98A2E"/>
+                </a:solidFill>
+                <a:latin typeface="Arial" pitchFamily="34" charset="0"/>
+                <a:ea typeface="Arial" pitchFamily="34" charset="-122"/>
+                <a:cs typeface="Arial" pitchFamily="34" charset="-120"/>
+              </a:rPr>
+              <a:t>Thesis</a:t>
+            </a:r>
+            <a:endParaRPr lang="en-US" sz="950" dirty="0"/>
+          </a:p>
+        </p:txBody>
+      </p:sp>
+      <p:sp>
+        <p:nvSpPr>
+          <p:cNvPr id="5" name="Text 3"/>
+          <p:cNvSpPr/>
+          <p:nvPr/>
+        </p:nvSpPr>
+        <p:spPr>
+          <a:xfrm>
+            <a:off x="1133856" y="640080"/>
+            <a:ext cx="10490911" cy="365760"/>
+          </a:xfrm>
+          <a:prstGeom prst="rect">
+            <a:avLst/>
+          </a:prstGeom>
+          <a:noFill/>
+          <a:ln/>
+        </p:spPr>
+        <p:txBody>
+          <a:bodyPr wrap="square" lIns="0" tIns="0" rIns="0" bIns="0" rtlCol="0" anchor="ctr"/>
+          <a:lstStyle/>
+          <a:p>
+            <a:pPr indent="0" marL="0">
+              <a:buNone/>
+            </a:pPr>
+            <a:r>
+              <a:rPr lang="en-US" sz="2300" b="1" dirty="0">
+                <a:solidFill>
+                  <a:srgbClr val="10161F"/>
+                </a:solidFill>
+                <a:latin typeface="Pretendard" pitchFamily="34" charset="0"/>
+                <a:ea typeface="Pretendard" pitchFamily="34" charset="-122"/>
+                <a:cs typeface="Pretendard" pitchFamily="34" charset="-120"/>
+              </a:rPr>
+              <a:t>투자 포인트</a:t>
+            </a:r>
+            <a:endParaRPr lang="en-US" sz="2300" dirty="0"/>
+          </a:p>
+        </p:txBody>
+      </p:sp>
+      <p:sp>
+        <p:nvSpPr>
+          <p:cNvPr id="6" name="Shape 4"/>
+          <p:cNvSpPr/>
+          <p:nvPr/>
+        </p:nvSpPr>
+        <p:spPr>
+          <a:xfrm>
+            <a:off x="566928" y="4983480"/>
+            <a:ext cx="11057839" cy="804672"/>
+          </a:xfrm>
+          <a:prstGeom prst="roundRect">
+            <a:avLst>
+              <a:gd name="adj" fmla="val 6818"/>
+            </a:avLst>
+          </a:prstGeom>
+          <a:solidFill>
+            <a:srgbClr val="F3EBDA"/>
+          </a:solidFill>
+          <a:ln w="10160">
+            <a:solidFill>
+              <a:srgbClr val="D9B668"/>
+            </a:solidFill>
+            <a:prstDash val="solid"/>
+          </a:ln>
+        </p:spPr>
+      </p:sp>
+      <p:sp>
+        <p:nvSpPr>
+          <p:cNvPr id="7" name="Text 5"/>
+          <p:cNvSpPr/>
+          <p:nvPr/>
+        </p:nvSpPr>
+        <p:spPr>
+          <a:xfrm>
+            <a:off x="749808" y="5093208"/>
+            <a:ext cx="1691640" cy="256032"/>
+          </a:xfrm>
+          <a:prstGeom prst="rect">
+            <a:avLst/>
+          </a:prstGeom>
+          <a:noFill/>
+          <a:ln/>
+        </p:spPr>
+        <p:txBody>
+          <a:bodyPr wrap="square" lIns="0" tIns="0" rIns="0" bIns="0" rtlCol="0" anchor="ctr"/>
+          <a:lstStyle/>
+          <a:p>
+            <a:pPr indent="0" marL="0">
+              <a:buNone/>
+            </a:pPr>
+            <a:r>
+              <a:rPr lang="en-US" sz="1050" b="1" dirty="0">
+                <a:solidFill>
+                  <a:srgbClr val="977024"/>
+                </a:solidFill>
+                <a:latin typeface="Pretendard" pitchFamily="34" charset="0"/>
+                <a:ea typeface="Pretendard" pitchFamily="34" charset="-122"/>
+                <a:cs typeface="Pretendard" pitchFamily="34" charset="-120"/>
+              </a:rPr>
+              <a:t>종합 가치 제안</a:t>
+            </a:r>
+            <a:endParaRPr lang="en-US" sz="1050" dirty="0"/>
+          </a:p>
+        </p:txBody>
+      </p:sp>
+      <p:sp>
+        <p:nvSpPr>
+          <p:cNvPr id="8" name="Text 6"/>
+          <p:cNvSpPr/>
+          <p:nvPr/>
+        </p:nvSpPr>
+        <p:spPr>
+          <a:xfrm>
+            <a:off x="2487168" y="5056632"/>
+            <a:ext cx="8954719" cy="658368"/>
+          </a:xfrm>
+          <a:prstGeom prst="rect">
+            <a:avLst/>
+          </a:prstGeom>
+          <a:noFill/>
+          <a:ln/>
+        </p:spPr>
+        <p:txBody>
+          <a:bodyPr wrap="square" lIns="0" tIns="0" rIns="0" bIns="0" rtlCol="0" anchor="ctr"/>
+          <a:lstStyle/>
+          <a:p>
+            <a:pPr indent="0" marL="0">
+              <a:lnSpc>
+                <a:spcPct val="125000"/>
+              </a:lnSpc>
+              <a:buNone/>
+            </a:pPr>
+            <a:r>
+              <a:rPr lang="en-US" sz="1100" dirty="0">
+                <a:solidFill>
+                  <a:srgbClr val="10161F"/>
+                </a:solidFill>
+                <a:latin typeface="Pretendard" pitchFamily="34" charset="0"/>
+                <a:ea typeface="Pretendard" pitchFamily="34" charset="-122"/>
+                <a:cs typeface="Pretendard" pitchFamily="34" charset="-120"/>
+              </a:rPr>
+              <a:t>관점에서 안정적 월 임대수익과 우량 메디컬 테넌트를 보유한 핵심 투자 자산입니다.</a:t>
+            </a:r>
+            <a:endParaRPr lang="en-US" sz="1100" dirty="0"/>
+          </a:p>
+        </p:txBody>
+      </p:sp>
+      <p:sp>
+        <p:nvSpPr>
+          <p:cNvPr id="9" name="Text 7"/>
+          <p:cNvSpPr/>
+          <p:nvPr/>
+        </p:nvSpPr>
+        <p:spPr>
+          <a:xfrm>
+            <a:off x="566928" y="6382512"/>
+            <a:ext cx="7315200" cy="219456"/>
+          </a:xfrm>
+          <a:prstGeom prst="rect">
+            <a:avLst/>
+          </a:prstGeom>
+          <a:noFill/>
+          <a:ln/>
+        </p:spPr>
+        <p:txBody>
+          <a:bodyPr wrap="square" lIns="0" tIns="0" rIns="0" bIns="0" rtlCol="0" anchor="ctr"/>
+          <a:lstStyle/>
+          <a:p>
+            <a:pPr indent="0" marL="0">
+              <a:buNone/>
+            </a:pPr>
+            <a:r>
+              <a:rPr lang="en-US" sz="800" dirty="0">
+                <a:solidFill>
+                  <a:srgbClr val="718096"/>
+                </a:solidFill>
+                <a:latin typeface="Pretendard" pitchFamily="34" charset="0"/>
+                <a:ea typeface="Pretendard" pitchFamily="34" charset="-122"/>
+                <a:cs typeface="Pretendard" pitchFamily="34" charset="-120"/>
+              </a:rPr>
+              <a:t>크리딜   |   </a:t>
+            </a:r>
+            <a:endParaRPr lang="en-US" sz="800" dirty="0"/>
+          </a:p>
+        </p:txBody>
+      </p:sp>
+      <p:sp>
+        <p:nvSpPr>
+          <p:cNvPr id="10" name="Text 8"/>
+          <p:cNvSpPr/>
+          <p:nvPr/>
+        </p:nvSpPr>
+        <p:spPr>
+          <a:xfrm>
+            <a:off x="10710367" y="6382512"/>
+            <a:ext cx="914400" cy="219456"/>
+          </a:xfrm>
+          <a:prstGeom prst="rect">
+            <a:avLst/>
+          </a:prstGeom>
+          <a:noFill/>
+          <a:ln/>
+        </p:spPr>
+        <p:txBody>
+          <a:bodyPr wrap="square" lIns="0" tIns="0" rIns="0" bIns="0" rtlCol="0" anchor="ctr"/>
+          <a:lstStyle/>
+          <a:p>
+            <a:pPr algn="r" indent="0" marL="0">
+              <a:buNone/>
+            </a:pPr>
+            <a:r>
+              <a:rPr lang="en-US" sz="900" b="1" dirty="0">
+                <a:solidFill>
+                  <a:srgbClr val="B98A2E"/>
+                </a:solidFill>
+                <a:latin typeface="Arial" pitchFamily="34" charset="0"/>
+                <a:ea typeface="Arial" pitchFamily="34" charset="-122"/>
+                <a:cs typeface="Arial" pitchFamily="34" charset="-120"/>
+              </a:rPr>
+              <a:t>9</a:t>
+            </a:r>
+            <a:endParaRPr lang="en-US" sz="900" dirty="0"/>
+          </a:p>
+        </p:txBody>
+      </p:sp>
+    </p:spTree>
+  </p:cSld>
+  <p:clrMapOvr>
+    <a:masterClrMapping/>
+  </p:clrMapOvr>
+</p:sld>
+</file>
+
+<file path=ppt/slides/slide11.xml><?xml version="1.0" encoding="utf-8"?>
+<p:sld xmlns:a="http://schemas.openxmlformats.org/drawingml/2006/main" xmlns:r="http://schemas.openxmlformats.org/officeDocument/2006/relationships" xmlns:p="http://schemas.openxmlformats.org/presentationml/2006/main">
+  <p:cSld name="Slide 11">
+    <p:bg>
+      <p:bgPr>
+        <a:solidFill>
+          <a:srgbClr val="FFFFFF"/>
+        </a:solidFill>
+      </p:bgPr>
+    </p:bg>
+    <p:spTree>
+      <p:nvGrpSpPr>
+        <p:cNvPr id="1" name=""/>
+        <p:cNvGrpSpPr/>
+        <p:nvPr/>
+      </p:nvGrpSpPr>
+      <p:grpSpPr>
+        <a:xfrm>
+          <a:off x="0" y="0"/>
+          <a:ext cx="0" cy="0"/>
+          <a:chOff x="0" y="0"/>
+          <a:chExt cx="0" cy="0"/>
+        </a:xfrm>
+      </p:grpSpPr>
+      <p:sp>
+        <p:nvSpPr>
+          <p:cNvPr id="2" name="Shape 0"/>
+          <p:cNvSpPr/>
+          <p:nvPr/>
+        </p:nvSpPr>
+        <p:spPr>
+          <a:xfrm>
+            <a:off x="566928" y="457200"/>
+            <a:ext cx="384048" cy="384048"/>
+          </a:xfrm>
+          <a:prstGeom prst="ellipse">
+            <a:avLst/>
+          </a:prstGeom>
+          <a:solidFill>
+            <a:srgbClr val="B98A2E"/>
+          </a:solidFill>
+          <a:ln/>
+        </p:spPr>
+      </p:sp>
+      <p:sp>
+        <p:nvSpPr>
+          <p:cNvPr id="3" name="Text 1"/>
+          <p:cNvSpPr/>
+          <p:nvPr/>
+        </p:nvSpPr>
+        <p:spPr>
+          <a:xfrm>
+            <a:off x="566928" y="457200"/>
+            <a:ext cx="384048" cy="384048"/>
+          </a:xfrm>
+          <a:prstGeom prst="rect">
+            <a:avLst/>
+          </a:prstGeom>
+          <a:noFill/>
+          <a:ln/>
+        </p:spPr>
+        <p:txBody>
+          <a:bodyPr wrap="square" lIns="0" tIns="0" rIns="0" bIns="0" rtlCol="0" anchor="ctr"/>
+          <a:lstStyle/>
+          <a:p>
+            <a:pPr algn="ctr" indent="0" marL="0">
+              <a:buNone/>
+            </a:pPr>
+            <a:r>
+              <a:rPr lang="en-US" sz="1300" b="1" dirty="0">
+                <a:solidFill>
+                  <a:srgbClr val="FFFFFF"/>
+                </a:solidFill>
+                <a:latin typeface="Arial" pitchFamily="34" charset="0"/>
+                <a:ea typeface="Arial" pitchFamily="34" charset="-122"/>
+                <a:cs typeface="Arial" pitchFamily="34" charset="-120"/>
+              </a:rPr>
+              <a:t>10</a:t>
+            </a:r>
+            <a:endParaRPr lang="en-US" sz="1300" dirty="0"/>
+          </a:p>
+        </p:txBody>
+      </p:sp>
+      <p:sp>
+        <p:nvSpPr>
+          <p:cNvPr id="4" name="Text 2"/>
+          <p:cNvSpPr/>
+          <p:nvPr/>
+        </p:nvSpPr>
+        <p:spPr>
+          <a:xfrm>
+            <a:off x="1133856" y="457200"/>
+            <a:ext cx="10490911" cy="182880"/>
+          </a:xfrm>
+          <a:prstGeom prst="rect">
+            <a:avLst/>
+          </a:prstGeom>
+          <a:noFill/>
+          <a:ln/>
+        </p:spPr>
+        <p:txBody>
+          <a:bodyPr wrap="square" lIns="0" tIns="0" rIns="0" bIns="0" rtlCol="0" anchor="ctr"/>
+          <a:lstStyle/>
+          <a:p>
+            <a:pPr indent="0" marL="0">
+              <a:buNone/>
+            </a:pPr>
+            <a:r>
+              <a:rPr lang="en-US" sz="950" b="1" spc="200" kern="0" dirty="0">
+                <a:solidFill>
+                  <a:srgbClr val="B98A2E"/>
+                </a:solidFill>
+                <a:latin typeface="Arial" pitchFamily="34" charset="0"/>
+                <a:ea typeface="Arial" pitchFamily="34" charset="-122"/>
+                <a:cs typeface="Arial" pitchFamily="34" charset="-120"/>
+              </a:rPr>
+              <a:t>Risk</a:t>
+            </a:r>
+            <a:endParaRPr lang="en-US" sz="950" dirty="0"/>
+          </a:p>
+        </p:txBody>
+      </p:sp>
+      <p:sp>
+        <p:nvSpPr>
+          <p:cNvPr id="5" name="Text 3"/>
+          <p:cNvSpPr/>
+          <p:nvPr/>
+        </p:nvSpPr>
+        <p:spPr>
+          <a:xfrm>
+            <a:off x="1133856" y="640080"/>
+            <a:ext cx="10490911" cy="365760"/>
+          </a:xfrm>
+          <a:prstGeom prst="rect">
+            <a:avLst/>
+          </a:prstGeom>
+          <a:noFill/>
+          <a:ln/>
+        </p:spPr>
+        <p:txBody>
+          <a:bodyPr wrap="square" lIns="0" tIns="0" rIns="0" bIns="0" rtlCol="0" anchor="ctr"/>
+          <a:lstStyle/>
+          <a:p>
+            <a:pPr indent="0" marL="0">
+              <a:buNone/>
+            </a:pPr>
+            <a:r>
+              <a:rPr lang="en-US" sz="2300" b="1" dirty="0">
+                <a:solidFill>
+                  <a:srgbClr val="10161F"/>
+                </a:solidFill>
+                <a:latin typeface="Pretendard" pitchFamily="34" charset="0"/>
+                <a:ea typeface="Pretendard" pitchFamily="34" charset="-122"/>
+                <a:cs typeface="Pretendard" pitchFamily="34" charset="-120"/>
+              </a:rPr>
+              <a:t>리스크 점검</a:t>
+            </a:r>
+            <a:endParaRPr lang="en-US" sz="2300" dirty="0"/>
+          </a:p>
+        </p:txBody>
+      </p:sp>
+      <p:sp>
+        <p:nvSpPr>
+          <p:cNvPr id="6" name="Shape 4"/>
+          <p:cNvSpPr/>
+          <p:nvPr/>
+        </p:nvSpPr>
+        <p:spPr>
+          <a:xfrm>
+            <a:off x="566928" y="1417320"/>
+            <a:ext cx="5400904" cy="3657600"/>
+          </a:xfrm>
+          <a:prstGeom prst="roundRect">
+            <a:avLst>
+              <a:gd name="adj" fmla="val 1500"/>
+            </a:avLst>
+          </a:prstGeom>
+          <a:solidFill>
+            <a:srgbClr val="F7FAFC"/>
+          </a:solidFill>
+          <a:ln w="6350">
+            <a:solidFill>
+              <a:srgbClr val="CBD5E0"/>
+            </a:solidFill>
+            <a:prstDash val="solid"/>
+          </a:ln>
+        </p:spPr>
+      </p:sp>
+      <p:sp>
+        <p:nvSpPr>
+          <p:cNvPr id="7" name="Shape 5"/>
+          <p:cNvSpPr/>
+          <p:nvPr/>
+        </p:nvSpPr>
+        <p:spPr>
+          <a:xfrm>
+            <a:off x="566928" y="1417320"/>
+            <a:ext cx="5400904" cy="45720"/>
+          </a:xfrm>
+          <a:prstGeom prst="rect">
+            <a:avLst/>
+          </a:prstGeom>
+          <a:solidFill>
+            <a:srgbClr val="B98A2E"/>
+          </a:solidFill>
+          <a:ln/>
+        </p:spPr>
+      </p:sp>
+      <p:sp>
+        <p:nvSpPr>
+          <p:cNvPr id="8" name="Text 6"/>
+          <p:cNvSpPr/>
+          <p:nvPr/>
+        </p:nvSpPr>
+        <p:spPr>
+          <a:xfrm>
+            <a:off x="795528" y="1618488"/>
+            <a:ext cx="4943704" cy="292608"/>
+          </a:xfrm>
+          <a:prstGeom prst="rect">
+            <a:avLst/>
+          </a:prstGeom>
+          <a:noFill/>
+          <a:ln/>
+        </p:spPr>
+        <p:txBody>
+          <a:bodyPr wrap="square" lIns="0" tIns="0" rIns="0" bIns="0" rtlCol="0" anchor="ctr"/>
+          <a:lstStyle/>
+          <a:p>
+            <a:pPr indent="0" marL="0">
+              <a:buNone/>
+            </a:pPr>
+            <a:r>
+              <a:rPr lang="en-US" sz="1350" b="1" dirty="0">
+                <a:solidFill>
+                  <a:srgbClr val="977024"/>
+                </a:solidFill>
+                <a:latin typeface="Pretendard" pitchFamily="34" charset="0"/>
+                <a:ea typeface="Pretendard" pitchFamily="34" charset="-122"/>
+                <a:cs typeface="Pretendard" pitchFamily="34" charset="-120"/>
+              </a:rPr>
+              <a:t>메디컬 단일업종 집중</a:t>
+            </a:r>
+            <a:endParaRPr lang="en-US" sz="1350" dirty="0"/>
+          </a:p>
+        </p:txBody>
+      </p:sp>
+      <p:sp>
+        <p:nvSpPr>
+          <p:cNvPr id="9" name="Text 7"/>
+          <p:cNvSpPr/>
+          <p:nvPr/>
+        </p:nvSpPr>
+        <p:spPr>
+          <a:xfrm>
+            <a:off x="795528" y="1947672"/>
+            <a:ext cx="4943704" cy="365760"/>
+          </a:xfrm>
+          <a:prstGeom prst="rect">
+            <a:avLst/>
+          </a:prstGeom>
+          <a:noFill/>
+          <a:ln/>
+        </p:spPr>
+        <p:txBody>
+          <a:bodyPr wrap="square" lIns="0" tIns="0" rIns="0" bIns="0" rtlCol="0" anchor="ctr">
+            <a:normAutofit/>
+          </a:bodyPr>
+          <a:lstStyle/>
+          <a:p>
+            <a:pPr indent="0" marL="0">
+              <a:buNone/>
+            </a:pPr>
+            <a:r>
+              <a:rPr lang="en-US" sz="1250" b="1" dirty="0">
+                <a:solidFill>
+                  <a:srgbClr val="10161F"/>
+                </a:solidFill>
+                <a:latin typeface="Pretendard" pitchFamily="34" charset="0"/>
+                <a:ea typeface="Pretendard" pitchFamily="34" charset="-122"/>
+                <a:cs typeface="Pretendard" pitchFamily="34" charset="-120"/>
+              </a:rPr>
+              <a:t>전층 의료</a:t>
+            </a:r>
+            <a:endParaRPr lang="en-US" sz="1250" dirty="0"/>
+          </a:p>
+        </p:txBody>
+      </p:sp>
+      <p:sp>
+        <p:nvSpPr>
+          <p:cNvPr id="10" name="Text 8"/>
+          <p:cNvSpPr/>
+          <p:nvPr/>
+        </p:nvSpPr>
+        <p:spPr>
+          <a:xfrm>
+            <a:off x="795528" y="2377440"/>
+            <a:ext cx="4943704" cy="2606040"/>
+          </a:xfrm>
+          <a:prstGeom prst="rect">
+            <a:avLst/>
+          </a:prstGeom>
+          <a:noFill/>
+          <a:ln/>
+        </p:spPr>
+        <p:txBody>
+          <a:bodyPr wrap="square" lIns="0" tIns="0" rIns="0" bIns="0" rtlCol="0" anchor="t">
+            <a:normAutofit/>
+          </a:bodyPr>
+          <a:lstStyle/>
+          <a:p>
+            <a:pPr marL="342900" indent="-342900">
+              <a:lnSpc>
+                <a:spcPct val="125000"/>
+              </a:lnSpc>
+              <a:buSzPct val="100000"/>
+              <a:buChar char="•"/>
+            </a:pPr>
+            <a:r>
+              <a:rPr lang="en-US" sz="1100" dirty="0">
+                <a:solidFill>
+                  <a:srgbClr val="10161F"/>
+                </a:solidFill>
+                <a:latin typeface="Pretendard" pitchFamily="34" charset="0"/>
+                <a:ea typeface="Pretendard" pitchFamily="34" charset="-122"/>
+                <a:cs typeface="Pretendard" pitchFamily="34" charset="-120"/>
+              </a:rPr>
+              <a:t>업종 다각화 검토</a:t>
+            </a:r>
+            <a:endParaRPr lang="en-US" sz="1100" dirty="0"/>
+          </a:p>
+        </p:txBody>
+      </p:sp>
+      <p:sp>
+        <p:nvSpPr>
+          <p:cNvPr id="11" name="Shape 9"/>
+          <p:cNvSpPr/>
+          <p:nvPr/>
+        </p:nvSpPr>
+        <p:spPr>
+          <a:xfrm>
+            <a:off x="6223864" y="1417320"/>
+            <a:ext cx="5400904" cy="3657600"/>
+          </a:xfrm>
+          <a:prstGeom prst="roundRect">
+            <a:avLst>
+              <a:gd name="adj" fmla="val 1500"/>
+            </a:avLst>
+          </a:prstGeom>
+          <a:solidFill>
+            <a:srgbClr val="F7FAFC"/>
+          </a:solidFill>
+          <a:ln w="6350">
+            <a:solidFill>
+              <a:srgbClr val="CBD5E0"/>
+            </a:solidFill>
+            <a:prstDash val="solid"/>
+          </a:ln>
+        </p:spPr>
+      </p:sp>
+      <p:sp>
+        <p:nvSpPr>
+          <p:cNvPr id="12" name="Shape 10"/>
+          <p:cNvSpPr/>
+          <p:nvPr/>
+        </p:nvSpPr>
+        <p:spPr>
+          <a:xfrm>
+            <a:off x="6223864" y="1417320"/>
+            <a:ext cx="5400904" cy="45720"/>
+          </a:xfrm>
+          <a:prstGeom prst="rect">
+            <a:avLst/>
+          </a:prstGeom>
+          <a:solidFill>
+            <a:srgbClr val="B98A2E"/>
+          </a:solidFill>
+          <a:ln/>
+        </p:spPr>
+      </p:sp>
+      <p:sp>
+        <p:nvSpPr>
+          <p:cNvPr id="13" name="Text 11"/>
+          <p:cNvSpPr/>
+          <p:nvPr/>
+        </p:nvSpPr>
+        <p:spPr>
+          <a:xfrm>
+            <a:off x="6452464" y="1618488"/>
+            <a:ext cx="4943704" cy="292608"/>
+          </a:xfrm>
+          <a:prstGeom prst="rect">
+            <a:avLst/>
+          </a:prstGeom>
+          <a:noFill/>
+          <a:ln/>
+        </p:spPr>
+        <p:txBody>
+          <a:bodyPr wrap="square" lIns="0" tIns="0" rIns="0" bIns="0" rtlCol="0" anchor="ctr"/>
+          <a:lstStyle/>
+          <a:p>
+            <a:pPr indent="0" marL="0">
+              <a:buNone/>
+            </a:pPr>
+            <a:r>
+              <a:rPr lang="en-US" sz="1350" b="1" dirty="0">
+                <a:solidFill>
+                  <a:srgbClr val="977024"/>
+                </a:solidFill>
+                <a:latin typeface="Pretendard" pitchFamily="34" charset="0"/>
+                <a:ea typeface="Pretendard" pitchFamily="34" charset="-122"/>
+                <a:cs typeface="Pretendard" pitchFamily="34" charset="-120"/>
+              </a:rPr>
+              <a:t>금리 변동</a:t>
+            </a:r>
+            <a:endParaRPr lang="en-US" sz="1350" dirty="0"/>
+          </a:p>
+        </p:txBody>
+      </p:sp>
+      <p:sp>
+        <p:nvSpPr>
+          <p:cNvPr id="14" name="Text 12"/>
+          <p:cNvSpPr/>
+          <p:nvPr/>
+        </p:nvSpPr>
+        <p:spPr>
+          <a:xfrm>
+            <a:off x="6452464" y="1947672"/>
+            <a:ext cx="4943704" cy="365760"/>
+          </a:xfrm>
+          <a:prstGeom prst="rect">
+            <a:avLst/>
+          </a:prstGeom>
+          <a:noFill/>
+          <a:ln/>
+        </p:spPr>
+        <p:txBody>
+          <a:bodyPr wrap="square" lIns="0" tIns="0" rIns="0" bIns="0" rtlCol="0" anchor="ctr">
+            <a:normAutofit/>
+          </a:bodyPr>
+          <a:lstStyle/>
+          <a:p>
+            <a:pPr indent="0" marL="0">
+              <a:buNone/>
+            </a:pPr>
+            <a:r>
+              <a:rPr lang="en-US" sz="1250" b="1" dirty="0">
+                <a:solidFill>
+                  <a:srgbClr val="10161F"/>
+                </a:solidFill>
+                <a:latin typeface="Pretendard" pitchFamily="34" charset="0"/>
+                <a:ea typeface="Pretendard" pitchFamily="34" charset="-122"/>
+                <a:cs typeface="Pretendard" pitchFamily="34" charset="-120"/>
+              </a:rPr>
+              <a:t>4.1% 고정</a:t>
+            </a:r>
+            <a:endParaRPr lang="en-US" sz="1250" dirty="0"/>
+          </a:p>
+        </p:txBody>
+      </p:sp>
+      <p:sp>
+        <p:nvSpPr>
+          <p:cNvPr id="15" name="Text 13"/>
+          <p:cNvSpPr/>
+          <p:nvPr/>
+        </p:nvSpPr>
+        <p:spPr>
+          <a:xfrm>
+            <a:off x="6452464" y="2377440"/>
+            <a:ext cx="4943704" cy="2606040"/>
+          </a:xfrm>
+          <a:prstGeom prst="rect">
+            <a:avLst/>
+          </a:prstGeom>
+          <a:noFill/>
+          <a:ln/>
+        </p:spPr>
+        <p:txBody>
+          <a:bodyPr wrap="square" lIns="0" tIns="0" rIns="0" bIns="0" rtlCol="0" anchor="t">
+            <a:normAutofit/>
+          </a:bodyPr>
+          <a:lstStyle/>
+          <a:p>
+            <a:pPr marL="342900" indent="-342900">
+              <a:lnSpc>
+                <a:spcPct val="125000"/>
+              </a:lnSpc>
+              <a:buSzPct val="100000"/>
+              <a:buChar char="•"/>
+            </a:pPr>
+            <a:r>
+              <a:rPr lang="en-US" sz="1100" dirty="0">
+                <a:solidFill>
+                  <a:srgbClr val="10161F"/>
+                </a:solidFill>
+                <a:latin typeface="Pretendard" pitchFamily="34" charset="0"/>
+                <a:ea typeface="Pretendard" pitchFamily="34" charset="-122"/>
+                <a:cs typeface="Pretendard" pitchFamily="34" charset="-120"/>
+              </a:rPr>
+              <a:t>승계 대출 활용</a:t>
+            </a:r>
+            <a:endParaRPr lang="en-US" sz="1100" dirty="0"/>
+          </a:p>
+        </p:txBody>
+      </p:sp>
+      <p:sp>
+        <p:nvSpPr>
+          <p:cNvPr id="16" name="Shape 14"/>
+          <p:cNvSpPr/>
+          <p:nvPr/>
+        </p:nvSpPr>
+        <p:spPr>
+          <a:xfrm>
+            <a:off x="566928" y="5193792"/>
+            <a:ext cx="11057839" cy="621792"/>
+          </a:xfrm>
+          <a:prstGeom prst="roundRect">
+            <a:avLst>
+              <a:gd name="adj" fmla="val 8824"/>
+            </a:avLst>
+          </a:prstGeom>
+          <a:solidFill>
+            <a:srgbClr val="F7FAFC"/>
+          </a:solidFill>
+          <a:ln w="6350">
+            <a:solidFill>
+              <a:srgbClr val="CBD5E0"/>
+            </a:solidFill>
+            <a:prstDash val="solid"/>
+          </a:ln>
+        </p:spPr>
+      </p:sp>
+      <p:sp>
+        <p:nvSpPr>
+          <p:cNvPr id="17" name="Text 15"/>
+          <p:cNvSpPr/>
+          <p:nvPr/>
+        </p:nvSpPr>
+        <p:spPr>
+          <a:xfrm>
+            <a:off x="795528" y="5193792"/>
+            <a:ext cx="10600639" cy="621792"/>
+          </a:xfrm>
+          <a:prstGeom prst="rect">
+            <a:avLst/>
+          </a:prstGeom>
+          <a:noFill/>
+          <a:ln/>
+        </p:spPr>
+        <p:txBody>
+          <a:bodyPr wrap="square" lIns="0" tIns="0" rIns="0" bIns="0" rtlCol="0" anchor="ctr"/>
+          <a:lstStyle/>
+          <a:p>
+            <a:pPr indent="0" marL="0">
+              <a:buNone/>
+            </a:pPr>
+            <a:r>
+              <a:rPr lang="en-US" sz="1100" dirty="0">
+                <a:solidFill>
+                  <a:srgbClr val="10161F"/>
+                </a:solidFill>
+                <a:latin typeface="Pretendard" pitchFamily="34" charset="0"/>
+                <a:ea typeface="Pretendard" pitchFamily="34" charset="-122"/>
+                <a:cs typeface="Pretendard" pitchFamily="34" charset="-120"/>
+              </a:rPr>
+              <a:t>※ 본 리스크 체크는 공부 및 브로커 확인 기반이며, 매수 전 전문 실사팀(변호사/건축사)을 통한 정밀 실사가 필요합니다.</a:t>
+            </a:r>
+            <a:endParaRPr lang="en-US" sz="1100" dirty="0"/>
+          </a:p>
+        </p:txBody>
+      </p:sp>
+      <p:sp>
+        <p:nvSpPr>
+          <p:cNvPr id="18" name="Text 16"/>
+          <p:cNvSpPr/>
+          <p:nvPr/>
+        </p:nvSpPr>
+        <p:spPr>
+          <a:xfrm>
+            <a:off x="566928" y="6382512"/>
+            <a:ext cx="7315200" cy="219456"/>
+          </a:xfrm>
+          <a:prstGeom prst="rect">
+            <a:avLst/>
+          </a:prstGeom>
+          <a:noFill/>
+          <a:ln/>
+        </p:spPr>
+        <p:txBody>
+          <a:bodyPr wrap="square" lIns="0" tIns="0" rIns="0" bIns="0" rtlCol="0" anchor="ctr"/>
+          <a:lstStyle/>
+          <a:p>
+            <a:pPr indent="0" marL="0">
+              <a:buNone/>
+            </a:pPr>
+            <a:r>
+              <a:rPr lang="en-US" sz="800" dirty="0">
+                <a:solidFill>
+                  <a:srgbClr val="718096"/>
+                </a:solidFill>
+                <a:latin typeface="Pretendard" pitchFamily="34" charset="0"/>
+                <a:ea typeface="Pretendard" pitchFamily="34" charset="-122"/>
+                <a:cs typeface="Pretendard" pitchFamily="34" charset="-120"/>
+              </a:rPr>
+              <a:t>크리딜   |   </a:t>
+            </a:r>
+            <a:endParaRPr lang="en-US" sz="800" dirty="0"/>
+          </a:p>
+        </p:txBody>
+      </p:sp>
+      <p:sp>
+        <p:nvSpPr>
+          <p:cNvPr id="19" name="Text 17"/>
+          <p:cNvSpPr/>
+          <p:nvPr/>
+        </p:nvSpPr>
+        <p:spPr>
+          <a:xfrm>
+            <a:off x="10710367" y="6382512"/>
+            <a:ext cx="914400" cy="219456"/>
+          </a:xfrm>
+          <a:prstGeom prst="rect">
+            <a:avLst/>
+          </a:prstGeom>
+          <a:noFill/>
+          <a:ln/>
+        </p:spPr>
+        <p:txBody>
+          <a:bodyPr wrap="square" lIns="0" tIns="0" rIns="0" bIns="0" rtlCol="0" anchor="ctr"/>
+          <a:lstStyle/>
+          <a:p>
+            <a:pPr algn="r" indent="0" marL="0">
+              <a:buNone/>
+            </a:pPr>
+            <a:r>
+              <a:rPr lang="en-US" sz="900" b="1" dirty="0">
+                <a:solidFill>
+                  <a:srgbClr val="B98A2E"/>
+                </a:solidFill>
+                <a:latin typeface="Arial" pitchFamily="34" charset="0"/>
+                <a:ea typeface="Arial" pitchFamily="34" charset="-122"/>
+                <a:cs typeface="Arial" pitchFamily="34" charset="-120"/>
+              </a:rPr>
+              <a:t>10</a:t>
+            </a:r>
+            <a:endParaRPr lang="en-US" sz="900" dirty="0"/>
+          </a:p>
+        </p:txBody>
+      </p:sp>
+    </p:spTree>
+  </p:cSld>
+  <p:clrMapOvr>
+    <a:masterClrMapping/>
+  </p:clrMapOvr>
+</p:sld>
+</file>
+
+<file path=ppt/slides/slide12.xml><?xml version="1.0" encoding="utf-8"?>
+<p:sld xmlns:a="http://schemas.openxmlformats.org/drawingml/2006/main" xmlns:r="http://schemas.openxmlformats.org/officeDocument/2006/relationships" xmlns:p="http://schemas.openxmlformats.org/presentationml/2006/main">
+  <p:cSld name="Slide 12">
+    <p:bg>
+      <p:bgPr>
+        <a:solidFill>
+          <a:srgbClr val="FFFFFF"/>
+        </a:solidFill>
+      </p:bgPr>
+    </p:bg>
+    <p:spTree>
+      <p:nvGrpSpPr>
+        <p:cNvPr id="1" name=""/>
+        <p:cNvGrpSpPr/>
+        <p:nvPr/>
+      </p:nvGrpSpPr>
+      <p:grpSpPr>
+        <a:xfrm>
+          <a:off x="0" y="0"/>
+          <a:ext cx="0" cy="0"/>
+          <a:chOff x="0" y="0"/>
+          <a:chExt cx="0" cy="0"/>
+        </a:xfrm>
+      </p:grpSpPr>
+      <p:sp>
+        <p:nvSpPr>
+          <p:cNvPr id="2" name="Shape 0"/>
+          <p:cNvSpPr/>
+          <p:nvPr/>
+        </p:nvSpPr>
+        <p:spPr>
+          <a:xfrm>
+            <a:off x="566928" y="457200"/>
+            <a:ext cx="384048" cy="384048"/>
+          </a:xfrm>
+          <a:prstGeom prst="ellipse">
+            <a:avLst/>
+          </a:prstGeom>
+          <a:solidFill>
+            <a:srgbClr val="B98A2E"/>
+          </a:solidFill>
+          <a:ln/>
+        </p:spPr>
+      </p:sp>
+      <p:sp>
+        <p:nvSpPr>
+          <p:cNvPr id="3" name="Text 1"/>
+          <p:cNvSpPr/>
+          <p:nvPr/>
+        </p:nvSpPr>
+        <p:spPr>
+          <a:xfrm>
+            <a:off x="566928" y="457200"/>
+            <a:ext cx="384048" cy="384048"/>
+          </a:xfrm>
+          <a:prstGeom prst="rect">
+            <a:avLst/>
+          </a:prstGeom>
+          <a:noFill/>
+          <a:ln/>
+        </p:spPr>
+        <p:txBody>
+          <a:bodyPr wrap="square" lIns="0" tIns="0" rIns="0" bIns="0" rtlCol="0" anchor="ctr"/>
+          <a:lstStyle/>
+          <a:p>
+            <a:pPr algn="ctr" indent="0" marL="0">
+              <a:buNone/>
+            </a:pPr>
+            <a:r>
+              <a:rPr lang="en-US" sz="1300" b="1" dirty="0">
+                <a:solidFill>
+                  <a:srgbClr val="FFFFFF"/>
+                </a:solidFill>
+                <a:latin typeface="Arial" pitchFamily="34" charset="0"/>
+                <a:ea typeface="Arial" pitchFamily="34" charset="-122"/>
+                <a:cs typeface="Arial" pitchFamily="34" charset="-120"/>
+              </a:rPr>
+              <a:t>11</a:t>
+            </a:r>
+            <a:endParaRPr lang="en-US" sz="1300" dirty="0"/>
+          </a:p>
+        </p:txBody>
+      </p:sp>
+      <p:sp>
+        <p:nvSpPr>
+          <p:cNvPr id="4" name="Text 2"/>
+          <p:cNvSpPr/>
+          <p:nvPr/>
+        </p:nvSpPr>
+        <p:spPr>
+          <a:xfrm>
+            <a:off x="1133856" y="457200"/>
+            <a:ext cx="10490911" cy="182880"/>
+          </a:xfrm>
+          <a:prstGeom prst="rect">
+            <a:avLst/>
+          </a:prstGeom>
+          <a:noFill/>
+          <a:ln/>
+        </p:spPr>
+        <p:txBody>
+          <a:bodyPr wrap="square" lIns="0" tIns="0" rIns="0" bIns="0" rtlCol="0" anchor="ctr"/>
+          <a:lstStyle/>
+          <a:p>
+            <a:pPr indent="0" marL="0">
+              <a:buNone/>
+            </a:pPr>
+            <a:r>
+              <a:rPr lang="en-US" sz="950" b="1" spc="200" kern="0" dirty="0">
+                <a:solidFill>
+                  <a:srgbClr val="B98A2E"/>
+                </a:solidFill>
+                <a:latin typeface="Arial" pitchFamily="34" charset="0"/>
+                <a:ea typeface="Arial" pitchFamily="34" charset="-122"/>
+                <a:cs typeface="Arial" pitchFamily="34" charset="-120"/>
+              </a:rPr>
+              <a:t>Checklist</a:t>
+            </a:r>
+            <a:endParaRPr lang="en-US" sz="950" dirty="0"/>
+          </a:p>
+        </p:txBody>
+      </p:sp>
+      <p:sp>
+        <p:nvSpPr>
+          <p:cNvPr id="5" name="Text 3"/>
+          <p:cNvSpPr/>
+          <p:nvPr/>
+        </p:nvSpPr>
+        <p:spPr>
+          <a:xfrm>
+            <a:off x="1133856" y="640080"/>
+            <a:ext cx="10490911" cy="365760"/>
+          </a:xfrm>
+          <a:prstGeom prst="rect">
+            <a:avLst/>
+          </a:prstGeom>
+          <a:noFill/>
+          <a:ln/>
+        </p:spPr>
+        <p:txBody>
+          <a:bodyPr wrap="square" lIns="0" tIns="0" rIns="0" bIns="0" rtlCol="0" anchor="ctr"/>
+          <a:lstStyle/>
+          <a:p>
+            <a:pPr indent="0" marL="0">
+              <a:buNone/>
+            </a:pPr>
+            <a:r>
+              <a:rPr lang="en-US" sz="2300" b="1" dirty="0">
+                <a:solidFill>
+                  <a:srgbClr val="10161F"/>
+                </a:solidFill>
+                <a:latin typeface="Pretendard" pitchFamily="34" charset="0"/>
+                <a:ea typeface="Pretendard" pitchFamily="34" charset="-122"/>
+                <a:cs typeface="Pretendard" pitchFamily="34" charset="-120"/>
+              </a:rPr>
+              <a:t>실사 및 확인 필요사항</a:t>
+            </a:r>
+            <a:endParaRPr lang="en-US" sz="2300" dirty="0"/>
+          </a:p>
+        </p:txBody>
+      </p:sp>
+      <p:sp>
+        <p:nvSpPr>
+          <p:cNvPr id="6" name="Text 4"/>
+          <p:cNvSpPr/>
+          <p:nvPr/>
+        </p:nvSpPr>
+        <p:spPr>
+          <a:xfrm>
+            <a:off x="566928" y="1371600"/>
+            <a:ext cx="11057839" cy="237744"/>
+          </a:xfrm>
+          <a:prstGeom prst="rect">
+            <a:avLst/>
+          </a:prstGeom>
+          <a:noFill/>
+          <a:ln/>
+        </p:spPr>
+        <p:txBody>
+          <a:bodyPr wrap="square" lIns="0" tIns="0" rIns="0" bIns="0" rtlCol="0" anchor="ctr"/>
+          <a:lstStyle/>
+          <a:p>
+            <a:pPr indent="0" marL="0">
+              <a:buNone/>
+            </a:pPr>
+            <a:r>
+              <a:rPr lang="en-US" sz="1100" b="1" dirty="0">
+                <a:solidFill>
+                  <a:srgbClr val="10161F"/>
+                </a:solidFill>
+                <a:latin typeface="Pretendard" pitchFamily="34" charset="0"/>
+                <a:ea typeface="Pretendard" pitchFamily="34" charset="-122"/>
+                <a:cs typeface="Pretendard" pitchFamily="34" charset="-120"/>
+              </a:rPr>
+              <a:t>거래 안정성 확보를 위한 필수 법률·물리·임대차 실사 점검 항목 (총 6건)</a:t>
+            </a:r>
+            <a:endParaRPr lang="en-US" sz="1100" dirty="0"/>
+          </a:p>
+        </p:txBody>
+      </p:sp>
+      <p:sp>
+        <p:nvSpPr>
+          <p:cNvPr id="7" name="Shape 5"/>
+          <p:cNvSpPr/>
+          <p:nvPr/>
+        </p:nvSpPr>
+        <p:spPr>
+          <a:xfrm>
+            <a:off x="566928" y="1719072"/>
+            <a:ext cx="5368900" cy="868680"/>
+          </a:xfrm>
+          <a:prstGeom prst="rect">
+            <a:avLst/>
+          </a:prstGeom>
+          <a:solidFill>
+            <a:srgbClr val="F7FAFC"/>
+          </a:solidFill>
+          <a:ln w="6350">
+            <a:solidFill>
+              <a:srgbClr val="D9B668"/>
+            </a:solidFill>
+            <a:prstDash val="solid"/>
+          </a:ln>
+        </p:spPr>
+      </p:sp>
+      <p:sp>
+        <p:nvSpPr>
+          <p:cNvPr id="8" name="Shape 6"/>
+          <p:cNvSpPr/>
+          <p:nvPr/>
+        </p:nvSpPr>
+        <p:spPr>
+          <a:xfrm>
+            <a:off x="704088" y="1883664"/>
+            <a:ext cx="320040" cy="320040"/>
+          </a:xfrm>
+          <a:prstGeom prst="rect">
+            <a:avLst/>
+          </a:prstGeom>
+          <a:solidFill>
+            <a:srgbClr val="977024"/>
+          </a:solidFill>
+          <a:ln/>
+        </p:spPr>
+      </p:sp>
+      <p:sp>
+        <p:nvSpPr>
+          <p:cNvPr id="9" name="Text 7"/>
+          <p:cNvSpPr/>
+          <p:nvPr/>
+        </p:nvSpPr>
+        <p:spPr>
+          <a:xfrm>
+            <a:off x="704088" y="1883664"/>
+            <a:ext cx="320040" cy="320040"/>
+          </a:xfrm>
+          <a:prstGeom prst="rect">
+            <a:avLst/>
+          </a:prstGeom>
+          <a:noFill/>
+          <a:ln/>
+        </p:spPr>
+        <p:txBody>
+          <a:bodyPr wrap="square" rtlCol="0" anchor="ctr"/>
+          <a:lstStyle/>
+          <a:p>
+            <a:pPr algn="ctr" indent="0" marL="0">
+              <a:buNone/>
+            </a:pPr>
+            <a:r>
+              <a:rPr lang="en-US" sz="1100" b="1" dirty="0">
+                <a:solidFill>
+                  <a:srgbClr val="000000"/>
+                </a:solidFill>
+                <a:latin typeface="Pretendard" pitchFamily="34" charset="0"/>
+                <a:ea typeface="Pretendard" pitchFamily="34" charset="-122"/>
+                <a:cs typeface="Pretendard" pitchFamily="34" charset="-120"/>
+              </a:rPr>
+              <a:t>✓</a:t>
+            </a:r>
+            <a:endParaRPr lang="en-US" sz="1100" dirty="0"/>
+          </a:p>
+        </p:txBody>
+      </p:sp>
+      <p:sp>
+        <p:nvSpPr>
+          <p:cNvPr id="10" name="Text 8"/>
+          <p:cNvSpPr/>
+          <p:nvPr/>
+        </p:nvSpPr>
+        <p:spPr>
+          <a:xfrm>
+            <a:off x="1115568" y="1828800"/>
+            <a:ext cx="4683100" cy="685800"/>
+          </a:xfrm>
+          <a:prstGeom prst="rect">
+            <a:avLst/>
+          </a:prstGeom>
+          <a:noFill/>
+          <a:ln/>
+        </p:spPr>
+        <p:txBody>
+          <a:bodyPr wrap="square" rtlCol="0" anchor="ctr"/>
+          <a:lstStyle/>
+          <a:p>
+            <a:pPr indent="0" marL="0">
+              <a:lnSpc>
+                <a:spcPct val="115000"/>
+              </a:lnSpc>
+              <a:buNone/>
+            </a:pPr>
+            <a:r>
+              <a:rPr lang="en-US" sz="1050" dirty="0">
+                <a:solidFill>
+                  <a:srgbClr val="10161F"/>
+                </a:solidFill>
+                <a:latin typeface="Pretendard" pitchFamily="34" charset="0"/>
+                <a:ea typeface="Pretendard" pitchFamily="34" charset="-122"/>
+                <a:cs typeface="Pretendard" pitchFamily="34" charset="-120"/>
+              </a:rPr>
+              <a:t>등기부등본 갑구/을구 권리관계 및 근저당 채권최고액 전액 말소 조건 원본 대조</a:t>
+            </a:r>
+            <a:endParaRPr lang="en-US" sz="1050" dirty="0"/>
+          </a:p>
+        </p:txBody>
+      </p:sp>
+      <p:sp>
+        <p:nvSpPr>
+          <p:cNvPr id="11" name="Shape 9"/>
+          <p:cNvSpPr/>
+          <p:nvPr/>
+        </p:nvSpPr>
+        <p:spPr>
+          <a:xfrm>
+            <a:off x="566928" y="2715768"/>
+            <a:ext cx="5368900" cy="868680"/>
+          </a:xfrm>
+          <a:prstGeom prst="rect">
+            <a:avLst/>
+          </a:prstGeom>
+          <a:solidFill>
+            <a:srgbClr val="F7FAFC"/>
+          </a:solidFill>
+          <a:ln w="6350">
+            <a:solidFill>
+              <a:srgbClr val="D9B668"/>
+            </a:solidFill>
+            <a:prstDash val="solid"/>
+          </a:ln>
+        </p:spPr>
+      </p:sp>
+      <p:sp>
+        <p:nvSpPr>
+          <p:cNvPr id="12" name="Shape 10"/>
+          <p:cNvSpPr/>
+          <p:nvPr/>
+        </p:nvSpPr>
+        <p:spPr>
+          <a:xfrm>
+            <a:off x="704088" y="2880360"/>
+            <a:ext cx="320040" cy="320040"/>
+          </a:xfrm>
+          <a:prstGeom prst="rect">
+            <a:avLst/>
+          </a:prstGeom>
+          <a:solidFill>
+            <a:srgbClr val="977024"/>
+          </a:solidFill>
+          <a:ln/>
+        </p:spPr>
+      </p:sp>
+      <p:sp>
+        <p:nvSpPr>
+          <p:cNvPr id="13" name="Text 11"/>
+          <p:cNvSpPr/>
+          <p:nvPr/>
+        </p:nvSpPr>
+        <p:spPr>
+          <a:xfrm>
+            <a:off x="704088" y="2880360"/>
+            <a:ext cx="320040" cy="320040"/>
+          </a:xfrm>
+          <a:prstGeom prst="rect">
+            <a:avLst/>
+          </a:prstGeom>
+          <a:noFill/>
+          <a:ln/>
+        </p:spPr>
+        <p:txBody>
+          <a:bodyPr wrap="square" rtlCol="0" anchor="ctr"/>
+          <a:lstStyle/>
+          <a:p>
+            <a:pPr algn="ctr" indent="0" marL="0">
+              <a:buNone/>
+            </a:pPr>
+            <a:r>
+              <a:rPr lang="en-US" sz="1100" b="1" dirty="0">
+                <a:solidFill>
+                  <a:srgbClr val="000000"/>
+                </a:solidFill>
+                <a:latin typeface="Pretendard" pitchFamily="34" charset="0"/>
+                <a:ea typeface="Pretendard" pitchFamily="34" charset="-122"/>
+                <a:cs typeface="Pretendard" pitchFamily="34" charset="-120"/>
+              </a:rPr>
+              <a:t>✓</a:t>
+            </a:r>
+            <a:endParaRPr lang="en-US" sz="1100" dirty="0"/>
+          </a:p>
+        </p:txBody>
+      </p:sp>
+      <p:sp>
+        <p:nvSpPr>
+          <p:cNvPr id="14" name="Text 12"/>
+          <p:cNvSpPr/>
+          <p:nvPr/>
+        </p:nvSpPr>
+        <p:spPr>
+          <a:xfrm>
+            <a:off x="1115568" y="2825496"/>
+            <a:ext cx="4683100" cy="685800"/>
+          </a:xfrm>
+          <a:prstGeom prst="rect">
+            <a:avLst/>
+          </a:prstGeom>
+          <a:noFill/>
+          <a:ln/>
+        </p:spPr>
+        <p:txBody>
+          <a:bodyPr wrap="square" rtlCol="0" anchor="ctr"/>
+          <a:lstStyle/>
+          <a:p>
+            <a:pPr indent="0" marL="0">
+              <a:lnSpc>
+                <a:spcPct val="115000"/>
+              </a:lnSpc>
+              <a:buNone/>
+            </a:pPr>
+            <a:r>
+              <a:rPr lang="en-US" sz="1050" dirty="0">
+                <a:solidFill>
+                  <a:srgbClr val="10161F"/>
+                </a:solidFill>
+                <a:latin typeface="Pretendard" pitchFamily="34" charset="0"/>
+                <a:ea typeface="Pretendard" pitchFamily="34" charset="-122"/>
+                <a:cs typeface="Pretendard" pitchFamily="34" charset="-120"/>
+              </a:rPr>
+              <a:t>임대차 원본 계약서 대조 (보증금, 월임대료, 관리비 실입금 내역 및 제소전화해조서)</a:t>
+            </a:r>
+            <a:endParaRPr lang="en-US" sz="1050" dirty="0"/>
+          </a:p>
+        </p:txBody>
+      </p:sp>
+      <p:sp>
+        <p:nvSpPr>
+          <p:cNvPr id="15" name="Shape 13"/>
+          <p:cNvSpPr/>
+          <p:nvPr/>
+        </p:nvSpPr>
+        <p:spPr>
+          <a:xfrm>
+            <a:off x="566928" y="3712464"/>
+            <a:ext cx="5368900" cy="868680"/>
+          </a:xfrm>
+          <a:prstGeom prst="rect">
+            <a:avLst/>
+          </a:prstGeom>
+          <a:solidFill>
+            <a:srgbClr val="F7FAFC"/>
+          </a:solidFill>
+          <a:ln w="6350">
+            <a:solidFill>
+              <a:srgbClr val="D9B668"/>
+            </a:solidFill>
+            <a:prstDash val="solid"/>
+          </a:ln>
+        </p:spPr>
+      </p:sp>
+      <p:sp>
+        <p:nvSpPr>
+          <p:cNvPr id="16" name="Shape 14"/>
+          <p:cNvSpPr/>
+          <p:nvPr/>
+        </p:nvSpPr>
+        <p:spPr>
+          <a:xfrm>
+            <a:off x="704088" y="3877056"/>
+            <a:ext cx="320040" cy="320040"/>
+          </a:xfrm>
+          <a:prstGeom prst="rect">
+            <a:avLst/>
+          </a:prstGeom>
+          <a:solidFill>
+            <a:srgbClr val="977024"/>
+          </a:solidFill>
+          <a:ln/>
+        </p:spPr>
+      </p:sp>
+      <p:sp>
+        <p:nvSpPr>
+          <p:cNvPr id="17" name="Text 15"/>
+          <p:cNvSpPr/>
+          <p:nvPr/>
+        </p:nvSpPr>
+        <p:spPr>
+          <a:xfrm>
+            <a:off x="704088" y="3877056"/>
+            <a:ext cx="320040" cy="320040"/>
+          </a:xfrm>
+          <a:prstGeom prst="rect">
+            <a:avLst/>
+          </a:prstGeom>
+          <a:noFill/>
+          <a:ln/>
+        </p:spPr>
+        <p:txBody>
+          <a:bodyPr wrap="square" rtlCol="0" anchor="ctr"/>
+          <a:lstStyle/>
+          <a:p>
+            <a:pPr algn="ctr" indent="0" marL="0">
+              <a:buNone/>
+            </a:pPr>
+            <a:r>
+              <a:rPr lang="en-US" sz="1100" b="1" dirty="0">
+                <a:solidFill>
+                  <a:srgbClr val="000000"/>
+                </a:solidFill>
+                <a:latin typeface="Pretendard" pitchFamily="34" charset="0"/>
+                <a:ea typeface="Pretendard" pitchFamily="34" charset="-122"/>
+                <a:cs typeface="Pretendard" pitchFamily="34" charset="-120"/>
+              </a:rPr>
+              <a:t>✓</a:t>
+            </a:r>
+            <a:endParaRPr lang="en-US" sz="1100" dirty="0"/>
+          </a:p>
+        </p:txBody>
+      </p:sp>
+      <p:sp>
+        <p:nvSpPr>
+          <p:cNvPr id="18" name="Text 16"/>
+          <p:cNvSpPr/>
+          <p:nvPr/>
+        </p:nvSpPr>
+        <p:spPr>
+          <a:xfrm>
+            <a:off x="1115568" y="3822192"/>
+            <a:ext cx="4683100" cy="685800"/>
+          </a:xfrm>
+          <a:prstGeom prst="rect">
+            <a:avLst/>
+          </a:prstGeom>
+          <a:noFill/>
+          <a:ln/>
+        </p:spPr>
+        <p:txBody>
+          <a:bodyPr wrap="square" rtlCol="0" anchor="ctr"/>
+          <a:lstStyle/>
+          <a:p>
+            <a:pPr indent="0" marL="0">
+              <a:lnSpc>
+                <a:spcPct val="115000"/>
+              </a:lnSpc>
+              <a:buNone/>
+            </a:pPr>
+            <a:r>
+              <a:rPr lang="en-US" sz="1050" dirty="0">
+                <a:solidFill>
+                  <a:srgbClr val="10161F"/>
+                </a:solidFill>
+                <a:latin typeface="Pretendard" pitchFamily="34" charset="0"/>
+                <a:ea typeface="Pretendard" pitchFamily="34" charset="-122"/>
+                <a:cs typeface="Pretendard" pitchFamily="34" charset="-120"/>
+              </a:rPr>
+              <a:t>건축물대장상 위반건축물 등재 여부 및 불법 증축·용도변경 이행강제금 납부 이력 점검</a:t>
+            </a:r>
+            <a:endParaRPr lang="en-US" sz="1050" dirty="0"/>
+          </a:p>
+        </p:txBody>
+      </p:sp>
+      <p:sp>
+        <p:nvSpPr>
+          <p:cNvPr id="19" name="Shape 17"/>
+          <p:cNvSpPr/>
+          <p:nvPr/>
+        </p:nvSpPr>
+        <p:spPr>
+          <a:xfrm>
+            <a:off x="6255868" y="1719072"/>
+            <a:ext cx="5368900" cy="868680"/>
+          </a:xfrm>
+          <a:prstGeom prst="rect">
+            <a:avLst/>
+          </a:prstGeom>
+          <a:solidFill>
+            <a:srgbClr val="F7FAFC"/>
+          </a:solidFill>
+          <a:ln w="6350">
+            <a:solidFill>
+              <a:srgbClr val="D9B668"/>
+            </a:solidFill>
+            <a:prstDash val="solid"/>
+          </a:ln>
+        </p:spPr>
+      </p:sp>
+      <p:sp>
+        <p:nvSpPr>
+          <p:cNvPr id="20" name="Shape 18"/>
+          <p:cNvSpPr/>
+          <p:nvPr/>
+        </p:nvSpPr>
+        <p:spPr>
+          <a:xfrm>
+            <a:off x="6393028" y="1883664"/>
+            <a:ext cx="320040" cy="320040"/>
+          </a:xfrm>
+          <a:prstGeom prst="rect">
+            <a:avLst/>
+          </a:prstGeom>
+          <a:solidFill>
+            <a:srgbClr val="977024"/>
+          </a:solidFill>
+          <a:ln/>
+        </p:spPr>
+      </p:sp>
+      <p:sp>
+        <p:nvSpPr>
+          <p:cNvPr id="21" name="Text 19"/>
+          <p:cNvSpPr/>
+          <p:nvPr/>
+        </p:nvSpPr>
+        <p:spPr>
+          <a:xfrm>
+            <a:off x="6393028" y="1883664"/>
+            <a:ext cx="320040" cy="320040"/>
+          </a:xfrm>
+          <a:prstGeom prst="rect">
+            <a:avLst/>
+          </a:prstGeom>
+          <a:noFill/>
+          <a:ln/>
+        </p:spPr>
+        <p:txBody>
+          <a:bodyPr wrap="square" rtlCol="0" anchor="ctr"/>
+          <a:lstStyle/>
+          <a:p>
+            <a:pPr algn="ctr" indent="0" marL="0">
+              <a:buNone/>
+            </a:pPr>
+            <a:r>
+              <a:rPr lang="en-US" sz="1100" b="1" dirty="0">
+                <a:solidFill>
+                  <a:srgbClr val="000000"/>
+                </a:solidFill>
+                <a:latin typeface="Pretendard" pitchFamily="34" charset="0"/>
+                <a:ea typeface="Pretendard" pitchFamily="34" charset="-122"/>
+                <a:cs typeface="Pretendard" pitchFamily="34" charset="-120"/>
+              </a:rPr>
+              <a:t>✓</a:t>
+            </a:r>
+            <a:endParaRPr lang="en-US" sz="1100" dirty="0"/>
+          </a:p>
+        </p:txBody>
+      </p:sp>
+      <p:sp>
+        <p:nvSpPr>
+          <p:cNvPr id="22" name="Text 20"/>
+          <p:cNvSpPr/>
+          <p:nvPr/>
+        </p:nvSpPr>
+        <p:spPr>
+          <a:xfrm>
+            <a:off x="6804508" y="1828800"/>
+            <a:ext cx="4683100" cy="685800"/>
+          </a:xfrm>
+          <a:prstGeom prst="rect">
+            <a:avLst/>
+          </a:prstGeom>
+          <a:noFill/>
+          <a:ln/>
+        </p:spPr>
+        <p:txBody>
+          <a:bodyPr wrap="square" rtlCol="0" anchor="ctr"/>
+          <a:lstStyle/>
+          <a:p>
+            <a:pPr indent="0" marL="0">
+              <a:lnSpc>
+                <a:spcPct val="115000"/>
+              </a:lnSpc>
+              <a:buNone/>
+            </a:pPr>
+            <a:r>
+              <a:rPr lang="en-US" sz="1050" dirty="0">
+                <a:solidFill>
+                  <a:srgbClr val="10161F"/>
+                </a:solidFill>
+                <a:latin typeface="Pretendard" pitchFamily="34" charset="0"/>
+                <a:ea typeface="Pretendard" pitchFamily="34" charset="-122"/>
+                <a:cs typeface="Pretendard" pitchFamily="34" charset="-120"/>
+              </a:rPr>
+              <a:t>토지이용계획확인원상 도시계획시설 저촉, 건축선 후퇴, 지구단위계획 특별계획구역 확인</a:t>
+            </a:r>
+            <a:endParaRPr lang="en-US" sz="1050" dirty="0"/>
+          </a:p>
+        </p:txBody>
+      </p:sp>
+      <p:sp>
+        <p:nvSpPr>
+          <p:cNvPr id="23" name="Shape 21"/>
+          <p:cNvSpPr/>
+          <p:nvPr/>
+        </p:nvSpPr>
+        <p:spPr>
+          <a:xfrm>
+            <a:off x="6255868" y="2715768"/>
+            <a:ext cx="5368900" cy="868680"/>
+          </a:xfrm>
+          <a:prstGeom prst="rect">
+            <a:avLst/>
+          </a:prstGeom>
+          <a:solidFill>
+            <a:srgbClr val="F7FAFC"/>
+          </a:solidFill>
+          <a:ln w="6350">
+            <a:solidFill>
+              <a:srgbClr val="D9B668"/>
+            </a:solidFill>
+            <a:prstDash val="solid"/>
+          </a:ln>
+        </p:spPr>
+      </p:sp>
+      <p:sp>
+        <p:nvSpPr>
+          <p:cNvPr id="24" name="Shape 22"/>
+          <p:cNvSpPr/>
+          <p:nvPr/>
+        </p:nvSpPr>
+        <p:spPr>
+          <a:xfrm>
+            <a:off x="6393028" y="2880360"/>
+            <a:ext cx="320040" cy="320040"/>
+          </a:xfrm>
+          <a:prstGeom prst="rect">
+            <a:avLst/>
+          </a:prstGeom>
+          <a:solidFill>
+            <a:srgbClr val="977024"/>
+          </a:solidFill>
+          <a:ln/>
+        </p:spPr>
+      </p:sp>
+      <p:sp>
+        <p:nvSpPr>
+          <p:cNvPr id="25" name="Text 23"/>
+          <p:cNvSpPr/>
+          <p:nvPr/>
+        </p:nvSpPr>
+        <p:spPr>
+          <a:xfrm>
+            <a:off x="6393028" y="2880360"/>
+            <a:ext cx="320040" cy="320040"/>
+          </a:xfrm>
+          <a:prstGeom prst="rect">
+            <a:avLst/>
+          </a:prstGeom>
+          <a:noFill/>
+          <a:ln/>
+        </p:spPr>
+        <p:txBody>
+          <a:bodyPr wrap="square" rtlCol="0" anchor="ctr"/>
+          <a:lstStyle/>
+          <a:p>
+            <a:pPr algn="ctr" indent="0" marL="0">
+              <a:buNone/>
+            </a:pPr>
+            <a:r>
+              <a:rPr lang="en-US" sz="1100" b="1" dirty="0">
+                <a:solidFill>
+                  <a:srgbClr val="000000"/>
+                </a:solidFill>
+                <a:latin typeface="Pretendard" pitchFamily="34" charset="0"/>
+                <a:ea typeface="Pretendard" pitchFamily="34" charset="-122"/>
+                <a:cs typeface="Pretendard" pitchFamily="34" charset="-120"/>
+              </a:rPr>
+              <a:t>✓</a:t>
+            </a:r>
+            <a:endParaRPr lang="en-US" sz="1100" dirty="0"/>
+          </a:p>
+        </p:txBody>
+      </p:sp>
+      <p:sp>
+        <p:nvSpPr>
+          <p:cNvPr id="26" name="Text 24"/>
+          <p:cNvSpPr/>
+          <p:nvPr/>
+        </p:nvSpPr>
+        <p:spPr>
+          <a:xfrm>
+            <a:off x="6804508" y="2825496"/>
+            <a:ext cx="4683100" cy="685800"/>
+          </a:xfrm>
+          <a:prstGeom prst="rect">
+            <a:avLst/>
+          </a:prstGeom>
+          <a:noFill/>
+          <a:ln/>
+        </p:spPr>
+        <p:txBody>
+          <a:bodyPr wrap="square" rtlCol="0" anchor="ctr"/>
+          <a:lstStyle/>
+          <a:p>
+            <a:pPr indent="0" marL="0">
+              <a:lnSpc>
+                <a:spcPct val="115000"/>
+              </a:lnSpc>
+              <a:buNone/>
+            </a:pPr>
+            <a:r>
+              <a:rPr lang="en-US" sz="1050" dirty="0">
+                <a:solidFill>
+                  <a:srgbClr val="10161F"/>
+                </a:solidFill>
+                <a:latin typeface="Pretendard" pitchFamily="34" charset="0"/>
+                <a:ea typeface="Pretendard" pitchFamily="34" charset="-122"/>
+                <a:cs typeface="Pretendard" pitchFamily="34" charset="-120"/>
+              </a:rPr>
+              <a:t>기계식 주차기 정기 안전점검 합격증, 승강기 검사필증, 소방 완비증명서 실물 실사</a:t>
+            </a:r>
+            <a:endParaRPr lang="en-US" sz="1050" dirty="0"/>
+          </a:p>
+        </p:txBody>
+      </p:sp>
+      <p:sp>
+        <p:nvSpPr>
+          <p:cNvPr id="27" name="Shape 25"/>
+          <p:cNvSpPr/>
+          <p:nvPr/>
+        </p:nvSpPr>
+        <p:spPr>
+          <a:xfrm>
+            <a:off x="6255868" y="3712464"/>
+            <a:ext cx="5368900" cy="868680"/>
+          </a:xfrm>
+          <a:prstGeom prst="rect">
+            <a:avLst/>
+          </a:prstGeom>
+          <a:solidFill>
+            <a:srgbClr val="F7FAFC"/>
+          </a:solidFill>
+          <a:ln w="6350">
+            <a:solidFill>
+              <a:srgbClr val="D9B668"/>
+            </a:solidFill>
+            <a:prstDash val="solid"/>
+          </a:ln>
+        </p:spPr>
+      </p:sp>
+      <p:sp>
+        <p:nvSpPr>
+          <p:cNvPr id="28" name="Shape 26"/>
+          <p:cNvSpPr/>
+          <p:nvPr/>
+        </p:nvSpPr>
+        <p:spPr>
+          <a:xfrm>
+            <a:off x="6393028" y="3877056"/>
+            <a:ext cx="320040" cy="320040"/>
+          </a:xfrm>
+          <a:prstGeom prst="rect">
+            <a:avLst/>
+          </a:prstGeom>
+          <a:solidFill>
+            <a:srgbClr val="977024"/>
+          </a:solidFill>
+          <a:ln/>
+        </p:spPr>
+      </p:sp>
+      <p:sp>
+        <p:nvSpPr>
+          <p:cNvPr id="29" name="Text 27"/>
+          <p:cNvSpPr/>
+          <p:nvPr/>
+        </p:nvSpPr>
+        <p:spPr>
+          <a:xfrm>
+            <a:off x="6393028" y="3877056"/>
+            <a:ext cx="320040" cy="320040"/>
+          </a:xfrm>
+          <a:prstGeom prst="rect">
+            <a:avLst/>
+          </a:prstGeom>
+          <a:noFill/>
+          <a:ln/>
+        </p:spPr>
+        <p:txBody>
+          <a:bodyPr wrap="square" rtlCol="0" anchor="ctr"/>
+          <a:lstStyle/>
+          <a:p>
+            <a:pPr algn="ctr" indent="0" marL="0">
+              <a:buNone/>
+            </a:pPr>
+            <a:r>
+              <a:rPr lang="en-US" sz="1100" b="1" dirty="0">
+                <a:solidFill>
+                  <a:srgbClr val="000000"/>
+                </a:solidFill>
+                <a:latin typeface="Pretendard" pitchFamily="34" charset="0"/>
+                <a:ea typeface="Pretendard" pitchFamily="34" charset="-122"/>
+                <a:cs typeface="Pretendard" pitchFamily="34" charset="-120"/>
+              </a:rPr>
+              <a:t>✓</a:t>
+            </a:r>
+            <a:endParaRPr lang="en-US" sz="1100" dirty="0"/>
+          </a:p>
+        </p:txBody>
+      </p:sp>
+      <p:sp>
+        <p:nvSpPr>
+          <p:cNvPr id="30" name="Text 28"/>
+          <p:cNvSpPr/>
+          <p:nvPr/>
+        </p:nvSpPr>
+        <p:spPr>
+          <a:xfrm>
+            <a:off x="6804508" y="3822192"/>
+            <a:ext cx="4683100" cy="685800"/>
+          </a:xfrm>
+          <a:prstGeom prst="rect">
+            <a:avLst/>
+          </a:prstGeom>
+          <a:noFill/>
+          <a:ln/>
+        </p:spPr>
+        <p:txBody>
+          <a:bodyPr wrap="square" rtlCol="0" anchor="ctr"/>
+          <a:lstStyle/>
+          <a:p>
+            <a:pPr indent="0" marL="0">
+              <a:lnSpc>
+                <a:spcPct val="115000"/>
+              </a:lnSpc>
+              <a:buNone/>
+            </a:pPr>
+            <a:r>
+              <a:rPr lang="en-US" sz="1050" dirty="0">
+                <a:solidFill>
+                  <a:srgbClr val="10161F"/>
+                </a:solidFill>
+                <a:latin typeface="Pretendard" pitchFamily="34" charset="0"/>
+                <a:ea typeface="Pretendard" pitchFamily="34" charset="-122"/>
+                <a:cs typeface="Pretendard" pitchFamily="34" charset="-120"/>
+              </a:rPr>
+              <a:t>정화조 용량 대비 현 업종 적합성 및 하수도 원인자부담금 추가 부과 대상 여부 확인</a:t>
+            </a:r>
+            <a:endParaRPr lang="en-US" sz="1050" dirty="0"/>
+          </a:p>
+        </p:txBody>
+      </p:sp>
+      <p:sp>
+        <p:nvSpPr>
+          <p:cNvPr id="31" name="Shape 29"/>
+          <p:cNvSpPr/>
+          <p:nvPr/>
+        </p:nvSpPr>
+        <p:spPr>
+          <a:xfrm>
+            <a:off x="566928" y="5760720"/>
+            <a:ext cx="11057839" cy="594360"/>
+          </a:xfrm>
+          <a:prstGeom prst="rect">
+            <a:avLst/>
+          </a:prstGeom>
+          <a:solidFill>
+            <a:srgbClr val="D9B668"/>
+          </a:solidFill>
+          <a:ln/>
+        </p:spPr>
+      </p:sp>
+      <p:sp>
+        <p:nvSpPr>
+          <p:cNvPr id="32" name="Text 30"/>
+          <p:cNvSpPr/>
+          <p:nvPr/>
+        </p:nvSpPr>
+        <p:spPr>
+          <a:xfrm>
+            <a:off x="749808" y="5833872"/>
+            <a:ext cx="10692079" cy="448056"/>
+          </a:xfrm>
+          <a:prstGeom prst="rect">
+            <a:avLst/>
+          </a:prstGeom>
+          <a:noFill/>
+          <a:ln/>
+        </p:spPr>
+        <p:txBody>
+          <a:bodyPr wrap="square" rtlCol="0" anchor="ctr"/>
+          <a:lstStyle/>
+          <a:p>
+            <a:pPr indent="0" marL="0">
+              <a:buNone/>
+            </a:pPr>
+            <a:r>
+              <a:rPr lang="en-US" sz="950" b="1" dirty="0">
+                <a:solidFill>
+                  <a:srgbClr val="977024"/>
+                </a:solidFill>
+                <a:latin typeface="Pretendard" pitchFamily="34" charset="0"/>
+                <a:ea typeface="Pretendard" pitchFamily="34" charset="-122"/>
+                <a:cs typeface="Pretendard" pitchFamily="34" charset="-120"/>
+              </a:rPr>
+              <a:t>※ 본 체크리스트는 계약 전 매수인의 안전한 자산 인수를 위한 필수 확인 사항이며, 실사(Due Diligence) 결과에 따라 매매 조건 및 잔금 일정이 조정될 수 있습니다.</a:t>
+            </a:r>
+            <a:endParaRPr lang="en-US" sz="950" dirty="0"/>
+          </a:p>
+        </p:txBody>
+      </p:sp>
+      <p:sp>
+        <p:nvSpPr>
+          <p:cNvPr id="33" name="Text 31"/>
+          <p:cNvSpPr/>
+          <p:nvPr/>
+        </p:nvSpPr>
+        <p:spPr>
+          <a:xfrm>
+            <a:off x="566928" y="6382512"/>
+            <a:ext cx="7315200" cy="219456"/>
+          </a:xfrm>
+          <a:prstGeom prst="rect">
+            <a:avLst/>
+          </a:prstGeom>
+          <a:noFill/>
+          <a:ln/>
+        </p:spPr>
+        <p:txBody>
+          <a:bodyPr wrap="square" lIns="0" tIns="0" rIns="0" bIns="0" rtlCol="0" anchor="ctr"/>
+          <a:lstStyle/>
+          <a:p>
+            <a:pPr indent="0" marL="0">
+              <a:buNone/>
+            </a:pPr>
+            <a:r>
+              <a:rPr lang="en-US" sz="800" dirty="0">
+                <a:solidFill>
+                  <a:srgbClr val="718096"/>
+                </a:solidFill>
+                <a:latin typeface="Pretendard" pitchFamily="34" charset="0"/>
+                <a:ea typeface="Pretendard" pitchFamily="34" charset="-122"/>
+                <a:cs typeface="Pretendard" pitchFamily="34" charset="-120"/>
+              </a:rPr>
+              <a:t>크리딜   |   </a:t>
+            </a:r>
+            <a:endParaRPr lang="en-US" sz="800" dirty="0"/>
+          </a:p>
+        </p:txBody>
+      </p:sp>
+      <p:sp>
+        <p:nvSpPr>
+          <p:cNvPr id="34" name="Text 32"/>
+          <p:cNvSpPr/>
+          <p:nvPr/>
+        </p:nvSpPr>
+        <p:spPr>
+          <a:xfrm>
+            <a:off x="10710367" y="6382512"/>
+            <a:ext cx="914400" cy="219456"/>
+          </a:xfrm>
+          <a:prstGeom prst="rect">
+            <a:avLst/>
+          </a:prstGeom>
+          <a:noFill/>
+          <a:ln/>
+        </p:spPr>
+        <p:txBody>
+          <a:bodyPr wrap="square" lIns="0" tIns="0" rIns="0" bIns="0" rtlCol="0" anchor="ctr"/>
+          <a:lstStyle/>
+          <a:p>
+            <a:pPr algn="r" indent="0" marL="0">
+              <a:buNone/>
+            </a:pPr>
+            <a:r>
+              <a:rPr lang="en-US" sz="900" b="1" dirty="0">
+                <a:solidFill>
+                  <a:srgbClr val="B98A2E"/>
+                </a:solidFill>
+                <a:latin typeface="Arial" pitchFamily="34" charset="0"/>
+                <a:ea typeface="Arial" pitchFamily="34" charset="-122"/>
+                <a:cs typeface="Arial" pitchFamily="34" charset="-120"/>
+              </a:rPr>
+              <a:t>11</a:t>
+            </a:r>
+            <a:endParaRPr lang="en-US" sz="900" dirty="0"/>
+          </a:p>
+        </p:txBody>
+      </p:sp>
+    </p:spTree>
+  </p:cSld>
+  <p:clrMapOvr>
+    <a:masterClrMapping/>
+  </p:clrMapOvr>
+</p:sld>
+</file>
+
+<file path=ppt/slides/slide13.xml><?xml version="1.0" encoding="utf-8"?>
+<p:sld xmlns:a="http://schemas.openxmlformats.org/drawingml/2006/main" xmlns:r="http://schemas.openxmlformats.org/officeDocument/2006/relationships" xmlns:p="http://schemas.openxmlformats.org/presentationml/2006/main">
+  <p:cSld name="Slide 13">
+    <p:bg>
+      <p:bgPr>
+        <a:solidFill>
+          <a:srgbClr val="FFFFFF"/>
+        </a:solidFill>
+      </p:bgPr>
+    </p:bg>
+    <p:spTree>
+      <p:nvGrpSpPr>
+        <p:cNvPr id="1" name=""/>
+        <p:cNvGrpSpPr/>
+        <p:nvPr/>
+      </p:nvGrpSpPr>
+      <p:grpSpPr>
+        <a:xfrm>
+          <a:off x="0" y="0"/>
+          <a:ext cx="0" cy="0"/>
+          <a:chOff x="0" y="0"/>
+          <a:chExt cx="0" cy="0"/>
+        </a:xfrm>
+      </p:grpSpPr>
+      <p:sp>
+        <p:nvSpPr>
+          <p:cNvPr id="2" name="Shape 0"/>
+          <p:cNvSpPr/>
+          <p:nvPr/>
+        </p:nvSpPr>
+        <p:spPr>
+          <a:xfrm>
+            <a:off x="566928" y="457200"/>
+            <a:ext cx="384048" cy="384048"/>
+          </a:xfrm>
+          <a:prstGeom prst="ellipse">
+            <a:avLst/>
+          </a:prstGeom>
+          <a:solidFill>
+            <a:srgbClr val="B98A2E"/>
+          </a:solidFill>
+          <a:ln/>
+        </p:spPr>
+      </p:sp>
+      <p:sp>
+        <p:nvSpPr>
+          <p:cNvPr id="3" name="Text 1"/>
+          <p:cNvSpPr/>
+          <p:nvPr/>
+        </p:nvSpPr>
+        <p:spPr>
+          <a:xfrm>
+            <a:off x="566928" y="457200"/>
+            <a:ext cx="384048" cy="384048"/>
+          </a:xfrm>
+          <a:prstGeom prst="rect">
+            <a:avLst/>
+          </a:prstGeom>
+          <a:noFill/>
+          <a:ln/>
+        </p:spPr>
+        <p:txBody>
+          <a:bodyPr wrap="square" lIns="0" tIns="0" rIns="0" bIns="0" rtlCol="0" anchor="ctr"/>
+          <a:lstStyle/>
+          <a:p>
+            <a:pPr algn="ctr" indent="0" marL="0">
+              <a:buNone/>
+            </a:pPr>
+            <a:r>
+              <a:rPr lang="en-US" sz="1300" b="1" dirty="0">
+                <a:solidFill>
+                  <a:srgbClr val="FFFFFF"/>
+                </a:solidFill>
+                <a:latin typeface="Arial" pitchFamily="34" charset="0"/>
+                <a:ea typeface="Arial" pitchFamily="34" charset="-122"/>
+                <a:cs typeface="Arial" pitchFamily="34" charset="-120"/>
+              </a:rPr>
+              <a:t>12</a:t>
+            </a:r>
+            <a:endParaRPr lang="en-US" sz="1300" dirty="0"/>
+          </a:p>
+        </p:txBody>
+      </p:sp>
+      <p:sp>
+        <p:nvSpPr>
+          <p:cNvPr id="4" name="Text 2"/>
+          <p:cNvSpPr/>
+          <p:nvPr/>
+        </p:nvSpPr>
+        <p:spPr>
+          <a:xfrm>
+            <a:off x="1133856" y="457200"/>
+            <a:ext cx="10490911" cy="182880"/>
+          </a:xfrm>
+          <a:prstGeom prst="rect">
+            <a:avLst/>
+          </a:prstGeom>
+          <a:noFill/>
+          <a:ln/>
+        </p:spPr>
+        <p:txBody>
+          <a:bodyPr wrap="square" lIns="0" tIns="0" rIns="0" bIns="0" rtlCol="0" anchor="ctr"/>
+          <a:lstStyle/>
+          <a:p>
+            <a:pPr indent="0" marL="0">
+              <a:buNone/>
+            </a:pPr>
+            <a:r>
+              <a:rPr lang="en-US" sz="950" b="1" spc="200" kern="0" dirty="0">
+                <a:solidFill>
+                  <a:srgbClr val="B98A2E"/>
+                </a:solidFill>
+                <a:latin typeface="Arial" pitchFamily="34" charset="0"/>
+                <a:ea typeface="Arial" pitchFamily="34" charset="-122"/>
+                <a:cs typeface="Arial" pitchFamily="34" charset="-120"/>
+              </a:rPr>
+              <a:t>Process</a:t>
+            </a:r>
+            <a:endParaRPr lang="en-US" sz="950" dirty="0"/>
+          </a:p>
+        </p:txBody>
+      </p:sp>
+      <p:sp>
+        <p:nvSpPr>
+          <p:cNvPr id="5" name="Text 3"/>
+          <p:cNvSpPr/>
+          <p:nvPr/>
+        </p:nvSpPr>
+        <p:spPr>
+          <a:xfrm>
+            <a:off x="1133856" y="640080"/>
+            <a:ext cx="10490911" cy="365760"/>
+          </a:xfrm>
+          <a:prstGeom prst="rect">
+            <a:avLst/>
+          </a:prstGeom>
+          <a:noFill/>
+          <a:ln/>
+        </p:spPr>
+        <p:txBody>
+          <a:bodyPr wrap="square" lIns="0" tIns="0" rIns="0" bIns="0" rtlCol="0" anchor="ctr"/>
+          <a:lstStyle/>
+          <a:p>
+            <a:pPr indent="0" marL="0">
+              <a:buNone/>
+            </a:pPr>
+            <a:r>
+              <a:rPr lang="en-US" sz="2300" b="1" dirty="0">
+                <a:solidFill>
+                  <a:srgbClr val="10161F"/>
+                </a:solidFill>
+                <a:latin typeface="Pretendard" pitchFamily="34" charset="0"/>
+                <a:ea typeface="Pretendard" pitchFamily="34" charset="-122"/>
+                <a:cs typeface="Pretendard" pitchFamily="34" charset="-120"/>
+              </a:rPr>
+              <a:t>다음 단계</a:t>
+            </a:r>
+            <a:endParaRPr lang="en-US" sz="2300" dirty="0"/>
+          </a:p>
+        </p:txBody>
+      </p:sp>
+      <p:sp>
+        <p:nvSpPr>
+          <p:cNvPr id="6" name="Shape 4"/>
+          <p:cNvSpPr/>
+          <p:nvPr/>
+        </p:nvSpPr>
+        <p:spPr>
+          <a:xfrm>
+            <a:off x="566928" y="1572768"/>
+            <a:ext cx="11057839" cy="3200400"/>
+          </a:xfrm>
+          <a:prstGeom prst="roundRect">
+            <a:avLst>
+              <a:gd name="adj" fmla="val 1714"/>
+            </a:avLst>
+          </a:prstGeom>
+          <a:solidFill>
+            <a:srgbClr val="F7FAFC"/>
+          </a:solidFill>
+          <a:ln w="6350">
+            <a:solidFill>
+              <a:srgbClr val="CBD5E0"/>
+            </a:solidFill>
+            <a:prstDash val="solid"/>
+          </a:ln>
+        </p:spPr>
+      </p:sp>
+      <p:sp>
+        <p:nvSpPr>
+          <p:cNvPr id="7" name="Shape 5"/>
+          <p:cNvSpPr/>
+          <p:nvPr/>
+        </p:nvSpPr>
+        <p:spPr>
+          <a:xfrm>
+            <a:off x="786384" y="1792224"/>
+            <a:ext cx="438912" cy="438912"/>
+          </a:xfrm>
+          <a:prstGeom prst="ellipse">
+            <a:avLst/>
+          </a:prstGeom>
+          <a:solidFill>
+            <a:srgbClr val="B98A2E"/>
+          </a:solidFill>
+          <a:ln/>
+        </p:spPr>
+      </p:sp>
+      <p:sp>
+        <p:nvSpPr>
+          <p:cNvPr id="8" name="Text 6"/>
+          <p:cNvSpPr/>
+          <p:nvPr/>
+        </p:nvSpPr>
+        <p:spPr>
+          <a:xfrm>
+            <a:off x="786384" y="1792224"/>
+            <a:ext cx="438912" cy="438912"/>
+          </a:xfrm>
+          <a:prstGeom prst="rect">
+            <a:avLst/>
+          </a:prstGeom>
+          <a:noFill/>
+          <a:ln/>
+        </p:spPr>
+        <p:txBody>
+          <a:bodyPr wrap="square" lIns="0" tIns="0" rIns="0" bIns="0" rtlCol="0" anchor="ctr"/>
+          <a:lstStyle/>
+          <a:p>
+            <a:pPr algn="ctr" indent="0" marL="0">
+              <a:buNone/>
+            </a:pPr>
+            <a:r>
+              <a:rPr lang="en-US" sz="1400" b="1" dirty="0">
+                <a:solidFill>
+                  <a:srgbClr val="FFFFFF"/>
+                </a:solidFill>
+                <a:latin typeface="Arial" pitchFamily="34" charset="0"/>
+                <a:ea typeface="Arial" pitchFamily="34" charset="-122"/>
+                <a:cs typeface="Arial" pitchFamily="34" charset="-120"/>
+              </a:rPr>
+              <a:t>01</a:t>
+            </a:r>
+            <a:endParaRPr lang="en-US" sz="1400" dirty="0"/>
+          </a:p>
+        </p:txBody>
+      </p:sp>
+      <p:sp>
+        <p:nvSpPr>
+          <p:cNvPr id="9" name="Text 7"/>
+          <p:cNvSpPr/>
+          <p:nvPr/>
+        </p:nvSpPr>
+        <p:spPr>
+          <a:xfrm>
+            <a:off x="786384" y="2304288"/>
+            <a:ext cx="10618927" cy="365760"/>
+          </a:xfrm>
+          <a:prstGeom prst="rect">
+            <a:avLst/>
+          </a:prstGeom>
+          <a:noFill/>
+          <a:ln/>
+        </p:spPr>
+        <p:txBody>
+          <a:bodyPr wrap="square" rtlCol="0" anchor="ctr"/>
+          <a:lstStyle/>
+          <a:p>
+            <a:pPr indent="0" marL="0">
+              <a:buNone/>
+            </a:pPr>
+            <a:r>
+              <a:rPr lang="en-US" sz="1600" b="1" dirty="0">
+                <a:solidFill>
+                  <a:srgbClr val="10161F"/>
+                </a:solidFill>
+                <a:latin typeface="Pretendard" pitchFamily="34" charset="0"/>
+                <a:ea typeface="Pretendard" pitchFamily="34" charset="-122"/>
+                <a:cs typeface="Pretendard" pitchFamily="34" charset="-120"/>
+              </a:rPr>
+              <a:t>1단계</a:t>
+            </a:r>
+            <a:endParaRPr lang="en-US" sz="1600" dirty="0"/>
+          </a:p>
+        </p:txBody>
+      </p:sp>
+      <p:sp>
+        <p:nvSpPr>
+          <p:cNvPr id="10" name="Text 8"/>
+          <p:cNvSpPr/>
+          <p:nvPr/>
+        </p:nvSpPr>
+        <p:spPr>
+          <a:xfrm>
+            <a:off x="786384" y="2761488"/>
+            <a:ext cx="10618927" cy="1828800"/>
+          </a:xfrm>
+          <a:prstGeom prst="rect">
+            <a:avLst/>
+          </a:prstGeom>
+          <a:noFill/>
+          <a:ln/>
+        </p:spPr>
+        <p:txBody>
+          <a:bodyPr wrap="square" rtlCol="0" anchor="t"/>
+          <a:lstStyle/>
+          <a:p>
+            <a:pPr indent="0" marL="0">
+              <a:buNone/>
+            </a:pPr>
+            <a:r>
+              <a:rPr lang="en-US" sz="1100" dirty="0">
+                <a:solidFill>
+                  <a:srgbClr val="10161F"/>
+                </a:solidFill>
+                <a:latin typeface="Pretendard" pitchFamily="34" charset="0"/>
+                <a:ea typeface="Pretendard" pitchFamily="34" charset="-122"/>
+                <a:cs typeface="Pretendard" pitchFamily="34" charset="-120"/>
+              </a:rPr>
+              <a:t>현장 실사 및 임대차계약서 원본 확인을 권장합니다.</a:t>
+            </a:r>
+            <a:endParaRPr lang="en-US" sz="1100" dirty="0"/>
+          </a:p>
+          <a:p>
+            <a:pPr indent="0" marL="0">
+              <a:buNone/>
+            </a:pPr>
+            <a:r>
+              <a:rPr lang="en-US" sz="1100" dirty="0">
+                <a:solidFill>
+                  <a:srgbClr val="10161F"/>
+                </a:solidFill>
+                <a:latin typeface="Pretendard" pitchFamily="34" charset="0"/>
+                <a:ea typeface="Pretendard" pitchFamily="34" charset="-122"/>
+                <a:cs typeface="Pretendard" pitchFamily="34" charset="-120"/>
+              </a:rPr>
+              <a:t>현장 실사 및 임대차계약서 원본 확인을 권장합니다.</a:t>
+            </a:r>
+            <a:endParaRPr lang="en-US" sz="1100" dirty="0"/>
+          </a:p>
+        </p:txBody>
+      </p:sp>
+      <p:sp>
+        <p:nvSpPr>
+          <p:cNvPr id="11" name="Text 9"/>
+          <p:cNvSpPr/>
+          <p:nvPr/>
+        </p:nvSpPr>
+        <p:spPr>
+          <a:xfrm>
+            <a:off x="566928" y="6382512"/>
+            <a:ext cx="7315200" cy="219456"/>
+          </a:xfrm>
+          <a:prstGeom prst="rect">
+            <a:avLst/>
+          </a:prstGeom>
+          <a:noFill/>
+          <a:ln/>
+        </p:spPr>
+        <p:txBody>
+          <a:bodyPr wrap="square" lIns="0" tIns="0" rIns="0" bIns="0" rtlCol="0" anchor="ctr"/>
+          <a:lstStyle/>
+          <a:p>
+            <a:pPr indent="0" marL="0">
+              <a:buNone/>
+            </a:pPr>
+            <a:r>
+              <a:rPr lang="en-US" sz="800" dirty="0">
+                <a:solidFill>
+                  <a:srgbClr val="718096"/>
+                </a:solidFill>
+                <a:latin typeface="Pretendard" pitchFamily="34" charset="0"/>
+                <a:ea typeface="Pretendard" pitchFamily="34" charset="-122"/>
+                <a:cs typeface="Pretendard" pitchFamily="34" charset="-120"/>
+              </a:rPr>
+              <a:t>크리딜   |   </a:t>
+            </a:r>
+            <a:endParaRPr lang="en-US" sz="800" dirty="0"/>
+          </a:p>
+        </p:txBody>
+      </p:sp>
+      <p:sp>
+        <p:nvSpPr>
+          <p:cNvPr id="12" name="Text 10"/>
+          <p:cNvSpPr/>
+          <p:nvPr/>
+        </p:nvSpPr>
+        <p:spPr>
+          <a:xfrm>
+            <a:off x="10710367" y="6382512"/>
+            <a:ext cx="914400" cy="219456"/>
+          </a:xfrm>
+          <a:prstGeom prst="rect">
+            <a:avLst/>
+          </a:prstGeom>
+          <a:noFill/>
+          <a:ln/>
+        </p:spPr>
+        <p:txBody>
+          <a:bodyPr wrap="square" lIns="0" tIns="0" rIns="0" bIns="0" rtlCol="0" anchor="ctr"/>
+          <a:lstStyle/>
+          <a:p>
+            <a:pPr algn="r" indent="0" marL="0">
+              <a:buNone/>
+            </a:pPr>
+            <a:r>
+              <a:rPr lang="en-US" sz="900" b="1" dirty="0">
+                <a:solidFill>
+                  <a:srgbClr val="B98A2E"/>
+                </a:solidFill>
+                <a:latin typeface="Arial" pitchFamily="34" charset="0"/>
+                <a:ea typeface="Arial" pitchFamily="34" charset="-122"/>
+                <a:cs typeface="Arial" pitchFamily="34" charset="-120"/>
+              </a:rPr>
+              <a:t>12</a:t>
+            </a:r>
+            <a:endParaRPr lang="en-US" sz="900" dirty="0"/>
+          </a:p>
+        </p:txBody>
+      </p:sp>
+    </p:spTree>
+  </p:cSld>
+  <p:clrMapOvr>
+    <a:masterClrMapping/>
+  </p:clrMapOvr>
+</p:sld>
+</file>
+
+<file path=ppt/slides/slide14.xml><?xml version="1.0" encoding="utf-8"?>
+<p:sld xmlns:a="http://schemas.openxmlformats.org/drawingml/2006/main" xmlns:r="http://schemas.openxmlformats.org/officeDocument/2006/relationships" xmlns:p="http://schemas.openxmlformats.org/presentationml/2006/main">
+  <p:cSld name="Slide 14">
     <p:bg>
       <p:bgPr>
         <a:solidFill>
@@ -2368,7 +5265,7 @@
                 <a:ea typeface="Arial" pitchFamily="34" charset="-122"/>
                 <a:cs typeface="Arial" pitchFamily="34" charset="-120"/>
               </a:rPr>
-              <a:t>10</a:t>
+              <a:t>13</a:t>
             </a:r>
             <a:endParaRPr lang="en-US" sz="1300" dirty="0"/>
           </a:p>
@@ -2407,7 +5304,7 @@
                 <a:ea typeface="Arial" pitchFamily="34" charset="-122"/>
                 <a:cs typeface="Arial" pitchFamily="34" charset="-120"/>
               </a:rPr>
-              <a:t>Disclaimer</a:t>
+              <a:t>Closing</a:t>
             </a:r>
             <a:endParaRPr lang="en-US" sz="950" dirty="0"/>
           </a:p>
@@ -2597,7 +5494,7 @@
               <a:buNone/>
             </a:pPr>
             <a:r>
-              <a:rPr lang="en-US" sz="850" dirty="0">
+              <a:rPr lang="en-US" sz="900" dirty="0">
                 <a:solidFill>
                   <a:srgbClr val="A0AEC0"/>
                 </a:solidFill>
@@ -2607,7 +5504,7 @@
               </a:rPr>
               <a:t>담당 중개사에게 초기 관심 표명 및 상담 요청</a:t>
             </a:r>
-            <a:endParaRPr lang="en-US" sz="850" dirty="0"/>
+            <a:endParaRPr lang="en-US" sz="900" dirty="0"/>
           </a:p>
         </p:txBody>
       </p:sp>
@@ -2795,7 +5692,7 @@
               <a:buNone/>
             </a:pPr>
             <a:r>
-              <a:rPr lang="en-US" sz="850" dirty="0">
+              <a:rPr lang="en-US" sz="900" dirty="0">
                 <a:solidFill>
                   <a:srgbClr val="A0AEC0"/>
                 </a:solidFill>
@@ -2805,7 +5702,7 @@
               </a:rPr>
               <a:t>비밀유지계약 후 상세 임대차·재무 자료 제공</a:t>
             </a:r>
-            <a:endParaRPr lang="en-US" sz="850" dirty="0"/>
+            <a:endParaRPr lang="en-US" sz="900" dirty="0"/>
           </a:p>
         </p:txBody>
       </p:sp>
@@ -2993,7 +5890,7 @@
               <a:buNone/>
             </a:pPr>
             <a:r>
-              <a:rPr lang="en-US" sz="850" dirty="0">
+              <a:rPr lang="en-US" sz="900" dirty="0">
                 <a:solidFill>
                   <a:srgbClr val="A0AEC0"/>
                 </a:solidFill>
@@ -3003,7 +5900,7 @@
               </a:rPr>
               <a:t>건물 컨디션 및 설비 직접 확인 후 의향서(LOI) 제출</a:t>
             </a:r>
-            <a:endParaRPr lang="en-US" sz="850" dirty="0"/>
+            <a:endParaRPr lang="en-US" sz="900" dirty="0"/>
           </a:p>
         </p:txBody>
       </p:sp>
@@ -3093,7 +5990,7 @@
               <a:buNone/>
             </a:pPr>
             <a:r>
-              <a:rPr lang="en-US" sz="850" b="1" dirty="0">
+              <a:rPr lang="en-US" sz="900" b="1" dirty="0">
                 <a:solidFill>
                   <a:srgbClr val="FFFFFF"/>
                 </a:solidFill>
@@ -3103,7 +6000,7 @@
               </a:rPr>
               <a:t>✓ 공부확인</a:t>
             </a:r>
-            <a:endParaRPr lang="en-US" sz="850" dirty="0"/>
+            <a:endParaRPr lang="en-US" sz="900" dirty="0"/>
           </a:p>
         </p:txBody>
       </p:sp>
@@ -3193,7 +6090,7 @@
               <a:buNone/>
             </a:pPr>
             <a:r>
-              <a:rPr lang="en-US" sz="850" b="1" dirty="0">
+              <a:rPr lang="en-US" sz="900" b="1" dirty="0">
                 <a:solidFill>
                   <a:srgbClr val="FFFFFF"/>
                 </a:solidFill>
@@ -3203,7 +6100,7 @@
               </a:rPr>
               <a:t>★ 전문가검증</a:t>
             </a:r>
-            <a:endParaRPr lang="en-US" sz="850" dirty="0"/>
+            <a:endParaRPr lang="en-US" sz="900" dirty="0"/>
           </a:p>
         </p:txBody>
       </p:sp>
@@ -3293,7 +6190,7 @@
               <a:buNone/>
             </a:pPr>
             <a:r>
-              <a:rPr lang="en-US" sz="850" b="1" dirty="0">
+              <a:rPr lang="en-US" sz="900" b="1" dirty="0">
                 <a:solidFill>
                   <a:srgbClr val="FFFFFF"/>
                 </a:solidFill>
@@ -3303,7 +6200,7 @@
               </a:rPr>
               <a:t>▲ 매도인고지</a:t>
             </a:r>
-            <a:endParaRPr lang="en-US" sz="850" dirty="0"/>
+            <a:endParaRPr lang="en-US" sz="900" dirty="0"/>
           </a:p>
         </p:txBody>
       </p:sp>
@@ -3393,7 +6290,7 @@
               <a:buNone/>
             </a:pPr>
             <a:r>
-              <a:rPr lang="en-US" sz="850" b="1" dirty="0">
+              <a:rPr lang="en-US" sz="900" b="1" dirty="0">
                 <a:solidFill>
                   <a:srgbClr val="FFFFFF"/>
                 </a:solidFill>
@@ -3403,7 +6300,7 @@
               </a:rPr>
               <a:t>● 중개인입력</a:t>
             </a:r>
-            <a:endParaRPr lang="en-US" sz="850" dirty="0"/>
+            <a:endParaRPr lang="en-US" sz="900" dirty="0"/>
           </a:p>
         </p:txBody>
       </p:sp>
@@ -3493,7 +6390,7 @@
               <a:buNone/>
             </a:pPr>
             <a:r>
-              <a:rPr lang="en-US" sz="850" b="1" dirty="0">
+              <a:rPr lang="en-US" sz="900" b="1" dirty="0">
                 <a:solidFill>
                   <a:srgbClr val="FFFFFF"/>
                 </a:solidFill>
@@ -3503,7 +6400,7 @@
               </a:rPr>
               <a:t>◇ AI추정·가정</a:t>
             </a:r>
-            <a:endParaRPr lang="en-US" sz="850" dirty="0"/>
+            <a:endParaRPr lang="en-US" sz="900" dirty="0"/>
           </a:p>
         </p:txBody>
       </p:sp>
@@ -3635,7 +6532,7 @@
               <a:buNone/>
             </a:pPr>
             <a:r>
-              <a:rPr lang="en-US" sz="850" dirty="0">
+              <a:rPr lang="en-US" sz="900" dirty="0">
                 <a:solidFill>
                   <a:srgbClr val="A0AEC0"/>
                 </a:solidFill>
@@ -3645,7 +6542,7 @@
               </a:rPr>
               <a:t>본 자료는 투자 권유가 아니며, 기재된 정보의 정확성을 보증하지 않습니다.</a:t>
             </a:r>
-            <a:endParaRPr lang="en-US" sz="850" dirty="0"/>
+            <a:endParaRPr lang="en-US" sz="900" dirty="0"/>
           </a:p>
         </p:txBody>
       </p:sp>
@@ -3780,7 +6677,7 @@
                 <a:ea typeface="Arial" pitchFamily="34" charset="-122"/>
                 <a:cs typeface="Arial" pitchFamily="34" charset="-120"/>
               </a:rPr>
-              <a:t>10</a:t>
+              <a:t>13</a:t>
             </a:r>
             <a:endParaRPr lang="en-US" sz="900" dirty="0"/>
           </a:p>
@@ -4091,7 +6988,7 @@
         </p:nvSpPr>
         <p:spPr>
           <a:xfrm>
-            <a:off x="731520" y="2276856"/>
+            <a:off x="731520" y="2313432"/>
             <a:ext cx="2298116" cy="402336"/>
           </a:xfrm>
           <a:prstGeom prst="rect">
@@ -4198,7 +7095,7 @@
         </p:nvSpPr>
         <p:spPr>
           <a:xfrm>
-            <a:off x="3541700" y="2276856"/>
+            <a:off x="3541700" y="2313432"/>
             <a:ext cx="2298116" cy="402336"/>
           </a:xfrm>
           <a:prstGeom prst="rect">
@@ -4305,7 +7202,7 @@
         </p:nvSpPr>
         <p:spPr>
           <a:xfrm>
-            <a:off x="6351880" y="2276856"/>
+            <a:off x="6351880" y="2313432"/>
             <a:ext cx="2298116" cy="402336"/>
           </a:xfrm>
           <a:prstGeom prst="rect">
@@ -4412,7 +7309,7 @@
         </p:nvSpPr>
         <p:spPr>
           <a:xfrm>
-            <a:off x="9162059" y="2276856"/>
+            <a:off x="9162059" y="2313432"/>
             <a:ext cx="2298116" cy="402336"/>
           </a:xfrm>
           <a:prstGeom prst="rect">
@@ -5127,117 +8024,9 @@
           </a:p>
         </p:txBody>
       </p:sp>
-      <p:pic>
-        <p:nvPicPr>
-          <p:cNvPr id="6" name="Image 0" descr="preencoded.png">    </p:cNvPr>
-          <p:cNvPicPr>
-            <a:picLocks noChangeAspect="1"/>
-          </p:cNvPicPr>
-          <p:nvPr/>
-        </p:nvPicPr>
-        <p:blipFill>
-          <a:blip r:embed="rId1"/>
-          <a:stretch>
-            <a:fillRect/>
-          </a:stretch>
-        </p:blipFill>
-        <p:spPr>
-          <a:xfrm>
-            <a:off x="566928" y="1481328"/>
-            <a:ext cx="5120640" cy="4114800"/>
-          </a:xfrm>
-          <a:prstGeom prst="rect">
-            <a:avLst/>
-          </a:prstGeom>
-        </p:spPr>
-      </p:pic>
-      <p:sp>
-        <p:nvSpPr>
-          <p:cNvPr id="7" name="Text 4"/>
-          <p:cNvSpPr/>
-          <p:nvPr/>
-        </p:nvSpPr>
-        <p:spPr>
-          <a:xfrm>
-            <a:off x="6053328" y="1481328"/>
-            <a:ext cx="2117147" cy="493776"/>
-          </a:xfrm>
-          <a:prstGeom prst="rect">
-            <a:avLst/>
-          </a:prstGeom>
-          <a:noFill/>
-          <a:ln/>
-        </p:spPr>
-        <p:txBody>
-          <a:bodyPr wrap="square" lIns="0" tIns="0" rIns="0" bIns="0" rtlCol="0" anchor="ctr"/>
-          <a:lstStyle/>
-          <a:p>
-            <a:pPr indent="0" marL="0">
-              <a:lnSpc>
-                <a:spcPct val="120000"/>
-              </a:lnSpc>
-              <a:buNone/>
-            </a:pPr>
-            <a:r>
-              <a:rPr lang="en-US" sz="1300" dirty="0">
-                <a:solidFill>
-                  <a:srgbClr val="718096"/>
-                </a:solidFill>
-                <a:latin typeface="Pretendard" pitchFamily="34" charset="0"/>
-                <a:ea typeface="Pretendard" pitchFamily="34" charset="-122"/>
-                <a:cs typeface="Pretendard" pitchFamily="34" charset="-120"/>
-              </a:rPr>
-              <a:t>교통 접근성</a:t>
-            </a:r>
-            <a:endParaRPr lang="en-US" sz="1300" dirty="0"/>
-          </a:p>
-        </p:txBody>
-      </p:sp>
-      <p:sp>
-        <p:nvSpPr>
-          <p:cNvPr id="8" name="Text 5"/>
-          <p:cNvSpPr/>
-          <p:nvPr/>
-        </p:nvSpPr>
-        <p:spPr>
-          <a:xfrm>
-            <a:off x="8170475" y="1481328"/>
-            <a:ext cx="3454292" cy="493776"/>
-          </a:xfrm>
-          <a:prstGeom prst="rect">
-            <a:avLst/>
-          </a:prstGeom>
-          <a:noFill/>
-          <a:ln/>
-        </p:spPr>
-        <p:txBody>
-          <a:bodyPr wrap="square" lIns="0" tIns="0" rIns="0" bIns="0" rtlCol="0" anchor="ctr"/>
-          <a:lstStyle/>
-          <a:p>
-            <a:pPr indent="0" marL="0">
-              <a:lnSpc>
-                <a:spcPct val="120000"/>
-              </a:lnSpc>
-              <a:buNone/>
-            </a:pPr>
-            <a:r>
-              <a:rPr lang="en-US" sz="1300" b="1" dirty="0">
-                <a:solidFill>
-                  <a:srgbClr val="10161F"/>
-                </a:solidFill>
-                <a:latin typeface="Pretendard" pitchFamily="34" charset="0"/>
-                <a:ea typeface="Pretendard" pitchFamily="34" charset="-122"/>
-                <a:cs typeface="Pretendard" pitchFamily="34" charset="-120"/>
-              </a:rPr>
-              <a:t>강남역·양재역 더블역세권 도보 4분 거리에 위치합니다.</a:t>
-            </a:r>
-            <a:endParaRPr lang="en-US" sz="1300" dirty="0"/>
-          </a:p>
-        </p:txBody>
-      </p:sp>
-      <p:sp>
-        <p:nvSpPr>
-          <p:cNvPr id="9" name="Text 6"/>
+      <p:sp>
+        <p:nvSpPr>
+          <p:cNvPr id="6" name="Text 4"/>
           <p:cNvSpPr/>
           <p:nvPr/>
         </p:nvSpPr>
@@ -5276,7 +8065,7 @@
       </p:sp>
       <p:sp>
         <p:nvSpPr>
-          <p:cNvPr id="10" name="Text 7"/>
+          <p:cNvPr id="7" name="Text 5"/>
           <p:cNvSpPr/>
           <p:nvPr/>
         </p:nvSpPr>
@@ -5310,45 +8099,6 @@
               <a:t>3</a:t>
             </a:r>
             <a:endParaRPr lang="en-US" sz="900" dirty="0"/>
-          </a:p>
-        </p:txBody>
-      </p:sp>
-      <p:sp>
-        <p:nvSpPr>
-          <p:cNvPr id="11" name="Text 8"/>
-          <p:cNvSpPr/>
-          <p:nvPr/>
-        </p:nvSpPr>
-        <p:spPr>
-          <a:xfrm>
-            <a:off x="566928" y="1481328"/>
-            <a:ext cx="11057839" cy="237744"/>
-          </a:xfrm>
-          <a:prstGeom prst="rect">
-            <a:avLst/>
-          </a:prstGeom>
-          <a:noFill/>
-          <a:ln/>
-        </p:spPr>
-        <p:txBody>
-          <a:bodyPr wrap="square" lIns="0" tIns="0" rIns="0" bIns="0" rtlCol="0" anchor="t"/>
-          <a:lstStyle/>
-          <a:p>
-            <a:pPr indent="0" marL="0">
-              <a:buNone/>
-            </a:pPr>
-            <a:r>
-              <a:rPr lang="en-US" sz="1000" dirty="0">
-                <a:solidFill>
-                  <a:srgbClr val="10161F"/>
-                </a:solidFill>
-                <a:latin typeface="Pretendard" pitchFamily="34" charset="0"/>
-                <a:ea typeface="Pretendard" pitchFamily="34" charset="-122"/>
-                <a:cs typeface="Pretendard" pitchFamily="34" charset="-120"/>
-              </a:rPr>
-              <a:t>강남역·양재역 더블역세권 도보 4분 거리에 위치합니다.</a:t>
-            </a:r>
-            <a:endParaRPr lang="en-US" sz="1000" dirty="0"/>
           </a:p>
         </p:txBody>
       </p:sp>
@@ -5437,7 +8187,7 @@
                 <a:ea typeface="Arial" pitchFamily="34" charset="-122"/>
                 <a:cs typeface="Arial" pitchFamily="34" charset="-120"/>
               </a:rPr>
-              <a:t>04</a:t>
+              <a:t>03</a:t>
             </a:r>
             <a:endParaRPr lang="en-US" sz="1300" dirty="0"/>
           </a:p>
@@ -5476,7 +8226,7 @@
                 <a:ea typeface="Arial" pitchFamily="34" charset="-122"/>
                 <a:cs typeface="Arial" pitchFamily="34" charset="-120"/>
               </a:rPr>
-              <a:t>Building</a:t>
+              <a:t>Land</a:t>
             </a:r>
             <a:endParaRPr lang="en-US" sz="950" dirty="0"/>
           </a:p>
@@ -5515,7 +8265,7 @@
                 <a:ea typeface="Pretendard" pitchFamily="34" charset="-122"/>
                 <a:cs typeface="Pretendard" pitchFamily="34" charset="-120"/>
               </a:rPr>
-              <a:t>물건 개요</a:t>
+              <a:t>토지</a:t>
             </a:r>
             <a:endParaRPr lang="en-US" sz="2300" dirty="0"/>
           </a:p>
@@ -5554,7 +8304,7 @@
                 <a:ea typeface="Pretendard" pitchFamily="34" charset="-122"/>
                 <a:cs typeface="Pretendard" pitchFamily="34" charset="-120"/>
               </a:rPr>
-              <a:t>건축물 개요 및 물리 스펙</a:t>
+              <a:t>토지 현황</a:t>
             </a:r>
             <a:endParaRPr lang="en-US" sz="1100" dirty="0"/>
           </a:p>
@@ -5569,7 +8319,7 @@
         <p:spPr>
           <a:xfrm>
             <a:off x="566928" y="1645920"/>
-            <a:ext cx="2606040" cy="402336"/>
+            <a:ext cx="2606040" cy="438912"/>
           </a:xfrm>
           <a:prstGeom prst="rect">
             <a:avLst/>
@@ -5588,7 +8338,7 @@
               <a:buNone/>
             </a:pPr>
             <a:r>
-              <a:rPr lang="en-US" sz="1400" dirty="0">
+              <a:rPr lang="en-US" sz="1350" dirty="0">
                 <a:solidFill>
                   <a:srgbClr val="718096"/>
                 </a:solidFill>
@@ -5598,7 +8348,7 @@
               </a:rPr>
               <a:t>대지면적</a:t>
             </a:r>
-            <a:endParaRPr lang="en-US" sz="1400" dirty="0"/>
+            <a:endParaRPr lang="en-US" sz="1350" dirty="0"/>
           </a:p>
         </p:txBody>
       </p:sp>
@@ -5611,7 +8361,7 @@
         <p:spPr>
           <a:xfrm>
             <a:off x="3172968" y="1645920"/>
-            <a:ext cx="4251960" cy="402336"/>
+            <a:ext cx="4251960" cy="438912"/>
           </a:xfrm>
           <a:prstGeom prst="rect">
             <a:avLst/>
@@ -5630,7 +8380,7 @@
               <a:buNone/>
             </a:pPr>
             <a:r>
-              <a:rPr lang="en-US" sz="1400" b="1" dirty="0">
+              <a:rPr lang="en-US" sz="1350" b="1" dirty="0">
                 <a:solidFill>
                   <a:srgbClr val="10161F"/>
                 </a:solidFill>
@@ -5640,7 +8390,7 @@
               </a:rPr>
               <a:t>142.5평</a:t>
             </a:r>
-            <a:endParaRPr lang="en-US" sz="1400" dirty="0"/>
+            <a:endParaRPr lang="en-US" sz="1350" dirty="0"/>
           </a:p>
         </p:txBody>
       </p:sp>
@@ -5652,7 +8402,7 @@
         </p:nvSpPr>
         <p:spPr>
           <a:xfrm>
-            <a:off x="566928" y="2048256"/>
+            <a:off x="566928" y="2084832"/>
             <a:ext cx="6858000" cy="0"/>
           </a:xfrm>
           <a:prstGeom prst="line">
@@ -5675,8 +8425,8 @@
         </p:nvSpPr>
         <p:spPr>
           <a:xfrm>
-            <a:off x="566928" y="2048256"/>
-            <a:ext cx="2606040" cy="402336"/>
+            <a:off x="566928" y="2084832"/>
+            <a:ext cx="2606040" cy="438912"/>
           </a:xfrm>
           <a:prstGeom prst="rect">
             <a:avLst/>
@@ -5695,7 +8445,7 @@
               <a:buNone/>
             </a:pPr>
             <a:r>
-              <a:rPr lang="en-US" sz="1400" dirty="0">
+              <a:rPr lang="en-US" sz="1350" dirty="0">
                 <a:solidFill>
                   <a:srgbClr val="718096"/>
                 </a:solidFill>
@@ -5705,7 +8455,7 @@
               </a:rPr>
               <a:t>연면적</a:t>
             </a:r>
-            <a:endParaRPr lang="en-US" sz="1400" dirty="0"/>
+            <a:endParaRPr lang="en-US" sz="1350" dirty="0"/>
           </a:p>
         </p:txBody>
       </p:sp>
@@ -5717,8 +8467,8 @@
         </p:nvSpPr>
         <p:spPr>
           <a:xfrm>
-            <a:off x="3172968" y="2048256"/>
-            <a:ext cx="4251960" cy="402336"/>
+            <a:off x="3172968" y="2084832"/>
+            <a:ext cx="4251960" cy="438912"/>
           </a:xfrm>
           <a:prstGeom prst="rect">
             <a:avLst/>
@@ -5737,7 +8487,7 @@
               <a:buNone/>
             </a:pPr>
             <a:r>
-              <a:rPr lang="en-US" sz="1400" b="1" dirty="0">
+              <a:rPr lang="en-US" sz="1350" b="1" dirty="0">
                 <a:solidFill>
                   <a:srgbClr val="10161F"/>
                 </a:solidFill>
@@ -5747,120 +8497,13 @@
               </a:rPr>
               <a:t>620.8평</a:t>
             </a:r>
-            <a:endParaRPr lang="en-US" sz="1400" dirty="0"/>
+            <a:endParaRPr lang="en-US" sz="1350" dirty="0"/>
           </a:p>
         </p:txBody>
       </p:sp>
       <p:sp>
         <p:nvSpPr>
           <p:cNvPr id="12" name="Shape 10"/>
-          <p:cNvSpPr/>
-          <p:nvPr/>
-        </p:nvSpPr>
-        <p:spPr>
-          <a:xfrm>
-            <a:off x="566928" y="2450592"/>
-            <a:ext cx="6858000" cy="0"/>
-          </a:xfrm>
-          <a:prstGeom prst="line">
-            <a:avLst/>
-          </a:prstGeom>
-          <a:noFill/>
-          <a:ln w="3810">
-            <a:solidFill>
-              <a:srgbClr val="CBD5E0"/>
-            </a:solidFill>
-            <a:prstDash val="solid"/>
-          </a:ln>
-        </p:spPr>
-      </p:sp>
-      <p:sp>
-        <p:nvSpPr>
-          <p:cNvPr id="13" name="Text 11"/>
-          <p:cNvSpPr/>
-          <p:nvPr/>
-        </p:nvSpPr>
-        <p:spPr>
-          <a:xfrm>
-            <a:off x="566928" y="2450592"/>
-            <a:ext cx="2606040" cy="402336"/>
-          </a:xfrm>
-          <a:prstGeom prst="rect">
-            <a:avLst/>
-          </a:prstGeom>
-          <a:noFill/>
-          <a:ln/>
-        </p:spPr>
-        <p:txBody>
-          <a:bodyPr wrap="square" lIns="0" tIns="0" rIns="0" bIns="0" rtlCol="0" anchor="ctr"/>
-          <a:lstStyle/>
-          <a:p>
-            <a:pPr indent="0" marL="0">
-              <a:lnSpc>
-                <a:spcPct val="120000"/>
-              </a:lnSpc>
-              <a:buNone/>
-            </a:pPr>
-            <a:r>
-              <a:rPr lang="en-US" sz="1400" dirty="0">
-                <a:solidFill>
-                  <a:srgbClr val="718096"/>
-                </a:solidFill>
-                <a:latin typeface="Pretendard" pitchFamily="34" charset="0"/>
-                <a:ea typeface="Pretendard" pitchFamily="34" charset="-122"/>
-                <a:cs typeface="Pretendard" pitchFamily="34" charset="-120"/>
-              </a:rPr>
-              <a:t>준공</a:t>
-            </a:r>
-            <a:endParaRPr lang="en-US" sz="1400" dirty="0"/>
-          </a:p>
-        </p:txBody>
-      </p:sp>
-      <p:sp>
-        <p:nvSpPr>
-          <p:cNvPr id="14" name="Text 12"/>
-          <p:cNvSpPr/>
-          <p:nvPr/>
-        </p:nvSpPr>
-        <p:spPr>
-          <a:xfrm>
-            <a:off x="3172968" y="2450592"/>
-            <a:ext cx="4251960" cy="402336"/>
-          </a:xfrm>
-          <a:prstGeom prst="rect">
-            <a:avLst/>
-          </a:prstGeom>
-          <a:noFill/>
-          <a:ln/>
-        </p:spPr>
-        <p:txBody>
-          <a:bodyPr wrap="square" lIns="0" tIns="0" rIns="0" bIns="0" rtlCol="0" anchor="ctr"/>
-          <a:lstStyle/>
-          <a:p>
-            <a:pPr indent="0" marL="0">
-              <a:lnSpc>
-                <a:spcPct val="120000"/>
-              </a:lnSpc>
-              <a:buNone/>
-            </a:pPr>
-            <a:r>
-              <a:rPr lang="en-US" sz="1400" b="1" dirty="0">
-                <a:solidFill>
-                  <a:srgbClr val="10161F"/>
-                </a:solidFill>
-                <a:latin typeface="Pretendard" pitchFamily="34" charset="0"/>
-                <a:ea typeface="Pretendard" pitchFamily="34" charset="-122"/>
-                <a:cs typeface="Pretendard" pitchFamily="34" charset="-120"/>
-              </a:rPr>
-              <a:t>2017년</a:t>
-            </a:r>
-            <a:endParaRPr lang="en-US" sz="1400" dirty="0"/>
-          </a:p>
-        </p:txBody>
-      </p:sp>
-      <p:sp>
-        <p:nvSpPr>
-          <p:cNvPr id="15" name="Shape 13"/>
           <p:cNvSpPr/>
           <p:nvPr/>
         </p:nvSpPr>
@@ -5883,49 +8526,49 @@
       </p:sp>
       <p:sp>
         <p:nvSpPr>
-          <p:cNvPr id="16" name="Shape 14"/>
+          <p:cNvPr id="13" name="Shape 11"/>
           <p:cNvSpPr/>
           <p:nvPr/>
         </p:nvSpPr>
         <p:spPr>
           <a:xfrm>
             <a:off x="7784287" y="1645920"/>
-            <a:ext cx="3840480" cy="1645920"/>
+            <a:ext cx="3840480" cy="2103120"/>
           </a:xfrm>
           <a:prstGeom prst="roundRect">
             <a:avLst>
-              <a:gd name="adj" fmla="val 3333"/>
+              <a:gd name="adj" fmla="val 2609"/>
             </a:avLst>
           </a:prstGeom>
           <a:solidFill>
-            <a:srgbClr val="F3EBDA"/>
+            <a:srgbClr val="BEE3F8"/>
           </a:solidFill>
           <a:ln/>
         </p:spPr>
       </p:sp>
       <p:sp>
         <p:nvSpPr>
-          <p:cNvPr id="17" name="Shape 15"/>
+          <p:cNvPr id="14" name="Shape 12"/>
           <p:cNvSpPr/>
           <p:nvPr/>
         </p:nvSpPr>
         <p:spPr>
           <a:xfrm>
             <a:off x="7784287" y="1700784"/>
-            <a:ext cx="36576" cy="1536192"/>
+            <a:ext cx="36576" cy="1993392"/>
           </a:xfrm>
           <a:prstGeom prst="rect">
             <a:avLst/>
           </a:prstGeom>
           <a:solidFill>
-            <a:srgbClr val="977024"/>
+            <a:srgbClr val="2B6CB0"/>
           </a:solidFill>
           <a:ln/>
         </p:spPr>
       </p:sp>
       <p:sp>
         <p:nvSpPr>
-          <p:cNvPr id="18" name="Text 16"/>
+          <p:cNvPr id="15" name="Text 13"/>
           <p:cNvSpPr/>
           <p:nvPr/>
         </p:nvSpPr>
@@ -5947,20 +8590,31 @@
             <a:pPr indent="0" marL="0">
               <a:buNone/>
             </a:pPr>
+            <a:r>
+              <a:rPr lang="en-US" sz="1050" b="1" dirty="0">
+                <a:solidFill>
+                  <a:srgbClr val="2B6CB0"/>
+                </a:solidFill>
+                <a:latin typeface="Pretendard" pitchFamily="34" charset="0"/>
+                <a:ea typeface="Pretendard" pitchFamily="34" charset="-122"/>
+                <a:cs typeface="Pretendard" pitchFamily="34" charset="-120"/>
+              </a:rPr>
+              <a:t>입지 및 권리관계 실사 포인트</a:t>
+            </a:r>
             <a:endParaRPr lang="en-US" sz="1050" dirty="0"/>
           </a:p>
         </p:txBody>
       </p:sp>
       <p:sp>
         <p:nvSpPr>
-          <p:cNvPr id="19" name="Text 17"/>
+          <p:cNvPr id="16" name="Text 14"/>
           <p:cNvSpPr/>
           <p:nvPr/>
         </p:nvSpPr>
         <p:spPr>
           <a:xfrm>
             <a:off x="7967167" y="1975104"/>
-            <a:ext cx="3511296" cy="1243584"/>
+            <a:ext cx="3511296" cy="1700784"/>
           </a:xfrm>
           <a:prstGeom prst="rect">
             <a:avLst/>
@@ -5972,11 +8626,12 @@
           <a:bodyPr wrap="square" lIns="0" tIns="0" rIns="0" bIns="0" rtlCol="0" anchor="t"/>
           <a:lstStyle/>
           <a:p>
-            <a:pPr indent="0" marL="0">
+            <a:pPr marL="342900" indent="-342900">
               <a:lnSpc>
                 <a:spcPct val="120000"/>
               </a:lnSpc>
-              <a:buNone/>
+              <a:buSzPct val="100000"/>
+              <a:buChar char="•"/>
             </a:pPr>
             <a:r>
               <a:rPr lang="en-US" sz="930" dirty="0">
@@ -5987,15 +8642,223 @@
                 <a:ea typeface="Pretendard" pitchFamily="34" charset="-122"/>
                 <a:cs typeface="Pretendard" pitchFamily="34" charset="-120"/>
               </a:rPr>
-              <a:t>서초 메디컬 빌딩은 지하2층~지상7층 규모의 올근생 빌딩입니다.</a:t>
+              <a:t>물건 접면 도로 폭 및 진출입 여건은 현장 실사 확인 사항입니다</a:t>
             </a:r>
             <a:endParaRPr lang="en-US" sz="930" dirty="0"/>
           </a:p>
+          <a:p>
+            <a:pPr marL="342900" indent="-342900">
+              <a:lnSpc>
+                <a:spcPct val="120000"/>
+              </a:lnSpc>
+              <a:buSzPct val="100000"/>
+              <a:buChar char="•"/>
+            </a:pPr>
+            <a:r>
+              <a:rPr lang="en-US" sz="930" dirty="0">
+                <a:solidFill>
+                  <a:srgbClr val="10161F"/>
+                </a:solidFill>
+                <a:latin typeface="Pretendard" pitchFamily="34" charset="0"/>
+                <a:ea typeface="Pretendard" pitchFamily="34" charset="-122"/>
+                <a:cs typeface="Pretendard" pitchFamily="34" charset="-120"/>
+              </a:rPr>
+              <a:t>등기부등본상 권리관계 및 제한물권 설정 여부를 확인하였습니다</a:t>
+            </a:r>
+            <a:endParaRPr lang="en-US" sz="930" dirty="0"/>
+          </a:p>
+          <a:p>
+            <a:pPr marL="342900" indent="-342900">
+              <a:lnSpc>
+                <a:spcPct val="120000"/>
+              </a:lnSpc>
+              <a:buSzPct val="100000"/>
+              <a:buChar char="•"/>
+            </a:pPr>
+            <a:r>
+              <a:rPr lang="en-US" sz="930" dirty="0">
+                <a:solidFill>
+                  <a:srgbClr val="10161F"/>
+                </a:solidFill>
+                <a:latin typeface="Pretendard" pitchFamily="34" charset="0"/>
+                <a:ea typeface="Pretendard" pitchFamily="34" charset="-122"/>
+                <a:cs typeface="Pretendard" pitchFamily="34" charset="-120"/>
+              </a:rPr>
+              <a:t>지구단위계획 및 토지이용계획상 허용 용도를 검토하였습니다</a:t>
+            </a:r>
+            <a:endParaRPr lang="en-US" sz="930" dirty="0"/>
+          </a:p>
+        </p:txBody>
+      </p:sp>
+      <p:sp>
+        <p:nvSpPr>
+          <p:cNvPr id="17" name="Shape 15"/>
+          <p:cNvSpPr/>
+          <p:nvPr/>
+        </p:nvSpPr>
+        <p:spPr>
+          <a:xfrm>
+            <a:off x="7784287" y="3977640"/>
+            <a:ext cx="3840480" cy="2148840"/>
+          </a:xfrm>
+          <a:prstGeom prst="roundRect">
+            <a:avLst>
+              <a:gd name="adj" fmla="val 2553"/>
+            </a:avLst>
+          </a:prstGeom>
+          <a:solidFill>
+            <a:srgbClr val="BEE3F8"/>
+          </a:solidFill>
+          <a:ln/>
+        </p:spPr>
+      </p:sp>
+      <p:sp>
+        <p:nvSpPr>
+          <p:cNvPr id="18" name="Shape 16"/>
+          <p:cNvSpPr/>
+          <p:nvPr/>
+        </p:nvSpPr>
+        <p:spPr>
+          <a:xfrm>
+            <a:off x="7784287" y="4032504"/>
+            <a:ext cx="36576" cy="2039112"/>
+          </a:xfrm>
+          <a:prstGeom prst="rect">
+            <a:avLst/>
+          </a:prstGeom>
+          <a:solidFill>
+            <a:srgbClr val="2B6CB0"/>
+          </a:solidFill>
+          <a:ln/>
+        </p:spPr>
+      </p:sp>
+      <p:sp>
+        <p:nvSpPr>
+          <p:cNvPr id="19" name="Text 17"/>
+          <p:cNvSpPr/>
+          <p:nvPr/>
+        </p:nvSpPr>
+        <p:spPr>
+          <a:xfrm>
+            <a:off x="7967167" y="4087368"/>
+            <a:ext cx="3511296" cy="201168"/>
+          </a:xfrm>
+          <a:prstGeom prst="rect">
+            <a:avLst/>
+          </a:prstGeom>
+          <a:noFill/>
+          <a:ln/>
+        </p:spPr>
+        <p:txBody>
+          <a:bodyPr wrap="square" lIns="0" tIns="0" rIns="0" bIns="0" rtlCol="0" anchor="ctr"/>
+          <a:lstStyle/>
+          <a:p>
+            <a:pPr indent="0" marL="0">
+              <a:buNone/>
+            </a:pPr>
+            <a:r>
+              <a:rPr lang="en-US" sz="1050" b="1" dirty="0">
+                <a:solidFill>
+                  <a:srgbClr val="2B6CB0"/>
+                </a:solidFill>
+                <a:latin typeface="Pretendard" pitchFamily="34" charset="0"/>
+                <a:ea typeface="Pretendard" pitchFamily="34" charset="-122"/>
+                <a:cs typeface="Pretendard" pitchFamily="34" charset="-120"/>
+              </a:rPr>
+              <a:t>임대차 및 운용 관리 상태</a:t>
+            </a:r>
+            <a:endParaRPr lang="en-US" sz="1050" dirty="0"/>
+          </a:p>
         </p:txBody>
       </p:sp>
       <p:sp>
         <p:nvSpPr>
           <p:cNvPr id="20" name="Text 18"/>
+          <p:cNvSpPr/>
+          <p:nvPr/>
+        </p:nvSpPr>
+        <p:spPr>
+          <a:xfrm>
+            <a:off x="7967167" y="4306824"/>
+            <a:ext cx="3511296" cy="1746504"/>
+          </a:xfrm>
+          <a:prstGeom prst="rect">
+            <a:avLst/>
+          </a:prstGeom>
+          <a:noFill/>
+          <a:ln/>
+        </p:spPr>
+        <p:txBody>
+          <a:bodyPr wrap="square" lIns="0" tIns="0" rIns="0" bIns="0" rtlCol="0" anchor="t"/>
+          <a:lstStyle/>
+          <a:p>
+            <a:pPr marL="342900" indent="-342900">
+              <a:lnSpc>
+                <a:spcPct val="120000"/>
+              </a:lnSpc>
+              <a:buSzPct val="100000"/>
+              <a:buChar char="•"/>
+            </a:pPr>
+            <a:r>
+              <a:rPr lang="en-US" sz="930" dirty="0">
+                <a:solidFill>
+                  <a:srgbClr val="10161F"/>
+                </a:solidFill>
+                <a:latin typeface="Pretendard" pitchFamily="34" charset="0"/>
+                <a:ea typeface="Pretendard" pitchFamily="34" charset="-122"/>
+                <a:cs typeface="Pretendard" pitchFamily="34" charset="-120"/>
+              </a:rPr>
+              <a:t>주요 임차인별 계약 만기 분산 및 렌트롤 실사가 필요합니다</a:t>
+            </a:r>
+            <a:endParaRPr lang="en-US" sz="930" dirty="0"/>
+          </a:p>
+          <a:p>
+            <a:pPr marL="342900" indent="-342900">
+              <a:lnSpc>
+                <a:spcPct val="120000"/>
+              </a:lnSpc>
+              <a:buSzPct val="100000"/>
+              <a:buChar char="•"/>
+            </a:pPr>
+            <a:r>
+              <a:rPr lang="en-US" sz="930" dirty="0">
+                <a:solidFill>
+                  <a:srgbClr val="10161F"/>
+                </a:solidFill>
+                <a:latin typeface="Pretendard" pitchFamily="34" charset="0"/>
+                <a:ea typeface="Pretendard" pitchFamily="34" charset="-122"/>
+                <a:cs typeface="Pretendard" pitchFamily="34" charset="-120"/>
+              </a:rPr>
+              <a:t>관리비 정산 내역 및 수선유지비 집행 이력을 점검하였습니다</a:t>
+            </a:r>
+            <a:endParaRPr lang="en-US" sz="930" dirty="0"/>
+          </a:p>
+          <a:p>
+            <a:pPr marL="342900" indent="-342900">
+              <a:lnSpc>
+                <a:spcPct val="120000"/>
+              </a:lnSpc>
+              <a:buSzPct val="100000"/>
+              <a:buChar char="•"/>
+            </a:pPr>
+            <a:r>
+              <a:rPr lang="en-US" sz="930" dirty="0">
+                <a:solidFill>
+                  <a:srgbClr val="10161F"/>
+                </a:solidFill>
+                <a:latin typeface="Pretendard" pitchFamily="34" charset="0"/>
+                <a:ea typeface="Pretendard" pitchFamily="34" charset="-122"/>
+                <a:cs typeface="Pretendard" pitchFamily="34" charset="-120"/>
+              </a:rPr>
+              <a:t>취득세 감면 및 대출 조달 구조는 금융·세무 자문 후 확정됩니다</a:t>
+            </a:r>
+            <a:endParaRPr lang="en-US" sz="930" dirty="0"/>
+          </a:p>
+        </p:txBody>
+      </p:sp>
+      <p:sp>
+        <p:nvSpPr>
+          <p:cNvPr id="21" name="Text 19"/>
           <p:cNvSpPr/>
           <p:nvPr/>
         </p:nvSpPr>
@@ -6034,7 +8897,7 @@
       </p:sp>
       <p:sp>
         <p:nvSpPr>
-          <p:cNvPr id="21" name="Text 19"/>
+          <p:cNvPr id="22" name="Text 20"/>
           <p:cNvSpPr/>
           <p:nvPr/>
         </p:nvSpPr>
@@ -6065,7 +8928,7 @@
                 <a:ea typeface="Arial" pitchFamily="34" charset="-122"/>
                 <a:cs typeface="Arial" pitchFamily="34" charset="-120"/>
               </a:rPr>
-              <a:t>4</a:t>
+              <a:t>3</a:t>
             </a:r>
             <a:endParaRPr lang="en-US" sz="900" dirty="0"/>
           </a:p>
@@ -6156,7 +9019,7 @@
                 <a:ea typeface="Arial" pitchFamily="34" charset="-122"/>
                 <a:cs typeface="Arial" pitchFamily="34" charset="-120"/>
               </a:rPr>
-              <a:t>05</a:t>
+              <a:t>04</a:t>
             </a:r>
             <a:endParaRPr lang="en-US" sz="1300" dirty="0"/>
           </a:p>
@@ -6195,7 +9058,7 @@
                 <a:ea typeface="Arial" pitchFamily="34" charset="-122"/>
                 <a:cs typeface="Arial" pitchFamily="34" charset="-120"/>
               </a:rPr>
-              <a:t>Rent Roll</a:t>
+              <a:t>Building</a:t>
             </a:r>
             <a:endParaRPr lang="en-US" sz="950" dirty="0"/>
           </a:p>
@@ -6234,6 +9097,725 @@
                 <a:ea typeface="Pretendard" pitchFamily="34" charset="-122"/>
                 <a:cs typeface="Pretendard" pitchFamily="34" charset="-120"/>
               </a:rPr>
+              <a:t>물건 개요</a:t>
+            </a:r>
+            <a:endParaRPr lang="en-US" sz="2300" dirty="0"/>
+          </a:p>
+        </p:txBody>
+      </p:sp>
+      <p:sp>
+        <p:nvSpPr>
+          <p:cNvPr id="6" name="Text 4"/>
+          <p:cNvSpPr/>
+          <p:nvPr/>
+        </p:nvSpPr>
+        <p:spPr>
+          <a:xfrm>
+            <a:off x="566928" y="1371600"/>
+            <a:ext cx="6858000" cy="237744"/>
+          </a:xfrm>
+          <a:prstGeom prst="rect">
+            <a:avLst/>
+          </a:prstGeom>
+          <a:noFill/>
+          <a:ln/>
+        </p:spPr>
+        <p:txBody>
+          <a:bodyPr wrap="square" lIns="0" tIns="0" rIns="0" bIns="0" rtlCol="0" anchor="ctr"/>
+          <a:lstStyle/>
+          <a:p>
+            <a:pPr indent="0" marL="0">
+              <a:buNone/>
+            </a:pPr>
+            <a:r>
+              <a:rPr lang="en-US" sz="1100" b="1" dirty="0">
+                <a:solidFill>
+                  <a:srgbClr val="10161F"/>
+                </a:solidFill>
+                <a:latin typeface="Pretendard" pitchFamily="34" charset="0"/>
+                <a:ea typeface="Pretendard" pitchFamily="34" charset="-122"/>
+                <a:cs typeface="Pretendard" pitchFamily="34" charset="-120"/>
+              </a:rPr>
+              <a:t>건축물 개요 및 물리 스펙</a:t>
+            </a:r>
+            <a:endParaRPr lang="en-US" sz="1100" dirty="0"/>
+          </a:p>
+        </p:txBody>
+      </p:sp>
+      <p:sp>
+        <p:nvSpPr>
+          <p:cNvPr id="7" name="Text 5"/>
+          <p:cNvSpPr/>
+          <p:nvPr/>
+        </p:nvSpPr>
+        <p:spPr>
+          <a:xfrm>
+            <a:off x="566928" y="1645920"/>
+            <a:ext cx="2606040" cy="438912"/>
+          </a:xfrm>
+          <a:prstGeom prst="rect">
+            <a:avLst/>
+          </a:prstGeom>
+          <a:noFill/>
+          <a:ln/>
+        </p:spPr>
+        <p:txBody>
+          <a:bodyPr wrap="square" lIns="0" tIns="0" rIns="0" bIns="0" rtlCol="0" anchor="ctr"/>
+          <a:lstStyle/>
+          <a:p>
+            <a:pPr indent="0" marL="0">
+              <a:lnSpc>
+                <a:spcPct val="120000"/>
+              </a:lnSpc>
+              <a:buNone/>
+            </a:pPr>
+            <a:r>
+              <a:rPr lang="en-US" sz="1350" dirty="0">
+                <a:solidFill>
+                  <a:srgbClr val="718096"/>
+                </a:solidFill>
+                <a:latin typeface="Pretendard" pitchFamily="34" charset="0"/>
+                <a:ea typeface="Pretendard" pitchFamily="34" charset="-122"/>
+                <a:cs typeface="Pretendard" pitchFamily="34" charset="-120"/>
+              </a:rPr>
+              <a:t>대지면적</a:t>
+            </a:r>
+            <a:endParaRPr lang="en-US" sz="1350" dirty="0"/>
+          </a:p>
+        </p:txBody>
+      </p:sp>
+      <p:sp>
+        <p:nvSpPr>
+          <p:cNvPr id="8" name="Text 6"/>
+          <p:cNvSpPr/>
+          <p:nvPr/>
+        </p:nvSpPr>
+        <p:spPr>
+          <a:xfrm>
+            <a:off x="3172968" y="1645920"/>
+            <a:ext cx="4251960" cy="438912"/>
+          </a:xfrm>
+          <a:prstGeom prst="rect">
+            <a:avLst/>
+          </a:prstGeom>
+          <a:noFill/>
+          <a:ln/>
+        </p:spPr>
+        <p:txBody>
+          <a:bodyPr wrap="square" lIns="0" tIns="0" rIns="0" bIns="0" rtlCol="0" anchor="ctr"/>
+          <a:lstStyle/>
+          <a:p>
+            <a:pPr indent="0" marL="0">
+              <a:lnSpc>
+                <a:spcPct val="120000"/>
+              </a:lnSpc>
+              <a:buNone/>
+            </a:pPr>
+            <a:r>
+              <a:rPr lang="en-US" sz="1350" b="1" dirty="0">
+                <a:solidFill>
+                  <a:srgbClr val="10161F"/>
+                </a:solidFill>
+                <a:latin typeface="Pretendard" pitchFamily="34" charset="0"/>
+                <a:ea typeface="Pretendard" pitchFamily="34" charset="-122"/>
+                <a:cs typeface="Pretendard" pitchFamily="34" charset="-120"/>
+              </a:rPr>
+              <a:t>142.5평</a:t>
+            </a:r>
+            <a:endParaRPr lang="en-US" sz="1350" dirty="0"/>
+          </a:p>
+        </p:txBody>
+      </p:sp>
+      <p:sp>
+        <p:nvSpPr>
+          <p:cNvPr id="9" name="Shape 7"/>
+          <p:cNvSpPr/>
+          <p:nvPr/>
+        </p:nvSpPr>
+        <p:spPr>
+          <a:xfrm>
+            <a:off x="566928" y="2084832"/>
+            <a:ext cx="6858000" cy="0"/>
+          </a:xfrm>
+          <a:prstGeom prst="line">
+            <a:avLst/>
+          </a:prstGeom>
+          <a:noFill/>
+          <a:ln w="3810">
+            <a:solidFill>
+              <a:srgbClr val="CBD5E0"/>
+            </a:solidFill>
+            <a:prstDash val="solid"/>
+          </a:ln>
+        </p:spPr>
+      </p:sp>
+      <p:sp>
+        <p:nvSpPr>
+          <p:cNvPr id="10" name="Text 8"/>
+          <p:cNvSpPr/>
+          <p:nvPr/>
+        </p:nvSpPr>
+        <p:spPr>
+          <a:xfrm>
+            <a:off x="566928" y="2084832"/>
+            <a:ext cx="2606040" cy="438912"/>
+          </a:xfrm>
+          <a:prstGeom prst="rect">
+            <a:avLst/>
+          </a:prstGeom>
+          <a:noFill/>
+          <a:ln/>
+        </p:spPr>
+        <p:txBody>
+          <a:bodyPr wrap="square" lIns="0" tIns="0" rIns="0" bIns="0" rtlCol="0" anchor="ctr"/>
+          <a:lstStyle/>
+          <a:p>
+            <a:pPr indent="0" marL="0">
+              <a:lnSpc>
+                <a:spcPct val="120000"/>
+              </a:lnSpc>
+              <a:buNone/>
+            </a:pPr>
+            <a:r>
+              <a:rPr lang="en-US" sz="1350" dirty="0">
+                <a:solidFill>
+                  <a:srgbClr val="718096"/>
+                </a:solidFill>
+                <a:latin typeface="Pretendard" pitchFamily="34" charset="0"/>
+                <a:ea typeface="Pretendard" pitchFamily="34" charset="-122"/>
+                <a:cs typeface="Pretendard" pitchFamily="34" charset="-120"/>
+              </a:rPr>
+              <a:t>연면적</a:t>
+            </a:r>
+            <a:endParaRPr lang="en-US" sz="1350" dirty="0"/>
+          </a:p>
+        </p:txBody>
+      </p:sp>
+      <p:sp>
+        <p:nvSpPr>
+          <p:cNvPr id="11" name="Text 9"/>
+          <p:cNvSpPr/>
+          <p:nvPr/>
+        </p:nvSpPr>
+        <p:spPr>
+          <a:xfrm>
+            <a:off x="3172968" y="2084832"/>
+            <a:ext cx="4251960" cy="438912"/>
+          </a:xfrm>
+          <a:prstGeom prst="rect">
+            <a:avLst/>
+          </a:prstGeom>
+          <a:noFill/>
+          <a:ln/>
+        </p:spPr>
+        <p:txBody>
+          <a:bodyPr wrap="square" lIns="0" tIns="0" rIns="0" bIns="0" rtlCol="0" anchor="ctr"/>
+          <a:lstStyle/>
+          <a:p>
+            <a:pPr indent="0" marL="0">
+              <a:lnSpc>
+                <a:spcPct val="120000"/>
+              </a:lnSpc>
+              <a:buNone/>
+            </a:pPr>
+            <a:r>
+              <a:rPr lang="en-US" sz="1350" b="1" dirty="0">
+                <a:solidFill>
+                  <a:srgbClr val="10161F"/>
+                </a:solidFill>
+                <a:latin typeface="Pretendard" pitchFamily="34" charset="0"/>
+                <a:ea typeface="Pretendard" pitchFamily="34" charset="-122"/>
+                <a:cs typeface="Pretendard" pitchFamily="34" charset="-120"/>
+              </a:rPr>
+              <a:t>620.8평</a:t>
+            </a:r>
+            <a:endParaRPr lang="en-US" sz="1350" dirty="0"/>
+          </a:p>
+        </p:txBody>
+      </p:sp>
+      <p:sp>
+        <p:nvSpPr>
+          <p:cNvPr id="12" name="Shape 10"/>
+          <p:cNvSpPr/>
+          <p:nvPr/>
+        </p:nvSpPr>
+        <p:spPr>
+          <a:xfrm>
+            <a:off x="566928" y="2523744"/>
+            <a:ext cx="6858000" cy="0"/>
+          </a:xfrm>
+          <a:prstGeom prst="line">
+            <a:avLst/>
+          </a:prstGeom>
+          <a:noFill/>
+          <a:ln w="3810">
+            <a:solidFill>
+              <a:srgbClr val="CBD5E0"/>
+            </a:solidFill>
+            <a:prstDash val="solid"/>
+          </a:ln>
+        </p:spPr>
+      </p:sp>
+      <p:sp>
+        <p:nvSpPr>
+          <p:cNvPr id="13" name="Text 11"/>
+          <p:cNvSpPr/>
+          <p:nvPr/>
+        </p:nvSpPr>
+        <p:spPr>
+          <a:xfrm>
+            <a:off x="566928" y="2523744"/>
+            <a:ext cx="2606040" cy="438912"/>
+          </a:xfrm>
+          <a:prstGeom prst="rect">
+            <a:avLst/>
+          </a:prstGeom>
+          <a:noFill/>
+          <a:ln/>
+        </p:spPr>
+        <p:txBody>
+          <a:bodyPr wrap="square" lIns="0" tIns="0" rIns="0" bIns="0" rtlCol="0" anchor="ctr"/>
+          <a:lstStyle/>
+          <a:p>
+            <a:pPr indent="0" marL="0">
+              <a:lnSpc>
+                <a:spcPct val="120000"/>
+              </a:lnSpc>
+              <a:buNone/>
+            </a:pPr>
+            <a:r>
+              <a:rPr lang="en-US" sz="1350" dirty="0">
+                <a:solidFill>
+                  <a:srgbClr val="718096"/>
+                </a:solidFill>
+                <a:latin typeface="Pretendard" pitchFamily="34" charset="0"/>
+                <a:ea typeface="Pretendard" pitchFamily="34" charset="-122"/>
+                <a:cs typeface="Pretendard" pitchFamily="34" charset="-120"/>
+              </a:rPr>
+              <a:t>준공</a:t>
+            </a:r>
+            <a:endParaRPr lang="en-US" sz="1350" dirty="0"/>
+          </a:p>
+        </p:txBody>
+      </p:sp>
+      <p:sp>
+        <p:nvSpPr>
+          <p:cNvPr id="14" name="Text 12"/>
+          <p:cNvSpPr/>
+          <p:nvPr/>
+        </p:nvSpPr>
+        <p:spPr>
+          <a:xfrm>
+            <a:off x="3172968" y="2523744"/>
+            <a:ext cx="4251960" cy="438912"/>
+          </a:xfrm>
+          <a:prstGeom prst="rect">
+            <a:avLst/>
+          </a:prstGeom>
+          <a:noFill/>
+          <a:ln/>
+        </p:spPr>
+        <p:txBody>
+          <a:bodyPr wrap="square" lIns="0" tIns="0" rIns="0" bIns="0" rtlCol="0" anchor="ctr"/>
+          <a:lstStyle/>
+          <a:p>
+            <a:pPr indent="0" marL="0">
+              <a:lnSpc>
+                <a:spcPct val="120000"/>
+              </a:lnSpc>
+              <a:buNone/>
+            </a:pPr>
+            <a:r>
+              <a:rPr lang="en-US" sz="1350" b="1" dirty="0">
+                <a:solidFill>
+                  <a:srgbClr val="10161F"/>
+                </a:solidFill>
+                <a:latin typeface="Pretendard" pitchFamily="34" charset="0"/>
+                <a:ea typeface="Pretendard" pitchFamily="34" charset="-122"/>
+                <a:cs typeface="Pretendard" pitchFamily="34" charset="-120"/>
+              </a:rPr>
+              <a:t>2017년</a:t>
+            </a:r>
+            <a:endParaRPr lang="en-US" sz="1350" dirty="0"/>
+          </a:p>
+        </p:txBody>
+      </p:sp>
+      <p:sp>
+        <p:nvSpPr>
+          <p:cNvPr id="15" name="Shape 13"/>
+          <p:cNvSpPr/>
+          <p:nvPr/>
+        </p:nvSpPr>
+        <p:spPr>
+          <a:xfrm>
+            <a:off x="7604608" y="1371600"/>
+            <a:ext cx="0" cy="4754880"/>
+          </a:xfrm>
+          <a:prstGeom prst="line">
+            <a:avLst/>
+          </a:prstGeom>
+          <a:noFill/>
+          <a:ln w="8890">
+            <a:solidFill>
+              <a:srgbClr val="B98A2E"/>
+            </a:solidFill>
+            <a:prstDash val="solid"/>
+          </a:ln>
+        </p:spPr>
+      </p:sp>
+      <p:sp>
+        <p:nvSpPr>
+          <p:cNvPr id="16" name="Shape 14"/>
+          <p:cNvSpPr/>
+          <p:nvPr/>
+        </p:nvSpPr>
+        <p:spPr>
+          <a:xfrm>
+            <a:off x="7784287" y="1645920"/>
+            <a:ext cx="3840480" cy="1645920"/>
+          </a:xfrm>
+          <a:prstGeom prst="roundRect">
+            <a:avLst>
+              <a:gd name="adj" fmla="val 3333"/>
+            </a:avLst>
+          </a:prstGeom>
+          <a:solidFill>
+            <a:srgbClr val="F3EBDA"/>
+          </a:solidFill>
+          <a:ln/>
+        </p:spPr>
+      </p:sp>
+      <p:sp>
+        <p:nvSpPr>
+          <p:cNvPr id="17" name="Shape 15"/>
+          <p:cNvSpPr/>
+          <p:nvPr/>
+        </p:nvSpPr>
+        <p:spPr>
+          <a:xfrm>
+            <a:off x="7784287" y="1700784"/>
+            <a:ext cx="36576" cy="1536192"/>
+          </a:xfrm>
+          <a:prstGeom prst="rect">
+            <a:avLst/>
+          </a:prstGeom>
+          <a:solidFill>
+            <a:srgbClr val="977024"/>
+          </a:solidFill>
+          <a:ln/>
+        </p:spPr>
+      </p:sp>
+      <p:sp>
+        <p:nvSpPr>
+          <p:cNvPr id="18" name="Text 16"/>
+          <p:cNvSpPr/>
+          <p:nvPr/>
+        </p:nvSpPr>
+        <p:spPr>
+          <a:xfrm>
+            <a:off x="7967167" y="1755648"/>
+            <a:ext cx="3511296" cy="201168"/>
+          </a:xfrm>
+          <a:prstGeom prst="rect">
+            <a:avLst/>
+          </a:prstGeom>
+          <a:noFill/>
+          <a:ln/>
+        </p:spPr>
+        <p:txBody>
+          <a:bodyPr wrap="square" lIns="0" tIns="0" rIns="0" bIns="0" rtlCol="0" anchor="ctr"/>
+          <a:lstStyle/>
+          <a:p>
+            <a:pPr indent="0" marL="0">
+              <a:buNone/>
+            </a:pPr>
+            <a:endParaRPr lang="en-US" sz="1050" dirty="0"/>
+          </a:p>
+        </p:txBody>
+      </p:sp>
+      <p:sp>
+        <p:nvSpPr>
+          <p:cNvPr id="19" name="Text 17"/>
+          <p:cNvSpPr/>
+          <p:nvPr/>
+        </p:nvSpPr>
+        <p:spPr>
+          <a:xfrm>
+            <a:off x="7967167" y="1975104"/>
+            <a:ext cx="3511296" cy="1243584"/>
+          </a:xfrm>
+          <a:prstGeom prst="rect">
+            <a:avLst/>
+          </a:prstGeom>
+          <a:noFill/>
+          <a:ln/>
+        </p:spPr>
+        <p:txBody>
+          <a:bodyPr wrap="square" lIns="0" tIns="0" rIns="0" bIns="0" rtlCol="0" anchor="t"/>
+          <a:lstStyle/>
+          <a:p>
+            <a:pPr indent="0" marL="0">
+              <a:lnSpc>
+                <a:spcPct val="120000"/>
+              </a:lnSpc>
+              <a:buNone/>
+            </a:pPr>
+            <a:r>
+              <a:rPr lang="en-US" sz="930" dirty="0">
+                <a:solidFill>
+                  <a:srgbClr val="10161F"/>
+                </a:solidFill>
+                <a:latin typeface="Pretendard" pitchFamily="34" charset="0"/>
+                <a:ea typeface="Pretendard" pitchFamily="34" charset="-122"/>
+                <a:cs typeface="Pretendard" pitchFamily="34" charset="-120"/>
+              </a:rPr>
+              <a:t>서초 메디컬 빌딩은 지하2층~지상7층 규모의 올근생 빌딩입니다.</a:t>
+            </a:r>
+            <a:endParaRPr lang="en-US" sz="930" dirty="0"/>
+          </a:p>
+        </p:txBody>
+      </p:sp>
+      <p:sp>
+        <p:nvSpPr>
+          <p:cNvPr id="20" name="Text 18"/>
+          <p:cNvSpPr/>
+          <p:nvPr/>
+        </p:nvSpPr>
+        <p:spPr>
+          <a:xfrm>
+            <a:off x="566928" y="6382512"/>
+            <a:ext cx="7315200" cy="219456"/>
+          </a:xfrm>
+          <a:prstGeom prst="rect">
+            <a:avLst/>
+          </a:prstGeom>
+          <a:noFill/>
+          <a:ln/>
+        </p:spPr>
+        <p:txBody>
+          <a:bodyPr wrap="square" lIns="0" tIns="0" rIns="0" bIns="0" rtlCol="0" anchor="ctr"/>
+          <a:lstStyle/>
+          <a:p>
+            <a:pPr indent="0" marL="0">
+              <a:buNone/>
+            </a:pPr>
+            <a:r>
+              <a:rPr lang="en-US" sz="800" dirty="0">
+                <a:solidFill>
+                  <a:srgbClr val="718096"/>
+                </a:solidFill>
+                <a:latin typeface="Pretendard" pitchFamily="34" charset="0"/>
+                <a:ea typeface="Pretendard" pitchFamily="34" charset="-122"/>
+                <a:cs typeface="Pretendard" pitchFamily="34" charset="-120"/>
+              </a:rPr>
+              <a:t>크리딜   |   </a:t>
+            </a:r>
+            <a:endParaRPr lang="en-US" sz="800" dirty="0"/>
+          </a:p>
+        </p:txBody>
+      </p:sp>
+      <p:sp>
+        <p:nvSpPr>
+          <p:cNvPr id="21" name="Text 19"/>
+          <p:cNvSpPr/>
+          <p:nvPr/>
+        </p:nvSpPr>
+        <p:spPr>
+          <a:xfrm>
+            <a:off x="10710367" y="6382512"/>
+            <a:ext cx="914400" cy="219456"/>
+          </a:xfrm>
+          <a:prstGeom prst="rect">
+            <a:avLst/>
+          </a:prstGeom>
+          <a:noFill/>
+          <a:ln/>
+        </p:spPr>
+        <p:txBody>
+          <a:bodyPr wrap="square" lIns="0" tIns="0" rIns="0" bIns="0" rtlCol="0" anchor="ctr"/>
+          <a:lstStyle/>
+          <a:p>
+            <a:pPr algn="r" indent="0" marL="0">
+              <a:buNone/>
+            </a:pPr>
+            <a:r>
+              <a:rPr lang="en-US" sz="900" b="1" dirty="0">
+                <a:solidFill>
+                  <a:srgbClr val="B98A2E"/>
+                </a:solidFill>
+                <a:latin typeface="Arial" pitchFamily="34" charset="0"/>
+                <a:ea typeface="Arial" pitchFamily="34" charset="-122"/>
+                <a:cs typeface="Arial" pitchFamily="34" charset="-120"/>
+              </a:rPr>
+              <a:t>4</a:t>
+            </a:r>
+            <a:endParaRPr lang="en-US" sz="900" dirty="0"/>
+          </a:p>
+        </p:txBody>
+      </p:sp>
+    </p:spTree>
+  </p:cSld>
+  <p:clrMapOvr>
+    <a:masterClrMapping/>
+  </p:clrMapOvr>
+</p:sld>
+</file>
+
+<file path=ppt/slides/slide6.xml><?xml version="1.0" encoding="utf-8"?>
+<p:sld xmlns:a="http://schemas.openxmlformats.org/drawingml/2006/main" xmlns:r="http://schemas.openxmlformats.org/officeDocument/2006/relationships" xmlns:p="http://schemas.openxmlformats.org/presentationml/2006/main">
+  <p:cSld name="Slide 6">
+    <p:bg>
+      <p:bgPr>
+        <a:solidFill>
+          <a:srgbClr val="FFFFFF"/>
+        </a:solidFill>
+      </p:bgPr>
+    </p:bg>
+    <p:spTree>
+      <p:nvGrpSpPr>
+        <p:cNvPr id="1" name=""/>
+        <p:cNvGrpSpPr/>
+        <p:nvPr/>
+      </p:nvGrpSpPr>
+      <p:grpSpPr>
+        <a:xfrm>
+          <a:off x="0" y="0"/>
+          <a:ext cx="0" cy="0"/>
+          <a:chOff x="0" y="0"/>
+          <a:chExt cx="0" cy="0"/>
+        </a:xfrm>
+      </p:grpSpPr>
+      <p:sp>
+        <p:nvSpPr>
+          <p:cNvPr id="2" name="Shape 0"/>
+          <p:cNvSpPr/>
+          <p:nvPr/>
+        </p:nvSpPr>
+        <p:spPr>
+          <a:xfrm>
+            <a:off x="566928" y="457200"/>
+            <a:ext cx="384048" cy="384048"/>
+          </a:xfrm>
+          <a:prstGeom prst="ellipse">
+            <a:avLst/>
+          </a:prstGeom>
+          <a:solidFill>
+            <a:srgbClr val="B98A2E"/>
+          </a:solidFill>
+          <a:ln/>
+        </p:spPr>
+      </p:sp>
+      <p:sp>
+        <p:nvSpPr>
+          <p:cNvPr id="3" name="Text 1"/>
+          <p:cNvSpPr/>
+          <p:nvPr/>
+        </p:nvSpPr>
+        <p:spPr>
+          <a:xfrm>
+            <a:off x="566928" y="457200"/>
+            <a:ext cx="384048" cy="384048"/>
+          </a:xfrm>
+          <a:prstGeom prst="rect">
+            <a:avLst/>
+          </a:prstGeom>
+          <a:noFill/>
+          <a:ln/>
+        </p:spPr>
+        <p:txBody>
+          <a:bodyPr wrap="square" lIns="0" tIns="0" rIns="0" bIns="0" rtlCol="0" anchor="ctr"/>
+          <a:lstStyle/>
+          <a:p>
+            <a:pPr algn="ctr" indent="0" marL="0">
+              <a:buNone/>
+            </a:pPr>
+            <a:r>
+              <a:rPr lang="en-US" sz="1300" b="1" dirty="0">
+                <a:solidFill>
+                  <a:srgbClr val="FFFFFF"/>
+                </a:solidFill>
+                <a:latin typeface="Arial" pitchFamily="34" charset="0"/>
+                <a:ea typeface="Arial" pitchFamily="34" charset="-122"/>
+                <a:cs typeface="Arial" pitchFamily="34" charset="-120"/>
+              </a:rPr>
+              <a:t>05</a:t>
+            </a:r>
+            <a:endParaRPr lang="en-US" sz="1300" dirty="0"/>
+          </a:p>
+        </p:txBody>
+      </p:sp>
+      <p:sp>
+        <p:nvSpPr>
+          <p:cNvPr id="4" name="Text 2"/>
+          <p:cNvSpPr/>
+          <p:nvPr/>
+        </p:nvSpPr>
+        <p:spPr>
+          <a:xfrm>
+            <a:off x="1133856" y="457200"/>
+            <a:ext cx="10490911" cy="182880"/>
+          </a:xfrm>
+          <a:prstGeom prst="rect">
+            <a:avLst/>
+          </a:prstGeom>
+          <a:noFill/>
+          <a:ln/>
+        </p:spPr>
+        <p:txBody>
+          <a:bodyPr wrap="square" lIns="0" tIns="0" rIns="0" bIns="0" rtlCol="0" anchor="ctr"/>
+          <a:lstStyle/>
+          <a:p>
+            <a:pPr indent="0" marL="0">
+              <a:buNone/>
+            </a:pPr>
+            <a:r>
+              <a:rPr lang="en-US" sz="950" b="1" spc="200" kern="0" dirty="0">
+                <a:solidFill>
+                  <a:srgbClr val="B98A2E"/>
+                </a:solidFill>
+                <a:latin typeface="Arial" pitchFamily="34" charset="0"/>
+                <a:ea typeface="Arial" pitchFamily="34" charset="-122"/>
+                <a:cs typeface="Arial" pitchFamily="34" charset="-120"/>
+              </a:rPr>
+              <a:t>Rent Roll</a:t>
+            </a:r>
+            <a:endParaRPr lang="en-US" sz="950" dirty="0"/>
+          </a:p>
+        </p:txBody>
+      </p:sp>
+      <p:sp>
+        <p:nvSpPr>
+          <p:cNvPr id="5" name="Text 3"/>
+          <p:cNvSpPr/>
+          <p:nvPr/>
+        </p:nvSpPr>
+        <p:spPr>
+          <a:xfrm>
+            <a:off x="1133856" y="640080"/>
+            <a:ext cx="10490911" cy="365760"/>
+          </a:xfrm>
+          <a:prstGeom prst="rect">
+            <a:avLst/>
+          </a:prstGeom>
+          <a:noFill/>
+          <a:ln/>
+        </p:spPr>
+        <p:txBody>
+          <a:bodyPr wrap="square" lIns="0" tIns="0" rIns="0" bIns="0" rtlCol="0" anchor="ctr"/>
+          <a:lstStyle/>
+          <a:p>
+            <a:pPr indent="0" marL="0">
+              <a:buNone/>
+            </a:pPr>
+            <a:r>
+              <a:rPr lang="en-US" sz="2300" b="1" dirty="0">
+                <a:solidFill>
+                  <a:srgbClr val="10161F"/>
+                </a:solidFill>
+                <a:latin typeface="Pretendard" pitchFamily="34" charset="0"/>
+                <a:ea typeface="Pretendard" pitchFamily="34" charset="-122"/>
+                <a:cs typeface="Pretendard" pitchFamily="34" charset="-120"/>
+              </a:rPr>
               <a:t>임대차 현황</a:t>
             </a:r>
             <a:endParaRPr lang="en-US" sz="2300" dirty="0"/>
@@ -6242,7 +9824,7 @@
       </p:sp>
       <p:graphicFrame>
         <p:nvGraphicFramePr>
-          <p:cNvPr id="6" name="Table 0"/>
+          <p:cNvPr id="7" name="Table 0"/>
           <p:cNvGraphicFramePr>
             <a:graphicFrameLocks noGrp="1"/>
           </p:cNvGraphicFramePr>
@@ -7180,399 +10762,6 @@
 </p:sld>
 </file>
 
-<file path=ppt/slides/slide6.xml><?xml version="1.0" encoding="utf-8"?>
-<p:sld xmlns:a="http://schemas.openxmlformats.org/drawingml/2006/main" xmlns:r="http://schemas.openxmlformats.org/officeDocument/2006/relationships" xmlns:p="http://schemas.openxmlformats.org/presentationml/2006/main">
-  <p:cSld name="Slide 6">
-    <p:bg>
-      <p:bgPr>
-        <a:solidFill>
-          <a:srgbClr val="FFFFFF"/>
-        </a:solidFill>
-      </p:bgPr>
-    </p:bg>
-    <p:spTree>
-      <p:nvGrpSpPr>
-        <p:cNvPr id="1" name=""/>
-        <p:cNvGrpSpPr/>
-        <p:nvPr/>
-      </p:nvGrpSpPr>
-      <p:grpSpPr>
-        <a:xfrm>
-          <a:off x="0" y="0"/>
-          <a:ext cx="0" cy="0"/>
-          <a:chOff x="0" y="0"/>
-          <a:chExt cx="0" cy="0"/>
-        </a:xfrm>
-      </p:grpSpPr>
-      <p:sp>
-        <p:nvSpPr>
-          <p:cNvPr id="2" name="Shape 0"/>
-          <p:cNvSpPr/>
-          <p:nvPr/>
-        </p:nvSpPr>
-        <p:spPr>
-          <a:xfrm>
-            <a:off x="566928" y="457200"/>
-            <a:ext cx="384048" cy="384048"/>
-          </a:xfrm>
-          <a:prstGeom prst="ellipse">
-            <a:avLst/>
-          </a:prstGeom>
-          <a:solidFill>
-            <a:srgbClr val="B98A2E"/>
-          </a:solidFill>
-          <a:ln/>
-        </p:spPr>
-      </p:sp>
-      <p:sp>
-        <p:nvSpPr>
-          <p:cNvPr id="3" name="Text 1"/>
-          <p:cNvSpPr/>
-          <p:nvPr/>
-        </p:nvSpPr>
-        <p:spPr>
-          <a:xfrm>
-            <a:off x="566928" y="457200"/>
-            <a:ext cx="384048" cy="384048"/>
-          </a:xfrm>
-          <a:prstGeom prst="rect">
-            <a:avLst/>
-          </a:prstGeom>
-          <a:noFill/>
-          <a:ln/>
-        </p:spPr>
-        <p:txBody>
-          <a:bodyPr wrap="square" lIns="0" tIns="0" rIns="0" bIns="0" rtlCol="0" anchor="ctr"/>
-          <a:lstStyle/>
-          <a:p>
-            <a:pPr algn="ctr" indent="0" marL="0">
-              <a:buNone/>
-            </a:pPr>
-            <a:r>
-              <a:rPr lang="en-US" sz="1300" b="1" dirty="0">
-                <a:solidFill>
-                  <a:srgbClr val="FFFFFF"/>
-                </a:solidFill>
-                <a:latin typeface="Arial" pitchFamily="34" charset="0"/>
-                <a:ea typeface="Arial" pitchFamily="34" charset="-122"/>
-                <a:cs typeface="Arial" pitchFamily="34" charset="-120"/>
-              </a:rPr>
-              <a:t>06</a:t>
-            </a:r>
-            <a:endParaRPr lang="en-US" sz="1300" dirty="0"/>
-          </a:p>
-        </p:txBody>
-      </p:sp>
-      <p:sp>
-        <p:nvSpPr>
-          <p:cNvPr id="4" name="Text 2"/>
-          <p:cNvSpPr/>
-          <p:nvPr/>
-        </p:nvSpPr>
-        <p:spPr>
-          <a:xfrm>
-            <a:off x="1133856" y="457200"/>
-            <a:ext cx="10490911" cy="182880"/>
-          </a:xfrm>
-          <a:prstGeom prst="rect">
-            <a:avLst/>
-          </a:prstGeom>
-          <a:noFill/>
-          <a:ln/>
-        </p:spPr>
-        <p:txBody>
-          <a:bodyPr wrap="square" lIns="0" tIns="0" rIns="0" bIns="0" rtlCol="0" anchor="ctr"/>
-          <a:lstStyle/>
-          <a:p>
-            <a:pPr indent="0" marL="0">
-              <a:buNone/>
-            </a:pPr>
-            <a:r>
-              <a:rPr lang="en-US" sz="950" b="1" spc="200" kern="0" dirty="0">
-                <a:solidFill>
-                  <a:srgbClr val="B98A2E"/>
-                </a:solidFill>
-                <a:latin typeface="Arial" pitchFamily="34" charset="0"/>
-                <a:ea typeface="Arial" pitchFamily="34" charset="-122"/>
-                <a:cs typeface="Arial" pitchFamily="34" charset="-120"/>
-              </a:rPr>
-              <a:t>Profit</a:t>
-            </a:r>
-            <a:endParaRPr lang="en-US" sz="950" dirty="0"/>
-          </a:p>
-        </p:txBody>
-      </p:sp>
-      <p:sp>
-        <p:nvSpPr>
-          <p:cNvPr id="5" name="Text 3"/>
-          <p:cNvSpPr/>
-          <p:nvPr/>
-        </p:nvSpPr>
-        <p:spPr>
-          <a:xfrm>
-            <a:off x="1133856" y="640080"/>
-            <a:ext cx="10490911" cy="365760"/>
-          </a:xfrm>
-          <a:prstGeom prst="rect">
-            <a:avLst/>
-          </a:prstGeom>
-          <a:noFill/>
-          <a:ln/>
-        </p:spPr>
-        <p:txBody>
-          <a:bodyPr wrap="square" lIns="0" tIns="0" rIns="0" bIns="0" rtlCol="0" anchor="ctr"/>
-          <a:lstStyle/>
-          <a:p>
-            <a:pPr indent="0" marL="0">
-              <a:buNone/>
-            </a:pPr>
-            <a:r>
-              <a:rPr lang="en-US" sz="2300" b="1" dirty="0">
-                <a:solidFill>
-                  <a:srgbClr val="10161F"/>
-                </a:solidFill>
-                <a:latin typeface="Pretendard" pitchFamily="34" charset="0"/>
-                <a:ea typeface="Pretendard" pitchFamily="34" charset="-122"/>
-                <a:cs typeface="Pretendard" pitchFamily="34" charset="-120"/>
-              </a:rPr>
-              <a:t>수익성 분석</a:t>
-            </a:r>
-            <a:endParaRPr lang="en-US" sz="2300" dirty="0"/>
-          </a:p>
-        </p:txBody>
-      </p:sp>
-      <p:sp>
-        <p:nvSpPr>
-          <p:cNvPr id="6" name="Shape 4"/>
-          <p:cNvSpPr/>
-          <p:nvPr/>
-        </p:nvSpPr>
-        <p:spPr>
-          <a:xfrm>
-            <a:off x="566928" y="1325880"/>
-            <a:ext cx="11057839" cy="0"/>
-          </a:xfrm>
-          <a:prstGeom prst="line">
-            <a:avLst/>
-          </a:prstGeom>
-          <a:noFill/>
-          <a:ln w="19050">
-            <a:solidFill>
-              <a:srgbClr val="B98A2E"/>
-            </a:solidFill>
-            <a:prstDash val="solid"/>
-          </a:ln>
-        </p:spPr>
-      </p:sp>
-      <p:sp>
-        <p:nvSpPr>
-          <p:cNvPr id="7" name="Shape 5"/>
-          <p:cNvSpPr/>
-          <p:nvPr/>
-        </p:nvSpPr>
-        <p:spPr>
-          <a:xfrm>
-            <a:off x="566928" y="1645920"/>
-            <a:ext cx="11057839" cy="1280160"/>
-          </a:xfrm>
-          <a:prstGeom prst="roundRect">
-            <a:avLst>
-              <a:gd name="adj" fmla="val 4286"/>
-            </a:avLst>
-          </a:prstGeom>
-          <a:solidFill>
-            <a:srgbClr val="BEE3F8"/>
-          </a:solidFill>
-          <a:ln/>
-        </p:spPr>
-      </p:sp>
-      <p:sp>
-        <p:nvSpPr>
-          <p:cNvPr id="8" name="Shape 6"/>
-          <p:cNvSpPr/>
-          <p:nvPr/>
-        </p:nvSpPr>
-        <p:spPr>
-          <a:xfrm>
-            <a:off x="566928" y="1700784"/>
-            <a:ext cx="36576" cy="1170432"/>
-          </a:xfrm>
-          <a:prstGeom prst="rect">
-            <a:avLst/>
-          </a:prstGeom>
-          <a:solidFill>
-            <a:srgbClr val="2B6CB0"/>
-          </a:solidFill>
-          <a:ln/>
-        </p:spPr>
-      </p:sp>
-      <p:sp>
-        <p:nvSpPr>
-          <p:cNvPr id="9" name="Text 7"/>
-          <p:cNvSpPr/>
-          <p:nvPr/>
-        </p:nvSpPr>
-        <p:spPr>
-          <a:xfrm>
-            <a:off x="749808" y="1755648"/>
-            <a:ext cx="10728655" cy="201168"/>
-          </a:xfrm>
-          <a:prstGeom prst="rect">
-            <a:avLst/>
-          </a:prstGeom>
-          <a:noFill/>
-          <a:ln/>
-        </p:spPr>
-        <p:txBody>
-          <a:bodyPr wrap="square" lIns="0" tIns="0" rIns="0" bIns="0" rtlCol="0" anchor="ctr"/>
-          <a:lstStyle/>
-          <a:p>
-            <a:pPr indent="0" marL="0">
-              <a:buNone/>
-            </a:pPr>
-            <a:r>
-              <a:rPr lang="en-US" sz="1050" b="1" dirty="0">
-                <a:solidFill>
-                  <a:srgbClr val="2B6CB0"/>
-                </a:solidFill>
-                <a:latin typeface="Pretendard" pitchFamily="34" charset="0"/>
-                <a:ea typeface="Pretendard" pitchFamily="34" charset="-122"/>
-                <a:cs typeface="Pretendard" pitchFamily="34" charset="-120"/>
-              </a:rPr>
-              <a:t>투자 가치 제안</a:t>
-            </a:r>
-            <a:endParaRPr lang="en-US" sz="1050" dirty="0"/>
-          </a:p>
-        </p:txBody>
-      </p:sp>
-      <p:sp>
-        <p:nvSpPr>
-          <p:cNvPr id="10" name="Text 8"/>
-          <p:cNvSpPr/>
-          <p:nvPr/>
-        </p:nvSpPr>
-        <p:spPr>
-          <a:xfrm>
-            <a:off x="749808" y="1975104"/>
-            <a:ext cx="10728655" cy="877824"/>
-          </a:xfrm>
-          <a:prstGeom prst="rect">
-            <a:avLst/>
-          </a:prstGeom>
-          <a:noFill/>
-          <a:ln/>
-        </p:spPr>
-        <p:txBody>
-          <a:bodyPr wrap="square" lIns="0" tIns="0" rIns="0" bIns="0" rtlCol="0" anchor="t"/>
-          <a:lstStyle/>
-          <a:p>
-            <a:pPr indent="0" marL="0">
-              <a:lnSpc>
-                <a:spcPct val="120000"/>
-              </a:lnSpc>
-              <a:buNone/>
-            </a:pPr>
-            <a:r>
-              <a:rPr lang="en-US" sz="930" dirty="0">
-                <a:solidFill>
-                  <a:srgbClr val="10161F"/>
-                </a:solidFill>
-                <a:latin typeface="Pretendard" pitchFamily="34" charset="0"/>
-                <a:ea typeface="Pretendard" pitchFamily="34" charset="-122"/>
-                <a:cs typeface="Pretendard" pitchFamily="34" charset="-120"/>
-              </a:rPr>
-              <a:t>연 순영업소득(NOI) 약 7.14억 원, 매입 Cap Rate 4.62%입니다.</a:t>
-            </a:r>
-            <a:endParaRPr lang="en-US" sz="930" dirty="0"/>
-          </a:p>
-        </p:txBody>
-      </p:sp>
-      <p:sp>
-        <p:nvSpPr>
-          <p:cNvPr id="11" name="Text 9"/>
-          <p:cNvSpPr/>
-          <p:nvPr/>
-        </p:nvSpPr>
-        <p:spPr>
-          <a:xfrm>
-            <a:off x="566928" y="6382512"/>
-            <a:ext cx="7315200" cy="219456"/>
-          </a:xfrm>
-          <a:prstGeom prst="rect">
-            <a:avLst/>
-          </a:prstGeom>
-          <a:noFill/>
-          <a:ln/>
-        </p:spPr>
-        <p:txBody>
-          <a:bodyPr wrap="square" lIns="0" tIns="0" rIns="0" bIns="0" rtlCol="0" anchor="ctr"/>
-          <a:lstStyle/>
-          <a:p>
-            <a:pPr indent="0" marL="0">
-              <a:buNone/>
-            </a:pPr>
-            <a:r>
-              <a:rPr lang="en-US" sz="800" dirty="0">
-                <a:solidFill>
-                  <a:srgbClr val="718096"/>
-                </a:solidFill>
-                <a:latin typeface="Pretendard" pitchFamily="34" charset="0"/>
-                <a:ea typeface="Pretendard" pitchFamily="34" charset="-122"/>
-                <a:cs typeface="Pretendard" pitchFamily="34" charset="-120"/>
-              </a:rPr>
-              <a:t>크리딜   |   </a:t>
-            </a:r>
-            <a:endParaRPr lang="en-US" sz="800" dirty="0"/>
-          </a:p>
-        </p:txBody>
-      </p:sp>
-      <p:sp>
-        <p:nvSpPr>
-          <p:cNvPr id="12" name="Text 10"/>
-          <p:cNvSpPr/>
-          <p:nvPr/>
-        </p:nvSpPr>
-        <p:spPr>
-          <a:xfrm>
-            <a:off x="10710367" y="6382512"/>
-            <a:ext cx="914400" cy="219456"/>
-          </a:xfrm>
-          <a:prstGeom prst="rect">
-            <a:avLst/>
-          </a:prstGeom>
-          <a:noFill/>
-          <a:ln/>
-        </p:spPr>
-        <p:txBody>
-          <a:bodyPr wrap="square" lIns="0" tIns="0" rIns="0" bIns="0" rtlCol="0" anchor="ctr"/>
-          <a:lstStyle/>
-          <a:p>
-            <a:pPr algn="r" indent="0" marL="0">
-              <a:buNone/>
-            </a:pPr>
-            <a:r>
-              <a:rPr lang="en-US" sz="900" b="1" dirty="0">
-                <a:solidFill>
-                  <a:srgbClr val="B98A2E"/>
-                </a:solidFill>
-                <a:latin typeface="Arial" pitchFamily="34" charset="0"/>
-                <a:ea typeface="Arial" pitchFamily="34" charset="-122"/>
-                <a:cs typeface="Arial" pitchFamily="34" charset="-120"/>
-              </a:rPr>
-              <a:t>6</a:t>
-            </a:r>
-            <a:endParaRPr lang="en-US" sz="900" dirty="0"/>
-          </a:p>
-        </p:txBody>
-      </p:sp>
-    </p:spTree>
-  </p:cSld>
-  <p:clrMapOvr>
-    <a:masterClrMapping/>
-  </p:clrMapOvr>
-</p:sld>
-</file>
-
 <file path=ppt/slides/slide7.xml><?xml version="1.0" encoding="utf-8"?>
 <p:sld xmlns:a="http://schemas.openxmlformats.org/drawingml/2006/main" xmlns:r="http://schemas.openxmlformats.org/officeDocument/2006/relationships" xmlns:p="http://schemas.openxmlformats.org/presentationml/2006/main">
   <p:cSld name="Slide 7">
@@ -7650,7 +10839,7 @@
                 <a:ea typeface="Arial" pitchFamily="34" charset="-122"/>
                 <a:cs typeface="Arial" pitchFamily="34" charset="-120"/>
               </a:rPr>
-              <a:t>07</a:t>
+              <a:t>06</a:t>
             </a:r>
             <a:endParaRPr lang="en-US" sz="1300" dirty="0"/>
           </a:p>
@@ -7689,7 +10878,7 @@
                 <a:ea typeface="Arial" pitchFamily="34" charset="-122"/>
                 <a:cs typeface="Arial" pitchFamily="34" charset="-120"/>
               </a:rPr>
-              <a:t>Risk</a:t>
+              <a:t>Stability</a:t>
             </a:r>
             <a:endParaRPr lang="en-US" sz="950" dirty="0"/>
           </a:p>
@@ -7728,7 +10917,7 @@
                 <a:ea typeface="Pretendard" pitchFamily="34" charset="-122"/>
                 <a:cs typeface="Pretendard" pitchFamily="34" charset="-120"/>
               </a:rPr>
-              <a:t>리스크 점검</a:t>
+              <a:t>임대안정성</a:t>
             </a:r>
             <a:endParaRPr lang="en-US" sz="2300" dirty="0"/>
           </a:p>
@@ -7736,24 +10925,143 @@
       </p:sp>
       <p:sp>
         <p:nvSpPr>
-          <p:cNvPr id="6" name="Shape 4"/>
-          <p:cNvSpPr/>
-          <p:nvPr/>
-        </p:nvSpPr>
-        <p:spPr>
-          <a:xfrm>
-            <a:off x="566928" y="1417320"/>
-            <a:ext cx="5400904" cy="3657600"/>
-          </a:xfrm>
-          <a:prstGeom prst="roundRect">
-            <a:avLst>
-              <a:gd name="adj" fmla="val 1500"/>
-            </a:avLst>
-          </a:prstGeom>
-          <a:solidFill>
-            <a:srgbClr val="F7FAFC"/>
-          </a:solidFill>
-          <a:ln w="6350">
+          <p:cNvPr id="6" name="Text 4"/>
+          <p:cNvSpPr/>
+          <p:nvPr/>
+        </p:nvSpPr>
+        <p:spPr>
+          <a:xfrm>
+            <a:off x="566928" y="1371600"/>
+            <a:ext cx="6858000" cy="237744"/>
+          </a:xfrm>
+          <a:prstGeom prst="rect">
+            <a:avLst/>
+          </a:prstGeom>
+          <a:noFill/>
+          <a:ln/>
+        </p:spPr>
+        <p:txBody>
+          <a:bodyPr wrap="square" lIns="0" tIns="0" rIns="0" bIns="0" rtlCol="0" anchor="ctr"/>
+          <a:lstStyle/>
+          <a:p>
+            <a:pPr indent="0" marL="0">
+              <a:buNone/>
+            </a:pPr>
+            <a:r>
+              <a:rPr lang="en-US" sz="1100" b="1" dirty="0">
+                <a:solidFill>
+                  <a:srgbClr val="10161F"/>
+                </a:solidFill>
+                <a:latin typeface="Pretendard" pitchFamily="34" charset="0"/>
+                <a:ea typeface="Pretendard" pitchFamily="34" charset="-122"/>
+                <a:cs typeface="Pretendard" pitchFamily="34" charset="-120"/>
+              </a:rPr>
+              <a:t>건축물 개요 및 물리 스펙</a:t>
+            </a:r>
+            <a:endParaRPr lang="en-US" sz="1100" dirty="0"/>
+          </a:p>
+        </p:txBody>
+      </p:sp>
+      <p:sp>
+        <p:nvSpPr>
+          <p:cNvPr id="7" name="Text 5"/>
+          <p:cNvSpPr/>
+          <p:nvPr/>
+        </p:nvSpPr>
+        <p:spPr>
+          <a:xfrm>
+            <a:off x="566928" y="1645920"/>
+            <a:ext cx="2606040" cy="438912"/>
+          </a:xfrm>
+          <a:prstGeom prst="rect">
+            <a:avLst/>
+          </a:prstGeom>
+          <a:noFill/>
+          <a:ln/>
+        </p:spPr>
+        <p:txBody>
+          <a:bodyPr wrap="square" lIns="0" tIns="0" rIns="0" bIns="0" rtlCol="0" anchor="ctr"/>
+          <a:lstStyle/>
+          <a:p>
+            <a:pPr indent="0" marL="0">
+              <a:lnSpc>
+                <a:spcPct val="120000"/>
+              </a:lnSpc>
+              <a:buNone/>
+            </a:pPr>
+            <a:r>
+              <a:rPr lang="en-US" sz="1350" dirty="0">
+                <a:solidFill>
+                  <a:srgbClr val="718096"/>
+                </a:solidFill>
+                <a:latin typeface="Pretendard" pitchFamily="34" charset="0"/>
+                <a:ea typeface="Pretendard" pitchFamily="34" charset="-122"/>
+                <a:cs typeface="Pretendard" pitchFamily="34" charset="-120"/>
+              </a:rPr>
+              <a:t>1F</a:t>
+            </a:r>
+            <a:endParaRPr lang="en-US" sz="1350" dirty="0"/>
+          </a:p>
+        </p:txBody>
+      </p:sp>
+      <p:sp>
+        <p:nvSpPr>
+          <p:cNvPr id="8" name="Text 6"/>
+          <p:cNvSpPr/>
+          <p:nvPr/>
+        </p:nvSpPr>
+        <p:spPr>
+          <a:xfrm>
+            <a:off x="3172968" y="1645920"/>
+            <a:ext cx="4251960" cy="438912"/>
+          </a:xfrm>
+          <a:prstGeom prst="rect">
+            <a:avLst/>
+          </a:prstGeom>
+          <a:noFill/>
+          <a:ln/>
+        </p:spPr>
+        <p:txBody>
+          <a:bodyPr wrap="square" lIns="0" tIns="0" rIns="0" bIns="0" rtlCol="0" anchor="ctr"/>
+          <a:lstStyle/>
+          <a:p>
+            <a:pPr indent="0" marL="0">
+              <a:lnSpc>
+                <a:spcPct val="120000"/>
+              </a:lnSpc>
+              <a:buNone/>
+            </a:pPr>
+            <a:r>
+              <a:rPr lang="en-US" sz="1350" b="1" dirty="0">
+                <a:solidFill>
+                  <a:srgbClr val="10161F"/>
+                </a:solidFill>
+                <a:latin typeface="Pretendard" pitchFamily="34" charset="0"/>
+                <a:ea typeface="Pretendard" pitchFamily="34" charset="-122"/>
+                <a:cs typeface="Pretendard" pitchFamily="34" charset="-120"/>
+              </a:rPr>
+              <a:t>약국 (3억)</a:t>
+            </a:r>
+            <a:endParaRPr lang="en-US" sz="1350" dirty="0"/>
+          </a:p>
+        </p:txBody>
+      </p:sp>
+      <p:sp>
+        <p:nvSpPr>
+          <p:cNvPr id="9" name="Shape 7"/>
+          <p:cNvSpPr/>
+          <p:nvPr/>
+        </p:nvSpPr>
+        <p:spPr>
+          <a:xfrm>
+            <a:off x="566928" y="2084832"/>
+            <a:ext cx="6858000" cy="0"/>
+          </a:xfrm>
+          <a:prstGeom prst="line">
+            <a:avLst/>
+          </a:prstGeom>
+          <a:noFill/>
+          <a:ln w="3810">
             <a:solidFill>
               <a:srgbClr val="CBD5E0"/>
             </a:solidFill>
@@ -7763,34 +11071,14 @@
       </p:sp>
       <p:sp>
         <p:nvSpPr>
-          <p:cNvPr id="7" name="Shape 5"/>
-          <p:cNvSpPr/>
-          <p:nvPr/>
-        </p:nvSpPr>
-        <p:spPr>
-          <a:xfrm>
-            <a:off x="566928" y="1417320"/>
-            <a:ext cx="5400904" cy="45720"/>
-          </a:xfrm>
-          <a:prstGeom prst="rect">
-            <a:avLst/>
-          </a:prstGeom>
-          <a:solidFill>
-            <a:srgbClr val="B98A2E"/>
-          </a:solidFill>
-          <a:ln/>
-        </p:spPr>
-      </p:sp>
-      <p:sp>
-        <p:nvSpPr>
-          <p:cNvPr id="8" name="Text 6"/>
-          <p:cNvSpPr/>
-          <p:nvPr/>
-        </p:nvSpPr>
-        <p:spPr>
-          <a:xfrm>
-            <a:off x="795528" y="1618488"/>
-            <a:ext cx="4943704" cy="292608"/>
+          <p:cNvPr id="10" name="Text 8"/>
+          <p:cNvSpPr/>
+          <p:nvPr/>
+        </p:nvSpPr>
+        <p:spPr>
+          <a:xfrm>
+            <a:off x="566928" y="2084832"/>
+            <a:ext cx="2606040" cy="438912"/>
           </a:xfrm>
           <a:prstGeom prst="rect">
             <a:avLst/>
@@ -7803,18 +11091,63 @@
           <a:lstStyle/>
           <a:p>
             <a:pPr indent="0" marL="0">
+              <a:lnSpc>
+                <a:spcPct val="120000"/>
+              </a:lnSpc>
+              <a:buNone/>
+            </a:pPr>
+            <a:r>
+              <a:rPr lang="en-US" sz="1350" dirty="0">
+                <a:solidFill>
+                  <a:srgbClr val="718096"/>
+                </a:solidFill>
+                <a:latin typeface="Pretendard" pitchFamily="34" charset="0"/>
+                <a:ea typeface="Pretendard" pitchFamily="34" charset="-122"/>
+                <a:cs typeface="Pretendard" pitchFamily="34" charset="-120"/>
+              </a:rPr>
+              <a:t>2F</a:t>
+            </a:r>
+            <a:endParaRPr lang="en-US" sz="1350" dirty="0"/>
+          </a:p>
+        </p:txBody>
+      </p:sp>
+      <p:sp>
+        <p:nvSpPr>
+          <p:cNvPr id="11" name="Text 9"/>
+          <p:cNvSpPr/>
+          <p:nvPr/>
+        </p:nvSpPr>
+        <p:spPr>
+          <a:xfrm>
+            <a:off x="3172968" y="2084832"/>
+            <a:ext cx="4251960" cy="438912"/>
+          </a:xfrm>
+          <a:prstGeom prst="rect">
+            <a:avLst/>
+          </a:prstGeom>
+          <a:noFill/>
+          <a:ln/>
+        </p:spPr>
+        <p:txBody>
+          <a:bodyPr wrap="square" lIns="0" tIns="0" rIns="0" bIns="0" rtlCol="0" anchor="ctr"/>
+          <a:lstStyle/>
+          <a:p>
+            <a:pPr indent="0" marL="0">
+              <a:lnSpc>
+                <a:spcPct val="120000"/>
+              </a:lnSpc>
               <a:buNone/>
             </a:pPr>
             <a:r>
               <a:rPr lang="en-US" sz="1350" b="1" dirty="0">
                 <a:solidFill>
-                  <a:srgbClr val="977024"/>
-                </a:solidFill>
-                <a:latin typeface="Pretendard" pitchFamily="34" charset="0"/>
-                <a:ea typeface="Pretendard" pitchFamily="34" charset="-122"/>
-                <a:cs typeface="Pretendard" pitchFamily="34" charset="-120"/>
-              </a:rPr>
-              <a:t>메디컬 단일업종 집중</a:t>
+                  <a:srgbClr val="10161F"/>
+                </a:solidFill>
+                <a:latin typeface="Pretendard" pitchFamily="34" charset="0"/>
+                <a:ea typeface="Pretendard" pitchFamily="34" charset="-122"/>
+                <a:cs typeface="Pretendard" pitchFamily="34" charset="-120"/>
+              </a:rPr>
+              <a:t>안과 (2억)</a:t>
             </a:r>
             <a:endParaRPr lang="en-US" sz="1350" dirty="0"/>
           </a:p>
@@ -7822,112 +11155,22 @@
       </p:sp>
       <p:sp>
         <p:nvSpPr>
-          <p:cNvPr id="9" name="Text 7"/>
-          <p:cNvSpPr/>
-          <p:nvPr/>
-        </p:nvSpPr>
-        <p:spPr>
-          <a:xfrm>
-            <a:off x="795528" y="1947672"/>
-            <a:ext cx="4943704" cy="365760"/>
-          </a:xfrm>
-          <a:prstGeom prst="rect">
-            <a:avLst/>
-          </a:prstGeom>
-          <a:noFill/>
-          <a:ln/>
-        </p:spPr>
-        <p:txBody>
-          <a:bodyPr wrap="square" lIns="0" tIns="0" rIns="0" bIns="0" rtlCol="0" anchor="ctr">
-            <a:normAutofit/>
-          </a:bodyPr>
-          <a:lstStyle/>
-          <a:p>
-            <a:pPr indent="0" marL="0">
-              <a:buNone/>
-            </a:pPr>
-            <a:r>
-              <a:rPr lang="en-US" sz="1250" b="1" dirty="0">
-                <a:solidFill>
-                  <a:srgbClr val="10161F"/>
-                </a:solidFill>
-                <a:latin typeface="Pretendard" pitchFamily="34" charset="0"/>
-                <a:ea typeface="Pretendard" pitchFamily="34" charset="-122"/>
-                <a:cs typeface="Pretendard" pitchFamily="34" charset="-120"/>
-              </a:rPr>
-              <a:t>전층 의료</a:t>
-            </a:r>
-            <a:endParaRPr lang="en-US" sz="1250" dirty="0"/>
-          </a:p>
-        </p:txBody>
-      </p:sp>
-      <p:sp>
-        <p:nvSpPr>
-          <p:cNvPr id="10" name="Text 8"/>
-          <p:cNvSpPr/>
-          <p:nvPr/>
-        </p:nvSpPr>
-        <p:spPr>
-          <a:xfrm>
-            <a:off x="795528" y="2377440"/>
-            <a:ext cx="4943704" cy="2606040"/>
-          </a:xfrm>
-          <a:prstGeom prst="rect">
-            <a:avLst/>
-          </a:prstGeom>
-          <a:noFill/>
-          <a:ln/>
-        </p:spPr>
-        <p:txBody>
-          <a:bodyPr wrap="square" lIns="0" tIns="0" rIns="0" bIns="0" rtlCol="0" anchor="t">
-            <a:normAutofit/>
-          </a:bodyPr>
-          <a:lstStyle/>
-          <a:p>
-            <a:pPr marL="342900" indent="-342900">
-              <a:lnSpc>
-                <a:spcPct val="125000"/>
-              </a:lnSpc>
-              <a:buSzPct val="100000"/>
-              <a:buChar char="•"/>
-            </a:pPr>
-            <a:r>
-              <a:rPr lang="en-US" sz="1100" dirty="0">
-                <a:solidFill>
-                  <a:srgbClr val="10161F"/>
-                </a:solidFill>
-                <a:latin typeface="Pretendard" pitchFamily="34" charset="0"/>
-                <a:ea typeface="Pretendard" pitchFamily="34" charset="-122"/>
-                <a:cs typeface="Pretendard" pitchFamily="34" charset="-120"/>
-              </a:rPr>
-              <a:t>업종 다각화 검토</a:t>
-            </a:r>
-            <a:endParaRPr lang="en-US" sz="1100" dirty="0"/>
-          </a:p>
-        </p:txBody>
-      </p:sp>
-      <p:sp>
-        <p:nvSpPr>
-          <p:cNvPr id="11" name="Shape 9"/>
-          <p:cNvSpPr/>
-          <p:nvPr/>
-        </p:nvSpPr>
-        <p:spPr>
-          <a:xfrm>
-            <a:off x="6223864" y="1417320"/>
-            <a:ext cx="5400904" cy="3657600"/>
-          </a:xfrm>
-          <a:prstGeom prst="roundRect">
-            <a:avLst>
-              <a:gd name="adj" fmla="val 1500"/>
-            </a:avLst>
-          </a:prstGeom>
-          <a:solidFill>
-            <a:srgbClr val="F7FAFC"/>
-          </a:solidFill>
-          <a:ln w="6350">
+          <p:cNvPr id="12" name="Shape 10"/>
+          <p:cNvSpPr/>
+          <p:nvPr/>
+        </p:nvSpPr>
+        <p:spPr>
+          <a:xfrm>
+            <a:off x="7604608" y="1371600"/>
+            <a:ext cx="0" cy="4754880"/>
+          </a:xfrm>
+          <a:prstGeom prst="line">
+            <a:avLst/>
+          </a:prstGeom>
+          <a:noFill/>
+          <a:ln w="8890">
             <a:solidFill>
-              <a:srgbClr val="CBD5E0"/>
+              <a:srgbClr val="B98A2E"/>
             </a:solidFill>
             <a:prstDash val="solid"/>
           </a:ln>
@@ -7935,218 +11178,119 @@
       </p:sp>
       <p:sp>
         <p:nvSpPr>
-          <p:cNvPr id="12" name="Shape 10"/>
-          <p:cNvSpPr/>
-          <p:nvPr/>
-        </p:nvSpPr>
-        <p:spPr>
-          <a:xfrm>
-            <a:off x="6223864" y="1417320"/>
-            <a:ext cx="5400904" cy="45720"/>
-          </a:xfrm>
-          <a:prstGeom prst="rect">
-            <a:avLst/>
-          </a:prstGeom>
-          <a:solidFill>
-            <a:srgbClr val="B98A2E"/>
-          </a:solidFill>
-          <a:ln/>
-        </p:spPr>
-      </p:sp>
-      <p:sp>
-        <p:nvSpPr>
-          <p:cNvPr id="13" name="Text 11"/>
-          <p:cNvSpPr/>
-          <p:nvPr/>
-        </p:nvSpPr>
-        <p:spPr>
-          <a:xfrm>
-            <a:off x="6452464" y="1618488"/>
-            <a:ext cx="4943704" cy="292608"/>
-          </a:xfrm>
-          <a:prstGeom prst="rect">
-            <a:avLst/>
-          </a:prstGeom>
-          <a:noFill/>
-          <a:ln/>
-        </p:spPr>
-        <p:txBody>
-          <a:bodyPr wrap="square" lIns="0" tIns="0" rIns="0" bIns="0" rtlCol="0" anchor="ctr"/>
-          <a:lstStyle/>
-          <a:p>
-            <a:pPr indent="0" marL="0">
-              <a:buNone/>
-            </a:pPr>
-            <a:r>
-              <a:rPr lang="en-US" sz="1350" b="1" dirty="0">
-                <a:solidFill>
-                  <a:srgbClr val="977024"/>
-                </a:solidFill>
-                <a:latin typeface="Pretendard" pitchFamily="34" charset="0"/>
-                <a:ea typeface="Pretendard" pitchFamily="34" charset="-122"/>
-                <a:cs typeface="Pretendard" pitchFamily="34" charset="-120"/>
-              </a:rPr>
-              <a:t>금리 변동</a:t>
-            </a:r>
-            <a:endParaRPr lang="en-US" sz="1350" dirty="0"/>
-          </a:p>
-        </p:txBody>
-      </p:sp>
-      <p:sp>
-        <p:nvSpPr>
-          <p:cNvPr id="14" name="Text 12"/>
-          <p:cNvSpPr/>
-          <p:nvPr/>
-        </p:nvSpPr>
-        <p:spPr>
-          <a:xfrm>
-            <a:off x="6452464" y="1947672"/>
-            <a:ext cx="4943704" cy="365760"/>
-          </a:xfrm>
-          <a:prstGeom prst="rect">
-            <a:avLst/>
-          </a:prstGeom>
-          <a:noFill/>
-          <a:ln/>
-        </p:spPr>
-        <p:txBody>
-          <a:bodyPr wrap="square" lIns="0" tIns="0" rIns="0" bIns="0" rtlCol="0" anchor="ctr">
-            <a:normAutofit/>
-          </a:bodyPr>
-          <a:lstStyle/>
-          <a:p>
-            <a:pPr indent="0" marL="0">
-              <a:buNone/>
-            </a:pPr>
-            <a:r>
-              <a:rPr lang="en-US" sz="1250" b="1" dirty="0">
-                <a:solidFill>
-                  <a:srgbClr val="10161F"/>
-                </a:solidFill>
-                <a:latin typeface="Pretendard" pitchFamily="34" charset="0"/>
-                <a:ea typeface="Pretendard" pitchFamily="34" charset="-122"/>
-                <a:cs typeface="Pretendard" pitchFamily="34" charset="-120"/>
-              </a:rPr>
-              <a:t>4.1% 고정</a:t>
-            </a:r>
-            <a:endParaRPr lang="en-US" sz="1250" dirty="0"/>
-          </a:p>
-        </p:txBody>
-      </p:sp>
-      <p:sp>
-        <p:nvSpPr>
-          <p:cNvPr id="15" name="Text 13"/>
-          <p:cNvSpPr/>
-          <p:nvPr/>
-        </p:nvSpPr>
-        <p:spPr>
-          <a:xfrm>
-            <a:off x="6452464" y="2377440"/>
-            <a:ext cx="4943704" cy="2606040"/>
-          </a:xfrm>
-          <a:prstGeom prst="rect">
-            <a:avLst/>
-          </a:prstGeom>
-          <a:noFill/>
-          <a:ln/>
-        </p:spPr>
-        <p:txBody>
-          <a:bodyPr wrap="square" lIns="0" tIns="0" rIns="0" bIns="0" rtlCol="0" anchor="t">
-            <a:normAutofit/>
-          </a:bodyPr>
-          <a:lstStyle/>
-          <a:p>
-            <a:pPr marL="342900" indent="-342900">
-              <a:lnSpc>
-                <a:spcPct val="125000"/>
-              </a:lnSpc>
-              <a:buSzPct val="100000"/>
-              <a:buChar char="•"/>
-            </a:pPr>
-            <a:r>
-              <a:rPr lang="en-US" sz="1100" dirty="0">
-                <a:solidFill>
-                  <a:srgbClr val="10161F"/>
-                </a:solidFill>
-                <a:latin typeface="Pretendard" pitchFamily="34" charset="0"/>
-                <a:ea typeface="Pretendard" pitchFamily="34" charset="-122"/>
-                <a:cs typeface="Pretendard" pitchFamily="34" charset="-120"/>
-              </a:rPr>
-              <a:t>승계 대출 활용</a:t>
-            </a:r>
-            <a:endParaRPr lang="en-US" sz="1100" dirty="0"/>
-          </a:p>
-        </p:txBody>
-      </p:sp>
-      <p:sp>
-        <p:nvSpPr>
-          <p:cNvPr id="16" name="Shape 14"/>
-          <p:cNvSpPr/>
-          <p:nvPr/>
-        </p:nvSpPr>
-        <p:spPr>
-          <a:xfrm>
-            <a:off x="566928" y="5193792"/>
-            <a:ext cx="11057839" cy="621792"/>
+          <p:cNvPr id="13" name="Shape 11"/>
+          <p:cNvSpPr/>
+          <p:nvPr/>
+        </p:nvSpPr>
+        <p:spPr>
+          <a:xfrm>
+            <a:off x="7784287" y="1645920"/>
+            <a:ext cx="3840480" cy="1645920"/>
           </a:xfrm>
           <a:prstGeom prst="roundRect">
             <a:avLst>
-              <a:gd name="adj" fmla="val 8824"/>
+              <a:gd name="adj" fmla="val 3333"/>
             </a:avLst>
           </a:prstGeom>
           <a:solidFill>
-            <a:srgbClr val="F7FAFC"/>
+            <a:srgbClr val="F3EBDA"/>
           </a:solidFill>
-          <a:ln w="6350">
-            <a:solidFill>
-              <a:srgbClr val="CBD5E0"/>
-            </a:solidFill>
-            <a:prstDash val="solid"/>
-          </a:ln>
-        </p:spPr>
+          <a:ln/>
+        </p:spPr>
+      </p:sp>
+      <p:sp>
+        <p:nvSpPr>
+          <p:cNvPr id="14" name="Shape 12"/>
+          <p:cNvSpPr/>
+          <p:nvPr/>
+        </p:nvSpPr>
+        <p:spPr>
+          <a:xfrm>
+            <a:off x="7784287" y="1700784"/>
+            <a:ext cx="36576" cy="1536192"/>
+          </a:xfrm>
+          <a:prstGeom prst="rect">
+            <a:avLst/>
+          </a:prstGeom>
+          <a:solidFill>
+            <a:srgbClr val="977024"/>
+          </a:solidFill>
+          <a:ln/>
+        </p:spPr>
+      </p:sp>
+      <p:sp>
+        <p:nvSpPr>
+          <p:cNvPr id="15" name="Text 13"/>
+          <p:cNvSpPr/>
+          <p:nvPr/>
+        </p:nvSpPr>
+        <p:spPr>
+          <a:xfrm>
+            <a:off x="7967167" y="1755648"/>
+            <a:ext cx="3511296" cy="201168"/>
+          </a:xfrm>
+          <a:prstGeom prst="rect">
+            <a:avLst/>
+          </a:prstGeom>
+          <a:noFill/>
+          <a:ln/>
+        </p:spPr>
+        <p:txBody>
+          <a:bodyPr wrap="square" lIns="0" tIns="0" rIns="0" bIns="0" rtlCol="0" anchor="ctr"/>
+          <a:lstStyle/>
+          <a:p>
+            <a:pPr indent="0" marL="0">
+              <a:buNone/>
+            </a:pPr>
+            <a:endParaRPr lang="en-US" sz="1050" dirty="0"/>
+          </a:p>
+        </p:txBody>
+      </p:sp>
+      <p:sp>
+        <p:nvSpPr>
+          <p:cNvPr id="16" name="Text 14"/>
+          <p:cNvSpPr/>
+          <p:nvPr/>
+        </p:nvSpPr>
+        <p:spPr>
+          <a:xfrm>
+            <a:off x="7967167" y="1975104"/>
+            <a:ext cx="3511296" cy="1243584"/>
+          </a:xfrm>
+          <a:prstGeom prst="rect">
+            <a:avLst/>
+          </a:prstGeom>
+          <a:noFill/>
+          <a:ln/>
+        </p:spPr>
+        <p:txBody>
+          <a:bodyPr wrap="square" lIns="0" tIns="0" rIns="0" bIns="0" rtlCol="0" anchor="t"/>
+          <a:lstStyle/>
+          <a:p>
+            <a:pPr indent="0" marL="0">
+              <a:lnSpc>
+                <a:spcPct val="120000"/>
+              </a:lnSpc>
+              <a:buNone/>
+            </a:pPr>
+            <a:r>
+              <a:rPr lang="en-US" sz="930" dirty="0">
+                <a:solidFill>
+                  <a:srgbClr val="10161F"/>
+                </a:solidFill>
+                <a:latin typeface="Pretendard" pitchFamily="34" charset="0"/>
+                <a:ea typeface="Pretendard" pitchFamily="34" charset="-122"/>
+                <a:cs typeface="Pretendard" pitchFamily="34" charset="-120"/>
+              </a:rPr>
+              <a:t>전층 메디컬 만실 운영 중이며 WALE 평균 3.5년입니다.</a:t>
+            </a:r>
+            <a:endParaRPr lang="en-US" sz="930" dirty="0"/>
+          </a:p>
+        </p:txBody>
       </p:sp>
       <p:sp>
         <p:nvSpPr>
           <p:cNvPr id="17" name="Text 15"/>
-          <p:cNvSpPr/>
-          <p:nvPr/>
-        </p:nvSpPr>
-        <p:spPr>
-          <a:xfrm>
-            <a:off x="795528" y="5193792"/>
-            <a:ext cx="10600639" cy="621792"/>
-          </a:xfrm>
-          <a:prstGeom prst="rect">
-            <a:avLst/>
-          </a:prstGeom>
-          <a:noFill/>
-          <a:ln/>
-        </p:spPr>
-        <p:txBody>
-          <a:bodyPr wrap="square" lIns="0" tIns="0" rIns="0" bIns="0" rtlCol="0" anchor="ctr"/>
-          <a:lstStyle/>
-          <a:p>
-            <a:pPr indent="0" marL="0">
-              <a:buNone/>
-            </a:pPr>
-            <a:r>
-              <a:rPr lang="en-US" sz="1100" dirty="0">
-                <a:solidFill>
-                  <a:srgbClr val="10161F"/>
-                </a:solidFill>
-                <a:latin typeface="Pretendard" pitchFamily="34" charset="0"/>
-                <a:ea typeface="Pretendard" pitchFamily="34" charset="-122"/>
-                <a:cs typeface="Pretendard" pitchFamily="34" charset="-120"/>
-              </a:rPr>
-              <a:t>※ 본 리스크 체크는 공부 및 브로커 확인 기반이며, 매수 전 전문 실사팀(변호사/건축사)을 통한 정밀 실사가 필요합니다.</a:t>
-            </a:r>
-            <a:endParaRPr lang="en-US" sz="1100" dirty="0"/>
-          </a:p>
-        </p:txBody>
-      </p:sp>
-      <p:sp>
-        <p:nvSpPr>
-          <p:cNvPr id="18" name="Text 16"/>
           <p:cNvSpPr/>
           <p:nvPr/>
         </p:nvSpPr>
@@ -8185,7 +11329,7 @@
       </p:sp>
       <p:sp>
         <p:nvSpPr>
-          <p:cNvPr id="19" name="Text 17"/>
+          <p:cNvPr id="18" name="Text 16"/>
           <p:cNvSpPr/>
           <p:nvPr/>
         </p:nvSpPr>
@@ -8216,7 +11360,7 @@
                 <a:ea typeface="Arial" pitchFamily="34" charset="-122"/>
                 <a:cs typeface="Arial" pitchFamily="34" charset="-120"/>
               </a:rPr>
-              <a:t>7</a:t>
+              <a:t>6</a:t>
             </a:r>
             <a:endParaRPr lang="en-US" sz="900" dirty="0"/>
           </a:p>
@@ -8307,7 +11451,7 @@
                 <a:ea typeface="Arial" pitchFamily="34" charset="-122"/>
                 <a:cs typeface="Arial" pitchFamily="34" charset="-120"/>
               </a:rPr>
-              <a:t>08</a:t>
+              <a:t>07</a:t>
             </a:r>
             <a:endParaRPr lang="en-US" sz="1300" dirty="0"/>
           </a:p>
@@ -8346,7 +11490,7 @@
                 <a:ea typeface="Arial" pitchFamily="34" charset="-122"/>
                 <a:cs typeface="Arial" pitchFamily="34" charset="-120"/>
               </a:rPr>
-              <a:t>Thesis</a:t>
+              <a:t>Profit</a:t>
             </a:r>
             <a:endParaRPr lang="en-US" sz="950" dirty="0"/>
           </a:p>
@@ -8385,7 +11529,7 @@
                 <a:ea typeface="Pretendard" pitchFamily="34" charset="-122"/>
                 <a:cs typeface="Pretendard" pitchFamily="34" charset="-120"/>
               </a:rPr>
-              <a:t>투자 포인트</a:t>
+              <a:t>수익성 분석</a:t>
             </a:r>
             <a:endParaRPr lang="en-US" sz="2300" dirty="0"/>
           </a:p>
@@ -8399,20 +11543,16 @@
         </p:nvSpPr>
         <p:spPr>
           <a:xfrm>
-            <a:off x="566928" y="4983480"/>
-            <a:ext cx="11057839" cy="804672"/>
-          </a:xfrm>
-          <a:prstGeom prst="roundRect">
-            <a:avLst>
-              <a:gd name="adj" fmla="val 6818"/>
-            </a:avLst>
-          </a:prstGeom>
-          <a:solidFill>
-            <a:srgbClr val="F3EBDA"/>
-          </a:solidFill>
-          <a:ln w="10160">
+            <a:off x="566928" y="1325880"/>
+            <a:ext cx="11057839" cy="0"/>
+          </a:xfrm>
+          <a:prstGeom prst="line">
+            <a:avLst/>
+          </a:prstGeom>
+          <a:noFill/>
+          <a:ln w="19050">
             <a:solidFill>
-              <a:srgbClr val="D9B668"/>
+              <a:srgbClr val="B98A2E"/>
             </a:solidFill>
             <a:prstDash val="solid"/>
           </a:ln>
@@ -8420,14 +11560,41 @@
       </p:sp>
       <p:sp>
         <p:nvSpPr>
-          <p:cNvPr id="7" name="Text 5"/>
-          <p:cNvSpPr/>
-          <p:nvPr/>
-        </p:nvSpPr>
-        <p:spPr>
-          <a:xfrm>
-            <a:off x="749808" y="5093208"/>
-            <a:ext cx="1691640" cy="256032"/>
+          <p:cNvPr id="7" name="Shape 5"/>
+          <p:cNvSpPr/>
+          <p:nvPr/>
+        </p:nvSpPr>
+        <p:spPr>
+          <a:xfrm>
+            <a:off x="566928" y="1554480"/>
+            <a:ext cx="3576218" cy="1188720"/>
+          </a:xfrm>
+          <a:prstGeom prst="roundRect">
+            <a:avLst>
+              <a:gd name="adj" fmla="val 4615"/>
+            </a:avLst>
+          </a:prstGeom>
+          <a:solidFill>
+            <a:srgbClr val="F7FAFC"/>
+          </a:solidFill>
+          <a:ln w="6350">
+            <a:solidFill>
+              <a:srgbClr val="CBD5E0"/>
+            </a:solidFill>
+            <a:prstDash val="solid"/>
+          </a:ln>
+        </p:spPr>
+      </p:sp>
+      <p:sp>
+        <p:nvSpPr>
+          <p:cNvPr id="8" name="Text 6"/>
+          <p:cNvSpPr/>
+          <p:nvPr/>
+        </p:nvSpPr>
+        <p:spPr>
+          <a:xfrm>
+            <a:off x="731520" y="1682496"/>
+            <a:ext cx="3247034" cy="201168"/>
           </a:xfrm>
           <a:prstGeom prst="rect">
             <a:avLst/>
@@ -8443,15 +11610,351 @@
               <a:buNone/>
             </a:pPr>
             <a:r>
+              <a:rPr lang="en-US" sz="950" dirty="0">
+                <a:solidFill>
+                  <a:srgbClr val="718096"/>
+                </a:solidFill>
+                <a:latin typeface="Pretendard" pitchFamily="34" charset="0"/>
+                <a:ea typeface="Pretendard" pitchFamily="34" charset="-122"/>
+                <a:cs typeface="Pretendard" pitchFamily="34" charset="-120"/>
+              </a:rPr>
+              <a:t>실투자금</a:t>
+            </a:r>
+            <a:endParaRPr lang="en-US" sz="950" dirty="0"/>
+          </a:p>
+        </p:txBody>
+      </p:sp>
+      <p:sp>
+        <p:nvSpPr>
+          <p:cNvPr id="9" name="Text 7"/>
+          <p:cNvSpPr/>
+          <p:nvPr/>
+        </p:nvSpPr>
+        <p:spPr>
+          <a:xfrm>
+            <a:off x="731520" y="1901952"/>
+            <a:ext cx="3247034" cy="402336"/>
+          </a:xfrm>
+          <a:prstGeom prst="rect">
+            <a:avLst/>
+          </a:prstGeom>
+          <a:noFill/>
+          <a:ln/>
+        </p:spPr>
+        <p:txBody>
+          <a:bodyPr wrap="square" lIns="0" tIns="0" rIns="0" bIns="0" rtlCol="0" anchor="ctr">
+            <a:normAutofit/>
+          </a:bodyPr>
+          <a:lstStyle/>
+          <a:p>
+            <a:pPr indent="0" marL="0">
+              <a:buNone/>
+            </a:pPr>
+            <a:r>
+              <a:rPr lang="en-US" sz="2200" b="1" dirty="0">
+                <a:solidFill>
+                  <a:srgbClr val="10161F"/>
+                </a:solidFill>
+                <a:latin typeface="Pretendard" pitchFamily="34" charset="0"/>
+                <a:ea typeface="Pretendard" pitchFamily="34" charset="-122"/>
+                <a:cs typeface="Pretendard" pitchFamily="34" charset="-120"/>
+              </a:rPr>
+              <a:t>약 69억 원</a:t>
+            </a:r>
+            <a:endParaRPr lang="en-US" sz="2200" dirty="0"/>
+          </a:p>
+        </p:txBody>
+      </p:sp>
+      <p:sp>
+        <p:nvSpPr>
+          <p:cNvPr id="10" name="Shape 8"/>
+          <p:cNvSpPr/>
+          <p:nvPr/>
+        </p:nvSpPr>
+        <p:spPr>
+          <a:xfrm>
+            <a:off x="4307738" y="1554480"/>
+            <a:ext cx="3576218" cy="1188720"/>
+          </a:xfrm>
+          <a:prstGeom prst="roundRect">
+            <a:avLst>
+              <a:gd name="adj" fmla="val 4615"/>
+            </a:avLst>
+          </a:prstGeom>
+          <a:solidFill>
+            <a:srgbClr val="F7FAFC"/>
+          </a:solidFill>
+          <a:ln w="6350">
+            <a:solidFill>
+              <a:srgbClr val="CBD5E0"/>
+            </a:solidFill>
+            <a:prstDash val="solid"/>
+          </a:ln>
+        </p:spPr>
+      </p:sp>
+      <p:sp>
+        <p:nvSpPr>
+          <p:cNvPr id="11" name="Text 9"/>
+          <p:cNvSpPr/>
+          <p:nvPr/>
+        </p:nvSpPr>
+        <p:spPr>
+          <a:xfrm>
+            <a:off x="4472330" y="1682496"/>
+            <a:ext cx="3247034" cy="201168"/>
+          </a:xfrm>
+          <a:prstGeom prst="rect">
+            <a:avLst/>
+          </a:prstGeom>
+          <a:noFill/>
+          <a:ln/>
+        </p:spPr>
+        <p:txBody>
+          <a:bodyPr wrap="square" lIns="0" tIns="0" rIns="0" bIns="0" rtlCol="0" anchor="ctr"/>
+          <a:lstStyle/>
+          <a:p>
+            <a:pPr indent="0" marL="0">
+              <a:buNone/>
+            </a:pPr>
+            <a:r>
+              <a:rPr lang="en-US" sz="950" dirty="0">
+                <a:solidFill>
+                  <a:srgbClr val="718096"/>
+                </a:solidFill>
+                <a:latin typeface="Pretendard" pitchFamily="34" charset="0"/>
+                <a:ea typeface="Pretendard" pitchFamily="34" charset="-122"/>
+                <a:cs typeface="Pretendard" pitchFamily="34" charset="-120"/>
+              </a:rPr>
+              <a:t>순수익(매월)</a:t>
+            </a:r>
+            <a:endParaRPr lang="en-US" sz="950" dirty="0"/>
+          </a:p>
+        </p:txBody>
+      </p:sp>
+      <p:sp>
+        <p:nvSpPr>
+          <p:cNvPr id="12" name="Text 10"/>
+          <p:cNvSpPr/>
+          <p:nvPr/>
+        </p:nvSpPr>
+        <p:spPr>
+          <a:xfrm>
+            <a:off x="4472330" y="1901952"/>
+            <a:ext cx="3247034" cy="402336"/>
+          </a:xfrm>
+          <a:prstGeom prst="rect">
+            <a:avLst/>
+          </a:prstGeom>
+          <a:noFill/>
+          <a:ln/>
+        </p:spPr>
+        <p:txBody>
+          <a:bodyPr wrap="square" lIns="0" tIns="0" rIns="0" bIns="0" rtlCol="0" anchor="ctr">
+            <a:normAutofit/>
+          </a:bodyPr>
+          <a:lstStyle/>
+          <a:p>
+            <a:pPr indent="0" marL="0">
+              <a:buNone/>
+            </a:pPr>
+            <a:r>
+              <a:rPr lang="en-US" sz="2200" b="1" dirty="0">
+                <a:solidFill>
+                  <a:srgbClr val="10161F"/>
+                </a:solidFill>
+                <a:latin typeface="Pretendard" pitchFamily="34" charset="0"/>
+                <a:ea typeface="Pretendard" pitchFamily="34" charset="-122"/>
+                <a:cs typeface="Pretendard" pitchFamily="34" charset="-120"/>
+              </a:rPr>
+              <a:t>약 3,650만 원</a:t>
+            </a:r>
+            <a:endParaRPr lang="en-US" sz="2200" dirty="0"/>
+          </a:p>
+        </p:txBody>
+      </p:sp>
+      <p:sp>
+        <p:nvSpPr>
+          <p:cNvPr id="13" name="Shape 11"/>
+          <p:cNvSpPr/>
+          <p:nvPr/>
+        </p:nvSpPr>
+        <p:spPr>
+          <a:xfrm>
+            <a:off x="8048549" y="1554480"/>
+            <a:ext cx="3576218" cy="1188720"/>
+          </a:xfrm>
+          <a:prstGeom prst="roundRect">
+            <a:avLst>
+              <a:gd name="adj" fmla="val 4615"/>
+            </a:avLst>
+          </a:prstGeom>
+          <a:solidFill>
+            <a:srgbClr val="F7FAFC"/>
+          </a:solidFill>
+          <a:ln w="6350">
+            <a:solidFill>
+              <a:srgbClr val="CBD5E0"/>
+            </a:solidFill>
+            <a:prstDash val="solid"/>
+          </a:ln>
+        </p:spPr>
+      </p:sp>
+      <p:sp>
+        <p:nvSpPr>
+          <p:cNvPr id="14" name="Text 12"/>
+          <p:cNvSpPr/>
+          <p:nvPr/>
+        </p:nvSpPr>
+        <p:spPr>
+          <a:xfrm>
+            <a:off x="8213141" y="1682496"/>
+            <a:ext cx="3247034" cy="201168"/>
+          </a:xfrm>
+          <a:prstGeom prst="rect">
+            <a:avLst/>
+          </a:prstGeom>
+          <a:noFill/>
+          <a:ln/>
+        </p:spPr>
+        <p:txBody>
+          <a:bodyPr wrap="square" lIns="0" tIns="0" rIns="0" bIns="0" rtlCol="0" anchor="ctr"/>
+          <a:lstStyle/>
+          <a:p>
+            <a:pPr indent="0" marL="0">
+              <a:buNone/>
+            </a:pPr>
+            <a:r>
+              <a:rPr lang="en-US" sz="950" dirty="0">
+                <a:solidFill>
+                  <a:srgbClr val="718096"/>
+                </a:solidFill>
+                <a:latin typeface="Pretendard" pitchFamily="34" charset="0"/>
+                <a:ea typeface="Pretendard" pitchFamily="34" charset="-122"/>
+                <a:cs typeface="Pretendard" pitchFamily="34" charset="-120"/>
+              </a:rPr>
+              <a:t>레버리지 수익률</a:t>
+            </a:r>
+            <a:endParaRPr lang="en-US" sz="950" dirty="0"/>
+          </a:p>
+        </p:txBody>
+      </p:sp>
+      <p:sp>
+        <p:nvSpPr>
+          <p:cNvPr id="15" name="Text 13"/>
+          <p:cNvSpPr/>
+          <p:nvPr/>
+        </p:nvSpPr>
+        <p:spPr>
+          <a:xfrm>
+            <a:off x="8213141" y="1901952"/>
+            <a:ext cx="3247034" cy="402336"/>
+          </a:xfrm>
+          <a:prstGeom prst="rect">
+            <a:avLst/>
+          </a:prstGeom>
+          <a:noFill/>
+          <a:ln/>
+        </p:spPr>
+        <p:txBody>
+          <a:bodyPr wrap="square" lIns="0" tIns="0" rIns="0" bIns="0" rtlCol="0" anchor="ctr">
+            <a:normAutofit/>
+          </a:bodyPr>
+          <a:lstStyle/>
+          <a:p>
+            <a:pPr indent="0" marL="0">
+              <a:buNone/>
+            </a:pPr>
+            <a:r>
+              <a:rPr lang="en-US" sz="2200" b="1" dirty="0">
+                <a:solidFill>
+                  <a:srgbClr val="10161F"/>
+                </a:solidFill>
+                <a:latin typeface="Pretendard" pitchFamily="34" charset="0"/>
+                <a:ea typeface="Pretendard" pitchFamily="34" charset="-122"/>
+                <a:cs typeface="Pretendard" pitchFamily="34" charset="-120"/>
+              </a:rPr>
+              <a:t>약 5.8%</a:t>
+            </a:r>
+            <a:endParaRPr lang="en-US" sz="2200" dirty="0"/>
+          </a:p>
+        </p:txBody>
+      </p:sp>
+      <p:sp>
+        <p:nvSpPr>
+          <p:cNvPr id="16" name="Shape 14"/>
+          <p:cNvSpPr/>
+          <p:nvPr/>
+        </p:nvSpPr>
+        <p:spPr>
+          <a:xfrm>
+            <a:off x="566928" y="2999232"/>
+            <a:ext cx="11057839" cy="1280160"/>
+          </a:xfrm>
+          <a:prstGeom prst="roundRect">
+            <a:avLst>
+              <a:gd name="adj" fmla="val 4286"/>
+            </a:avLst>
+          </a:prstGeom>
+          <a:solidFill>
+            <a:srgbClr val="BEE3F8"/>
+          </a:solidFill>
+          <a:ln/>
+        </p:spPr>
+      </p:sp>
+      <p:sp>
+        <p:nvSpPr>
+          <p:cNvPr id="17" name="Shape 15"/>
+          <p:cNvSpPr/>
+          <p:nvPr/>
+        </p:nvSpPr>
+        <p:spPr>
+          <a:xfrm>
+            <a:off x="566928" y="3054096"/>
+            <a:ext cx="36576" cy="1170432"/>
+          </a:xfrm>
+          <a:prstGeom prst="rect">
+            <a:avLst/>
+          </a:prstGeom>
+          <a:solidFill>
+            <a:srgbClr val="2B6CB0"/>
+          </a:solidFill>
+          <a:ln/>
+        </p:spPr>
+      </p:sp>
+      <p:sp>
+        <p:nvSpPr>
+          <p:cNvPr id="18" name="Text 16"/>
+          <p:cNvSpPr/>
+          <p:nvPr/>
+        </p:nvSpPr>
+        <p:spPr>
+          <a:xfrm>
+            <a:off x="749808" y="3108960"/>
+            <a:ext cx="10728655" cy="201168"/>
+          </a:xfrm>
+          <a:prstGeom prst="rect">
+            <a:avLst/>
+          </a:prstGeom>
+          <a:noFill/>
+          <a:ln/>
+        </p:spPr>
+        <p:txBody>
+          <a:bodyPr wrap="square" lIns="0" tIns="0" rIns="0" bIns="0" rtlCol="0" anchor="ctr"/>
+          <a:lstStyle/>
+          <a:p>
+            <a:pPr indent="0" marL="0">
+              <a:buNone/>
+            </a:pPr>
+            <a:r>
               <a:rPr lang="en-US" sz="1050" b="1" dirty="0">
                 <a:solidFill>
-                  <a:srgbClr val="977024"/>
-                </a:solidFill>
-                <a:latin typeface="Pretendard" pitchFamily="34" charset="0"/>
-                <a:ea typeface="Pretendard" pitchFamily="34" charset="-122"/>
-                <a:cs typeface="Pretendard" pitchFamily="34" charset="-120"/>
-              </a:rPr>
-              <a:t>종합 가치 제안</a:t>
+                  <a:srgbClr val="2B6CB0"/>
+                </a:solidFill>
+                <a:latin typeface="Pretendard" pitchFamily="34" charset="0"/>
+                <a:ea typeface="Pretendard" pitchFamily="34" charset="-122"/>
+                <a:cs typeface="Pretendard" pitchFamily="34" charset="-120"/>
+              </a:rPr>
+              <a:t>투자 가치 제안</a:t>
             </a:r>
             <a:endParaRPr lang="en-US" sz="1050" dirty="0"/>
           </a:p>
@@ -8459,33 +11962,33 @@
       </p:sp>
       <p:sp>
         <p:nvSpPr>
-          <p:cNvPr id="8" name="Text 6"/>
-          <p:cNvSpPr/>
-          <p:nvPr/>
-        </p:nvSpPr>
-        <p:spPr>
-          <a:xfrm>
-            <a:off x="2487168" y="5056632"/>
-            <a:ext cx="8954719" cy="658368"/>
-          </a:xfrm>
-          <a:prstGeom prst="rect">
-            <a:avLst/>
-          </a:prstGeom>
-          <a:noFill/>
-          <a:ln/>
-        </p:spPr>
-        <p:txBody>
-          <a:bodyPr wrap="square" lIns="0" tIns="0" rIns="0" bIns="0" rtlCol="0" anchor="ctr"/>
+          <p:cNvPr id="19" name="Text 17"/>
+          <p:cNvSpPr/>
+          <p:nvPr/>
+        </p:nvSpPr>
+        <p:spPr>
+          <a:xfrm>
+            <a:off x="749808" y="3328416"/>
+            <a:ext cx="10728655" cy="877824"/>
+          </a:xfrm>
+          <a:prstGeom prst="rect">
+            <a:avLst/>
+          </a:prstGeom>
+          <a:noFill/>
+          <a:ln/>
+        </p:spPr>
+        <p:txBody>
+          <a:bodyPr wrap="square" lIns="0" tIns="0" rIns="0" bIns="0" rtlCol="0" anchor="t"/>
           <a:lstStyle/>
           <a:p>
             <a:pPr indent="0" marL="0">
               <a:lnSpc>
-                <a:spcPct val="125000"/>
+                <a:spcPct val="120000"/>
               </a:lnSpc>
               <a:buNone/>
             </a:pPr>
             <a:r>
-              <a:rPr lang="en-US" sz="1100" dirty="0">
+              <a:rPr lang="en-US" sz="930" dirty="0">
                 <a:solidFill>
                   <a:srgbClr val="10161F"/>
                 </a:solidFill>
@@ -8493,15 +11996,15 @@
                 <a:ea typeface="Pretendard" pitchFamily="34" charset="-122"/>
                 <a:cs typeface="Pretendard" pitchFamily="34" charset="-120"/>
               </a:rPr>
-              <a:t>관점에서 안정적 월 임대수익과 우량 메디컬 테넌트를 보유한 핵심 투자 자산입니다.</a:t>
-            </a:r>
-            <a:endParaRPr lang="en-US" sz="1100" dirty="0"/>
-          </a:p>
-        </p:txBody>
-      </p:sp>
-      <p:sp>
-        <p:nvSpPr>
-          <p:cNvPr id="9" name="Text 7"/>
+              <a:t>연 순영업소득(NOI) 약 7.14억 원, 매입 Cap Rate 4.62%입니다. 실투자금: 약 69억 원</a:t>
+            </a:r>
+            <a:endParaRPr lang="en-US" sz="930" dirty="0"/>
+          </a:p>
+        </p:txBody>
+      </p:sp>
+      <p:sp>
+        <p:nvSpPr>
+          <p:cNvPr id="20" name="Text 18"/>
           <p:cNvSpPr/>
           <p:nvPr/>
         </p:nvSpPr>
@@ -8540,7 +12043,7 @@
       </p:sp>
       <p:sp>
         <p:nvSpPr>
-          <p:cNvPr id="10" name="Text 8"/>
+          <p:cNvPr id="21" name="Text 19"/>
           <p:cNvSpPr/>
           <p:nvPr/>
         </p:nvSpPr>
@@ -8571,7 +12074,7 @@
                 <a:ea typeface="Arial" pitchFamily="34" charset="-122"/>
                 <a:cs typeface="Arial" pitchFamily="34" charset="-120"/>
               </a:rPr>
-              <a:t>8</a:t>
+              <a:t>7</a:t>
             </a:r>
             <a:endParaRPr lang="en-US" sz="900" dirty="0"/>
           </a:p>
@@ -8662,7 +12165,7 @@
                 <a:ea typeface="Arial" pitchFamily="34" charset="-122"/>
                 <a:cs typeface="Arial" pitchFamily="34" charset="-120"/>
               </a:rPr>
-              <a:t>09</a:t>
+              <a:t>08</a:t>
             </a:r>
             <a:endParaRPr lang="en-US" sz="1300" dirty="0"/>
           </a:p>
@@ -8701,7 +12204,7 @@
                 <a:ea typeface="Arial" pitchFamily="34" charset="-122"/>
                 <a:cs typeface="Arial" pitchFamily="34" charset="-120"/>
               </a:rPr>
-              <a:t>Process</a:t>
+              <a:t>Comps</a:t>
             </a:r>
             <a:endParaRPr lang="en-US" sz="950" dirty="0"/>
           </a:p>
@@ -8740,7 +12243,7 @@
                 <a:ea typeface="Pretendard" pitchFamily="34" charset="-122"/>
                 <a:cs typeface="Pretendard" pitchFamily="34" charset="-120"/>
               </a:rPr>
-              <a:t>다음 단계</a:t>
+              <a:t>비교사례</a:t>
             </a:r>
             <a:endParaRPr lang="en-US" sz="2300" dirty="0"/>
           </a:p>
@@ -8748,24 +12251,104 @@
       </p:sp>
       <p:sp>
         <p:nvSpPr>
-          <p:cNvPr id="6" name="Shape 4"/>
-          <p:cNvSpPr/>
-          <p:nvPr/>
-        </p:nvSpPr>
-        <p:spPr>
-          <a:xfrm>
-            <a:off x="566928" y="1572768"/>
-            <a:ext cx="11057839" cy="3200400"/>
-          </a:xfrm>
-          <a:prstGeom prst="roundRect">
-            <a:avLst>
-              <a:gd name="adj" fmla="val 1714"/>
-            </a:avLst>
-          </a:prstGeom>
-          <a:solidFill>
-            <a:srgbClr val="F7FAFC"/>
-          </a:solidFill>
-          <a:ln w="6350">
+          <p:cNvPr id="6" name="Text 4"/>
+          <p:cNvSpPr/>
+          <p:nvPr/>
+        </p:nvSpPr>
+        <p:spPr>
+          <a:xfrm>
+            <a:off x="566928" y="1645920"/>
+            <a:ext cx="4201979" cy="402336"/>
+          </a:xfrm>
+          <a:prstGeom prst="rect">
+            <a:avLst/>
+          </a:prstGeom>
+          <a:noFill/>
+          <a:ln/>
+        </p:spPr>
+        <p:txBody>
+          <a:bodyPr wrap="square" lIns="0" tIns="0" rIns="0" bIns="0" rtlCol="0" anchor="ctr"/>
+          <a:lstStyle/>
+          <a:p>
+            <a:pPr indent="0" marL="0">
+              <a:lnSpc>
+                <a:spcPct val="120000"/>
+              </a:lnSpc>
+              <a:buNone/>
+            </a:pPr>
+            <a:r>
+              <a:rPr lang="en-US" sz="1400" dirty="0">
+                <a:solidFill>
+                  <a:srgbClr val="718096"/>
+                </a:solidFill>
+                <a:latin typeface="Pretendard" pitchFamily="34" charset="0"/>
+                <a:ea typeface="Pretendard" pitchFamily="34" charset="-122"/>
+                <a:cs typeface="Pretendard" pitchFamily="34" charset="-120"/>
+              </a:rPr>
+              <a:t>- 실투자금</a:t>
+            </a:r>
+            <a:endParaRPr lang="en-US" sz="1400" dirty="0"/>
+          </a:p>
+        </p:txBody>
+      </p:sp>
+      <p:sp>
+        <p:nvSpPr>
+          <p:cNvPr id="7" name="Text 5"/>
+          <p:cNvSpPr/>
+          <p:nvPr/>
+        </p:nvSpPr>
+        <p:spPr>
+          <a:xfrm>
+            <a:off x="4768907" y="1645920"/>
+            <a:ext cx="6855860" cy="402336"/>
+          </a:xfrm>
+          <a:prstGeom prst="rect">
+            <a:avLst/>
+          </a:prstGeom>
+          <a:noFill/>
+          <a:ln/>
+        </p:spPr>
+        <p:txBody>
+          <a:bodyPr wrap="square" lIns="0" tIns="0" rIns="0" bIns="0" rtlCol="0" anchor="ctr"/>
+          <a:lstStyle/>
+          <a:p>
+            <a:pPr indent="0" marL="0">
+              <a:lnSpc>
+                <a:spcPct val="120000"/>
+              </a:lnSpc>
+              <a:buNone/>
+            </a:pPr>
+            <a:r>
+              <a:rPr lang="en-US" sz="1400" b="1" dirty="0">
+                <a:solidFill>
+                  <a:srgbClr val="10161F"/>
+                </a:solidFill>
+                <a:latin typeface="Pretendard" pitchFamily="34" charset="0"/>
+                <a:ea typeface="Pretendard" pitchFamily="34" charset="-122"/>
+                <a:cs typeface="Pretendard" pitchFamily="34" charset="-120"/>
+              </a:rPr>
+              <a:t>약 69억 원</a:t>
+            </a:r>
+            <a:endParaRPr lang="en-US" sz="1400" dirty="0"/>
+          </a:p>
+        </p:txBody>
+      </p:sp>
+      <p:sp>
+        <p:nvSpPr>
+          <p:cNvPr id="8" name="Shape 6"/>
+          <p:cNvSpPr/>
+          <p:nvPr/>
+        </p:nvSpPr>
+        <p:spPr>
+          <a:xfrm>
+            <a:off x="566928" y="2048256"/>
+            <a:ext cx="11057839" cy="0"/>
+          </a:xfrm>
+          <a:prstGeom prst="line">
+            <a:avLst/>
+          </a:prstGeom>
+          <a:noFill/>
+          <a:ln w="3810">
             <a:solidFill>
               <a:srgbClr val="CBD5E0"/>
             </a:solidFill>
@@ -8775,231 +12358,268 @@
       </p:sp>
       <p:sp>
         <p:nvSpPr>
-          <p:cNvPr id="7" name="Shape 5"/>
-          <p:cNvSpPr/>
-          <p:nvPr/>
-        </p:nvSpPr>
-        <p:spPr>
-          <a:xfrm>
-            <a:off x="786384" y="1792224"/>
-            <a:ext cx="438912" cy="438912"/>
-          </a:xfrm>
-          <a:prstGeom prst="ellipse">
-            <a:avLst/>
-          </a:prstGeom>
-          <a:solidFill>
-            <a:srgbClr val="B98A2E"/>
-          </a:solidFill>
-          <a:ln/>
-        </p:spPr>
-      </p:sp>
-      <p:sp>
-        <p:nvSpPr>
-          <p:cNvPr id="8" name="Text 6"/>
-          <p:cNvSpPr/>
-          <p:nvPr/>
-        </p:nvSpPr>
-        <p:spPr>
-          <a:xfrm>
-            <a:off x="786384" y="1792224"/>
-            <a:ext cx="438912" cy="438912"/>
-          </a:xfrm>
-          <a:prstGeom prst="rect">
-            <a:avLst/>
-          </a:prstGeom>
-          <a:noFill/>
-          <a:ln/>
-        </p:spPr>
-        <p:txBody>
-          <a:bodyPr wrap="square" lIns="0" tIns="0" rIns="0" bIns="0" rtlCol="0" anchor="ctr"/>
-          <a:lstStyle/>
-          <a:p>
-            <a:pPr algn="ctr" indent="0" marL="0">
+          <p:cNvPr id="9" name="Text 7"/>
+          <p:cNvSpPr/>
+          <p:nvPr/>
+        </p:nvSpPr>
+        <p:spPr>
+          <a:xfrm>
+            <a:off x="566928" y="2048256"/>
+            <a:ext cx="4201979" cy="402336"/>
+          </a:xfrm>
+          <a:prstGeom prst="rect">
+            <a:avLst/>
+          </a:prstGeom>
+          <a:noFill/>
+          <a:ln/>
+        </p:spPr>
+        <p:txBody>
+          <a:bodyPr wrap="square" lIns="0" tIns="0" rIns="0" bIns="0" rtlCol="0" anchor="ctr"/>
+          <a:lstStyle/>
+          <a:p>
+            <a:pPr indent="0" marL="0">
+              <a:lnSpc>
+                <a:spcPct val="120000"/>
+              </a:lnSpc>
+              <a:buNone/>
+            </a:pPr>
+            <a:r>
+              <a:rPr lang="en-US" sz="1400" dirty="0">
+                <a:solidFill>
+                  <a:srgbClr val="718096"/>
+                </a:solidFill>
+                <a:latin typeface="Pretendard" pitchFamily="34" charset="0"/>
+                <a:ea typeface="Pretendard" pitchFamily="34" charset="-122"/>
+                <a:cs typeface="Pretendard" pitchFamily="34" charset="-120"/>
+              </a:rPr>
+              <a:t>- 순수익(매월)</a:t>
+            </a:r>
+            <a:endParaRPr lang="en-US" sz="1400" dirty="0"/>
+          </a:p>
+        </p:txBody>
+      </p:sp>
+      <p:sp>
+        <p:nvSpPr>
+          <p:cNvPr id="10" name="Text 8"/>
+          <p:cNvSpPr/>
+          <p:nvPr/>
+        </p:nvSpPr>
+        <p:spPr>
+          <a:xfrm>
+            <a:off x="4768907" y="2048256"/>
+            <a:ext cx="6855860" cy="402336"/>
+          </a:xfrm>
+          <a:prstGeom prst="rect">
+            <a:avLst/>
+          </a:prstGeom>
+          <a:noFill/>
+          <a:ln/>
+        </p:spPr>
+        <p:txBody>
+          <a:bodyPr wrap="square" lIns="0" tIns="0" rIns="0" bIns="0" rtlCol="0" anchor="ctr"/>
+          <a:lstStyle/>
+          <a:p>
+            <a:pPr indent="0" marL="0">
+              <a:lnSpc>
+                <a:spcPct val="120000"/>
+              </a:lnSpc>
               <a:buNone/>
             </a:pPr>
             <a:r>
               <a:rPr lang="en-US" sz="1400" b="1" dirty="0">
                 <a:solidFill>
-                  <a:srgbClr val="FFFFFF"/>
+                  <a:srgbClr val="10161F"/>
+                </a:solidFill>
+                <a:latin typeface="Pretendard" pitchFamily="34" charset="0"/>
+                <a:ea typeface="Pretendard" pitchFamily="34" charset="-122"/>
+                <a:cs typeface="Pretendard" pitchFamily="34" charset="-120"/>
+              </a:rPr>
+              <a:t>약 3,650만 원</a:t>
+            </a:r>
+            <a:endParaRPr lang="en-US" sz="1400" dirty="0"/>
+          </a:p>
+        </p:txBody>
+      </p:sp>
+      <p:sp>
+        <p:nvSpPr>
+          <p:cNvPr id="11" name="Shape 9"/>
+          <p:cNvSpPr/>
+          <p:nvPr/>
+        </p:nvSpPr>
+        <p:spPr>
+          <a:xfrm>
+            <a:off x="566928" y="2450592"/>
+            <a:ext cx="11057839" cy="0"/>
+          </a:xfrm>
+          <a:prstGeom prst="line">
+            <a:avLst/>
+          </a:prstGeom>
+          <a:noFill/>
+          <a:ln w="3810">
+            <a:solidFill>
+              <a:srgbClr val="CBD5E0"/>
+            </a:solidFill>
+            <a:prstDash val="solid"/>
+          </a:ln>
+        </p:spPr>
+      </p:sp>
+      <p:sp>
+        <p:nvSpPr>
+          <p:cNvPr id="12" name="Text 10"/>
+          <p:cNvSpPr/>
+          <p:nvPr/>
+        </p:nvSpPr>
+        <p:spPr>
+          <a:xfrm>
+            <a:off x="566928" y="2450592"/>
+            <a:ext cx="4201979" cy="402336"/>
+          </a:xfrm>
+          <a:prstGeom prst="rect">
+            <a:avLst/>
+          </a:prstGeom>
+          <a:noFill/>
+          <a:ln/>
+        </p:spPr>
+        <p:txBody>
+          <a:bodyPr wrap="square" lIns="0" tIns="0" rIns="0" bIns="0" rtlCol="0" anchor="ctr"/>
+          <a:lstStyle/>
+          <a:p>
+            <a:pPr indent="0" marL="0">
+              <a:lnSpc>
+                <a:spcPct val="120000"/>
+              </a:lnSpc>
+              <a:buNone/>
+            </a:pPr>
+            <a:r>
+              <a:rPr lang="en-US" sz="1400" dirty="0">
+                <a:solidFill>
+                  <a:srgbClr val="718096"/>
+                </a:solidFill>
+                <a:latin typeface="Pretendard" pitchFamily="34" charset="0"/>
+                <a:ea typeface="Pretendard" pitchFamily="34" charset="-122"/>
+                <a:cs typeface="Pretendard" pitchFamily="34" charset="-120"/>
+              </a:rPr>
+              <a:t>- 레버리지 수익률</a:t>
+            </a:r>
+            <a:endParaRPr lang="en-US" sz="1400" dirty="0"/>
+          </a:p>
+        </p:txBody>
+      </p:sp>
+      <p:sp>
+        <p:nvSpPr>
+          <p:cNvPr id="13" name="Text 11"/>
+          <p:cNvSpPr/>
+          <p:nvPr/>
+        </p:nvSpPr>
+        <p:spPr>
+          <a:xfrm>
+            <a:off x="4768907" y="2450592"/>
+            <a:ext cx="6855860" cy="402336"/>
+          </a:xfrm>
+          <a:prstGeom prst="rect">
+            <a:avLst/>
+          </a:prstGeom>
+          <a:noFill/>
+          <a:ln/>
+        </p:spPr>
+        <p:txBody>
+          <a:bodyPr wrap="square" lIns="0" tIns="0" rIns="0" bIns="0" rtlCol="0" anchor="ctr"/>
+          <a:lstStyle/>
+          <a:p>
+            <a:pPr indent="0" marL="0">
+              <a:lnSpc>
+                <a:spcPct val="120000"/>
+              </a:lnSpc>
+              <a:buNone/>
+            </a:pPr>
+            <a:r>
+              <a:rPr lang="en-US" sz="1400" b="1" dirty="0">
+                <a:solidFill>
+                  <a:srgbClr val="10161F"/>
+                </a:solidFill>
+                <a:latin typeface="Pretendard" pitchFamily="34" charset="0"/>
+                <a:ea typeface="Pretendard" pitchFamily="34" charset="-122"/>
+                <a:cs typeface="Pretendard" pitchFamily="34" charset="-120"/>
+              </a:rPr>
+              <a:t>약 5.8%</a:t>
+            </a:r>
+            <a:endParaRPr lang="en-US" sz="1400" dirty="0"/>
+          </a:p>
+        </p:txBody>
+      </p:sp>
+      <p:sp>
+        <p:nvSpPr>
+          <p:cNvPr id="14" name="Text 12"/>
+          <p:cNvSpPr/>
+          <p:nvPr/>
+        </p:nvSpPr>
+        <p:spPr>
+          <a:xfrm>
+            <a:off x="566928" y="6382512"/>
+            <a:ext cx="7315200" cy="219456"/>
+          </a:xfrm>
+          <a:prstGeom prst="rect">
+            <a:avLst/>
+          </a:prstGeom>
+          <a:noFill/>
+          <a:ln/>
+        </p:spPr>
+        <p:txBody>
+          <a:bodyPr wrap="square" lIns="0" tIns="0" rIns="0" bIns="0" rtlCol="0" anchor="ctr"/>
+          <a:lstStyle/>
+          <a:p>
+            <a:pPr indent="0" marL="0">
+              <a:buNone/>
+            </a:pPr>
+            <a:r>
+              <a:rPr lang="en-US" sz="800" dirty="0">
+                <a:solidFill>
+                  <a:srgbClr val="718096"/>
+                </a:solidFill>
+                <a:latin typeface="Pretendard" pitchFamily="34" charset="0"/>
+                <a:ea typeface="Pretendard" pitchFamily="34" charset="-122"/>
+                <a:cs typeface="Pretendard" pitchFamily="34" charset="-120"/>
+              </a:rPr>
+              <a:t>크리딜   |   </a:t>
+            </a:r>
+            <a:endParaRPr lang="en-US" sz="800" dirty="0"/>
+          </a:p>
+        </p:txBody>
+      </p:sp>
+      <p:sp>
+        <p:nvSpPr>
+          <p:cNvPr id="15" name="Text 13"/>
+          <p:cNvSpPr/>
+          <p:nvPr/>
+        </p:nvSpPr>
+        <p:spPr>
+          <a:xfrm>
+            <a:off x="10710367" y="6382512"/>
+            <a:ext cx="914400" cy="219456"/>
+          </a:xfrm>
+          <a:prstGeom prst="rect">
+            <a:avLst/>
+          </a:prstGeom>
+          <a:noFill/>
+          <a:ln/>
+        </p:spPr>
+        <p:txBody>
+          <a:bodyPr wrap="square" lIns="0" tIns="0" rIns="0" bIns="0" rtlCol="0" anchor="ctr"/>
+          <a:lstStyle/>
+          <a:p>
+            <a:pPr algn="r" indent="0" marL="0">
+              <a:buNone/>
+            </a:pPr>
+            <a:r>
+              <a:rPr lang="en-US" sz="900" b="1" dirty="0">
+                <a:solidFill>
+                  <a:srgbClr val="B98A2E"/>
                 </a:solidFill>
                 <a:latin typeface="Arial" pitchFamily="34" charset="0"/>
                 <a:ea typeface="Arial" pitchFamily="34" charset="-122"/>
                 <a:cs typeface="Arial" pitchFamily="34" charset="-120"/>
               </a:rPr>
-              <a:t>01</a:t>
-            </a:r>
-            <a:endParaRPr lang="en-US" sz="1400" dirty="0"/>
-          </a:p>
-        </p:txBody>
-      </p:sp>
-      <p:sp>
-        <p:nvSpPr>
-          <p:cNvPr id="9" name="Text 7"/>
-          <p:cNvSpPr/>
-          <p:nvPr/>
-        </p:nvSpPr>
-        <p:spPr>
-          <a:xfrm>
-            <a:off x="786384" y="2304288"/>
-            <a:ext cx="10618927" cy="365760"/>
-          </a:xfrm>
-          <a:prstGeom prst="rect">
-            <a:avLst/>
-          </a:prstGeom>
-          <a:noFill/>
-          <a:ln/>
-        </p:spPr>
-        <p:txBody>
-          <a:bodyPr wrap="square" rtlCol="0" anchor="ctr"/>
-          <a:lstStyle/>
-          <a:p>
-            <a:pPr indent="0" marL="0">
-              <a:buNone/>
-            </a:pPr>
-            <a:r>
-              <a:rPr lang="en-US" sz="1600" b="1" dirty="0">
-                <a:solidFill>
-                  <a:srgbClr val="10161F"/>
-                </a:solidFill>
-                <a:latin typeface="Pretendard" pitchFamily="34" charset="0"/>
-                <a:ea typeface="Pretendard" pitchFamily="34" charset="-122"/>
-                <a:cs typeface="Pretendard" pitchFamily="34" charset="-120"/>
-              </a:rPr>
-              <a:t>1단계</a:t>
-            </a:r>
-            <a:endParaRPr lang="en-US" sz="1600" dirty="0"/>
-          </a:p>
-        </p:txBody>
-      </p:sp>
-      <p:sp>
-        <p:nvSpPr>
-          <p:cNvPr id="10" name="Text 8"/>
-          <p:cNvSpPr/>
-          <p:nvPr/>
-        </p:nvSpPr>
-        <p:spPr>
-          <a:xfrm>
-            <a:off x="786384" y="2761488"/>
-            <a:ext cx="10618927" cy="1828800"/>
-          </a:xfrm>
-          <a:prstGeom prst="rect">
-            <a:avLst/>
-          </a:prstGeom>
-          <a:noFill/>
-          <a:ln/>
-        </p:spPr>
-        <p:txBody>
-          <a:bodyPr wrap="square" rtlCol="0" anchor="t"/>
-          <a:lstStyle/>
-          <a:p>
-            <a:pPr indent="0" marL="0">
-              <a:buNone/>
-            </a:pPr>
-            <a:r>
-              <a:rPr lang="en-US" sz="1100" dirty="0">
-                <a:solidFill>
-                  <a:srgbClr val="10161F"/>
-                </a:solidFill>
-                <a:latin typeface="Pretendard" pitchFamily="34" charset="0"/>
-                <a:ea typeface="Pretendard" pitchFamily="34" charset="-122"/>
-                <a:cs typeface="Pretendard" pitchFamily="34" charset="-120"/>
-              </a:rPr>
-              <a:t>현장 실사 및 임대차계약서 원본 확인을 권장합니다.</a:t>
-            </a:r>
-            <a:endParaRPr lang="en-US" sz="1100" dirty="0"/>
-          </a:p>
-          <a:p>
-            <a:pPr indent="0" marL="0">
-              <a:buNone/>
-            </a:pPr>
-            <a:r>
-              <a:rPr lang="en-US" sz="1100" dirty="0">
-                <a:solidFill>
-                  <a:srgbClr val="10161F"/>
-                </a:solidFill>
-                <a:latin typeface="Pretendard" pitchFamily="34" charset="0"/>
-                <a:ea typeface="Pretendard" pitchFamily="34" charset="-122"/>
-                <a:cs typeface="Pretendard" pitchFamily="34" charset="-120"/>
-              </a:rPr>
-              <a:t>현장 실사 및 임대차계약서 원본 확인을 권장합니다.</a:t>
-            </a:r>
-            <a:endParaRPr lang="en-US" sz="1100" dirty="0"/>
-          </a:p>
-        </p:txBody>
-      </p:sp>
-      <p:sp>
-        <p:nvSpPr>
-          <p:cNvPr id="11" name="Text 9"/>
-          <p:cNvSpPr/>
-          <p:nvPr/>
-        </p:nvSpPr>
-        <p:spPr>
-          <a:xfrm>
-            <a:off x="566928" y="6382512"/>
-            <a:ext cx="7315200" cy="219456"/>
-          </a:xfrm>
-          <a:prstGeom prst="rect">
-            <a:avLst/>
-          </a:prstGeom>
-          <a:noFill/>
-          <a:ln/>
-        </p:spPr>
-        <p:txBody>
-          <a:bodyPr wrap="square" lIns="0" tIns="0" rIns="0" bIns="0" rtlCol="0" anchor="ctr"/>
-          <a:lstStyle/>
-          <a:p>
-            <a:pPr indent="0" marL="0">
-              <a:buNone/>
-            </a:pPr>
-            <a:r>
-              <a:rPr lang="en-US" sz="800" dirty="0">
-                <a:solidFill>
-                  <a:srgbClr val="718096"/>
-                </a:solidFill>
-                <a:latin typeface="Pretendard" pitchFamily="34" charset="0"/>
-                <a:ea typeface="Pretendard" pitchFamily="34" charset="-122"/>
-                <a:cs typeface="Pretendard" pitchFamily="34" charset="-120"/>
-              </a:rPr>
-              <a:t>크리딜   |   </a:t>
-            </a:r>
-            <a:endParaRPr lang="en-US" sz="800" dirty="0"/>
-          </a:p>
-        </p:txBody>
-      </p:sp>
-      <p:sp>
-        <p:nvSpPr>
-          <p:cNvPr id="12" name="Text 10"/>
-          <p:cNvSpPr/>
-          <p:nvPr/>
-        </p:nvSpPr>
-        <p:spPr>
-          <a:xfrm>
-            <a:off x="10710367" y="6382512"/>
-            <a:ext cx="914400" cy="219456"/>
-          </a:xfrm>
-          <a:prstGeom prst="rect">
-            <a:avLst/>
-          </a:prstGeom>
-          <a:noFill/>
-          <a:ln/>
-        </p:spPr>
-        <p:txBody>
-          <a:bodyPr wrap="square" lIns="0" tIns="0" rIns="0" bIns="0" rtlCol="0" anchor="ctr"/>
-          <a:lstStyle/>
-          <a:p>
-            <a:pPr algn="r" indent="0" marL="0">
-              <a:buNone/>
-            </a:pPr>
-            <a:r>
-              <a:rPr lang="en-US" sz="900" b="1" dirty="0">
-                <a:solidFill>
-                  <a:srgbClr val="B98A2E"/>
-                </a:solidFill>
-                <a:latin typeface="Arial" pitchFamily="34" charset="0"/>
-                <a:ea typeface="Arial" pitchFamily="34" charset="-122"/>
-                <a:cs typeface="Arial" pitchFamily="34" charset="-120"/>
-              </a:rPr>
-              <a:t>9</a:t>
+              <a:t>8</a:t>
             </a:r>
             <a:endParaRPr lang="en-US" sz="900" dirty="0"/>
           </a:p>

--- a/docs/test/stress/e2e-outputs/income_pro_gradeC_pr07.pptx
+++ b/docs/test/stress/e2e-outputs/income_pro_gradeC_pr07.pptx
@@ -11996,7 +11996,7 @@
                 <a:ea typeface="Pretendard" pitchFamily="34" charset="-122"/>
                 <a:cs typeface="Pretendard" pitchFamily="34" charset="-120"/>
               </a:rPr>
-              <a:t>연 순영업소득(NOI) 약 7.14억 원, 매입 Cap Rate 4.62%입니다. 실투자금: 약 69억 원</a:t>
+              <a:t>연 순영업소득(NOI) 약 7.14억 원, 매입 Cap Rate 4.62%입니다.</a:t>
             </a:r>
             <a:endParaRPr lang="en-US" sz="930" dirty="0"/>
           </a:p>
